--- a/Dot Net/NEW.pptx
+++ b/Dot Net/NEW.pptx
@@ -11,6 +11,13 @@
     <p:sldId id="259" r:id="rId5"/>
     <p:sldId id="260" r:id="rId6"/>
     <p:sldId id="261" r:id="rId7"/>
+    <p:sldId id="262" r:id="rId8"/>
+    <p:sldId id="263" r:id="rId9"/>
+    <p:sldId id="264" r:id="rId10"/>
+    <p:sldId id="265" r:id="rId11"/>
+    <p:sldId id="266" r:id="rId12"/>
+    <p:sldId id="267" r:id="rId13"/>
+    <p:sldId id="268" r:id="rId14"/>
   </p:sldIdLst>
   <p:sldSz cx="12192000" cy="6858000"/>
   <p:notesSz cx="6858000" cy="9144000"/>
@@ -109,6 +116,11 @@
       </a:defRPr>
     </a:lvl9pPr>
   </p:defaultTextStyle>
+  <p:extLst>
+    <p:ext uri="{EFAFB233-063F-42B5-8137-9DF3F51BA10A}">
+      <p15:sldGuideLst xmlns:p15="http://schemas.microsoft.com/office/powerpoint/2012/main"/>
+    </p:ext>
+  </p:extLst>
 </p:presentation>
 </file>
 
@@ -297,7 +309,7 @@
           <a:p>
             <a:fld id="{79806886-C3E2-4AA6-AE5C-EC60C7639E42}" type="datetimeFigureOut">
               <a:rPr lang="en-US" smtClean="0"/>
-              <a:t>4/15/2026</a:t>
+              <a:t>4/20/2026</a:t>
             </a:fld>
             <a:endParaRPr lang="en-US"/>
           </a:p>
@@ -595,7 +607,7 @@
           <a:p>
             <a:fld id="{79806886-C3E2-4AA6-AE5C-EC60C7639E42}" type="datetimeFigureOut">
               <a:rPr lang="en-US" smtClean="0"/>
-              <a:t>4/15/2026</a:t>
+              <a:t>4/20/2026</a:t>
             </a:fld>
             <a:endParaRPr lang="en-US"/>
           </a:p>
@@ -787,7 +799,7 @@
           <a:p>
             <a:fld id="{79806886-C3E2-4AA6-AE5C-EC60C7639E42}" type="datetimeFigureOut">
               <a:rPr lang="en-US" smtClean="0"/>
-              <a:t>4/15/2026</a:t>
+              <a:t>4/20/2026</a:t>
             </a:fld>
             <a:endParaRPr lang="en-US"/>
           </a:p>
@@ -1048,7 +1060,7 @@
           <a:p>
             <a:fld id="{79806886-C3E2-4AA6-AE5C-EC60C7639E42}" type="datetimeFigureOut">
               <a:rPr lang="en-US" smtClean="0"/>
-              <a:t>4/15/2026</a:t>
+              <a:t>4/20/2026</a:t>
             </a:fld>
             <a:endParaRPr lang="en-US"/>
           </a:p>
@@ -1472,7 +1484,7 @@
           <a:p>
             <a:fld id="{79806886-C3E2-4AA6-AE5C-EC60C7639E42}" type="datetimeFigureOut">
               <a:rPr lang="en-US" smtClean="0"/>
-              <a:t>4/15/2026</a:t>
+              <a:t>4/20/2026</a:t>
             </a:fld>
             <a:endParaRPr lang="en-US"/>
           </a:p>
@@ -2009,7 +2021,7 @@
           <a:p>
             <a:fld id="{79806886-C3E2-4AA6-AE5C-EC60C7639E42}" type="datetimeFigureOut">
               <a:rPr lang="en-US" smtClean="0"/>
-              <a:t>4/15/2026</a:t>
+              <a:t>4/20/2026</a:t>
             </a:fld>
             <a:endParaRPr lang="en-US"/>
           </a:p>
@@ -2873,7 +2885,7 @@
           <a:p>
             <a:fld id="{79806886-C3E2-4AA6-AE5C-EC60C7639E42}" type="datetimeFigureOut">
               <a:rPr lang="en-US" smtClean="0"/>
-              <a:t>4/15/2026</a:t>
+              <a:t>4/20/2026</a:t>
             </a:fld>
             <a:endParaRPr lang="en-US"/>
           </a:p>
@@ -3043,7 +3055,7 @@
           <a:p>
             <a:fld id="{79806886-C3E2-4AA6-AE5C-EC60C7639E42}" type="datetimeFigureOut">
               <a:rPr lang="en-US" smtClean="0"/>
-              <a:t>4/15/2026</a:t>
+              <a:t>4/20/2026</a:t>
             </a:fld>
             <a:endParaRPr lang="en-US"/>
           </a:p>
@@ -3227,7 +3239,7 @@
           <a:p>
             <a:fld id="{79806886-C3E2-4AA6-AE5C-EC60C7639E42}" type="datetimeFigureOut">
               <a:rPr lang="en-US" smtClean="0"/>
-              <a:t>4/15/2026</a:t>
+              <a:t>4/20/2026</a:t>
             </a:fld>
             <a:endParaRPr lang="en-US"/>
           </a:p>
@@ -3397,7 +3409,7 @@
           <a:p>
             <a:fld id="{79806886-C3E2-4AA6-AE5C-EC60C7639E42}" type="datetimeFigureOut">
               <a:rPr lang="en-US" smtClean="0"/>
-              <a:t>4/15/2026</a:t>
+              <a:t>4/20/2026</a:t>
             </a:fld>
             <a:endParaRPr lang="en-US"/>
           </a:p>
@@ -3641,7 +3653,7 @@
           <a:p>
             <a:fld id="{79806886-C3E2-4AA6-AE5C-EC60C7639E42}" type="datetimeFigureOut">
               <a:rPr lang="en-US" smtClean="0"/>
-              <a:t>4/15/2026</a:t>
+              <a:t>4/20/2026</a:t>
             </a:fld>
             <a:endParaRPr lang="en-US"/>
           </a:p>
@@ -3877,7 +3889,7 @@
           <a:p>
             <a:fld id="{79806886-C3E2-4AA6-AE5C-EC60C7639E42}" type="datetimeFigureOut">
               <a:rPr lang="en-US" smtClean="0"/>
-              <a:t>4/15/2026</a:t>
+              <a:t>4/20/2026</a:t>
             </a:fld>
             <a:endParaRPr lang="en-US"/>
           </a:p>
@@ -4343,7 +4355,7 @@
           <a:p>
             <a:fld id="{79806886-C3E2-4AA6-AE5C-EC60C7639E42}" type="datetimeFigureOut">
               <a:rPr lang="en-US" smtClean="0"/>
-              <a:t>4/15/2026</a:t>
+              <a:t>4/20/2026</a:t>
             </a:fld>
             <a:endParaRPr lang="en-US"/>
           </a:p>
@@ -4461,7 +4473,7 @@
           <a:p>
             <a:fld id="{79806886-C3E2-4AA6-AE5C-EC60C7639E42}" type="datetimeFigureOut">
               <a:rPr lang="en-US" smtClean="0"/>
-              <a:t>4/15/2026</a:t>
+              <a:t>4/20/2026</a:t>
             </a:fld>
             <a:endParaRPr lang="en-US"/>
           </a:p>
@@ -4556,7 +4568,7 @@
           <a:p>
             <a:fld id="{79806886-C3E2-4AA6-AE5C-EC60C7639E42}" type="datetimeFigureOut">
               <a:rPr lang="en-US" smtClean="0"/>
-              <a:t>4/15/2026</a:t>
+              <a:t>4/20/2026</a:t>
             </a:fld>
             <a:endParaRPr lang="en-US"/>
           </a:p>
@@ -4811,7 +4823,7 @@
           <a:p>
             <a:fld id="{79806886-C3E2-4AA6-AE5C-EC60C7639E42}" type="datetimeFigureOut">
               <a:rPr lang="en-US" smtClean="0"/>
-              <a:t>4/15/2026</a:t>
+              <a:t>4/20/2026</a:t>
             </a:fld>
             <a:endParaRPr lang="en-US"/>
           </a:p>
@@ -5111,7 +5123,7 @@
           <a:p>
             <a:fld id="{79806886-C3E2-4AA6-AE5C-EC60C7639E42}" type="datetimeFigureOut">
               <a:rPr lang="en-US" smtClean="0"/>
-              <a:t>4/15/2026</a:t>
+              <a:t>4/20/2026</a:t>
             </a:fld>
             <a:endParaRPr lang="en-US"/>
           </a:p>
@@ -5345,7 +5357,7 @@
           <a:p>
             <a:fld id="{79806886-C3E2-4AA6-AE5C-EC60C7639E42}" type="datetimeFigureOut">
               <a:rPr lang="en-US" smtClean="0"/>
-              <a:t>4/15/2026</a:t>
+              <a:t>4/20/2026</a:t>
             </a:fld>
             <a:endParaRPr lang="en-US"/>
           </a:p>
@@ -6082,6 +6094,789 @@
 </p:sld>
 </file>
 
+<file path=ppt/slides/slide10.xml><?xml version="1.0" encoding="utf-8"?>
+<p:sld xmlns:a="http://schemas.openxmlformats.org/drawingml/2006/main" xmlns:r="http://schemas.openxmlformats.org/officeDocument/2006/relationships" xmlns:p="http://schemas.openxmlformats.org/presentationml/2006/main">
+  <p:cSld>
+    <p:spTree>
+      <p:nvGrpSpPr>
+        <p:cNvPr id="1" name=""/>
+        <p:cNvGrpSpPr/>
+        <p:nvPr/>
+      </p:nvGrpSpPr>
+      <p:grpSpPr>
+        <a:xfrm>
+          <a:off x="0" y="0"/>
+          <a:ext cx="0" cy="0"/>
+          <a:chOff x="0" y="0"/>
+          <a:chExt cx="0" cy="0"/>
+        </a:xfrm>
+      </p:grpSpPr>
+      <p:sp>
+        <p:nvSpPr>
+          <p:cNvPr id="2" name="Title 1">
+            <a:extLst>
+              <a:ext uri="{FF2B5EF4-FFF2-40B4-BE49-F238E27FC236}">
+                <a16:creationId xmlns:a16="http://schemas.microsoft.com/office/drawing/2014/main" id="{264267C5-BAE5-0154-04C1-96AF1FC31AB4}"/>
+              </a:ext>
+            </a:extLst>
+          </p:cNvPr>
+          <p:cNvSpPr>
+            <a:spLocks noGrp="1"/>
+          </p:cNvSpPr>
+          <p:nvPr>
+            <p:ph type="title"/>
+          </p:nvPr>
+        </p:nvSpPr>
+        <p:spPr>
+          <a:xfrm>
+            <a:off x="913795" y="0"/>
+            <a:ext cx="10353762" cy="651933"/>
+          </a:xfrm>
+        </p:spPr>
+        <p:txBody>
+          <a:bodyPr>
+            <a:normAutofit fontScale="90000"/>
+          </a:bodyPr>
+          <a:lstStyle/>
+          <a:p>
+            <a:r>
+              <a:rPr lang="en-US" b="1">
+                <a:effectLst/>
+              </a:rPr>
+              <a:t>Aggregation </a:t>
+            </a:r>
+            <a:endParaRPr lang="en-US"/>
+          </a:p>
+        </p:txBody>
+      </p:sp>
+      <p:sp>
+        <p:nvSpPr>
+          <p:cNvPr id="3" name="Content Placeholder 2">
+            <a:extLst>
+              <a:ext uri="{FF2B5EF4-FFF2-40B4-BE49-F238E27FC236}">
+                <a16:creationId xmlns:a16="http://schemas.microsoft.com/office/drawing/2014/main" id="{D665FE83-4CE4-A8FB-78C3-FC7CC7279430}"/>
+              </a:ext>
+            </a:extLst>
+          </p:cNvPr>
+          <p:cNvSpPr>
+            <a:spLocks noGrp="1"/>
+          </p:cNvSpPr>
+          <p:nvPr>
+            <p:ph idx="1"/>
+          </p:nvPr>
+        </p:nvSpPr>
+        <p:spPr>
+          <a:xfrm>
+            <a:off x="93133" y="651933"/>
+            <a:ext cx="11980334" cy="6070600"/>
+          </a:xfrm>
+        </p:spPr>
+        <p:txBody>
+          <a:bodyPr/>
+          <a:lstStyle/>
+          <a:p>
+            <a:r>
+              <a:rPr lang="en-US" sz="1800" b="1">
+                <a:effectLst/>
+              </a:rPr>
+              <a:t>The "Has-A" Relationship</a:t>
+            </a:r>
+          </a:p>
+          <a:p>
+            <a:r>
+              <a:rPr lang="en-US" sz="1800" b="1">
+                <a:effectLst/>
+              </a:rPr>
+              <a:t>C# Implementation:</a:t>
+            </a:r>
+            <a:r>
+              <a:rPr lang="en-US" sz="1800">
+                <a:effectLst/>
+              </a:rPr>
+              <a:t> </a:t>
+            </a:r>
+            <a:r>
+              <a:rPr lang="en-US" sz="1800" b="1">
+                <a:effectLst/>
+              </a:rPr>
+              <a:t>Usually implemented by passing the child object into the parent’s constructor or property (</a:t>
+            </a:r>
+            <a:r>
+              <a:rPr lang="en-US" sz="1800" b="1">
+                <a:solidFill>
+                  <a:srgbClr val="FFFF00"/>
+                </a:solidFill>
+                <a:effectLst/>
+              </a:rPr>
+              <a:t>Dependency Injection</a:t>
+            </a:r>
+            <a:r>
+              <a:rPr lang="en-US" sz="1800" b="1">
+                <a:effectLst/>
+              </a:rPr>
+              <a:t>)</a:t>
+            </a:r>
+          </a:p>
+          <a:p>
+            <a:r>
+              <a:rPr lang="en-US" b="1">
+                <a:effectLst/>
+              </a:rPr>
+              <a:t>Here </a:t>
+            </a:r>
+            <a:r>
+              <a:rPr lang="en-US"/>
+              <a:t>children (teachers) can live without parent [ department ]</a:t>
+            </a:r>
+            <a:endParaRPr lang="en-US" b="1">
+              <a:effectLst/>
+            </a:endParaRPr>
+          </a:p>
+          <a:p>
+            <a:endParaRPr lang="en-US" b="1">
+              <a:effectLst/>
+            </a:endParaRPr>
+          </a:p>
+          <a:p>
+            <a:endParaRPr lang="en-US" b="1">
+              <a:effectLst/>
+            </a:endParaRPr>
+          </a:p>
+          <a:p>
+            <a:endParaRPr lang="en-US" b="1">
+              <a:effectLst/>
+            </a:endParaRPr>
+          </a:p>
+          <a:p>
+            <a:endParaRPr lang="en-US"/>
+          </a:p>
+        </p:txBody>
+      </p:sp>
+      <p:pic>
+        <p:nvPicPr>
+          <p:cNvPr id="5" name="Picture 4">
+            <a:extLst>
+              <a:ext uri="{FF2B5EF4-FFF2-40B4-BE49-F238E27FC236}">
+                <a16:creationId xmlns:a16="http://schemas.microsoft.com/office/drawing/2014/main" id="{89992E4A-01A8-4933-2AB5-554C036CF0B2}"/>
+              </a:ext>
+            </a:extLst>
+          </p:cNvPr>
+          <p:cNvPicPr>
+            <a:picLocks noChangeAspect="1"/>
+          </p:cNvPicPr>
+          <p:nvPr/>
+        </p:nvPicPr>
+        <p:blipFill>
+          <a:blip r:embed="rId2"/>
+          <a:stretch>
+            <a:fillRect/>
+          </a:stretch>
+        </p:blipFill>
+        <p:spPr>
+          <a:xfrm>
+            <a:off x="118533" y="2684926"/>
+            <a:ext cx="4885267" cy="3147614"/>
+          </a:xfrm>
+          <a:prstGeom prst="rect">
+            <a:avLst/>
+          </a:prstGeom>
+        </p:spPr>
+      </p:pic>
+    </p:spTree>
+    <p:extLst>
+      <p:ext uri="{BB962C8B-B14F-4D97-AF65-F5344CB8AC3E}">
+        <p14:creationId xmlns:p14="http://schemas.microsoft.com/office/powerpoint/2010/main" val="3768059492"/>
+      </p:ext>
+    </p:extLst>
+  </p:cSld>
+  <p:clrMapOvr>
+    <a:masterClrMapping/>
+  </p:clrMapOvr>
+</p:sld>
+</file>
+
+<file path=ppt/slides/slide11.xml><?xml version="1.0" encoding="utf-8"?>
+<p:sld xmlns:a="http://schemas.openxmlformats.org/drawingml/2006/main" xmlns:r="http://schemas.openxmlformats.org/officeDocument/2006/relationships" xmlns:p="http://schemas.openxmlformats.org/presentationml/2006/main">
+  <p:cSld>
+    <p:spTree>
+      <p:nvGrpSpPr>
+        <p:cNvPr id="1" name=""/>
+        <p:cNvGrpSpPr/>
+        <p:nvPr/>
+      </p:nvGrpSpPr>
+      <p:grpSpPr>
+        <a:xfrm>
+          <a:off x="0" y="0"/>
+          <a:ext cx="0" cy="0"/>
+          <a:chOff x="0" y="0"/>
+          <a:chExt cx="0" cy="0"/>
+        </a:xfrm>
+      </p:grpSpPr>
+      <p:sp>
+        <p:nvSpPr>
+          <p:cNvPr id="2" name="Title 1">
+            <a:extLst>
+              <a:ext uri="{FF2B5EF4-FFF2-40B4-BE49-F238E27FC236}">
+                <a16:creationId xmlns:a16="http://schemas.microsoft.com/office/drawing/2014/main" id="{E52B5755-B757-6CAE-6FCA-355EA02E6B56}"/>
+              </a:ext>
+            </a:extLst>
+          </p:cNvPr>
+          <p:cNvSpPr>
+            <a:spLocks noGrp="1"/>
+          </p:cNvSpPr>
+          <p:nvPr>
+            <p:ph type="title"/>
+          </p:nvPr>
+        </p:nvSpPr>
+        <p:spPr>
+          <a:xfrm>
+            <a:off x="913795" y="0"/>
+            <a:ext cx="10353762" cy="609600"/>
+          </a:xfrm>
+        </p:spPr>
+        <p:txBody>
+          <a:bodyPr>
+            <a:normAutofit fontScale="90000"/>
+          </a:bodyPr>
+          <a:lstStyle/>
+          <a:p>
+            <a:r>
+              <a:rPr lang="en-US" b="1">
+                <a:effectLst/>
+              </a:rPr>
+              <a:t>Composition </a:t>
+            </a:r>
+            <a:endParaRPr lang="en-US"/>
+          </a:p>
+        </p:txBody>
+      </p:sp>
+      <p:sp>
+        <p:nvSpPr>
+          <p:cNvPr id="3" name="Content Placeholder 2">
+            <a:extLst>
+              <a:ext uri="{FF2B5EF4-FFF2-40B4-BE49-F238E27FC236}">
+                <a16:creationId xmlns:a16="http://schemas.microsoft.com/office/drawing/2014/main" id="{43BDCBF4-E275-B0F1-7606-6B1E25C882FD}"/>
+              </a:ext>
+            </a:extLst>
+          </p:cNvPr>
+          <p:cNvSpPr>
+            <a:spLocks noGrp="1"/>
+          </p:cNvSpPr>
+          <p:nvPr>
+            <p:ph idx="1"/>
+          </p:nvPr>
+        </p:nvSpPr>
+        <p:spPr>
+          <a:xfrm>
+            <a:off x="101600" y="609601"/>
+            <a:ext cx="12022667" cy="6155266"/>
+          </a:xfrm>
+        </p:spPr>
+        <p:txBody>
+          <a:bodyPr/>
+          <a:lstStyle/>
+          <a:p>
+            <a:r>
+              <a:rPr lang="en-US" b="1">
+                <a:effectLst/>
+              </a:rPr>
+              <a:t>The "Part-Of" Relationship</a:t>
+            </a:r>
+          </a:p>
+          <a:p>
+            <a:r>
+              <a:rPr lang="en-US" b="1"/>
+              <a:t>child cannot exist without parent</a:t>
+            </a:r>
+            <a:r>
+              <a:rPr lang="en-US"/>
+              <a:t>.</a:t>
+            </a:r>
+            <a:endParaRPr lang="en-US" b="1">
+              <a:effectLst/>
+            </a:endParaRPr>
+          </a:p>
+          <a:p>
+            <a:endParaRPr lang="en-US" b="1">
+              <a:effectLst/>
+            </a:endParaRPr>
+          </a:p>
+          <a:p>
+            <a:endParaRPr lang="en-US"/>
+          </a:p>
+        </p:txBody>
+      </p:sp>
+      <p:pic>
+        <p:nvPicPr>
+          <p:cNvPr id="5" name="Picture 4">
+            <a:extLst>
+              <a:ext uri="{FF2B5EF4-FFF2-40B4-BE49-F238E27FC236}">
+                <a16:creationId xmlns:a16="http://schemas.microsoft.com/office/drawing/2014/main" id="{0ABBE13F-38DC-0375-5425-89FF89DE68DB}"/>
+              </a:ext>
+            </a:extLst>
+          </p:cNvPr>
+          <p:cNvPicPr>
+            <a:picLocks noChangeAspect="1"/>
+          </p:cNvPicPr>
+          <p:nvPr/>
+        </p:nvPicPr>
+        <p:blipFill>
+          <a:blip r:embed="rId2"/>
+          <a:stretch>
+            <a:fillRect/>
+          </a:stretch>
+        </p:blipFill>
+        <p:spPr>
+          <a:xfrm>
+            <a:off x="101600" y="1727965"/>
+            <a:ext cx="4719468" cy="2526795"/>
+          </a:xfrm>
+          <a:prstGeom prst="rect">
+            <a:avLst/>
+          </a:prstGeom>
+        </p:spPr>
+      </p:pic>
+    </p:spTree>
+    <p:extLst>
+      <p:ext uri="{BB962C8B-B14F-4D97-AF65-F5344CB8AC3E}">
+        <p14:creationId xmlns:p14="http://schemas.microsoft.com/office/powerpoint/2010/main" val="3138428670"/>
+      </p:ext>
+    </p:extLst>
+  </p:cSld>
+  <p:clrMapOvr>
+    <a:masterClrMapping/>
+  </p:clrMapOvr>
+</p:sld>
+</file>
+
+<file path=ppt/slides/slide12.xml><?xml version="1.0" encoding="utf-8"?>
+<p:sld xmlns:a="http://schemas.openxmlformats.org/drawingml/2006/main" xmlns:r="http://schemas.openxmlformats.org/officeDocument/2006/relationships" xmlns:p="http://schemas.openxmlformats.org/presentationml/2006/main">
+  <p:cSld>
+    <p:spTree>
+      <p:nvGrpSpPr>
+        <p:cNvPr id="1" name=""/>
+        <p:cNvGrpSpPr/>
+        <p:nvPr/>
+      </p:nvGrpSpPr>
+      <p:grpSpPr>
+        <a:xfrm>
+          <a:off x="0" y="0"/>
+          <a:ext cx="0" cy="0"/>
+          <a:chOff x="0" y="0"/>
+          <a:chExt cx="0" cy="0"/>
+        </a:xfrm>
+      </p:grpSpPr>
+      <p:sp>
+        <p:nvSpPr>
+          <p:cNvPr id="2" name="Title 1">
+            <a:extLst>
+              <a:ext uri="{FF2B5EF4-FFF2-40B4-BE49-F238E27FC236}">
+                <a16:creationId xmlns:a16="http://schemas.microsoft.com/office/drawing/2014/main" id="{18BD19B6-E7B4-D6B7-EA34-EAE44153C85E}"/>
+              </a:ext>
+            </a:extLst>
+          </p:cNvPr>
+          <p:cNvSpPr>
+            <a:spLocks noGrp="1"/>
+          </p:cNvSpPr>
+          <p:nvPr>
+            <p:ph type="title"/>
+          </p:nvPr>
+        </p:nvSpPr>
+        <p:spPr>
+          <a:xfrm>
+            <a:off x="913795" y="0"/>
+            <a:ext cx="10353762" cy="609600"/>
+          </a:xfrm>
+        </p:spPr>
+        <p:txBody>
+          <a:bodyPr>
+            <a:normAutofit fontScale="90000"/>
+          </a:bodyPr>
+          <a:lstStyle/>
+          <a:p>
+            <a:r>
+              <a:rPr lang="en-US" b="1">
+                <a:solidFill>
+                  <a:srgbClr val="FF0000"/>
+                </a:solidFill>
+              </a:rPr>
+              <a:t>CQRS</a:t>
+            </a:r>
+          </a:p>
+        </p:txBody>
+      </p:sp>
+      <p:sp>
+        <p:nvSpPr>
+          <p:cNvPr id="3" name="Content Placeholder 2">
+            <a:extLst>
+              <a:ext uri="{FF2B5EF4-FFF2-40B4-BE49-F238E27FC236}">
+                <a16:creationId xmlns:a16="http://schemas.microsoft.com/office/drawing/2014/main" id="{09AB7379-F3B5-45C0-E910-A23E10E29503}"/>
+              </a:ext>
+            </a:extLst>
+          </p:cNvPr>
+          <p:cNvSpPr>
+            <a:spLocks noGrp="1"/>
+          </p:cNvSpPr>
+          <p:nvPr>
+            <p:ph idx="1"/>
+          </p:nvPr>
+        </p:nvSpPr>
+        <p:spPr>
+          <a:xfrm>
+            <a:off x="135467" y="609601"/>
+            <a:ext cx="11997266" cy="6138332"/>
+          </a:xfrm>
+        </p:spPr>
+        <p:txBody>
+          <a:bodyPr>
+            <a:normAutofit/>
+          </a:bodyPr>
+          <a:lstStyle/>
+          <a:p>
+            <a:r>
+              <a:rPr lang="en-US" b="1"/>
+              <a:t>CQRS stands for Command and </a:t>
+            </a:r>
+            <a:r>
+              <a:rPr lang="en-US" b="1">
+                <a:solidFill>
+                  <a:srgbClr val="FF0000"/>
+                </a:solidFill>
+              </a:rPr>
+              <a:t>Query Responsibility Segregation</a:t>
+            </a:r>
+          </a:p>
+          <a:p>
+            <a:r>
+              <a:rPr lang="en-US"/>
+              <a:t>It is a design pattern that separates read operations (queries) from write operations (commands).</a:t>
+            </a:r>
+          </a:p>
+          <a:p>
+            <a:r>
+              <a:rPr lang="en-US"/>
+              <a:t>Instead of having one model/service doing everything, CQRS splits responsibilities into two sides:</a:t>
+            </a:r>
+          </a:p>
+          <a:p>
+            <a:r>
+              <a:rPr lang="en-US"/>
+              <a:t>- Core Idea</a:t>
+            </a:r>
+          </a:p>
+          <a:p>
+            <a:r>
+              <a:rPr lang="en-US"/>
+              <a:t>   - </a:t>
+            </a:r>
+            <a:r>
+              <a:rPr lang="en-US" b="1">
+                <a:solidFill>
+                  <a:srgbClr val="00B0F0"/>
+                </a:solidFill>
+              </a:rPr>
+              <a:t>Commands</a:t>
+            </a:r>
+            <a:r>
+              <a:rPr lang="en-US"/>
+              <a:t> → change state (Create, Update, Delete)</a:t>
+            </a:r>
+          </a:p>
+          <a:p>
+            <a:r>
+              <a:rPr lang="en-US"/>
+              <a:t>   - </a:t>
+            </a:r>
+            <a:r>
+              <a:rPr lang="en-US" b="1">
+                <a:solidFill>
+                  <a:srgbClr val="00B0F0"/>
+                </a:solidFill>
+              </a:rPr>
+              <a:t>Queries</a:t>
+            </a:r>
+            <a:r>
+              <a:rPr lang="en-US"/>
+              <a:t> → read data (Get, List, Search)</a:t>
+            </a:r>
+          </a:p>
+          <a:p>
+            <a:r>
+              <a:rPr lang="en-US"/>
+              <a:t>-- Application</a:t>
+            </a:r>
+          </a:p>
+          <a:p>
+            <a:pPr lvl="1"/>
+            <a:r>
+              <a:rPr lang="en-US"/>
+              <a:t> </a:t>
+            </a:r>
+            <a:r>
+              <a:rPr lang="en-US" sz="1600" b="1">
+                <a:solidFill>
+                  <a:srgbClr val="FFFF00"/>
+                </a:solidFill>
+              </a:rPr>
+              <a:t>Commands</a:t>
+            </a:r>
+          </a:p>
+          <a:p>
+            <a:pPr lvl="2"/>
+            <a:r>
+              <a:rPr lang="en-US" b="1"/>
+              <a:t>CreateOrderCommand.cs</a:t>
+            </a:r>
+          </a:p>
+          <a:p>
+            <a:pPr lvl="1"/>
+            <a:r>
+              <a:rPr lang="en-US" sz="1600" b="1">
+                <a:solidFill>
+                  <a:srgbClr val="FFFF00"/>
+                </a:solidFill>
+              </a:rPr>
+              <a:t>Queries</a:t>
+            </a:r>
+          </a:p>
+          <a:p>
+            <a:pPr lvl="2"/>
+            <a:r>
+              <a:rPr lang="en-US" b="1"/>
+              <a:t>GetOrderByIdQuery.cs</a:t>
+            </a:r>
+          </a:p>
+          <a:p>
+            <a:pPr lvl="1"/>
+            <a:r>
+              <a:rPr lang="en-US" sz="1600" b="1">
+                <a:solidFill>
+                  <a:srgbClr val="FFFF00"/>
+                </a:solidFill>
+              </a:rPr>
+              <a:t>Handlers</a:t>
+            </a:r>
+            <a:endParaRPr lang="en-US" sz="1600" b="1"/>
+          </a:p>
+          <a:p>
+            <a:pPr lvl="2"/>
+            <a:r>
+              <a:rPr lang="en-US" b="1"/>
+              <a:t>CreateOrderHandler.cs</a:t>
+            </a:r>
+          </a:p>
+          <a:p>
+            <a:pPr lvl="2"/>
+            <a:r>
+              <a:rPr lang="en-US" b="1"/>
+              <a:t>GetOrderByIdHandler.cs</a:t>
+            </a:r>
+          </a:p>
+        </p:txBody>
+      </p:sp>
+      <p:pic>
+        <p:nvPicPr>
+          <p:cNvPr id="5" name="Picture 4">
+            <a:extLst>
+              <a:ext uri="{FF2B5EF4-FFF2-40B4-BE49-F238E27FC236}">
+                <a16:creationId xmlns:a16="http://schemas.microsoft.com/office/drawing/2014/main" id="{3DE7AA69-5920-72EC-6556-3CFCF420F3BA}"/>
+              </a:ext>
+            </a:extLst>
+          </p:cNvPr>
+          <p:cNvPicPr>
+            <a:picLocks noChangeAspect="1"/>
+          </p:cNvPicPr>
+          <p:nvPr/>
+        </p:nvPicPr>
+        <p:blipFill>
+          <a:blip r:embed="rId2"/>
+          <a:stretch>
+            <a:fillRect/>
+          </a:stretch>
+        </p:blipFill>
+        <p:spPr>
+          <a:xfrm>
+            <a:off x="5046020" y="3601657"/>
+            <a:ext cx="3469826" cy="1918609"/>
+          </a:xfrm>
+          <a:prstGeom prst="rect">
+            <a:avLst/>
+          </a:prstGeom>
+        </p:spPr>
+      </p:pic>
+    </p:spTree>
+    <p:extLst>
+      <p:ext uri="{BB962C8B-B14F-4D97-AF65-F5344CB8AC3E}">
+        <p14:creationId xmlns:p14="http://schemas.microsoft.com/office/powerpoint/2010/main" val="205078609"/>
+      </p:ext>
+    </p:extLst>
+  </p:cSld>
+  <p:clrMapOvr>
+    <a:masterClrMapping/>
+  </p:clrMapOvr>
+</p:sld>
+</file>
+
+<file path=ppt/slides/slide13.xml><?xml version="1.0" encoding="utf-8"?>
+<p:sld xmlns:a="http://schemas.openxmlformats.org/drawingml/2006/main" xmlns:r="http://schemas.openxmlformats.org/officeDocument/2006/relationships" xmlns:p="http://schemas.openxmlformats.org/presentationml/2006/main">
+  <p:cSld>
+    <p:spTree>
+      <p:nvGrpSpPr>
+        <p:cNvPr id="1" name=""/>
+        <p:cNvGrpSpPr/>
+        <p:nvPr/>
+      </p:nvGrpSpPr>
+      <p:grpSpPr>
+        <a:xfrm>
+          <a:off x="0" y="0"/>
+          <a:ext cx="0" cy="0"/>
+          <a:chOff x="0" y="0"/>
+          <a:chExt cx="0" cy="0"/>
+        </a:xfrm>
+      </p:grpSpPr>
+      <p:sp>
+        <p:nvSpPr>
+          <p:cNvPr id="2" name="Title 1">
+            <a:extLst>
+              <a:ext uri="{FF2B5EF4-FFF2-40B4-BE49-F238E27FC236}">
+                <a16:creationId xmlns:a16="http://schemas.microsoft.com/office/drawing/2014/main" id="{93FD8936-648D-D9BA-8BA1-324899E5489B}"/>
+              </a:ext>
+            </a:extLst>
+          </p:cNvPr>
+          <p:cNvSpPr>
+            <a:spLocks noGrp="1"/>
+          </p:cNvSpPr>
+          <p:nvPr>
+            <p:ph type="title"/>
+          </p:nvPr>
+        </p:nvSpPr>
+        <p:spPr>
+          <a:xfrm>
+            <a:off x="913795" y="1"/>
+            <a:ext cx="10353762" cy="482600"/>
+          </a:xfrm>
+        </p:spPr>
+        <p:txBody>
+          <a:bodyPr>
+            <a:noAutofit/>
+          </a:bodyPr>
+          <a:lstStyle/>
+          <a:p>
+            <a:r>
+              <a:rPr lang="en-US" sz="3200" b="1">
+                <a:solidFill>
+                  <a:srgbClr val="FF0000"/>
+                </a:solidFill>
+              </a:rPr>
+              <a:t>CQRS [cont.]</a:t>
+            </a:r>
+            <a:endParaRPr lang="en-US" sz="3200"/>
+          </a:p>
+        </p:txBody>
+      </p:sp>
+      <p:pic>
+        <p:nvPicPr>
+          <p:cNvPr id="7" name="Picture 6">
+            <a:extLst>
+              <a:ext uri="{FF2B5EF4-FFF2-40B4-BE49-F238E27FC236}">
+                <a16:creationId xmlns:a16="http://schemas.microsoft.com/office/drawing/2014/main" id="{92A6B526-486E-96C5-BF0B-7527114EAA20}"/>
+              </a:ext>
+            </a:extLst>
+          </p:cNvPr>
+          <p:cNvPicPr>
+            <a:picLocks noChangeAspect="1"/>
+          </p:cNvPicPr>
+          <p:nvPr/>
+        </p:nvPicPr>
+        <p:blipFill>
+          <a:blip r:embed="rId2"/>
+          <a:stretch>
+            <a:fillRect/>
+          </a:stretch>
+        </p:blipFill>
+        <p:spPr>
+          <a:xfrm>
+            <a:off x="564628" y="538161"/>
+            <a:ext cx="5526048" cy="3229506"/>
+          </a:xfrm>
+          <a:prstGeom prst="rect">
+            <a:avLst/>
+          </a:prstGeom>
+        </p:spPr>
+      </p:pic>
+      <p:pic>
+        <p:nvPicPr>
+          <p:cNvPr id="9" name="Picture 8">
+            <a:extLst>
+              <a:ext uri="{FF2B5EF4-FFF2-40B4-BE49-F238E27FC236}">
+                <a16:creationId xmlns:a16="http://schemas.microsoft.com/office/drawing/2014/main" id="{98C71119-4ADF-618D-29F0-B255D7F714ED}"/>
+              </a:ext>
+            </a:extLst>
+          </p:cNvPr>
+          <p:cNvPicPr>
+            <a:picLocks noChangeAspect="1"/>
+          </p:cNvPicPr>
+          <p:nvPr/>
+        </p:nvPicPr>
+        <p:blipFill>
+          <a:blip r:embed="rId3"/>
+          <a:stretch>
+            <a:fillRect/>
+          </a:stretch>
+        </p:blipFill>
+        <p:spPr>
+          <a:xfrm>
+            <a:off x="564628" y="3827987"/>
+            <a:ext cx="5526048" cy="3030012"/>
+          </a:xfrm>
+          <a:prstGeom prst="rect">
+            <a:avLst/>
+          </a:prstGeom>
+        </p:spPr>
+      </p:pic>
+      <p:pic>
+        <p:nvPicPr>
+          <p:cNvPr id="13" name="Picture 12">
+            <a:extLst>
+              <a:ext uri="{FF2B5EF4-FFF2-40B4-BE49-F238E27FC236}">
+                <a16:creationId xmlns:a16="http://schemas.microsoft.com/office/drawing/2014/main" id="{37BE61BF-A50B-9557-B63A-22A3C6D43743}"/>
+              </a:ext>
+            </a:extLst>
+          </p:cNvPr>
+          <p:cNvPicPr>
+            <a:picLocks noChangeAspect="1"/>
+          </p:cNvPicPr>
+          <p:nvPr/>
+        </p:nvPicPr>
+        <p:blipFill>
+          <a:blip r:embed="rId4"/>
+          <a:stretch>
+            <a:fillRect/>
+          </a:stretch>
+        </p:blipFill>
+        <p:spPr>
+          <a:xfrm>
+            <a:off x="6766443" y="819722"/>
+            <a:ext cx="4942957" cy="4523271"/>
+          </a:xfrm>
+          <a:prstGeom prst="rect">
+            <a:avLst/>
+          </a:prstGeom>
+        </p:spPr>
+      </p:pic>
+    </p:spTree>
+    <p:extLst>
+      <p:ext uri="{BB962C8B-B14F-4D97-AF65-F5344CB8AC3E}">
+        <p14:creationId xmlns:p14="http://schemas.microsoft.com/office/powerpoint/2010/main" val="2017616460"/>
+      </p:ext>
+    </p:extLst>
+  </p:cSld>
+  <p:clrMapOvr>
+    <a:masterClrMapping/>
+  </p:clrMapOvr>
+</p:sld>
+</file>
+
 <file path=ppt/slides/slide2.xml><?xml version="1.0" encoding="utf-8"?>
 <p:sld xmlns:a="http://schemas.openxmlformats.org/drawingml/2006/main" xmlns:r="http://schemas.openxmlformats.org/officeDocument/2006/relationships" xmlns:p="http://schemas.openxmlformats.org/presentationml/2006/main">
   <p:cSld>
@@ -7378,44 +8173,756 @@
             <p:ph type="title"/>
           </p:nvPr>
         </p:nvSpPr>
-        <p:spPr/>
-        <p:txBody>
-          <a:bodyPr/>
+        <p:spPr>
+          <a:xfrm>
+            <a:off x="913795" y="0"/>
+            <a:ext cx="10353762" cy="575733"/>
+          </a:xfrm>
+        </p:spPr>
+        <p:txBody>
+          <a:bodyPr>
+            <a:normAutofit fontScale="90000"/>
+          </a:bodyPr>
           <a:lstStyle/>
           <a:p>
-            <a:endParaRPr lang="en-US"/>
-          </a:p>
-        </p:txBody>
-      </p:sp>
-      <p:sp>
-        <p:nvSpPr>
-          <p:cNvPr id="3" name="Content Placeholder 2">
+            <a:r>
+              <a:rPr lang="en-US" b="1">
+                <a:solidFill>
+                  <a:srgbClr val="FFFF00"/>
+                </a:solidFill>
+                <a:effectLst/>
+              </a:rPr>
+              <a:t>LINQ Query Syntax left Join</a:t>
+            </a:r>
+            <a:endParaRPr lang="en-US" b="1">
+              <a:solidFill>
+                <a:srgbClr val="FFFF00"/>
+              </a:solidFill>
+            </a:endParaRPr>
+          </a:p>
+        </p:txBody>
+      </p:sp>
+      <p:pic>
+        <p:nvPicPr>
+          <p:cNvPr id="13" name="Picture 12">
             <a:extLst>
               <a:ext uri="{FF2B5EF4-FFF2-40B4-BE49-F238E27FC236}">
-                <a16:creationId xmlns:a16="http://schemas.microsoft.com/office/drawing/2014/main" id="{1A30A2F4-5E6D-E4B7-E3C0-663C580D278F}"/>
+                <a16:creationId xmlns:a16="http://schemas.microsoft.com/office/drawing/2014/main" id="{38D248F4-0131-E61B-4DC6-F1B7BD778D59}"/>
               </a:ext>
             </a:extLst>
           </p:cNvPr>
-          <p:cNvSpPr>
-            <a:spLocks noGrp="1"/>
-          </p:cNvSpPr>
-          <p:nvPr>
-            <p:ph idx="1"/>
-          </p:nvPr>
-        </p:nvSpPr>
-        <p:spPr/>
-        <p:txBody>
-          <a:bodyPr/>
-          <a:lstStyle/>
-          <a:p>
-            <a:endParaRPr lang="en-US"/>
-          </a:p>
-        </p:txBody>
-      </p:sp>
+          <p:cNvPicPr>
+            <a:picLocks noChangeAspect="1"/>
+          </p:cNvPicPr>
+          <p:nvPr/>
+        </p:nvPicPr>
+        <p:blipFill>
+          <a:blip r:embed="rId2"/>
+          <a:stretch>
+            <a:fillRect/>
+          </a:stretch>
+        </p:blipFill>
+        <p:spPr>
+          <a:xfrm>
+            <a:off x="151796" y="719666"/>
+            <a:ext cx="2606430" cy="1546994"/>
+          </a:xfrm>
+          <a:prstGeom prst="rect">
+            <a:avLst/>
+          </a:prstGeom>
+        </p:spPr>
+      </p:pic>
+      <p:pic>
+        <p:nvPicPr>
+          <p:cNvPr id="15" name="Picture 14">
+            <a:extLst>
+              <a:ext uri="{FF2B5EF4-FFF2-40B4-BE49-F238E27FC236}">
+                <a16:creationId xmlns:a16="http://schemas.microsoft.com/office/drawing/2014/main" id="{3A5E6F59-06F8-72D9-70F4-8C549D07F88F}"/>
+              </a:ext>
+            </a:extLst>
+          </p:cNvPr>
+          <p:cNvPicPr>
+            <a:picLocks noChangeAspect="1"/>
+          </p:cNvPicPr>
+          <p:nvPr/>
+        </p:nvPicPr>
+        <p:blipFill>
+          <a:blip r:embed="rId3"/>
+          <a:stretch>
+            <a:fillRect/>
+          </a:stretch>
+        </p:blipFill>
+        <p:spPr>
+          <a:xfrm>
+            <a:off x="2929468" y="560627"/>
+            <a:ext cx="3716336" cy="1791904"/>
+          </a:xfrm>
+          <a:prstGeom prst="rect">
+            <a:avLst/>
+          </a:prstGeom>
+        </p:spPr>
+      </p:pic>
+      <p:pic>
+        <p:nvPicPr>
+          <p:cNvPr id="17" name="Picture 16">
+            <a:extLst>
+              <a:ext uri="{FF2B5EF4-FFF2-40B4-BE49-F238E27FC236}">
+                <a16:creationId xmlns:a16="http://schemas.microsoft.com/office/drawing/2014/main" id="{33476E61-EFFB-1CC9-6979-6E6234D3E7BE}"/>
+              </a:ext>
+            </a:extLst>
+          </p:cNvPr>
+          <p:cNvPicPr>
+            <a:picLocks noChangeAspect="1"/>
+          </p:cNvPicPr>
+          <p:nvPr/>
+        </p:nvPicPr>
+        <p:blipFill>
+          <a:blip r:embed="rId4"/>
+          <a:stretch>
+            <a:fillRect/>
+          </a:stretch>
+        </p:blipFill>
+        <p:spPr>
+          <a:xfrm>
+            <a:off x="0" y="2438401"/>
+            <a:ext cx="3834023" cy="4447408"/>
+          </a:xfrm>
+          <a:prstGeom prst="rect">
+            <a:avLst/>
+          </a:prstGeom>
+        </p:spPr>
+      </p:pic>
+      <p:pic>
+        <p:nvPicPr>
+          <p:cNvPr id="21" name="Picture 20">
+            <a:extLst>
+              <a:ext uri="{FF2B5EF4-FFF2-40B4-BE49-F238E27FC236}">
+                <a16:creationId xmlns:a16="http://schemas.microsoft.com/office/drawing/2014/main" id="{46AA3581-A6E2-1BC7-E6DB-736DD2E0191B}"/>
+              </a:ext>
+            </a:extLst>
+          </p:cNvPr>
+          <p:cNvPicPr>
+            <a:picLocks noChangeAspect="1"/>
+          </p:cNvPicPr>
+          <p:nvPr/>
+        </p:nvPicPr>
+        <p:blipFill>
+          <a:blip r:embed="rId5"/>
+          <a:stretch>
+            <a:fillRect/>
+          </a:stretch>
+        </p:blipFill>
+        <p:spPr>
+          <a:xfrm>
+            <a:off x="3892559" y="2403018"/>
+            <a:ext cx="3716336" cy="2051963"/>
+          </a:xfrm>
+          <a:prstGeom prst="rect">
+            <a:avLst/>
+          </a:prstGeom>
+        </p:spPr>
+      </p:pic>
+      <p:pic>
+        <p:nvPicPr>
+          <p:cNvPr id="23" name="Picture 22">
+            <a:extLst>
+              <a:ext uri="{FF2B5EF4-FFF2-40B4-BE49-F238E27FC236}">
+                <a16:creationId xmlns:a16="http://schemas.microsoft.com/office/drawing/2014/main" id="{8B0F35E5-A5B4-4718-F3D9-89FA9709369C}"/>
+              </a:ext>
+            </a:extLst>
+          </p:cNvPr>
+          <p:cNvPicPr>
+            <a:picLocks noChangeAspect="1"/>
+          </p:cNvPicPr>
+          <p:nvPr/>
+        </p:nvPicPr>
+        <p:blipFill>
+          <a:blip r:embed="rId6"/>
+          <a:stretch>
+            <a:fillRect/>
+          </a:stretch>
+        </p:blipFill>
+        <p:spPr>
+          <a:xfrm>
+            <a:off x="3892559" y="4490364"/>
+            <a:ext cx="2682472" cy="2367636"/>
+          </a:xfrm>
+          <a:prstGeom prst="rect">
+            <a:avLst/>
+          </a:prstGeom>
+        </p:spPr>
+      </p:pic>
+      <p:pic>
+        <p:nvPicPr>
+          <p:cNvPr id="25" name="Picture 24">
+            <a:extLst>
+              <a:ext uri="{FF2B5EF4-FFF2-40B4-BE49-F238E27FC236}">
+                <a16:creationId xmlns:a16="http://schemas.microsoft.com/office/drawing/2014/main" id="{3FCD31B3-BF3B-0D8A-A0DA-28A446926527}"/>
+              </a:ext>
+            </a:extLst>
+          </p:cNvPr>
+          <p:cNvPicPr>
+            <a:picLocks noChangeAspect="1"/>
+          </p:cNvPicPr>
+          <p:nvPr/>
+        </p:nvPicPr>
+        <p:blipFill>
+          <a:blip r:embed="rId7"/>
+          <a:stretch>
+            <a:fillRect/>
+          </a:stretch>
+        </p:blipFill>
+        <p:spPr>
+          <a:xfrm>
+            <a:off x="8120912" y="575733"/>
+            <a:ext cx="2420087" cy="3311330"/>
+          </a:xfrm>
+          <a:prstGeom prst="rect">
+            <a:avLst/>
+          </a:prstGeom>
+        </p:spPr>
+      </p:pic>
+      <p:pic>
+        <p:nvPicPr>
+          <p:cNvPr id="27" name="Picture 26">
+            <a:extLst>
+              <a:ext uri="{FF2B5EF4-FFF2-40B4-BE49-F238E27FC236}">
+                <a16:creationId xmlns:a16="http://schemas.microsoft.com/office/drawing/2014/main" id="{A143240C-C79B-8D12-DEB4-A172F26C1010}"/>
+              </a:ext>
+            </a:extLst>
+          </p:cNvPr>
+          <p:cNvPicPr>
+            <a:picLocks noChangeAspect="1"/>
+          </p:cNvPicPr>
+          <p:nvPr/>
+        </p:nvPicPr>
+        <p:blipFill>
+          <a:blip r:embed="rId8"/>
+          <a:stretch>
+            <a:fillRect/>
+          </a:stretch>
+        </p:blipFill>
+        <p:spPr>
+          <a:xfrm>
+            <a:off x="7859872" y="4069389"/>
+            <a:ext cx="3635055" cy="2613887"/>
+          </a:xfrm>
+          <a:prstGeom prst="rect">
+            <a:avLst/>
+          </a:prstGeom>
+        </p:spPr>
+      </p:pic>
     </p:spTree>
     <p:extLst>
       <p:ext uri="{BB962C8B-B14F-4D97-AF65-F5344CB8AC3E}">
         <p14:creationId xmlns:p14="http://schemas.microsoft.com/office/powerpoint/2010/main" val="2328028493"/>
+      </p:ext>
+    </p:extLst>
+  </p:cSld>
+  <p:clrMapOvr>
+    <a:masterClrMapping/>
+  </p:clrMapOvr>
+</p:sld>
+</file>
+
+<file path=ppt/slides/slide7.xml><?xml version="1.0" encoding="utf-8"?>
+<p:sld xmlns:a="http://schemas.openxmlformats.org/drawingml/2006/main" xmlns:r="http://schemas.openxmlformats.org/officeDocument/2006/relationships" xmlns:p="http://schemas.openxmlformats.org/presentationml/2006/main">
+  <p:cSld>
+    <p:spTree>
+      <p:nvGrpSpPr>
+        <p:cNvPr id="1" name=""/>
+        <p:cNvGrpSpPr/>
+        <p:nvPr/>
+      </p:nvGrpSpPr>
+      <p:grpSpPr>
+        <a:xfrm>
+          <a:off x="0" y="0"/>
+          <a:ext cx="0" cy="0"/>
+          <a:chOff x="0" y="0"/>
+          <a:chExt cx="0" cy="0"/>
+        </a:xfrm>
+      </p:grpSpPr>
+      <p:sp>
+        <p:nvSpPr>
+          <p:cNvPr id="2" name="Title 1">
+            <a:extLst>
+              <a:ext uri="{FF2B5EF4-FFF2-40B4-BE49-F238E27FC236}">
+                <a16:creationId xmlns:a16="http://schemas.microsoft.com/office/drawing/2014/main" id="{BC629567-C097-E677-74FD-BB7789F58B8C}"/>
+              </a:ext>
+            </a:extLst>
+          </p:cNvPr>
+          <p:cNvSpPr>
+            <a:spLocks noGrp="1"/>
+          </p:cNvSpPr>
+          <p:nvPr>
+            <p:ph type="title"/>
+          </p:nvPr>
+        </p:nvSpPr>
+        <p:spPr>
+          <a:xfrm>
+            <a:off x="913795" y="0"/>
+            <a:ext cx="10353762" cy="601133"/>
+          </a:xfrm>
+        </p:spPr>
+        <p:txBody>
+          <a:bodyPr>
+            <a:normAutofit fontScale="90000"/>
+          </a:bodyPr>
+          <a:lstStyle/>
+          <a:p>
+            <a:r>
+              <a:rPr lang="en-US" b="1">
+                <a:solidFill>
+                  <a:srgbClr val="FFFF00"/>
+                </a:solidFill>
+                <a:effectLst/>
+              </a:rPr>
+              <a:t>LINQ Query Syntax left Join</a:t>
+            </a:r>
+            <a:endParaRPr lang="en-US"/>
+          </a:p>
+        </p:txBody>
+      </p:sp>
+      <p:pic>
+        <p:nvPicPr>
+          <p:cNvPr id="5" name="Content Placeholder 4">
+            <a:extLst>
+              <a:ext uri="{FF2B5EF4-FFF2-40B4-BE49-F238E27FC236}">
+                <a16:creationId xmlns:a16="http://schemas.microsoft.com/office/drawing/2014/main" id="{43EBEE3B-A167-F253-28A7-81C76EED4FD1}"/>
+              </a:ext>
+            </a:extLst>
+          </p:cNvPr>
+          <p:cNvPicPr>
+            <a:picLocks noGrp="1" noChangeAspect="1"/>
+          </p:cNvPicPr>
+          <p:nvPr>
+            <p:ph idx="1"/>
+          </p:nvPr>
+        </p:nvPicPr>
+        <p:blipFill>
+          <a:blip r:embed="rId2"/>
+          <a:stretch>
+            <a:fillRect/>
+          </a:stretch>
+        </p:blipFill>
+        <p:spPr>
+          <a:xfrm>
+            <a:off x="3716866" y="601132"/>
+            <a:ext cx="4030133" cy="2820333"/>
+          </a:xfrm>
+          <a:prstGeom prst="rect">
+            <a:avLst/>
+          </a:prstGeom>
+          <a:effectLst>
+            <a:outerShdw blurRad="25400" dir="17880000">
+              <a:srgbClr val="000000">
+                <a:alpha val="46000"/>
+              </a:srgbClr>
+            </a:outerShdw>
+          </a:effectLst>
+        </p:spPr>
+      </p:pic>
+      <p:pic>
+        <p:nvPicPr>
+          <p:cNvPr id="7" name="Picture 6">
+            <a:extLst>
+              <a:ext uri="{FF2B5EF4-FFF2-40B4-BE49-F238E27FC236}">
+                <a16:creationId xmlns:a16="http://schemas.microsoft.com/office/drawing/2014/main" id="{B26874DD-4DB0-E2B0-FE6A-506E6C22AD83}"/>
+              </a:ext>
+            </a:extLst>
+          </p:cNvPr>
+          <p:cNvPicPr>
+            <a:picLocks noChangeAspect="1"/>
+          </p:cNvPicPr>
+          <p:nvPr/>
+        </p:nvPicPr>
+        <p:blipFill>
+          <a:blip r:embed="rId3"/>
+          <a:stretch>
+            <a:fillRect/>
+          </a:stretch>
+        </p:blipFill>
+        <p:spPr>
+          <a:xfrm>
+            <a:off x="196308" y="608667"/>
+            <a:ext cx="3247932" cy="2820333"/>
+          </a:xfrm>
+          <a:prstGeom prst="rect">
+            <a:avLst/>
+          </a:prstGeom>
+        </p:spPr>
+      </p:pic>
+      <p:sp>
+        <p:nvSpPr>
+          <p:cNvPr id="8" name="TextBox 7">
+            <a:extLst>
+              <a:ext uri="{FF2B5EF4-FFF2-40B4-BE49-F238E27FC236}">
+                <a16:creationId xmlns:a16="http://schemas.microsoft.com/office/drawing/2014/main" id="{DC59A1D6-D574-D479-7528-6A48466DDE1C}"/>
+              </a:ext>
+            </a:extLst>
+          </p:cNvPr>
+          <p:cNvSpPr txBox="1"/>
+          <p:nvPr/>
+        </p:nvSpPr>
+        <p:spPr>
+          <a:xfrm>
+            <a:off x="728132" y="4064000"/>
+            <a:ext cx="10041467" cy="1477328"/>
+          </a:xfrm>
+          <a:prstGeom prst="rect">
+            <a:avLst/>
+          </a:prstGeom>
+          <a:noFill/>
+        </p:spPr>
+        <p:txBody>
+          <a:bodyPr wrap="square" rtlCol="0">
+            <a:spAutoFit/>
+          </a:bodyPr>
+          <a:lstStyle/>
+          <a:p>
+            <a:r>
+              <a:rPr lang="en-US"/>
+              <a:t>The tricky here is : when we need to get from all rows from first table even if there no match in second table</a:t>
+            </a:r>
+          </a:p>
+          <a:p>
+            <a:endParaRPr lang="en-US"/>
+          </a:p>
+          <a:p>
+            <a:endParaRPr lang="en-US"/>
+          </a:p>
+          <a:p>
+            <a:r>
+              <a:rPr lang="en-US"/>
+              <a:t> </a:t>
+            </a:r>
+          </a:p>
+        </p:txBody>
+      </p:sp>
+    </p:spTree>
+    <p:extLst>
+      <p:ext uri="{BB962C8B-B14F-4D97-AF65-F5344CB8AC3E}">
+        <p14:creationId xmlns:p14="http://schemas.microsoft.com/office/powerpoint/2010/main" val="2082898737"/>
+      </p:ext>
+    </p:extLst>
+  </p:cSld>
+  <p:clrMapOvr>
+    <a:masterClrMapping/>
+  </p:clrMapOvr>
+</p:sld>
+</file>
+
+<file path=ppt/slides/slide8.xml><?xml version="1.0" encoding="utf-8"?>
+<p:sld xmlns:a="http://schemas.openxmlformats.org/drawingml/2006/main" xmlns:r="http://schemas.openxmlformats.org/officeDocument/2006/relationships" xmlns:p="http://schemas.openxmlformats.org/presentationml/2006/main">
+  <p:cSld>
+    <p:spTree>
+      <p:nvGrpSpPr>
+        <p:cNvPr id="1" name=""/>
+        <p:cNvGrpSpPr/>
+        <p:nvPr/>
+      </p:nvGrpSpPr>
+      <p:grpSpPr>
+        <a:xfrm>
+          <a:off x="0" y="0"/>
+          <a:ext cx="0" cy="0"/>
+          <a:chOff x="0" y="0"/>
+          <a:chExt cx="0" cy="0"/>
+        </a:xfrm>
+      </p:grpSpPr>
+      <p:sp>
+        <p:nvSpPr>
+          <p:cNvPr id="2" name="Title 1">
+            <a:extLst>
+              <a:ext uri="{FF2B5EF4-FFF2-40B4-BE49-F238E27FC236}">
+                <a16:creationId xmlns:a16="http://schemas.microsoft.com/office/drawing/2014/main" id="{C6017F55-A87E-8987-8C53-D352FE5F6AD4}"/>
+              </a:ext>
+            </a:extLst>
+          </p:cNvPr>
+          <p:cNvSpPr>
+            <a:spLocks noGrp="1"/>
+          </p:cNvSpPr>
+          <p:nvPr>
+            <p:ph type="title"/>
+          </p:nvPr>
+        </p:nvSpPr>
+        <p:spPr>
+          <a:xfrm>
+            <a:off x="913795" y="0"/>
+            <a:ext cx="10353762" cy="970450"/>
+          </a:xfrm>
+        </p:spPr>
+        <p:txBody>
+          <a:bodyPr/>
+          <a:lstStyle/>
+          <a:p>
+            <a:r>
+              <a:rPr lang="en-US" b="1">
+                <a:solidFill>
+                  <a:srgbClr val="FF0000"/>
+                </a:solidFill>
+              </a:rPr>
+              <a:t>Left join in .net 10</a:t>
+            </a:r>
+          </a:p>
+        </p:txBody>
+      </p:sp>
+      <p:sp>
+        <p:nvSpPr>
+          <p:cNvPr id="3" name="Content Placeholder 2">
+            <a:extLst>
+              <a:ext uri="{FF2B5EF4-FFF2-40B4-BE49-F238E27FC236}">
+                <a16:creationId xmlns:a16="http://schemas.microsoft.com/office/drawing/2014/main" id="{F573BCEA-3A25-B8DF-FB6E-C613885C8F25}"/>
+              </a:ext>
+            </a:extLst>
+          </p:cNvPr>
+          <p:cNvSpPr>
+            <a:spLocks noGrp="1"/>
+          </p:cNvSpPr>
+          <p:nvPr>
+            <p:ph idx="1"/>
+          </p:nvPr>
+        </p:nvSpPr>
+        <p:spPr>
+          <a:xfrm>
+            <a:off x="143933" y="970450"/>
+            <a:ext cx="11954934" cy="5785949"/>
+          </a:xfrm>
+        </p:spPr>
+        <p:txBody>
+          <a:bodyPr/>
+          <a:lstStyle/>
+          <a:p>
+            <a:endParaRPr lang="en-US"/>
+          </a:p>
+          <a:p>
+            <a:endParaRPr lang="en-US"/>
+          </a:p>
+          <a:p>
+            <a:endParaRPr lang="en-US"/>
+          </a:p>
+        </p:txBody>
+      </p:sp>
+      <p:pic>
+        <p:nvPicPr>
+          <p:cNvPr id="5" name="Picture 4">
+            <a:extLst>
+              <a:ext uri="{FF2B5EF4-FFF2-40B4-BE49-F238E27FC236}">
+                <a16:creationId xmlns:a16="http://schemas.microsoft.com/office/drawing/2014/main" id="{1A68C370-4A46-552D-83CE-7E9DB643D26E}"/>
+              </a:ext>
+            </a:extLst>
+          </p:cNvPr>
+          <p:cNvPicPr>
+            <a:picLocks noChangeAspect="1"/>
+          </p:cNvPicPr>
+          <p:nvPr/>
+        </p:nvPicPr>
+        <p:blipFill>
+          <a:blip r:embed="rId2"/>
+          <a:stretch>
+            <a:fillRect/>
+          </a:stretch>
+        </p:blipFill>
+        <p:spPr>
+          <a:xfrm>
+            <a:off x="271574" y="885510"/>
+            <a:ext cx="5824426" cy="2921577"/>
+          </a:xfrm>
+          <a:prstGeom prst="rect">
+            <a:avLst/>
+          </a:prstGeom>
+        </p:spPr>
+      </p:pic>
+    </p:spTree>
+    <p:extLst>
+      <p:ext uri="{BB962C8B-B14F-4D97-AF65-F5344CB8AC3E}">
+        <p14:creationId xmlns:p14="http://schemas.microsoft.com/office/powerpoint/2010/main" val="1885605593"/>
+      </p:ext>
+    </p:extLst>
+  </p:cSld>
+  <p:clrMapOvr>
+    <a:masterClrMapping/>
+  </p:clrMapOvr>
+</p:sld>
+</file>
+
+<file path=ppt/slides/slide9.xml><?xml version="1.0" encoding="utf-8"?>
+<p:sld xmlns:a="http://schemas.openxmlformats.org/drawingml/2006/main" xmlns:r="http://schemas.openxmlformats.org/officeDocument/2006/relationships" xmlns:p="http://schemas.openxmlformats.org/presentationml/2006/main">
+  <p:cSld>
+    <p:spTree>
+      <p:nvGrpSpPr>
+        <p:cNvPr id="1" name=""/>
+        <p:cNvGrpSpPr/>
+        <p:nvPr/>
+      </p:nvGrpSpPr>
+      <p:grpSpPr>
+        <a:xfrm>
+          <a:off x="0" y="0"/>
+          <a:ext cx="0" cy="0"/>
+          <a:chOff x="0" y="0"/>
+          <a:chExt cx="0" cy="0"/>
+        </a:xfrm>
+      </p:grpSpPr>
+      <p:sp>
+        <p:nvSpPr>
+          <p:cNvPr id="2" name="Title 1">
+            <a:extLst>
+              <a:ext uri="{FF2B5EF4-FFF2-40B4-BE49-F238E27FC236}">
+                <a16:creationId xmlns:a16="http://schemas.microsoft.com/office/drawing/2014/main" id="{204F4AEA-1971-E800-703E-69F376F262A9}"/>
+              </a:ext>
+            </a:extLst>
+          </p:cNvPr>
+          <p:cNvSpPr>
+            <a:spLocks noGrp="1"/>
+          </p:cNvSpPr>
+          <p:nvPr>
+            <p:ph type="title"/>
+          </p:nvPr>
+        </p:nvSpPr>
+        <p:spPr>
+          <a:xfrm>
+            <a:off x="913795" y="0"/>
+            <a:ext cx="10353762" cy="753533"/>
+          </a:xfrm>
+        </p:spPr>
+        <p:txBody>
+          <a:bodyPr/>
+          <a:lstStyle/>
+          <a:p>
+            <a:r>
+              <a:rPr lang="en-US" b="1">
+                <a:effectLst/>
+              </a:rPr>
+              <a:t>Association </a:t>
+            </a:r>
+            <a:endParaRPr lang="en-US"/>
+          </a:p>
+        </p:txBody>
+      </p:sp>
+      <p:sp>
+        <p:nvSpPr>
+          <p:cNvPr id="3" name="Content Placeholder 2">
+            <a:extLst>
+              <a:ext uri="{FF2B5EF4-FFF2-40B4-BE49-F238E27FC236}">
+                <a16:creationId xmlns:a16="http://schemas.microsoft.com/office/drawing/2014/main" id="{2F56D789-EEAB-71E6-ECF8-CFF49F4FD004}"/>
+              </a:ext>
+            </a:extLst>
+          </p:cNvPr>
+          <p:cNvSpPr>
+            <a:spLocks noGrp="1"/>
+          </p:cNvSpPr>
+          <p:nvPr>
+            <p:ph idx="1"/>
+          </p:nvPr>
+        </p:nvSpPr>
+        <p:spPr>
+          <a:xfrm>
+            <a:off x="177800" y="897467"/>
+            <a:ext cx="11844867" cy="5698066"/>
+          </a:xfrm>
+        </p:spPr>
+        <p:txBody>
+          <a:bodyPr/>
+          <a:lstStyle/>
+          <a:p>
+            <a:r>
+              <a:rPr lang="en-US" b="1">
+                <a:effectLst/>
+              </a:rPr>
+              <a:t>Uses-A"</a:t>
+            </a:r>
+            <a:r>
+              <a:rPr lang="en-US" b="1">
+                <a:solidFill>
+                  <a:srgbClr val="FFFF00"/>
+                </a:solidFill>
+                <a:effectLst/>
+              </a:rPr>
+              <a:t>Relationship</a:t>
+            </a:r>
+            <a:r>
+              <a:rPr lang="en-US" b="1">
+                <a:effectLst/>
+              </a:rPr>
+              <a:t>"</a:t>
+            </a:r>
+            <a:endParaRPr lang="en-US">
+              <a:effectLst/>
+            </a:endParaRPr>
+          </a:p>
+          <a:p>
+            <a:r>
+              <a:rPr lang="en-US">
+                <a:effectLst/>
+              </a:rPr>
+              <a:t>It defines a link between two </a:t>
+            </a:r>
+            <a:r>
+              <a:rPr lang="en-US" b="1">
+                <a:solidFill>
+                  <a:srgbClr val="FFFF00"/>
+                </a:solidFill>
+                <a:effectLst/>
+              </a:rPr>
+              <a:t>independent</a:t>
+            </a:r>
+            <a:r>
+              <a:rPr lang="en-US">
+                <a:effectLst/>
+              </a:rPr>
+              <a:t> objects where they use each other to perform actions, but neither "owns" the other.</a:t>
+            </a:r>
+          </a:p>
+          <a:p>
+            <a:r>
+              <a:rPr lang="en-US" b="1">
+                <a:effectLst/>
+              </a:rPr>
+              <a:t>Implementation: </a:t>
+            </a:r>
+            <a:r>
+              <a:rPr lang="en-US">
+                <a:effectLst/>
+              </a:rPr>
+              <a:t>by passing an object as a parameter to a method.</a:t>
+            </a:r>
+            <a:endParaRPr lang="en-US"/>
+          </a:p>
+        </p:txBody>
+      </p:sp>
+      <p:pic>
+        <p:nvPicPr>
+          <p:cNvPr id="5" name="Picture 4">
+            <a:extLst>
+              <a:ext uri="{FF2B5EF4-FFF2-40B4-BE49-F238E27FC236}">
+                <a16:creationId xmlns:a16="http://schemas.microsoft.com/office/drawing/2014/main" id="{0134ABA0-88FD-1776-477D-E864080379AA}"/>
+              </a:ext>
+            </a:extLst>
+          </p:cNvPr>
+          <p:cNvPicPr>
+            <a:picLocks noChangeAspect="1"/>
+          </p:cNvPicPr>
+          <p:nvPr/>
+        </p:nvPicPr>
+        <p:blipFill>
+          <a:blip r:embed="rId2"/>
+          <a:stretch>
+            <a:fillRect/>
+          </a:stretch>
+        </p:blipFill>
+        <p:spPr>
+          <a:xfrm>
+            <a:off x="311776" y="2788392"/>
+            <a:ext cx="6063623" cy="2881812"/>
+          </a:xfrm>
+          <a:prstGeom prst="rect">
+            <a:avLst/>
+          </a:prstGeom>
+        </p:spPr>
+      </p:pic>
+    </p:spTree>
+    <p:extLst>
+      <p:ext uri="{BB962C8B-B14F-4D97-AF65-F5344CB8AC3E}">
+        <p14:creationId xmlns:p14="http://schemas.microsoft.com/office/powerpoint/2010/main" val="2546003169"/>
       </p:ext>
     </p:extLst>
   </p:cSld>

--- a/Dot Net/NEW.pptx
+++ b/Dot Net/NEW.pptx
@@ -10,14 +10,19 @@
     <p:sldId id="258" r:id="rId4"/>
     <p:sldId id="259" r:id="rId5"/>
     <p:sldId id="260" r:id="rId6"/>
-    <p:sldId id="261" r:id="rId7"/>
-    <p:sldId id="262" r:id="rId8"/>
-    <p:sldId id="263" r:id="rId9"/>
-    <p:sldId id="264" r:id="rId10"/>
-    <p:sldId id="265" r:id="rId11"/>
-    <p:sldId id="266" r:id="rId12"/>
-    <p:sldId id="267" r:id="rId13"/>
-    <p:sldId id="268" r:id="rId14"/>
+    <p:sldId id="269" r:id="rId7"/>
+    <p:sldId id="261" r:id="rId8"/>
+    <p:sldId id="262" r:id="rId9"/>
+    <p:sldId id="263" r:id="rId10"/>
+    <p:sldId id="264" r:id="rId11"/>
+    <p:sldId id="265" r:id="rId12"/>
+    <p:sldId id="266" r:id="rId13"/>
+    <p:sldId id="267" r:id="rId14"/>
+    <p:sldId id="268" r:id="rId15"/>
+    <p:sldId id="270" r:id="rId16"/>
+    <p:sldId id="271" r:id="rId17"/>
+    <p:sldId id="273" r:id="rId18"/>
+    <p:sldId id="272" r:id="rId19"/>
   </p:sldIdLst>
   <p:sldSz cx="12192000" cy="6858000"/>
   <p:notesSz cx="6858000" cy="9144000"/>
@@ -309,7 +314,7 @@
           <a:p>
             <a:fld id="{79806886-C3E2-4AA6-AE5C-EC60C7639E42}" type="datetimeFigureOut">
               <a:rPr lang="en-US" smtClean="0"/>
-              <a:t>4/20/2026</a:t>
+              <a:t>4/28/2026</a:t>
             </a:fld>
             <a:endParaRPr lang="en-US"/>
           </a:p>
@@ -607,7 +612,7 @@
           <a:p>
             <a:fld id="{79806886-C3E2-4AA6-AE5C-EC60C7639E42}" type="datetimeFigureOut">
               <a:rPr lang="en-US" smtClean="0"/>
-              <a:t>4/20/2026</a:t>
+              <a:t>4/28/2026</a:t>
             </a:fld>
             <a:endParaRPr lang="en-US"/>
           </a:p>
@@ -799,7 +804,7 @@
           <a:p>
             <a:fld id="{79806886-C3E2-4AA6-AE5C-EC60C7639E42}" type="datetimeFigureOut">
               <a:rPr lang="en-US" smtClean="0"/>
-              <a:t>4/20/2026</a:t>
+              <a:t>4/28/2026</a:t>
             </a:fld>
             <a:endParaRPr lang="en-US"/>
           </a:p>
@@ -1060,7 +1065,7 @@
           <a:p>
             <a:fld id="{79806886-C3E2-4AA6-AE5C-EC60C7639E42}" type="datetimeFigureOut">
               <a:rPr lang="en-US" smtClean="0"/>
-              <a:t>4/20/2026</a:t>
+              <a:t>4/28/2026</a:t>
             </a:fld>
             <a:endParaRPr lang="en-US"/>
           </a:p>
@@ -1484,7 +1489,7 @@
           <a:p>
             <a:fld id="{79806886-C3E2-4AA6-AE5C-EC60C7639E42}" type="datetimeFigureOut">
               <a:rPr lang="en-US" smtClean="0"/>
-              <a:t>4/20/2026</a:t>
+              <a:t>4/28/2026</a:t>
             </a:fld>
             <a:endParaRPr lang="en-US"/>
           </a:p>
@@ -2021,7 +2026,7 @@
           <a:p>
             <a:fld id="{79806886-C3E2-4AA6-AE5C-EC60C7639E42}" type="datetimeFigureOut">
               <a:rPr lang="en-US" smtClean="0"/>
-              <a:t>4/20/2026</a:t>
+              <a:t>4/28/2026</a:t>
             </a:fld>
             <a:endParaRPr lang="en-US"/>
           </a:p>
@@ -2885,7 +2890,7 @@
           <a:p>
             <a:fld id="{79806886-C3E2-4AA6-AE5C-EC60C7639E42}" type="datetimeFigureOut">
               <a:rPr lang="en-US" smtClean="0"/>
-              <a:t>4/20/2026</a:t>
+              <a:t>4/28/2026</a:t>
             </a:fld>
             <a:endParaRPr lang="en-US"/>
           </a:p>
@@ -3055,7 +3060,7 @@
           <a:p>
             <a:fld id="{79806886-C3E2-4AA6-AE5C-EC60C7639E42}" type="datetimeFigureOut">
               <a:rPr lang="en-US" smtClean="0"/>
-              <a:t>4/20/2026</a:t>
+              <a:t>4/28/2026</a:t>
             </a:fld>
             <a:endParaRPr lang="en-US"/>
           </a:p>
@@ -3239,7 +3244,7 @@
           <a:p>
             <a:fld id="{79806886-C3E2-4AA6-AE5C-EC60C7639E42}" type="datetimeFigureOut">
               <a:rPr lang="en-US" smtClean="0"/>
-              <a:t>4/20/2026</a:t>
+              <a:t>4/28/2026</a:t>
             </a:fld>
             <a:endParaRPr lang="en-US"/>
           </a:p>
@@ -3409,7 +3414,7 @@
           <a:p>
             <a:fld id="{79806886-C3E2-4AA6-AE5C-EC60C7639E42}" type="datetimeFigureOut">
               <a:rPr lang="en-US" smtClean="0"/>
-              <a:t>4/20/2026</a:t>
+              <a:t>4/28/2026</a:t>
             </a:fld>
             <a:endParaRPr lang="en-US"/>
           </a:p>
@@ -3653,7 +3658,7 @@
           <a:p>
             <a:fld id="{79806886-C3E2-4AA6-AE5C-EC60C7639E42}" type="datetimeFigureOut">
               <a:rPr lang="en-US" smtClean="0"/>
-              <a:t>4/20/2026</a:t>
+              <a:t>4/28/2026</a:t>
             </a:fld>
             <a:endParaRPr lang="en-US"/>
           </a:p>
@@ -3889,7 +3894,7 @@
           <a:p>
             <a:fld id="{79806886-C3E2-4AA6-AE5C-EC60C7639E42}" type="datetimeFigureOut">
               <a:rPr lang="en-US" smtClean="0"/>
-              <a:t>4/20/2026</a:t>
+              <a:t>4/28/2026</a:t>
             </a:fld>
             <a:endParaRPr lang="en-US"/>
           </a:p>
@@ -4355,7 +4360,7 @@
           <a:p>
             <a:fld id="{79806886-C3E2-4AA6-AE5C-EC60C7639E42}" type="datetimeFigureOut">
               <a:rPr lang="en-US" smtClean="0"/>
-              <a:t>4/20/2026</a:t>
+              <a:t>4/28/2026</a:t>
             </a:fld>
             <a:endParaRPr lang="en-US"/>
           </a:p>
@@ -4473,7 +4478,7 @@
           <a:p>
             <a:fld id="{79806886-C3E2-4AA6-AE5C-EC60C7639E42}" type="datetimeFigureOut">
               <a:rPr lang="en-US" smtClean="0"/>
-              <a:t>4/20/2026</a:t>
+              <a:t>4/28/2026</a:t>
             </a:fld>
             <a:endParaRPr lang="en-US"/>
           </a:p>
@@ -4568,7 +4573,7 @@
           <a:p>
             <a:fld id="{79806886-C3E2-4AA6-AE5C-EC60C7639E42}" type="datetimeFigureOut">
               <a:rPr lang="en-US" smtClean="0"/>
-              <a:t>4/20/2026</a:t>
+              <a:t>4/28/2026</a:t>
             </a:fld>
             <a:endParaRPr lang="en-US"/>
           </a:p>
@@ -4823,7 +4828,7 @@
           <a:p>
             <a:fld id="{79806886-C3E2-4AA6-AE5C-EC60C7639E42}" type="datetimeFigureOut">
               <a:rPr lang="en-US" smtClean="0"/>
-              <a:t>4/20/2026</a:t>
+              <a:t>4/28/2026</a:t>
             </a:fld>
             <a:endParaRPr lang="en-US"/>
           </a:p>
@@ -5123,7 +5128,7 @@
           <a:p>
             <a:fld id="{79806886-C3E2-4AA6-AE5C-EC60C7639E42}" type="datetimeFigureOut">
               <a:rPr lang="en-US" smtClean="0"/>
-              <a:t>4/20/2026</a:t>
+              <a:t>4/28/2026</a:t>
             </a:fld>
             <a:endParaRPr lang="en-US"/>
           </a:p>
@@ -5357,7 +5362,7 @@
           <a:p>
             <a:fld id="{79806886-C3E2-4AA6-AE5C-EC60C7639E42}" type="datetimeFigureOut">
               <a:rPr lang="en-US" smtClean="0"/>
-              <a:t>4/20/2026</a:t>
+              <a:t>4/28/2026</a:t>
             </a:fld>
             <a:endParaRPr lang="en-US"/>
           </a:p>
@@ -6116,7 +6121,7 @@
           <p:cNvPr id="2" name="Title 1">
             <a:extLst>
               <a:ext uri="{FF2B5EF4-FFF2-40B4-BE49-F238E27FC236}">
-                <a16:creationId xmlns:a16="http://schemas.microsoft.com/office/drawing/2014/main" id="{264267C5-BAE5-0154-04C1-96AF1FC31AB4}"/>
+                <a16:creationId xmlns:a16="http://schemas.microsoft.com/office/drawing/2014/main" id="{204F4AEA-1971-E800-703E-69F376F262A9}"/>
               </a:ext>
             </a:extLst>
           </p:cNvPr>
@@ -6130,20 +6135,18 @@
         <p:spPr>
           <a:xfrm>
             <a:off x="913795" y="0"/>
-            <a:ext cx="10353762" cy="651933"/>
-          </a:xfrm>
-        </p:spPr>
-        <p:txBody>
-          <a:bodyPr>
-            <a:normAutofit fontScale="90000"/>
-          </a:bodyPr>
+            <a:ext cx="10353762" cy="753533"/>
+          </a:xfrm>
+        </p:spPr>
+        <p:txBody>
+          <a:bodyPr/>
           <a:lstStyle/>
           <a:p>
             <a:r>
               <a:rPr lang="en-US" b="1">
                 <a:effectLst/>
               </a:rPr>
-              <a:t>Aggregation </a:t>
+              <a:t>Association </a:t>
             </a:r>
             <a:endParaRPr lang="en-US"/>
           </a:p>
@@ -6154,7 +6157,7 @@
           <p:cNvPr id="3" name="Content Placeholder 2">
             <a:extLst>
               <a:ext uri="{FF2B5EF4-FFF2-40B4-BE49-F238E27FC236}">
-                <a16:creationId xmlns:a16="http://schemas.microsoft.com/office/drawing/2014/main" id="{D665FE83-4CE4-A8FB-78C3-FC7CC7279430}"/>
+                <a16:creationId xmlns:a16="http://schemas.microsoft.com/office/drawing/2014/main" id="{2F56D789-EEAB-71E6-ECF8-CFF49F4FD004}"/>
               </a:ext>
             </a:extLst>
           </p:cNvPr>
@@ -6167,8 +6170,8 @@
         </p:nvSpPr>
         <p:spPr>
           <a:xfrm>
-            <a:off x="93133" y="651933"/>
-            <a:ext cx="11980334" cy="6070600"/>
+            <a:off x="177800" y="897467"/>
+            <a:ext cx="11844867" cy="5698066"/>
           </a:xfrm>
         </p:spPr>
         <p:txBody>
@@ -6176,78 +6179,66 @@
           <a:lstStyle/>
           <a:p>
             <a:r>
-              <a:rPr lang="en-US" sz="1800" b="1">
+              <a:rPr lang="en-US" b="1">
                 <a:effectLst/>
               </a:rPr>
-              <a:t>The "Has-A" Relationship</a:t>
-            </a:r>
-          </a:p>
-          <a:p>
-            <a:r>
-              <a:rPr lang="en-US" sz="1800" b="1">
-                <a:effectLst/>
-              </a:rPr>
-              <a:t>C# Implementation:</a:t>
-            </a:r>
-            <a:r>
-              <a:rPr lang="en-US" sz="1800">
-                <a:effectLst/>
-              </a:rPr>
-              <a:t> </a:t>
-            </a:r>
-            <a:r>
-              <a:rPr lang="en-US" sz="1800" b="1">
-                <a:effectLst/>
-              </a:rPr>
-              <a:t>Usually implemented by passing the child object into the parent’s constructor or property (</a:t>
-            </a:r>
-            <a:r>
-              <a:rPr lang="en-US" sz="1800" b="1">
+              <a:t>Uses-A"</a:t>
+            </a:r>
+            <a:r>
+              <a:rPr lang="en-US" b="1">
                 <a:solidFill>
                   <a:srgbClr val="FFFF00"/>
                 </a:solidFill>
                 <a:effectLst/>
               </a:rPr>
-              <a:t>Dependency Injection</a:t>
-            </a:r>
-            <a:r>
-              <a:rPr lang="en-US" sz="1800" b="1">
-                <a:effectLst/>
-              </a:rPr>
-              <a:t>)</a:t>
-            </a:r>
-          </a:p>
-          <a:p>
+              <a:t>Relationship</a:t>
+            </a:r>
             <a:r>
               <a:rPr lang="en-US" b="1">
                 <a:effectLst/>
               </a:rPr>
-              <a:t>Here </a:t>
-            </a:r>
-            <a:r>
-              <a:rPr lang="en-US"/>
-              <a:t>children (teachers) can live without parent [ department ]</a:t>
-            </a:r>
-            <a:endParaRPr lang="en-US" b="1">
+              <a:t>"</a:t>
+            </a:r>
+            <a:endParaRPr lang="en-US">
               <a:effectLst/>
             </a:endParaRPr>
           </a:p>
           <a:p>
-            <a:endParaRPr lang="en-US" b="1">
-              <a:effectLst/>
-            </a:endParaRPr>
-          </a:p>
-          <a:p>
-            <a:endParaRPr lang="en-US" b="1">
-              <a:effectLst/>
-            </a:endParaRPr>
-          </a:p>
-          <a:p>
-            <a:endParaRPr lang="en-US" b="1">
-              <a:effectLst/>
-            </a:endParaRPr>
-          </a:p>
-          <a:p>
+            <a:r>
+              <a:rPr lang="en-US">
+                <a:effectLst/>
+              </a:rPr>
+              <a:t>It defines a link between two </a:t>
+            </a:r>
+            <a:r>
+              <a:rPr lang="en-US" b="1">
+                <a:solidFill>
+                  <a:srgbClr val="FFFF00"/>
+                </a:solidFill>
+                <a:effectLst/>
+              </a:rPr>
+              <a:t>independent</a:t>
+            </a:r>
+            <a:r>
+              <a:rPr lang="en-US">
+                <a:effectLst/>
+              </a:rPr>
+              <a:t> objects where they use each other to perform actions, but neither "owns" the other.</a:t>
+            </a:r>
+          </a:p>
+          <a:p>
+            <a:r>
+              <a:rPr lang="en-US" b="1">
+                <a:effectLst/>
+              </a:rPr>
+              <a:t>Implementation: </a:t>
+            </a:r>
+            <a:r>
+              <a:rPr lang="en-US">
+                <a:effectLst/>
+              </a:rPr>
+              <a:t>by passing an object as a parameter to a method.</a:t>
+            </a:r>
             <a:endParaRPr lang="en-US"/>
           </a:p>
         </p:txBody>
@@ -6257,7 +6248,7 @@
           <p:cNvPr id="5" name="Picture 4">
             <a:extLst>
               <a:ext uri="{FF2B5EF4-FFF2-40B4-BE49-F238E27FC236}">
-                <a16:creationId xmlns:a16="http://schemas.microsoft.com/office/drawing/2014/main" id="{89992E4A-01A8-4933-2AB5-554C036CF0B2}"/>
+                <a16:creationId xmlns:a16="http://schemas.microsoft.com/office/drawing/2014/main" id="{0134ABA0-88FD-1776-477D-E864080379AA}"/>
               </a:ext>
             </a:extLst>
           </p:cNvPr>
@@ -6274,8 +6265,8 @@
         </p:blipFill>
         <p:spPr>
           <a:xfrm>
-            <a:off x="118533" y="2684926"/>
-            <a:ext cx="4885267" cy="3147614"/>
+            <a:off x="311776" y="2788392"/>
+            <a:ext cx="6063623" cy="2881812"/>
           </a:xfrm>
           <a:prstGeom prst="rect">
             <a:avLst/>
@@ -6285,7 +6276,7 @@
     </p:spTree>
     <p:extLst>
       <p:ext uri="{BB962C8B-B14F-4D97-AF65-F5344CB8AC3E}">
-        <p14:creationId xmlns:p14="http://schemas.microsoft.com/office/powerpoint/2010/main" val="3768059492"/>
+        <p14:creationId xmlns:p14="http://schemas.microsoft.com/office/powerpoint/2010/main" val="2546003169"/>
       </p:ext>
     </p:extLst>
   </p:cSld>
@@ -6317,7 +6308,7 @@
           <p:cNvPr id="2" name="Title 1">
             <a:extLst>
               <a:ext uri="{FF2B5EF4-FFF2-40B4-BE49-F238E27FC236}">
-                <a16:creationId xmlns:a16="http://schemas.microsoft.com/office/drawing/2014/main" id="{E52B5755-B757-6CAE-6FCA-355EA02E6B56}"/>
+                <a16:creationId xmlns:a16="http://schemas.microsoft.com/office/drawing/2014/main" id="{264267C5-BAE5-0154-04C1-96AF1FC31AB4}"/>
               </a:ext>
             </a:extLst>
           </p:cNvPr>
@@ -6331,7 +6322,7 @@
         <p:spPr>
           <a:xfrm>
             <a:off x="913795" y="0"/>
-            <a:ext cx="10353762" cy="609600"/>
+            <a:ext cx="10353762" cy="651933"/>
           </a:xfrm>
         </p:spPr>
         <p:txBody>
@@ -6344,7 +6335,7 @@
               <a:rPr lang="en-US" b="1">
                 <a:effectLst/>
               </a:rPr>
-              <a:t>Composition </a:t>
+              <a:t>Aggregation </a:t>
             </a:r>
             <a:endParaRPr lang="en-US"/>
           </a:p>
@@ -6355,7 +6346,7 @@
           <p:cNvPr id="3" name="Content Placeholder 2">
             <a:extLst>
               <a:ext uri="{FF2B5EF4-FFF2-40B4-BE49-F238E27FC236}">
-                <a16:creationId xmlns:a16="http://schemas.microsoft.com/office/drawing/2014/main" id="{43BDCBF4-E275-B0F1-7606-6B1E25C882FD}"/>
+                <a16:creationId xmlns:a16="http://schemas.microsoft.com/office/drawing/2014/main" id="{D665FE83-4CE4-A8FB-78C3-FC7CC7279430}"/>
               </a:ext>
             </a:extLst>
           </p:cNvPr>
@@ -6368,30 +6359,77 @@
         </p:nvSpPr>
         <p:spPr>
           <a:xfrm>
-            <a:off x="101600" y="609601"/>
-            <a:ext cx="12022667" cy="6155266"/>
+            <a:off x="93133" y="651933"/>
+            <a:ext cx="11980334" cy="6070600"/>
           </a:xfrm>
         </p:spPr>
         <p:txBody>
           <a:bodyPr/>
           <a:lstStyle/>
+          <a:p>
+            <a:r>
+              <a:rPr lang="en-US" sz="1800" b="1">
+                <a:effectLst/>
+              </a:rPr>
+              <a:t>The "Has-A" Relationship</a:t>
+            </a:r>
+          </a:p>
+          <a:p>
+            <a:r>
+              <a:rPr lang="en-US" sz="1800" b="1">
+                <a:effectLst/>
+              </a:rPr>
+              <a:t>C# Implementation:</a:t>
+            </a:r>
+            <a:r>
+              <a:rPr lang="en-US" sz="1800">
+                <a:effectLst/>
+              </a:rPr>
+              <a:t> </a:t>
+            </a:r>
+            <a:r>
+              <a:rPr lang="en-US" sz="1800" b="1">
+                <a:effectLst/>
+              </a:rPr>
+              <a:t>Usually implemented by passing the child object into the parent’s constructor or property (</a:t>
+            </a:r>
+            <a:r>
+              <a:rPr lang="en-US" sz="1800" b="1">
+                <a:solidFill>
+                  <a:srgbClr val="FFFF00"/>
+                </a:solidFill>
+                <a:effectLst/>
+              </a:rPr>
+              <a:t>Dependency Injection</a:t>
+            </a:r>
+            <a:r>
+              <a:rPr lang="en-US" sz="1800" b="1">
+                <a:effectLst/>
+              </a:rPr>
+              <a:t>)</a:t>
+            </a:r>
+          </a:p>
           <a:p>
             <a:r>
               <a:rPr lang="en-US" b="1">
                 <a:effectLst/>
               </a:rPr>
-              <a:t>The "Part-Of" Relationship</a:t>
-            </a:r>
-          </a:p>
-          <a:p>
-            <a:r>
-              <a:rPr lang="en-US" b="1"/>
-              <a:t>child cannot exist without parent</a:t>
-            </a:r>
-            <a:r>
-              <a:rPr lang="en-US"/>
-              <a:t>.</a:t>
-            </a:r>
+              <a:t>Here </a:t>
+            </a:r>
+            <a:r>
+              <a:rPr lang="en-US"/>
+              <a:t>children (teachers) can live without parent [ department ]</a:t>
+            </a:r>
+            <a:endParaRPr lang="en-US" b="1">
+              <a:effectLst/>
+            </a:endParaRPr>
+          </a:p>
+          <a:p>
+            <a:endParaRPr lang="en-US" b="1">
+              <a:effectLst/>
+            </a:endParaRPr>
+          </a:p>
+          <a:p>
             <a:endParaRPr lang="en-US" b="1">
               <a:effectLst/>
             </a:endParaRPr>
@@ -6411,7 +6449,7 @@
           <p:cNvPr id="5" name="Picture 4">
             <a:extLst>
               <a:ext uri="{FF2B5EF4-FFF2-40B4-BE49-F238E27FC236}">
-                <a16:creationId xmlns:a16="http://schemas.microsoft.com/office/drawing/2014/main" id="{0ABBE13F-38DC-0375-5425-89FF89DE68DB}"/>
+                <a16:creationId xmlns:a16="http://schemas.microsoft.com/office/drawing/2014/main" id="{89992E4A-01A8-4933-2AB5-554C036CF0B2}"/>
               </a:ext>
             </a:extLst>
           </p:cNvPr>
@@ -6428,8 +6466,8 @@
         </p:blipFill>
         <p:spPr>
           <a:xfrm>
-            <a:off x="101600" y="1727965"/>
-            <a:ext cx="4719468" cy="2526795"/>
+            <a:off x="118533" y="2684926"/>
+            <a:ext cx="4885267" cy="3147614"/>
           </a:xfrm>
           <a:prstGeom prst="rect">
             <a:avLst/>
@@ -6439,7 +6477,7 @@
     </p:spTree>
     <p:extLst>
       <p:ext uri="{BB962C8B-B14F-4D97-AF65-F5344CB8AC3E}">
-        <p14:creationId xmlns:p14="http://schemas.microsoft.com/office/powerpoint/2010/main" val="3138428670"/>
+        <p14:creationId xmlns:p14="http://schemas.microsoft.com/office/powerpoint/2010/main" val="3768059492"/>
       </p:ext>
     </p:extLst>
   </p:cSld>
@@ -6471,7 +6509,7 @@
           <p:cNvPr id="2" name="Title 1">
             <a:extLst>
               <a:ext uri="{FF2B5EF4-FFF2-40B4-BE49-F238E27FC236}">
-                <a16:creationId xmlns:a16="http://schemas.microsoft.com/office/drawing/2014/main" id="{18BD19B6-E7B4-D6B7-EA34-EAE44153C85E}"/>
+                <a16:creationId xmlns:a16="http://schemas.microsoft.com/office/drawing/2014/main" id="{E52B5755-B757-6CAE-6FCA-355EA02E6B56}"/>
               </a:ext>
             </a:extLst>
           </p:cNvPr>
@@ -6496,12 +6534,11 @@
           <a:p>
             <a:r>
               <a:rPr lang="en-US" b="1">
-                <a:solidFill>
-                  <a:srgbClr val="FF0000"/>
-                </a:solidFill>
+                <a:effectLst/>
               </a:rPr>
-              <a:t>CQRS</a:t>
-            </a:r>
+              <a:t>Composition </a:t>
+            </a:r>
+            <a:endParaRPr lang="en-US"/>
           </a:p>
         </p:txBody>
       </p:sp>
@@ -6510,7 +6547,7 @@
           <p:cNvPr id="3" name="Content Placeholder 2">
             <a:extLst>
               <a:ext uri="{FF2B5EF4-FFF2-40B4-BE49-F238E27FC236}">
-                <a16:creationId xmlns:a16="http://schemas.microsoft.com/office/drawing/2014/main" id="{09AB7379-F3B5-45C0-E910-A23E10E29503}"/>
+                <a16:creationId xmlns:a16="http://schemas.microsoft.com/office/drawing/2014/main" id="{43BDCBF4-E275-B0F1-7606-6B1E25C882FD}"/>
               </a:ext>
             </a:extLst>
           </p:cNvPr>
@@ -6523,154 +6560,41 @@
         </p:nvSpPr>
         <p:spPr>
           <a:xfrm>
-            <a:off x="135467" y="609601"/>
-            <a:ext cx="11997266" cy="6138332"/>
-          </a:xfrm>
-        </p:spPr>
-        <p:txBody>
-          <a:bodyPr>
-            <a:normAutofit/>
-          </a:bodyPr>
+            <a:off x="101600" y="609601"/>
+            <a:ext cx="12022667" cy="6155266"/>
+          </a:xfrm>
+        </p:spPr>
+        <p:txBody>
+          <a:bodyPr/>
           <a:lstStyle/>
           <a:p>
             <a:r>
+              <a:rPr lang="en-US" b="1">
+                <a:effectLst/>
+              </a:rPr>
+              <a:t>The "Part-Of" Relationship</a:t>
+            </a:r>
+          </a:p>
+          <a:p>
+            <a:r>
               <a:rPr lang="en-US" b="1"/>
-              <a:t>CQRS stands for Command and </a:t>
-            </a:r>
-            <a:r>
-              <a:rPr lang="en-US" b="1">
-                <a:solidFill>
-                  <a:srgbClr val="FF0000"/>
-                </a:solidFill>
-              </a:rPr>
-              <a:t>Query Responsibility Segregation</a:t>
-            </a:r>
-          </a:p>
-          <a:p>
-            <a:r>
-              <a:rPr lang="en-US"/>
-              <a:t>It is a design pattern that separates read operations (queries) from write operations (commands).</a:t>
-            </a:r>
-          </a:p>
-          <a:p>
-            <a:r>
-              <a:rPr lang="en-US"/>
-              <a:t>Instead of having one model/service doing everything, CQRS splits responsibilities into two sides:</a:t>
-            </a:r>
-          </a:p>
-          <a:p>
-            <a:r>
-              <a:rPr lang="en-US"/>
-              <a:t>- Core Idea</a:t>
-            </a:r>
-          </a:p>
-          <a:p>
-            <a:r>
-              <a:rPr lang="en-US"/>
-              <a:t>   - </a:t>
-            </a:r>
-            <a:r>
-              <a:rPr lang="en-US" b="1">
-                <a:solidFill>
-                  <a:srgbClr val="00B0F0"/>
-                </a:solidFill>
-              </a:rPr>
-              <a:t>Commands</a:t>
-            </a:r>
-            <a:r>
-              <a:rPr lang="en-US"/>
-              <a:t> → change state (Create, Update, Delete)</a:t>
-            </a:r>
-          </a:p>
-          <a:p>
-            <a:r>
-              <a:rPr lang="en-US"/>
-              <a:t>   - </a:t>
-            </a:r>
-            <a:r>
-              <a:rPr lang="en-US" b="1">
-                <a:solidFill>
-                  <a:srgbClr val="00B0F0"/>
-                </a:solidFill>
-              </a:rPr>
-              <a:t>Queries</a:t>
-            </a:r>
-            <a:r>
-              <a:rPr lang="en-US"/>
-              <a:t> → read data (Get, List, Search)</a:t>
-            </a:r>
-          </a:p>
-          <a:p>
-            <a:r>
-              <a:rPr lang="en-US"/>
-              <a:t>-- Application</a:t>
-            </a:r>
-          </a:p>
-          <a:p>
-            <a:pPr lvl="1"/>
-            <a:r>
-              <a:rPr lang="en-US"/>
-              <a:t> </a:t>
-            </a:r>
-            <a:r>
-              <a:rPr lang="en-US" sz="1600" b="1">
-                <a:solidFill>
-                  <a:srgbClr val="FFFF00"/>
-                </a:solidFill>
-              </a:rPr>
-              <a:t>Commands</a:t>
-            </a:r>
-          </a:p>
-          <a:p>
-            <a:pPr lvl="2"/>
-            <a:r>
-              <a:rPr lang="en-US" b="1"/>
-              <a:t>CreateOrderCommand.cs</a:t>
-            </a:r>
-          </a:p>
-          <a:p>
-            <a:pPr lvl="1"/>
-            <a:r>
-              <a:rPr lang="en-US" sz="1600" b="1">
-                <a:solidFill>
-                  <a:srgbClr val="FFFF00"/>
-                </a:solidFill>
-              </a:rPr>
-              <a:t>Queries</a:t>
-            </a:r>
-          </a:p>
-          <a:p>
-            <a:pPr lvl="2"/>
-            <a:r>
-              <a:rPr lang="en-US" b="1"/>
-              <a:t>GetOrderByIdQuery.cs</a:t>
-            </a:r>
-          </a:p>
-          <a:p>
-            <a:pPr lvl="1"/>
-            <a:r>
-              <a:rPr lang="en-US" sz="1600" b="1">
-                <a:solidFill>
-                  <a:srgbClr val="FFFF00"/>
-                </a:solidFill>
-              </a:rPr>
-              <a:t>Handlers</a:t>
-            </a:r>
-            <a:endParaRPr lang="en-US" sz="1600" b="1"/>
-          </a:p>
-          <a:p>
-            <a:pPr lvl="2"/>
-            <a:r>
-              <a:rPr lang="en-US" b="1"/>
-              <a:t>CreateOrderHandler.cs</a:t>
-            </a:r>
-          </a:p>
-          <a:p>
-            <a:pPr lvl="2"/>
-            <a:r>
-              <a:rPr lang="en-US" b="1"/>
-              <a:t>GetOrderByIdHandler.cs</a:t>
-            </a:r>
+              <a:t>child cannot exist without parent</a:t>
+            </a:r>
+            <a:r>
+              <a:rPr lang="en-US"/>
+              <a:t>.</a:t>
+            </a:r>
+            <a:endParaRPr lang="en-US" b="1">
+              <a:effectLst/>
+            </a:endParaRPr>
+          </a:p>
+          <a:p>
+            <a:endParaRPr lang="en-US" b="1">
+              <a:effectLst/>
+            </a:endParaRPr>
+          </a:p>
+          <a:p>
+            <a:endParaRPr lang="en-US"/>
           </a:p>
         </p:txBody>
       </p:sp>
@@ -6679,7 +6603,7 @@
           <p:cNvPr id="5" name="Picture 4">
             <a:extLst>
               <a:ext uri="{FF2B5EF4-FFF2-40B4-BE49-F238E27FC236}">
-                <a16:creationId xmlns:a16="http://schemas.microsoft.com/office/drawing/2014/main" id="{3DE7AA69-5920-72EC-6556-3CFCF420F3BA}"/>
+                <a16:creationId xmlns:a16="http://schemas.microsoft.com/office/drawing/2014/main" id="{0ABBE13F-38DC-0375-5425-89FF89DE68DB}"/>
               </a:ext>
             </a:extLst>
           </p:cNvPr>
@@ -6696,8 +6620,8 @@
         </p:blipFill>
         <p:spPr>
           <a:xfrm>
-            <a:off x="5046020" y="3601657"/>
-            <a:ext cx="3469826" cy="1918609"/>
+            <a:off x="101600" y="1727965"/>
+            <a:ext cx="4719468" cy="2526795"/>
           </a:xfrm>
           <a:prstGeom prst="rect">
             <a:avLst/>
@@ -6707,7 +6631,7 @@
     </p:spTree>
     <p:extLst>
       <p:ext uri="{BB962C8B-B14F-4D97-AF65-F5344CB8AC3E}">
-        <p14:creationId xmlns:p14="http://schemas.microsoft.com/office/powerpoint/2010/main" val="205078609"/>
+        <p14:creationId xmlns:p14="http://schemas.microsoft.com/office/powerpoint/2010/main" val="3138428670"/>
       </p:ext>
     </p:extLst>
   </p:cSld>
@@ -6739,6 +6663,274 @@
           <p:cNvPr id="2" name="Title 1">
             <a:extLst>
               <a:ext uri="{FF2B5EF4-FFF2-40B4-BE49-F238E27FC236}">
+                <a16:creationId xmlns:a16="http://schemas.microsoft.com/office/drawing/2014/main" id="{18BD19B6-E7B4-D6B7-EA34-EAE44153C85E}"/>
+              </a:ext>
+            </a:extLst>
+          </p:cNvPr>
+          <p:cNvSpPr>
+            <a:spLocks noGrp="1"/>
+          </p:cNvSpPr>
+          <p:nvPr>
+            <p:ph type="title"/>
+          </p:nvPr>
+        </p:nvSpPr>
+        <p:spPr>
+          <a:xfrm>
+            <a:off x="913795" y="0"/>
+            <a:ext cx="10353762" cy="609600"/>
+          </a:xfrm>
+        </p:spPr>
+        <p:txBody>
+          <a:bodyPr>
+            <a:normAutofit fontScale="90000"/>
+          </a:bodyPr>
+          <a:lstStyle/>
+          <a:p>
+            <a:r>
+              <a:rPr lang="en-US" b="1">
+                <a:solidFill>
+                  <a:srgbClr val="FF0000"/>
+                </a:solidFill>
+              </a:rPr>
+              <a:t>CQRS</a:t>
+            </a:r>
+          </a:p>
+        </p:txBody>
+      </p:sp>
+      <p:sp>
+        <p:nvSpPr>
+          <p:cNvPr id="3" name="Content Placeholder 2">
+            <a:extLst>
+              <a:ext uri="{FF2B5EF4-FFF2-40B4-BE49-F238E27FC236}">
+                <a16:creationId xmlns:a16="http://schemas.microsoft.com/office/drawing/2014/main" id="{09AB7379-F3B5-45C0-E910-A23E10E29503}"/>
+              </a:ext>
+            </a:extLst>
+          </p:cNvPr>
+          <p:cNvSpPr>
+            <a:spLocks noGrp="1"/>
+          </p:cNvSpPr>
+          <p:nvPr>
+            <p:ph idx="1"/>
+          </p:nvPr>
+        </p:nvSpPr>
+        <p:spPr>
+          <a:xfrm>
+            <a:off x="135467" y="609601"/>
+            <a:ext cx="11997266" cy="6138332"/>
+          </a:xfrm>
+        </p:spPr>
+        <p:txBody>
+          <a:bodyPr>
+            <a:normAutofit/>
+          </a:bodyPr>
+          <a:lstStyle/>
+          <a:p>
+            <a:r>
+              <a:rPr lang="en-US" b="1"/>
+              <a:t>CQRS stands for Command and </a:t>
+            </a:r>
+            <a:r>
+              <a:rPr lang="en-US" b="1">
+                <a:solidFill>
+                  <a:srgbClr val="FF0000"/>
+                </a:solidFill>
+              </a:rPr>
+              <a:t>Query Responsibility Segregation</a:t>
+            </a:r>
+          </a:p>
+          <a:p>
+            <a:r>
+              <a:rPr lang="en-US"/>
+              <a:t>It is a design pattern that separates read operations (queries) from write operations (commands).</a:t>
+            </a:r>
+          </a:p>
+          <a:p>
+            <a:r>
+              <a:rPr lang="en-US"/>
+              <a:t>Instead of having one model/service doing everything, CQRS splits responsibilities into two sides:</a:t>
+            </a:r>
+          </a:p>
+          <a:p>
+            <a:r>
+              <a:rPr lang="en-US"/>
+              <a:t>- Core Idea</a:t>
+            </a:r>
+          </a:p>
+          <a:p>
+            <a:r>
+              <a:rPr lang="en-US"/>
+              <a:t>   - </a:t>
+            </a:r>
+            <a:r>
+              <a:rPr lang="en-US" b="1">
+                <a:solidFill>
+                  <a:srgbClr val="00B0F0"/>
+                </a:solidFill>
+              </a:rPr>
+              <a:t>Commands</a:t>
+            </a:r>
+            <a:r>
+              <a:rPr lang="en-US"/>
+              <a:t> → change state (Create, Update, Delete)</a:t>
+            </a:r>
+          </a:p>
+          <a:p>
+            <a:r>
+              <a:rPr lang="en-US"/>
+              <a:t>   - </a:t>
+            </a:r>
+            <a:r>
+              <a:rPr lang="en-US" b="1">
+                <a:solidFill>
+                  <a:srgbClr val="00B0F0"/>
+                </a:solidFill>
+              </a:rPr>
+              <a:t>Queries</a:t>
+            </a:r>
+            <a:r>
+              <a:rPr lang="en-US"/>
+              <a:t> → read data (Get, List, Search)</a:t>
+            </a:r>
+          </a:p>
+          <a:p>
+            <a:r>
+              <a:rPr lang="en-US"/>
+              <a:t>-- Application</a:t>
+            </a:r>
+          </a:p>
+          <a:p>
+            <a:pPr lvl="1"/>
+            <a:r>
+              <a:rPr lang="en-US"/>
+              <a:t> </a:t>
+            </a:r>
+            <a:r>
+              <a:rPr lang="en-US" sz="1600" b="1">
+                <a:solidFill>
+                  <a:srgbClr val="FFFF00"/>
+                </a:solidFill>
+              </a:rPr>
+              <a:t>Commands</a:t>
+            </a:r>
+          </a:p>
+          <a:p>
+            <a:pPr lvl="2"/>
+            <a:r>
+              <a:rPr lang="en-US" b="1"/>
+              <a:t>CreateOrderCommand.cs</a:t>
+            </a:r>
+          </a:p>
+          <a:p>
+            <a:pPr lvl="1"/>
+            <a:r>
+              <a:rPr lang="en-US" sz="1600" b="1">
+                <a:solidFill>
+                  <a:srgbClr val="FFFF00"/>
+                </a:solidFill>
+              </a:rPr>
+              <a:t>Queries</a:t>
+            </a:r>
+          </a:p>
+          <a:p>
+            <a:pPr lvl="2"/>
+            <a:r>
+              <a:rPr lang="en-US" b="1"/>
+              <a:t>GetOrderByIdQuery.cs</a:t>
+            </a:r>
+          </a:p>
+          <a:p>
+            <a:pPr lvl="1"/>
+            <a:r>
+              <a:rPr lang="en-US" sz="1600" b="1">
+                <a:solidFill>
+                  <a:srgbClr val="FFFF00"/>
+                </a:solidFill>
+              </a:rPr>
+              <a:t>Handlers</a:t>
+            </a:r>
+            <a:endParaRPr lang="en-US" sz="1600" b="1"/>
+          </a:p>
+          <a:p>
+            <a:pPr lvl="2"/>
+            <a:r>
+              <a:rPr lang="en-US" b="1"/>
+              <a:t>CreateOrderHandler.cs</a:t>
+            </a:r>
+          </a:p>
+          <a:p>
+            <a:pPr lvl="2"/>
+            <a:r>
+              <a:rPr lang="en-US" b="1"/>
+              <a:t>GetOrderByIdHandler.cs</a:t>
+            </a:r>
+          </a:p>
+        </p:txBody>
+      </p:sp>
+      <p:pic>
+        <p:nvPicPr>
+          <p:cNvPr id="5" name="Picture 4">
+            <a:extLst>
+              <a:ext uri="{FF2B5EF4-FFF2-40B4-BE49-F238E27FC236}">
+                <a16:creationId xmlns:a16="http://schemas.microsoft.com/office/drawing/2014/main" id="{3DE7AA69-5920-72EC-6556-3CFCF420F3BA}"/>
+              </a:ext>
+            </a:extLst>
+          </p:cNvPr>
+          <p:cNvPicPr>
+            <a:picLocks noChangeAspect="1"/>
+          </p:cNvPicPr>
+          <p:nvPr/>
+        </p:nvPicPr>
+        <p:blipFill>
+          <a:blip r:embed="rId2"/>
+          <a:stretch>
+            <a:fillRect/>
+          </a:stretch>
+        </p:blipFill>
+        <p:spPr>
+          <a:xfrm>
+            <a:off x="5046020" y="3601657"/>
+            <a:ext cx="3469826" cy="1918609"/>
+          </a:xfrm>
+          <a:prstGeom prst="rect">
+            <a:avLst/>
+          </a:prstGeom>
+        </p:spPr>
+      </p:pic>
+    </p:spTree>
+    <p:extLst>
+      <p:ext uri="{BB962C8B-B14F-4D97-AF65-F5344CB8AC3E}">
+        <p14:creationId xmlns:p14="http://schemas.microsoft.com/office/powerpoint/2010/main" val="205078609"/>
+      </p:ext>
+    </p:extLst>
+  </p:cSld>
+  <p:clrMapOvr>
+    <a:masterClrMapping/>
+  </p:clrMapOvr>
+</p:sld>
+</file>
+
+<file path=ppt/slides/slide14.xml><?xml version="1.0" encoding="utf-8"?>
+<p:sld xmlns:a="http://schemas.openxmlformats.org/drawingml/2006/main" xmlns:r="http://schemas.openxmlformats.org/officeDocument/2006/relationships" xmlns:p="http://schemas.openxmlformats.org/presentationml/2006/main">
+  <p:cSld>
+    <p:spTree>
+      <p:nvGrpSpPr>
+        <p:cNvPr id="1" name=""/>
+        <p:cNvGrpSpPr/>
+        <p:nvPr/>
+      </p:nvGrpSpPr>
+      <p:grpSpPr>
+        <a:xfrm>
+          <a:off x="0" y="0"/>
+          <a:ext cx="0" cy="0"/>
+          <a:chOff x="0" y="0"/>
+          <a:chExt cx="0" cy="0"/>
+        </a:xfrm>
+      </p:grpSpPr>
+      <p:sp>
+        <p:nvSpPr>
+          <p:cNvPr id="2" name="Title 1">
+            <a:extLst>
+              <a:ext uri="{FF2B5EF4-FFF2-40B4-BE49-F238E27FC236}">
                 <a16:creationId xmlns:a16="http://schemas.microsoft.com/office/drawing/2014/main" id="{93FD8936-648D-D9BA-8BA1-324899E5489B}"/>
               </a:ext>
             </a:extLst>
@@ -6868,6 +7060,354 @@
     <p:extLst>
       <p:ext uri="{BB962C8B-B14F-4D97-AF65-F5344CB8AC3E}">
         <p14:creationId xmlns:p14="http://schemas.microsoft.com/office/powerpoint/2010/main" val="2017616460"/>
+      </p:ext>
+    </p:extLst>
+  </p:cSld>
+  <p:clrMapOvr>
+    <a:masterClrMapping/>
+  </p:clrMapOvr>
+</p:sld>
+</file>
+
+<file path=ppt/slides/slide15.xml><?xml version="1.0" encoding="utf-8"?>
+<p:sld xmlns:a="http://schemas.openxmlformats.org/drawingml/2006/main" xmlns:r="http://schemas.openxmlformats.org/officeDocument/2006/relationships" xmlns:p="http://schemas.openxmlformats.org/presentationml/2006/main">
+  <p:cSld>
+    <p:spTree>
+      <p:nvGrpSpPr>
+        <p:cNvPr id="1" name=""/>
+        <p:cNvGrpSpPr/>
+        <p:nvPr/>
+      </p:nvGrpSpPr>
+      <p:grpSpPr>
+        <a:xfrm>
+          <a:off x="0" y="0"/>
+          <a:ext cx="0" cy="0"/>
+          <a:chOff x="0" y="0"/>
+          <a:chExt cx="0" cy="0"/>
+        </a:xfrm>
+      </p:grpSpPr>
+      <p:sp>
+        <p:nvSpPr>
+          <p:cNvPr id="2" name="Title 1">
+            <a:extLst>
+              <a:ext uri="{FF2B5EF4-FFF2-40B4-BE49-F238E27FC236}">
+                <a16:creationId xmlns:a16="http://schemas.microsoft.com/office/drawing/2014/main" id="{E1A8B0CF-9FBD-570C-8889-185A96C90ED4}"/>
+              </a:ext>
+            </a:extLst>
+          </p:cNvPr>
+          <p:cNvSpPr>
+            <a:spLocks noGrp="1"/>
+          </p:cNvSpPr>
+          <p:nvPr>
+            <p:ph type="title"/>
+          </p:nvPr>
+        </p:nvSpPr>
+        <p:spPr/>
+        <p:txBody>
+          <a:bodyPr/>
+          <a:lstStyle/>
+          <a:p>
+            <a:endParaRPr lang="en-US"/>
+          </a:p>
+        </p:txBody>
+      </p:sp>
+      <p:sp>
+        <p:nvSpPr>
+          <p:cNvPr id="3" name="Content Placeholder 2">
+            <a:extLst>
+              <a:ext uri="{FF2B5EF4-FFF2-40B4-BE49-F238E27FC236}">
+                <a16:creationId xmlns:a16="http://schemas.microsoft.com/office/drawing/2014/main" id="{2DA12D25-9BC0-E54F-F8F5-E9C371D629F5}"/>
+              </a:ext>
+            </a:extLst>
+          </p:cNvPr>
+          <p:cNvSpPr>
+            <a:spLocks noGrp="1"/>
+          </p:cNvSpPr>
+          <p:nvPr>
+            <p:ph idx="1"/>
+          </p:nvPr>
+        </p:nvSpPr>
+        <p:spPr/>
+        <p:txBody>
+          <a:bodyPr/>
+          <a:lstStyle/>
+          <a:p>
+            <a:endParaRPr lang="en-US"/>
+          </a:p>
+        </p:txBody>
+      </p:sp>
+    </p:spTree>
+    <p:extLst>
+      <p:ext uri="{BB962C8B-B14F-4D97-AF65-F5344CB8AC3E}">
+        <p14:creationId xmlns:p14="http://schemas.microsoft.com/office/powerpoint/2010/main" val="2952004057"/>
+      </p:ext>
+    </p:extLst>
+  </p:cSld>
+  <p:clrMapOvr>
+    <a:masterClrMapping/>
+  </p:clrMapOvr>
+</p:sld>
+</file>
+
+<file path=ppt/slides/slide16.xml><?xml version="1.0" encoding="utf-8"?>
+<p:sld xmlns:a="http://schemas.openxmlformats.org/drawingml/2006/main" xmlns:r="http://schemas.openxmlformats.org/officeDocument/2006/relationships" xmlns:p="http://schemas.openxmlformats.org/presentationml/2006/main">
+  <p:cSld>
+    <p:spTree>
+      <p:nvGrpSpPr>
+        <p:cNvPr id="1" name=""/>
+        <p:cNvGrpSpPr/>
+        <p:nvPr/>
+      </p:nvGrpSpPr>
+      <p:grpSpPr>
+        <a:xfrm>
+          <a:off x="0" y="0"/>
+          <a:ext cx="0" cy="0"/>
+          <a:chOff x="0" y="0"/>
+          <a:chExt cx="0" cy="0"/>
+        </a:xfrm>
+      </p:grpSpPr>
+      <p:sp>
+        <p:nvSpPr>
+          <p:cNvPr id="3" name="Content Placeholder 2">
+            <a:extLst>
+              <a:ext uri="{FF2B5EF4-FFF2-40B4-BE49-F238E27FC236}">
+                <a16:creationId xmlns:a16="http://schemas.microsoft.com/office/drawing/2014/main" id="{8812E581-CD83-A0AD-774B-49DF71333757}"/>
+              </a:ext>
+            </a:extLst>
+          </p:cNvPr>
+          <p:cNvSpPr>
+            <a:spLocks noGrp="1"/>
+          </p:cNvSpPr>
+          <p:nvPr>
+            <p:ph idx="1"/>
+          </p:nvPr>
+        </p:nvSpPr>
+        <p:spPr>
+          <a:xfrm>
+            <a:off x="1023862" y="2159000"/>
+            <a:ext cx="10353762" cy="1430867"/>
+          </a:xfrm>
+        </p:spPr>
+        <p:txBody>
+          <a:bodyPr>
+            <a:normAutofit/>
+          </a:bodyPr>
+          <a:lstStyle/>
+          <a:p>
+            <a:pPr marL="36900" indent="0" algn="ctr">
+              <a:buNone/>
+            </a:pPr>
+            <a:r>
+              <a:rPr lang="en-US" sz="7200" b="1">
+                <a:solidFill>
+                  <a:srgbClr val="FF0000"/>
+                </a:solidFill>
+              </a:rPr>
+              <a:t>Start GIT</a:t>
+            </a:r>
+          </a:p>
+        </p:txBody>
+      </p:sp>
+    </p:spTree>
+    <p:extLst>
+      <p:ext uri="{BB962C8B-B14F-4D97-AF65-F5344CB8AC3E}">
+        <p14:creationId xmlns:p14="http://schemas.microsoft.com/office/powerpoint/2010/main" val="1394362454"/>
+      </p:ext>
+    </p:extLst>
+  </p:cSld>
+  <p:clrMapOvr>
+    <a:masterClrMapping/>
+  </p:clrMapOvr>
+</p:sld>
+</file>
+
+<file path=ppt/slides/slide17.xml><?xml version="1.0" encoding="utf-8"?>
+<p:sld xmlns:a="http://schemas.openxmlformats.org/drawingml/2006/main" xmlns:r="http://schemas.openxmlformats.org/officeDocument/2006/relationships" xmlns:p="http://schemas.openxmlformats.org/presentationml/2006/main">
+  <p:cSld>
+    <p:spTree>
+      <p:nvGrpSpPr>
+        <p:cNvPr id="1" name=""/>
+        <p:cNvGrpSpPr/>
+        <p:nvPr/>
+      </p:nvGrpSpPr>
+      <p:grpSpPr>
+        <a:xfrm>
+          <a:off x="0" y="0"/>
+          <a:ext cx="0" cy="0"/>
+          <a:chOff x="0" y="0"/>
+          <a:chExt cx="0" cy="0"/>
+        </a:xfrm>
+      </p:grpSpPr>
+      <p:sp>
+        <p:nvSpPr>
+          <p:cNvPr id="2" name="Title 1">
+            <a:extLst>
+              <a:ext uri="{FF2B5EF4-FFF2-40B4-BE49-F238E27FC236}">
+                <a16:creationId xmlns:a16="http://schemas.microsoft.com/office/drawing/2014/main" id="{1F25334C-1B96-D150-CC11-B6DD59DF4BEA}"/>
+              </a:ext>
+            </a:extLst>
+          </p:cNvPr>
+          <p:cNvSpPr>
+            <a:spLocks noGrp="1"/>
+          </p:cNvSpPr>
+          <p:nvPr>
+            <p:ph type="title"/>
+          </p:nvPr>
+        </p:nvSpPr>
+        <p:spPr/>
+        <p:txBody>
+          <a:bodyPr/>
+          <a:lstStyle/>
+          <a:p>
+            <a:endParaRPr lang="en-US"/>
+          </a:p>
+        </p:txBody>
+      </p:sp>
+      <p:sp>
+        <p:nvSpPr>
+          <p:cNvPr id="3" name="Content Placeholder 2">
+            <a:extLst>
+              <a:ext uri="{FF2B5EF4-FFF2-40B4-BE49-F238E27FC236}">
+                <a16:creationId xmlns:a16="http://schemas.microsoft.com/office/drawing/2014/main" id="{ECC9883E-73B2-9EDC-CD3F-5CEAD2883E9C}"/>
+              </a:ext>
+            </a:extLst>
+          </p:cNvPr>
+          <p:cNvSpPr>
+            <a:spLocks noGrp="1"/>
+          </p:cNvSpPr>
+          <p:nvPr>
+            <p:ph idx="1"/>
+          </p:nvPr>
+        </p:nvSpPr>
+        <p:spPr/>
+        <p:txBody>
+          <a:bodyPr/>
+          <a:lstStyle/>
+          <a:p>
+            <a:r>
+              <a:rPr lang="en-US"/>
+              <a:t>During merge conflict</a:t>
+            </a:r>
+          </a:p>
+          <a:p>
+            <a:pPr lvl="1"/>
+            <a:r>
+              <a:rPr lang="en-US"/>
+              <a:t>If you want to keep the current version and ignore the incoming changes</a:t>
+            </a:r>
+          </a:p>
+          <a:p>
+            <a:pPr lvl="2"/>
+            <a:r>
+              <a:rPr lang="en-US"/>
+              <a:t>git checkout --ours "Dot Net/Business.pptx“</a:t>
+            </a:r>
+          </a:p>
+          <a:p>
+            <a:pPr lvl="1"/>
+            <a:r>
+              <a:rPr lang="en-US"/>
+              <a:t>If you want to keep the incoming version and ignore ( discard ) the local changes</a:t>
+            </a:r>
+          </a:p>
+          <a:p>
+            <a:pPr lvl="2"/>
+            <a:r>
+              <a:rPr lang="en-US"/>
+              <a:t>git checkout --theirs "Dot Net/Business.pptx“</a:t>
+            </a:r>
+          </a:p>
+          <a:p>
+            <a:pPr lvl="2"/>
+            <a:endParaRPr lang="en-US"/>
+          </a:p>
+          <a:p>
+            <a:endParaRPr lang="en-US"/>
+          </a:p>
+        </p:txBody>
+      </p:sp>
+    </p:spTree>
+    <p:extLst>
+      <p:ext uri="{BB962C8B-B14F-4D97-AF65-F5344CB8AC3E}">
+        <p14:creationId xmlns:p14="http://schemas.microsoft.com/office/powerpoint/2010/main" val="1480913698"/>
+      </p:ext>
+    </p:extLst>
+  </p:cSld>
+  <p:clrMapOvr>
+    <a:masterClrMapping/>
+  </p:clrMapOvr>
+</p:sld>
+</file>
+
+<file path=ppt/slides/slide18.xml><?xml version="1.0" encoding="utf-8"?>
+<p:sld xmlns:a="http://schemas.openxmlformats.org/drawingml/2006/main" xmlns:r="http://schemas.openxmlformats.org/officeDocument/2006/relationships" xmlns:p="http://schemas.openxmlformats.org/presentationml/2006/main">
+  <p:cSld>
+    <p:spTree>
+      <p:nvGrpSpPr>
+        <p:cNvPr id="1" name="">
+          <a:extLst>
+            <a:ext uri="{FF2B5EF4-FFF2-40B4-BE49-F238E27FC236}">
+              <a16:creationId xmlns:a16="http://schemas.microsoft.com/office/drawing/2014/main" id="{2633D092-8CF7-AC2C-E735-CD881E5A7E47}"/>
+            </a:ext>
+          </a:extLst>
+        </p:cNvPr>
+        <p:cNvGrpSpPr/>
+        <p:nvPr/>
+      </p:nvGrpSpPr>
+      <p:grpSpPr>
+        <a:xfrm>
+          <a:off x="0" y="0"/>
+          <a:ext cx="0" cy="0"/>
+          <a:chOff x="0" y="0"/>
+          <a:chExt cx="0" cy="0"/>
+        </a:xfrm>
+      </p:grpSpPr>
+      <p:sp>
+        <p:nvSpPr>
+          <p:cNvPr id="3" name="Content Placeholder 2">
+            <a:extLst>
+              <a:ext uri="{FF2B5EF4-FFF2-40B4-BE49-F238E27FC236}">
+                <a16:creationId xmlns:a16="http://schemas.microsoft.com/office/drawing/2014/main" id="{ED73A33B-30B1-C540-CF64-34BF78007BCC}"/>
+              </a:ext>
+            </a:extLst>
+          </p:cNvPr>
+          <p:cNvSpPr>
+            <a:spLocks noGrp="1"/>
+          </p:cNvSpPr>
+          <p:nvPr>
+            <p:ph idx="1"/>
+          </p:nvPr>
+        </p:nvSpPr>
+        <p:spPr>
+          <a:xfrm>
+            <a:off x="1023862" y="2159000"/>
+            <a:ext cx="10353762" cy="1430867"/>
+          </a:xfrm>
+        </p:spPr>
+        <p:txBody>
+          <a:bodyPr>
+            <a:normAutofit/>
+          </a:bodyPr>
+          <a:lstStyle/>
+          <a:p>
+            <a:pPr marL="36900" indent="0" algn="ctr">
+              <a:buNone/>
+            </a:pPr>
+            <a:r>
+              <a:rPr lang="en-US" sz="7200" b="1">
+                <a:solidFill>
+                  <a:srgbClr val="FF0000"/>
+                </a:solidFill>
+              </a:rPr>
+              <a:t>End GIT</a:t>
+            </a:r>
+          </a:p>
+        </p:txBody>
+      </p:sp>
+    </p:spTree>
+    <p:extLst>
+      <p:ext uri="{BB962C8B-B14F-4D97-AF65-F5344CB8AC3E}">
+        <p14:creationId xmlns:p14="http://schemas.microsoft.com/office/powerpoint/2010/main" val="2484187571"/>
       </p:ext>
     </p:extLst>
   </p:cSld>
@@ -8162,7 +8702,7 @@
           <p:cNvPr id="2" name="Title 1">
             <a:extLst>
               <a:ext uri="{FF2B5EF4-FFF2-40B4-BE49-F238E27FC236}">
-                <a16:creationId xmlns:a16="http://schemas.microsoft.com/office/drawing/2014/main" id="{53D7DDB9-AA73-A473-E653-7B1D163CA4D5}"/>
+                <a16:creationId xmlns:a16="http://schemas.microsoft.com/office/drawing/2014/main" id="{D57A302D-777A-F719-8C92-9D165BB03AEB}"/>
               </a:ext>
             </a:extLst>
           </p:cNvPr>
@@ -8176,7 +8716,7 @@
         <p:spPr>
           <a:xfrm>
             <a:off x="913795" y="0"/>
-            <a:ext cx="10353762" cy="575733"/>
+            <a:ext cx="10353762" cy="491067"/>
           </a:xfrm>
         </p:spPr>
         <p:txBody>
@@ -8186,236 +8726,49 @@
           <a:lstStyle/>
           <a:p>
             <a:r>
-              <a:rPr lang="en-US" b="1">
-                <a:solidFill>
-                  <a:srgbClr val="FFFF00"/>
-                </a:solidFill>
-                <a:effectLst/>
-              </a:rPr>
-              <a:t>LINQ Query Syntax left Join</a:t>
-            </a:r>
-            <a:endParaRPr lang="en-US" b="1">
-              <a:solidFill>
-                <a:srgbClr val="FFFF00"/>
-              </a:solidFill>
-            </a:endParaRPr>
-          </a:p>
-        </p:txBody>
-      </p:sp>
-      <p:pic>
-        <p:nvPicPr>
-          <p:cNvPr id="13" name="Picture 12">
+              <a:rPr lang="en-US"/>
+              <a:t>Built in methods</a:t>
+            </a:r>
+          </a:p>
+        </p:txBody>
+      </p:sp>
+      <p:sp>
+        <p:nvSpPr>
+          <p:cNvPr id="3" name="Content Placeholder 2">
             <a:extLst>
               <a:ext uri="{FF2B5EF4-FFF2-40B4-BE49-F238E27FC236}">
-                <a16:creationId xmlns:a16="http://schemas.microsoft.com/office/drawing/2014/main" id="{38D248F4-0131-E61B-4DC6-F1B7BD778D59}"/>
+                <a16:creationId xmlns:a16="http://schemas.microsoft.com/office/drawing/2014/main" id="{DDC44BCE-5CA1-155C-BAED-09E66730BB5A}"/>
               </a:ext>
             </a:extLst>
           </p:cNvPr>
-          <p:cNvPicPr>
-            <a:picLocks noChangeAspect="1"/>
-          </p:cNvPicPr>
-          <p:nvPr/>
-        </p:nvPicPr>
-        <p:blipFill>
-          <a:blip r:embed="rId2"/>
-          <a:stretch>
-            <a:fillRect/>
-          </a:stretch>
-        </p:blipFill>
-        <p:spPr>
-          <a:xfrm>
-            <a:off x="151796" y="719666"/>
-            <a:ext cx="2606430" cy="1546994"/>
-          </a:xfrm>
-          <a:prstGeom prst="rect">
-            <a:avLst/>
-          </a:prstGeom>
-        </p:spPr>
-      </p:pic>
-      <p:pic>
-        <p:nvPicPr>
-          <p:cNvPr id="15" name="Picture 14">
-            <a:extLst>
-              <a:ext uri="{FF2B5EF4-FFF2-40B4-BE49-F238E27FC236}">
-                <a16:creationId xmlns:a16="http://schemas.microsoft.com/office/drawing/2014/main" id="{3A5E6F59-06F8-72D9-70F4-8C549D07F88F}"/>
-              </a:ext>
-            </a:extLst>
-          </p:cNvPr>
-          <p:cNvPicPr>
-            <a:picLocks noChangeAspect="1"/>
-          </p:cNvPicPr>
-          <p:nvPr/>
-        </p:nvPicPr>
-        <p:blipFill>
-          <a:blip r:embed="rId3"/>
-          <a:stretch>
-            <a:fillRect/>
-          </a:stretch>
-        </p:blipFill>
-        <p:spPr>
-          <a:xfrm>
-            <a:off x="2929468" y="560627"/>
-            <a:ext cx="3716336" cy="1791904"/>
-          </a:xfrm>
-          <a:prstGeom prst="rect">
-            <a:avLst/>
-          </a:prstGeom>
-        </p:spPr>
-      </p:pic>
-      <p:pic>
-        <p:nvPicPr>
-          <p:cNvPr id="17" name="Picture 16">
-            <a:extLst>
-              <a:ext uri="{FF2B5EF4-FFF2-40B4-BE49-F238E27FC236}">
-                <a16:creationId xmlns:a16="http://schemas.microsoft.com/office/drawing/2014/main" id="{33476E61-EFFB-1CC9-6979-6E6234D3E7BE}"/>
-              </a:ext>
-            </a:extLst>
-          </p:cNvPr>
-          <p:cNvPicPr>
-            <a:picLocks noChangeAspect="1"/>
-          </p:cNvPicPr>
-          <p:nvPr/>
-        </p:nvPicPr>
-        <p:blipFill>
-          <a:blip r:embed="rId4"/>
-          <a:stretch>
-            <a:fillRect/>
-          </a:stretch>
-        </p:blipFill>
-        <p:spPr>
-          <a:xfrm>
-            <a:off x="0" y="2438401"/>
-            <a:ext cx="3834023" cy="4447408"/>
-          </a:xfrm>
-          <a:prstGeom prst="rect">
-            <a:avLst/>
-          </a:prstGeom>
-        </p:spPr>
-      </p:pic>
-      <p:pic>
-        <p:nvPicPr>
-          <p:cNvPr id="21" name="Picture 20">
-            <a:extLst>
-              <a:ext uri="{FF2B5EF4-FFF2-40B4-BE49-F238E27FC236}">
-                <a16:creationId xmlns:a16="http://schemas.microsoft.com/office/drawing/2014/main" id="{46AA3581-A6E2-1BC7-E6DB-736DD2E0191B}"/>
-              </a:ext>
-            </a:extLst>
-          </p:cNvPr>
-          <p:cNvPicPr>
-            <a:picLocks noChangeAspect="1"/>
-          </p:cNvPicPr>
-          <p:nvPr/>
-        </p:nvPicPr>
-        <p:blipFill>
-          <a:blip r:embed="rId5"/>
-          <a:stretch>
-            <a:fillRect/>
-          </a:stretch>
-        </p:blipFill>
-        <p:spPr>
-          <a:xfrm>
-            <a:off x="3892559" y="2403018"/>
-            <a:ext cx="3716336" cy="2051963"/>
-          </a:xfrm>
-          <a:prstGeom prst="rect">
-            <a:avLst/>
-          </a:prstGeom>
-        </p:spPr>
-      </p:pic>
-      <p:pic>
-        <p:nvPicPr>
-          <p:cNvPr id="23" name="Picture 22">
-            <a:extLst>
-              <a:ext uri="{FF2B5EF4-FFF2-40B4-BE49-F238E27FC236}">
-                <a16:creationId xmlns:a16="http://schemas.microsoft.com/office/drawing/2014/main" id="{8B0F35E5-A5B4-4718-F3D9-89FA9709369C}"/>
-              </a:ext>
-            </a:extLst>
-          </p:cNvPr>
-          <p:cNvPicPr>
-            <a:picLocks noChangeAspect="1"/>
-          </p:cNvPicPr>
-          <p:nvPr/>
-        </p:nvPicPr>
-        <p:blipFill>
-          <a:blip r:embed="rId6"/>
-          <a:stretch>
-            <a:fillRect/>
-          </a:stretch>
-        </p:blipFill>
-        <p:spPr>
-          <a:xfrm>
-            <a:off x="3892559" y="4490364"/>
-            <a:ext cx="2682472" cy="2367636"/>
-          </a:xfrm>
-          <a:prstGeom prst="rect">
-            <a:avLst/>
-          </a:prstGeom>
-        </p:spPr>
-      </p:pic>
-      <p:pic>
-        <p:nvPicPr>
-          <p:cNvPr id="25" name="Picture 24">
-            <a:extLst>
-              <a:ext uri="{FF2B5EF4-FFF2-40B4-BE49-F238E27FC236}">
-                <a16:creationId xmlns:a16="http://schemas.microsoft.com/office/drawing/2014/main" id="{3FCD31B3-BF3B-0D8A-A0DA-28A446926527}"/>
-              </a:ext>
-            </a:extLst>
-          </p:cNvPr>
-          <p:cNvPicPr>
-            <a:picLocks noChangeAspect="1"/>
-          </p:cNvPicPr>
-          <p:nvPr/>
-        </p:nvPicPr>
-        <p:blipFill>
-          <a:blip r:embed="rId7"/>
-          <a:stretch>
-            <a:fillRect/>
-          </a:stretch>
-        </p:blipFill>
-        <p:spPr>
-          <a:xfrm>
-            <a:off x="8120912" y="575733"/>
-            <a:ext cx="2420087" cy="3311330"/>
-          </a:xfrm>
-          <a:prstGeom prst="rect">
-            <a:avLst/>
-          </a:prstGeom>
-        </p:spPr>
-      </p:pic>
-      <p:pic>
-        <p:nvPicPr>
-          <p:cNvPr id="27" name="Picture 26">
-            <a:extLst>
-              <a:ext uri="{FF2B5EF4-FFF2-40B4-BE49-F238E27FC236}">
-                <a16:creationId xmlns:a16="http://schemas.microsoft.com/office/drawing/2014/main" id="{A143240C-C79B-8D12-DEB4-A172F26C1010}"/>
-              </a:ext>
-            </a:extLst>
-          </p:cNvPr>
-          <p:cNvPicPr>
-            <a:picLocks noChangeAspect="1"/>
-          </p:cNvPicPr>
-          <p:nvPr/>
-        </p:nvPicPr>
-        <p:blipFill>
-          <a:blip r:embed="rId8"/>
-          <a:stretch>
-            <a:fillRect/>
-          </a:stretch>
-        </p:blipFill>
-        <p:spPr>
-          <a:xfrm>
-            <a:off x="7859872" y="4069389"/>
-            <a:ext cx="3635055" cy="2613887"/>
-          </a:xfrm>
-          <a:prstGeom prst="rect">
-            <a:avLst/>
-          </a:prstGeom>
-        </p:spPr>
-      </p:pic>
+          <p:cNvSpPr>
+            <a:spLocks noGrp="1"/>
+          </p:cNvSpPr>
+          <p:nvPr>
+            <p:ph idx="1"/>
+          </p:nvPr>
+        </p:nvSpPr>
+        <p:spPr>
+          <a:xfrm>
+            <a:off x="913795" y="491067"/>
+            <a:ext cx="10353762" cy="5300133"/>
+          </a:xfrm>
+        </p:spPr>
+        <p:txBody>
+          <a:bodyPr/>
+          <a:lstStyle/>
+          <a:p>
+            <a:r>
+              <a:rPr lang="en-US"/>
+              <a:t>SPACE(1)</a:t>
+            </a:r>
+          </a:p>
+        </p:txBody>
+      </p:sp>
     </p:spTree>
     <p:extLst>
       <p:ext uri="{BB962C8B-B14F-4D97-AF65-F5344CB8AC3E}">
-        <p14:creationId xmlns:p14="http://schemas.microsoft.com/office/powerpoint/2010/main" val="2328028493"/>
+        <p14:creationId xmlns:p14="http://schemas.microsoft.com/office/powerpoint/2010/main" val="1815370671"/>
       </p:ext>
     </p:extLst>
   </p:cSld>
@@ -8447,7 +8800,7 @@
           <p:cNvPr id="2" name="Title 1">
             <a:extLst>
               <a:ext uri="{FF2B5EF4-FFF2-40B4-BE49-F238E27FC236}">
-                <a16:creationId xmlns:a16="http://schemas.microsoft.com/office/drawing/2014/main" id="{BC629567-C097-E677-74FD-BB7789F58B8C}"/>
+                <a16:creationId xmlns:a16="http://schemas.microsoft.com/office/drawing/2014/main" id="{53D7DDB9-AA73-A473-E653-7B1D163CA4D5}"/>
               </a:ext>
             </a:extLst>
           </p:cNvPr>
@@ -8461,7 +8814,7 @@
         <p:spPr>
           <a:xfrm>
             <a:off x="913795" y="0"/>
-            <a:ext cx="10353762" cy="601133"/>
+            <a:ext cx="10353762" cy="575733"/>
           </a:xfrm>
         </p:spPr>
         <p:txBody>
@@ -8479,25 +8832,27 @@
               </a:rPr>
               <a:t>LINQ Query Syntax left Join</a:t>
             </a:r>
-            <a:endParaRPr lang="en-US"/>
+            <a:endParaRPr lang="en-US" b="1">
+              <a:solidFill>
+                <a:srgbClr val="FFFF00"/>
+              </a:solidFill>
+            </a:endParaRPr>
           </a:p>
         </p:txBody>
       </p:sp>
       <p:pic>
         <p:nvPicPr>
-          <p:cNvPr id="5" name="Content Placeholder 4">
+          <p:cNvPr id="13" name="Picture 12">
             <a:extLst>
               <a:ext uri="{FF2B5EF4-FFF2-40B4-BE49-F238E27FC236}">
-                <a16:creationId xmlns:a16="http://schemas.microsoft.com/office/drawing/2014/main" id="{43EBEE3B-A167-F253-28A7-81C76EED4FD1}"/>
+                <a16:creationId xmlns:a16="http://schemas.microsoft.com/office/drawing/2014/main" id="{38D248F4-0131-E61B-4DC6-F1B7BD778D59}"/>
               </a:ext>
             </a:extLst>
           </p:cNvPr>
           <p:cNvPicPr>
-            <a:picLocks noGrp="1" noChangeAspect="1"/>
+            <a:picLocks noChangeAspect="1"/>
           </p:cNvPicPr>
-          <p:nvPr>
-            <p:ph idx="1"/>
-          </p:nvPr>
+          <p:nvPr/>
         </p:nvPicPr>
         <p:blipFill>
           <a:blip r:embed="rId2"/>
@@ -8507,27 +8862,20 @@
         </p:blipFill>
         <p:spPr>
           <a:xfrm>
-            <a:off x="3716866" y="601132"/>
-            <a:ext cx="4030133" cy="2820333"/>
+            <a:off x="151796" y="719666"/>
+            <a:ext cx="2606430" cy="1546994"/>
           </a:xfrm>
           <a:prstGeom prst="rect">
             <a:avLst/>
           </a:prstGeom>
-          <a:effectLst>
-            <a:outerShdw blurRad="25400" dir="17880000">
-              <a:srgbClr val="000000">
-                <a:alpha val="46000"/>
-              </a:srgbClr>
-            </a:outerShdw>
-          </a:effectLst>
         </p:spPr>
       </p:pic>
       <p:pic>
         <p:nvPicPr>
-          <p:cNvPr id="7" name="Picture 6">
+          <p:cNvPr id="15" name="Picture 14">
             <a:extLst>
               <a:ext uri="{FF2B5EF4-FFF2-40B4-BE49-F238E27FC236}">
-                <a16:creationId xmlns:a16="http://schemas.microsoft.com/office/drawing/2014/main" id="{B26874DD-4DB0-E2B0-FE6A-506E6C22AD83}"/>
+                <a16:creationId xmlns:a16="http://schemas.microsoft.com/office/drawing/2014/main" id="{3A5E6F59-06F8-72D9-70F4-8C549D07F88F}"/>
               </a:ext>
             </a:extLst>
           </p:cNvPr>
@@ -8544,65 +8892,168 @@
         </p:blipFill>
         <p:spPr>
           <a:xfrm>
-            <a:off x="196308" y="608667"/>
-            <a:ext cx="3247932" cy="2820333"/>
+            <a:off x="2929468" y="560627"/>
+            <a:ext cx="3716336" cy="1791904"/>
           </a:xfrm>
           <a:prstGeom prst="rect">
             <a:avLst/>
           </a:prstGeom>
         </p:spPr>
       </p:pic>
-      <p:sp>
-        <p:nvSpPr>
-          <p:cNvPr id="8" name="TextBox 7">
+      <p:pic>
+        <p:nvPicPr>
+          <p:cNvPr id="17" name="Picture 16">
             <a:extLst>
               <a:ext uri="{FF2B5EF4-FFF2-40B4-BE49-F238E27FC236}">
-                <a16:creationId xmlns:a16="http://schemas.microsoft.com/office/drawing/2014/main" id="{DC59A1D6-D574-D479-7528-6A48466DDE1C}"/>
+                <a16:creationId xmlns:a16="http://schemas.microsoft.com/office/drawing/2014/main" id="{33476E61-EFFB-1CC9-6979-6E6234D3E7BE}"/>
               </a:ext>
             </a:extLst>
           </p:cNvPr>
-          <p:cNvSpPr txBox="1"/>
+          <p:cNvPicPr>
+            <a:picLocks noChangeAspect="1"/>
+          </p:cNvPicPr>
           <p:nvPr/>
-        </p:nvSpPr>
-        <p:spPr>
-          <a:xfrm>
-            <a:off x="728132" y="4064000"/>
-            <a:ext cx="10041467" cy="1477328"/>
+        </p:nvPicPr>
+        <p:blipFill>
+          <a:blip r:embed="rId4"/>
+          <a:stretch>
+            <a:fillRect/>
+          </a:stretch>
+        </p:blipFill>
+        <p:spPr>
+          <a:xfrm>
+            <a:off x="0" y="2438401"/>
+            <a:ext cx="3834023" cy="4447408"/>
           </a:xfrm>
           <a:prstGeom prst="rect">
             <a:avLst/>
           </a:prstGeom>
-          <a:noFill/>
-        </p:spPr>
-        <p:txBody>
-          <a:bodyPr wrap="square" rtlCol="0">
-            <a:spAutoFit/>
-          </a:bodyPr>
-          <a:lstStyle/>
-          <a:p>
-            <a:r>
-              <a:rPr lang="en-US"/>
-              <a:t>The tricky here is : when we need to get from all rows from first table even if there no match in second table</a:t>
-            </a:r>
-          </a:p>
-          <a:p>
-            <a:endParaRPr lang="en-US"/>
-          </a:p>
-          <a:p>
-            <a:endParaRPr lang="en-US"/>
-          </a:p>
-          <a:p>
-            <a:r>
-              <a:rPr lang="en-US"/>
-              <a:t> </a:t>
-            </a:r>
-          </a:p>
-        </p:txBody>
-      </p:sp>
+        </p:spPr>
+      </p:pic>
+      <p:pic>
+        <p:nvPicPr>
+          <p:cNvPr id="21" name="Picture 20">
+            <a:extLst>
+              <a:ext uri="{FF2B5EF4-FFF2-40B4-BE49-F238E27FC236}">
+                <a16:creationId xmlns:a16="http://schemas.microsoft.com/office/drawing/2014/main" id="{46AA3581-A6E2-1BC7-E6DB-736DD2E0191B}"/>
+              </a:ext>
+            </a:extLst>
+          </p:cNvPr>
+          <p:cNvPicPr>
+            <a:picLocks noChangeAspect="1"/>
+          </p:cNvPicPr>
+          <p:nvPr/>
+        </p:nvPicPr>
+        <p:blipFill>
+          <a:blip r:embed="rId5"/>
+          <a:stretch>
+            <a:fillRect/>
+          </a:stretch>
+        </p:blipFill>
+        <p:spPr>
+          <a:xfrm>
+            <a:off x="3892559" y="2403018"/>
+            <a:ext cx="3716336" cy="2051963"/>
+          </a:xfrm>
+          <a:prstGeom prst="rect">
+            <a:avLst/>
+          </a:prstGeom>
+        </p:spPr>
+      </p:pic>
+      <p:pic>
+        <p:nvPicPr>
+          <p:cNvPr id="23" name="Picture 22">
+            <a:extLst>
+              <a:ext uri="{FF2B5EF4-FFF2-40B4-BE49-F238E27FC236}">
+                <a16:creationId xmlns:a16="http://schemas.microsoft.com/office/drawing/2014/main" id="{8B0F35E5-A5B4-4718-F3D9-89FA9709369C}"/>
+              </a:ext>
+            </a:extLst>
+          </p:cNvPr>
+          <p:cNvPicPr>
+            <a:picLocks noChangeAspect="1"/>
+          </p:cNvPicPr>
+          <p:nvPr/>
+        </p:nvPicPr>
+        <p:blipFill>
+          <a:blip r:embed="rId6"/>
+          <a:stretch>
+            <a:fillRect/>
+          </a:stretch>
+        </p:blipFill>
+        <p:spPr>
+          <a:xfrm>
+            <a:off x="3892559" y="4490364"/>
+            <a:ext cx="2682472" cy="2367636"/>
+          </a:xfrm>
+          <a:prstGeom prst="rect">
+            <a:avLst/>
+          </a:prstGeom>
+        </p:spPr>
+      </p:pic>
+      <p:pic>
+        <p:nvPicPr>
+          <p:cNvPr id="25" name="Picture 24">
+            <a:extLst>
+              <a:ext uri="{FF2B5EF4-FFF2-40B4-BE49-F238E27FC236}">
+                <a16:creationId xmlns:a16="http://schemas.microsoft.com/office/drawing/2014/main" id="{3FCD31B3-BF3B-0D8A-A0DA-28A446926527}"/>
+              </a:ext>
+            </a:extLst>
+          </p:cNvPr>
+          <p:cNvPicPr>
+            <a:picLocks noChangeAspect="1"/>
+          </p:cNvPicPr>
+          <p:nvPr/>
+        </p:nvPicPr>
+        <p:blipFill>
+          <a:blip r:embed="rId7"/>
+          <a:stretch>
+            <a:fillRect/>
+          </a:stretch>
+        </p:blipFill>
+        <p:spPr>
+          <a:xfrm>
+            <a:off x="8120912" y="575733"/>
+            <a:ext cx="2420087" cy="3311330"/>
+          </a:xfrm>
+          <a:prstGeom prst="rect">
+            <a:avLst/>
+          </a:prstGeom>
+        </p:spPr>
+      </p:pic>
+      <p:pic>
+        <p:nvPicPr>
+          <p:cNvPr id="27" name="Picture 26">
+            <a:extLst>
+              <a:ext uri="{FF2B5EF4-FFF2-40B4-BE49-F238E27FC236}">
+                <a16:creationId xmlns:a16="http://schemas.microsoft.com/office/drawing/2014/main" id="{A143240C-C79B-8D12-DEB4-A172F26C1010}"/>
+              </a:ext>
+            </a:extLst>
+          </p:cNvPr>
+          <p:cNvPicPr>
+            <a:picLocks noChangeAspect="1"/>
+          </p:cNvPicPr>
+          <p:nvPr/>
+        </p:nvPicPr>
+        <p:blipFill>
+          <a:blip r:embed="rId8"/>
+          <a:stretch>
+            <a:fillRect/>
+          </a:stretch>
+        </p:blipFill>
+        <p:spPr>
+          <a:xfrm>
+            <a:off x="7859872" y="4069389"/>
+            <a:ext cx="3635055" cy="2613887"/>
+          </a:xfrm>
+          <a:prstGeom prst="rect">
+            <a:avLst/>
+          </a:prstGeom>
+        </p:spPr>
+      </p:pic>
     </p:spTree>
     <p:extLst>
       <p:ext uri="{BB962C8B-B14F-4D97-AF65-F5344CB8AC3E}">
-        <p14:creationId xmlns:p14="http://schemas.microsoft.com/office/powerpoint/2010/main" val="2082898737"/>
+        <p14:creationId xmlns:p14="http://schemas.microsoft.com/office/powerpoint/2010/main" val="2328028493"/>
       </p:ext>
     </p:extLst>
   </p:cSld>
@@ -8634,7 +9085,7 @@
           <p:cNvPr id="2" name="Title 1">
             <a:extLst>
               <a:ext uri="{FF2B5EF4-FFF2-40B4-BE49-F238E27FC236}">
-                <a16:creationId xmlns:a16="http://schemas.microsoft.com/office/drawing/2014/main" id="{C6017F55-A87E-8987-8C53-D352FE5F6AD4}"/>
+                <a16:creationId xmlns:a16="http://schemas.microsoft.com/office/drawing/2014/main" id="{BC629567-C097-E677-74FD-BB7789F58B8C}"/>
               </a:ext>
             </a:extLst>
           </p:cNvPr>
@@ -8648,66 +9099,73 @@
         <p:spPr>
           <a:xfrm>
             <a:off x="913795" y="0"/>
-            <a:ext cx="10353762" cy="970450"/>
-          </a:xfrm>
-        </p:spPr>
-        <p:txBody>
-          <a:bodyPr/>
+            <a:ext cx="10353762" cy="601133"/>
+          </a:xfrm>
+        </p:spPr>
+        <p:txBody>
+          <a:bodyPr>
+            <a:normAutofit fontScale="90000"/>
+          </a:bodyPr>
           <a:lstStyle/>
           <a:p>
             <a:r>
               <a:rPr lang="en-US" b="1">
                 <a:solidFill>
-                  <a:srgbClr val="FF0000"/>
+                  <a:srgbClr val="FFFF00"/>
                 </a:solidFill>
+                <a:effectLst/>
               </a:rPr>
-              <a:t>Left join in .net 10</a:t>
-            </a:r>
-          </a:p>
-        </p:txBody>
-      </p:sp>
-      <p:sp>
-        <p:nvSpPr>
-          <p:cNvPr id="3" name="Content Placeholder 2">
+              <a:t>LINQ Query Syntax left Join</a:t>
+            </a:r>
+            <a:endParaRPr lang="en-US"/>
+          </a:p>
+        </p:txBody>
+      </p:sp>
+      <p:pic>
+        <p:nvPicPr>
+          <p:cNvPr id="5" name="Content Placeholder 4">
             <a:extLst>
               <a:ext uri="{FF2B5EF4-FFF2-40B4-BE49-F238E27FC236}">
-                <a16:creationId xmlns:a16="http://schemas.microsoft.com/office/drawing/2014/main" id="{F573BCEA-3A25-B8DF-FB6E-C613885C8F25}"/>
+                <a16:creationId xmlns:a16="http://schemas.microsoft.com/office/drawing/2014/main" id="{43EBEE3B-A167-F253-28A7-81C76EED4FD1}"/>
               </a:ext>
             </a:extLst>
           </p:cNvPr>
-          <p:cNvSpPr>
-            <a:spLocks noGrp="1"/>
-          </p:cNvSpPr>
+          <p:cNvPicPr>
+            <a:picLocks noGrp="1" noChangeAspect="1"/>
+          </p:cNvPicPr>
           <p:nvPr>
             <p:ph idx="1"/>
           </p:nvPr>
-        </p:nvSpPr>
-        <p:spPr>
-          <a:xfrm>
-            <a:off x="143933" y="970450"/>
-            <a:ext cx="11954934" cy="5785949"/>
-          </a:xfrm>
-        </p:spPr>
-        <p:txBody>
-          <a:bodyPr/>
-          <a:lstStyle/>
-          <a:p>
-            <a:endParaRPr lang="en-US"/>
-          </a:p>
-          <a:p>
-            <a:endParaRPr lang="en-US"/>
-          </a:p>
-          <a:p>
-            <a:endParaRPr lang="en-US"/>
-          </a:p>
-        </p:txBody>
-      </p:sp>
+        </p:nvPicPr>
+        <p:blipFill>
+          <a:blip r:embed="rId2"/>
+          <a:stretch>
+            <a:fillRect/>
+          </a:stretch>
+        </p:blipFill>
+        <p:spPr>
+          <a:xfrm>
+            <a:off x="3716866" y="601132"/>
+            <a:ext cx="4030133" cy="2820333"/>
+          </a:xfrm>
+          <a:prstGeom prst="rect">
+            <a:avLst/>
+          </a:prstGeom>
+          <a:effectLst>
+            <a:outerShdw blurRad="25400" dir="17880000">
+              <a:srgbClr val="000000">
+                <a:alpha val="46000"/>
+              </a:srgbClr>
+            </a:outerShdw>
+          </a:effectLst>
+        </p:spPr>
+      </p:pic>
       <p:pic>
         <p:nvPicPr>
-          <p:cNvPr id="5" name="Picture 4">
+          <p:cNvPr id="7" name="Picture 6">
             <a:extLst>
               <a:ext uri="{FF2B5EF4-FFF2-40B4-BE49-F238E27FC236}">
-                <a16:creationId xmlns:a16="http://schemas.microsoft.com/office/drawing/2014/main" id="{1A68C370-4A46-552D-83CE-7E9DB643D26E}"/>
+                <a16:creationId xmlns:a16="http://schemas.microsoft.com/office/drawing/2014/main" id="{B26874DD-4DB0-E2B0-FE6A-506E6C22AD83}"/>
               </a:ext>
             </a:extLst>
           </p:cNvPr>
@@ -8717,25 +9175,72 @@
           <p:nvPr/>
         </p:nvPicPr>
         <p:blipFill>
-          <a:blip r:embed="rId2"/>
+          <a:blip r:embed="rId3"/>
           <a:stretch>
             <a:fillRect/>
           </a:stretch>
         </p:blipFill>
         <p:spPr>
           <a:xfrm>
-            <a:off x="271574" y="885510"/>
-            <a:ext cx="5824426" cy="2921577"/>
+            <a:off x="196308" y="608667"/>
+            <a:ext cx="3247932" cy="2820333"/>
           </a:xfrm>
           <a:prstGeom prst="rect">
             <a:avLst/>
           </a:prstGeom>
         </p:spPr>
       </p:pic>
+      <p:sp>
+        <p:nvSpPr>
+          <p:cNvPr id="8" name="TextBox 7">
+            <a:extLst>
+              <a:ext uri="{FF2B5EF4-FFF2-40B4-BE49-F238E27FC236}">
+                <a16:creationId xmlns:a16="http://schemas.microsoft.com/office/drawing/2014/main" id="{DC59A1D6-D574-D479-7528-6A48466DDE1C}"/>
+              </a:ext>
+            </a:extLst>
+          </p:cNvPr>
+          <p:cNvSpPr txBox="1"/>
+          <p:nvPr/>
+        </p:nvSpPr>
+        <p:spPr>
+          <a:xfrm>
+            <a:off x="728132" y="4064000"/>
+            <a:ext cx="10041467" cy="1477328"/>
+          </a:xfrm>
+          <a:prstGeom prst="rect">
+            <a:avLst/>
+          </a:prstGeom>
+          <a:noFill/>
+        </p:spPr>
+        <p:txBody>
+          <a:bodyPr wrap="square" rtlCol="0">
+            <a:spAutoFit/>
+          </a:bodyPr>
+          <a:lstStyle/>
+          <a:p>
+            <a:r>
+              <a:rPr lang="en-US"/>
+              <a:t>The tricky here is : when we need to get from all rows from first table even if there no match in second table</a:t>
+            </a:r>
+          </a:p>
+          <a:p>
+            <a:endParaRPr lang="en-US"/>
+          </a:p>
+          <a:p>
+            <a:endParaRPr lang="en-US"/>
+          </a:p>
+          <a:p>
+            <a:r>
+              <a:rPr lang="en-US"/>
+              <a:t> </a:t>
+            </a:r>
+          </a:p>
+        </p:txBody>
+      </p:sp>
     </p:spTree>
     <p:extLst>
       <p:ext uri="{BB962C8B-B14F-4D97-AF65-F5344CB8AC3E}">
-        <p14:creationId xmlns:p14="http://schemas.microsoft.com/office/powerpoint/2010/main" val="1885605593"/>
+        <p14:creationId xmlns:p14="http://schemas.microsoft.com/office/powerpoint/2010/main" val="2082898737"/>
       </p:ext>
     </p:extLst>
   </p:cSld>
@@ -8767,7 +9272,7 @@
           <p:cNvPr id="2" name="Title 1">
             <a:extLst>
               <a:ext uri="{FF2B5EF4-FFF2-40B4-BE49-F238E27FC236}">
-                <a16:creationId xmlns:a16="http://schemas.microsoft.com/office/drawing/2014/main" id="{204F4AEA-1971-E800-703E-69F376F262A9}"/>
+                <a16:creationId xmlns:a16="http://schemas.microsoft.com/office/drawing/2014/main" id="{C6017F55-A87E-8987-8C53-D352FE5F6AD4}"/>
               </a:ext>
             </a:extLst>
           </p:cNvPr>
@@ -8781,7 +9286,7 @@
         <p:spPr>
           <a:xfrm>
             <a:off x="913795" y="0"/>
-            <a:ext cx="10353762" cy="753533"/>
+            <a:ext cx="10353762" cy="970450"/>
           </a:xfrm>
         </p:spPr>
         <p:txBody>
@@ -8790,11 +9295,12 @@
           <a:p>
             <a:r>
               <a:rPr lang="en-US" b="1">
-                <a:effectLst/>
+                <a:solidFill>
+                  <a:srgbClr val="FF0000"/>
+                </a:solidFill>
               </a:rPr>
-              <a:t>Association </a:t>
-            </a:r>
-            <a:endParaRPr lang="en-US"/>
+              <a:t>Left join in .net 10</a:t>
+            </a:r>
           </a:p>
         </p:txBody>
       </p:sp>
@@ -8803,7 +9309,7 @@
           <p:cNvPr id="3" name="Content Placeholder 2">
             <a:extLst>
               <a:ext uri="{FF2B5EF4-FFF2-40B4-BE49-F238E27FC236}">
-                <a16:creationId xmlns:a16="http://schemas.microsoft.com/office/drawing/2014/main" id="{2F56D789-EEAB-71E6-ECF8-CFF49F4FD004}"/>
+                <a16:creationId xmlns:a16="http://schemas.microsoft.com/office/drawing/2014/main" id="{F573BCEA-3A25-B8DF-FB6E-C613885C8F25}"/>
               </a:ext>
             </a:extLst>
           </p:cNvPr>
@@ -8816,75 +9322,20 @@
         </p:nvSpPr>
         <p:spPr>
           <a:xfrm>
-            <a:off x="177800" y="897467"/>
-            <a:ext cx="11844867" cy="5698066"/>
+            <a:off x="143933" y="970450"/>
+            <a:ext cx="11954934" cy="5785949"/>
           </a:xfrm>
         </p:spPr>
         <p:txBody>
           <a:bodyPr/>
           <a:lstStyle/>
           <a:p>
-            <a:r>
-              <a:rPr lang="en-US" b="1">
-                <a:effectLst/>
-              </a:rPr>
-              <a:t>Uses-A"</a:t>
-            </a:r>
-            <a:r>
-              <a:rPr lang="en-US" b="1">
-                <a:solidFill>
-                  <a:srgbClr val="FFFF00"/>
-                </a:solidFill>
-                <a:effectLst/>
-              </a:rPr>
-              <a:t>Relationship</a:t>
-            </a:r>
-            <a:r>
-              <a:rPr lang="en-US" b="1">
-                <a:effectLst/>
-              </a:rPr>
-              <a:t>"</a:t>
-            </a:r>
-            <a:endParaRPr lang="en-US">
-              <a:effectLst/>
-            </a:endParaRPr>
-          </a:p>
-          <a:p>
-            <a:r>
-              <a:rPr lang="en-US">
-                <a:effectLst/>
-              </a:rPr>
-              <a:t>It defines a link between two </a:t>
-            </a:r>
-            <a:r>
-              <a:rPr lang="en-US" b="1">
-                <a:solidFill>
-                  <a:srgbClr val="FFFF00"/>
-                </a:solidFill>
-                <a:effectLst/>
-              </a:rPr>
-              <a:t>independent</a:t>
-            </a:r>
-            <a:r>
-              <a:rPr lang="en-US">
-                <a:effectLst/>
-              </a:rPr>
-              <a:t> objects where they use each other to perform actions, but neither "owns" the other.</a:t>
-            </a:r>
-          </a:p>
-          <a:p>
-            <a:r>
-              <a:rPr lang="en-US" b="1">
-                <a:effectLst/>
-              </a:rPr>
-              <a:t>Implementation: </a:t>
-            </a:r>
-            <a:r>
-              <a:rPr lang="en-US">
-                <a:effectLst/>
-              </a:rPr>
-              <a:t>by passing an object as a parameter to a method.</a:t>
-            </a:r>
+            <a:endParaRPr lang="en-US"/>
+          </a:p>
+          <a:p>
+            <a:endParaRPr lang="en-US"/>
+          </a:p>
+          <a:p>
             <a:endParaRPr lang="en-US"/>
           </a:p>
         </p:txBody>
@@ -8894,7 +9345,7 @@
           <p:cNvPr id="5" name="Picture 4">
             <a:extLst>
               <a:ext uri="{FF2B5EF4-FFF2-40B4-BE49-F238E27FC236}">
-                <a16:creationId xmlns:a16="http://schemas.microsoft.com/office/drawing/2014/main" id="{0134ABA0-88FD-1776-477D-E864080379AA}"/>
+                <a16:creationId xmlns:a16="http://schemas.microsoft.com/office/drawing/2014/main" id="{1A68C370-4A46-552D-83CE-7E9DB643D26E}"/>
               </a:ext>
             </a:extLst>
           </p:cNvPr>
@@ -8911,8 +9362,8 @@
         </p:blipFill>
         <p:spPr>
           <a:xfrm>
-            <a:off x="311776" y="2788392"/>
-            <a:ext cx="6063623" cy="2881812"/>
+            <a:off x="271574" y="885510"/>
+            <a:ext cx="5824426" cy="2921577"/>
           </a:xfrm>
           <a:prstGeom prst="rect">
             <a:avLst/>
@@ -8922,7 +9373,7 @@
     </p:spTree>
     <p:extLst>
       <p:ext uri="{BB962C8B-B14F-4D97-AF65-F5344CB8AC3E}">
-        <p14:creationId xmlns:p14="http://schemas.microsoft.com/office/powerpoint/2010/main" val="2546003169"/>
+        <p14:creationId xmlns:p14="http://schemas.microsoft.com/office/powerpoint/2010/main" val="1885605593"/>
       </p:ext>
     </p:extLst>
   </p:cSld>

--- a/Dot Net/NEW.pptx
+++ b/Dot Net/NEW.pptx
@@ -11,18 +11,19 @@
     <p:sldId id="259" r:id="rId5"/>
     <p:sldId id="260" r:id="rId6"/>
     <p:sldId id="269" r:id="rId7"/>
-    <p:sldId id="261" r:id="rId8"/>
-    <p:sldId id="262" r:id="rId9"/>
-    <p:sldId id="263" r:id="rId10"/>
-    <p:sldId id="264" r:id="rId11"/>
-    <p:sldId id="265" r:id="rId12"/>
-    <p:sldId id="266" r:id="rId13"/>
-    <p:sldId id="267" r:id="rId14"/>
-    <p:sldId id="268" r:id="rId15"/>
-    <p:sldId id="270" r:id="rId16"/>
-    <p:sldId id="271" r:id="rId17"/>
-    <p:sldId id="273" r:id="rId18"/>
-    <p:sldId id="272" r:id="rId19"/>
+    <p:sldId id="274" r:id="rId8"/>
+    <p:sldId id="261" r:id="rId9"/>
+    <p:sldId id="262" r:id="rId10"/>
+    <p:sldId id="263" r:id="rId11"/>
+    <p:sldId id="264" r:id="rId12"/>
+    <p:sldId id="265" r:id="rId13"/>
+    <p:sldId id="266" r:id="rId14"/>
+    <p:sldId id="267" r:id="rId15"/>
+    <p:sldId id="268" r:id="rId16"/>
+    <p:sldId id="270" r:id="rId17"/>
+    <p:sldId id="271" r:id="rId18"/>
+    <p:sldId id="273" r:id="rId19"/>
+    <p:sldId id="272" r:id="rId20"/>
   </p:sldIdLst>
   <p:sldSz cx="12192000" cy="6858000"/>
   <p:notesSz cx="6858000" cy="9144000"/>
@@ -314,7 +315,7 @@
           <a:p>
             <a:fld id="{79806886-C3E2-4AA6-AE5C-EC60C7639E42}" type="datetimeFigureOut">
               <a:rPr lang="en-US" smtClean="0"/>
-              <a:t>4/28/2026</a:t>
+              <a:t>5/17/2026</a:t>
             </a:fld>
             <a:endParaRPr lang="en-US"/>
           </a:p>
@@ -612,7 +613,7 @@
           <a:p>
             <a:fld id="{79806886-C3E2-4AA6-AE5C-EC60C7639E42}" type="datetimeFigureOut">
               <a:rPr lang="en-US" smtClean="0"/>
-              <a:t>4/28/2026</a:t>
+              <a:t>5/17/2026</a:t>
             </a:fld>
             <a:endParaRPr lang="en-US"/>
           </a:p>
@@ -804,7 +805,7 @@
           <a:p>
             <a:fld id="{79806886-C3E2-4AA6-AE5C-EC60C7639E42}" type="datetimeFigureOut">
               <a:rPr lang="en-US" smtClean="0"/>
-              <a:t>4/28/2026</a:t>
+              <a:t>5/17/2026</a:t>
             </a:fld>
             <a:endParaRPr lang="en-US"/>
           </a:p>
@@ -1065,7 +1066,7 @@
           <a:p>
             <a:fld id="{79806886-C3E2-4AA6-AE5C-EC60C7639E42}" type="datetimeFigureOut">
               <a:rPr lang="en-US" smtClean="0"/>
-              <a:t>4/28/2026</a:t>
+              <a:t>5/17/2026</a:t>
             </a:fld>
             <a:endParaRPr lang="en-US"/>
           </a:p>
@@ -1489,7 +1490,7 @@
           <a:p>
             <a:fld id="{79806886-C3E2-4AA6-AE5C-EC60C7639E42}" type="datetimeFigureOut">
               <a:rPr lang="en-US" smtClean="0"/>
-              <a:t>4/28/2026</a:t>
+              <a:t>5/17/2026</a:t>
             </a:fld>
             <a:endParaRPr lang="en-US"/>
           </a:p>
@@ -2026,7 +2027,7 @@
           <a:p>
             <a:fld id="{79806886-C3E2-4AA6-AE5C-EC60C7639E42}" type="datetimeFigureOut">
               <a:rPr lang="en-US" smtClean="0"/>
-              <a:t>4/28/2026</a:t>
+              <a:t>5/17/2026</a:t>
             </a:fld>
             <a:endParaRPr lang="en-US"/>
           </a:p>
@@ -2890,7 +2891,7 @@
           <a:p>
             <a:fld id="{79806886-C3E2-4AA6-AE5C-EC60C7639E42}" type="datetimeFigureOut">
               <a:rPr lang="en-US" smtClean="0"/>
-              <a:t>4/28/2026</a:t>
+              <a:t>5/17/2026</a:t>
             </a:fld>
             <a:endParaRPr lang="en-US"/>
           </a:p>
@@ -3060,7 +3061,7 @@
           <a:p>
             <a:fld id="{79806886-C3E2-4AA6-AE5C-EC60C7639E42}" type="datetimeFigureOut">
               <a:rPr lang="en-US" smtClean="0"/>
-              <a:t>4/28/2026</a:t>
+              <a:t>5/17/2026</a:t>
             </a:fld>
             <a:endParaRPr lang="en-US"/>
           </a:p>
@@ -3244,7 +3245,7 @@
           <a:p>
             <a:fld id="{79806886-C3E2-4AA6-AE5C-EC60C7639E42}" type="datetimeFigureOut">
               <a:rPr lang="en-US" smtClean="0"/>
-              <a:t>4/28/2026</a:t>
+              <a:t>5/17/2026</a:t>
             </a:fld>
             <a:endParaRPr lang="en-US"/>
           </a:p>
@@ -3414,7 +3415,7 @@
           <a:p>
             <a:fld id="{79806886-C3E2-4AA6-AE5C-EC60C7639E42}" type="datetimeFigureOut">
               <a:rPr lang="en-US" smtClean="0"/>
-              <a:t>4/28/2026</a:t>
+              <a:t>5/17/2026</a:t>
             </a:fld>
             <a:endParaRPr lang="en-US"/>
           </a:p>
@@ -3658,7 +3659,7 @@
           <a:p>
             <a:fld id="{79806886-C3E2-4AA6-AE5C-EC60C7639E42}" type="datetimeFigureOut">
               <a:rPr lang="en-US" smtClean="0"/>
-              <a:t>4/28/2026</a:t>
+              <a:t>5/17/2026</a:t>
             </a:fld>
             <a:endParaRPr lang="en-US"/>
           </a:p>
@@ -3894,7 +3895,7 @@
           <a:p>
             <a:fld id="{79806886-C3E2-4AA6-AE5C-EC60C7639E42}" type="datetimeFigureOut">
               <a:rPr lang="en-US" smtClean="0"/>
-              <a:t>4/28/2026</a:t>
+              <a:t>5/17/2026</a:t>
             </a:fld>
             <a:endParaRPr lang="en-US"/>
           </a:p>
@@ -4360,7 +4361,7 @@
           <a:p>
             <a:fld id="{79806886-C3E2-4AA6-AE5C-EC60C7639E42}" type="datetimeFigureOut">
               <a:rPr lang="en-US" smtClean="0"/>
-              <a:t>4/28/2026</a:t>
+              <a:t>5/17/2026</a:t>
             </a:fld>
             <a:endParaRPr lang="en-US"/>
           </a:p>
@@ -4478,7 +4479,7 @@
           <a:p>
             <a:fld id="{79806886-C3E2-4AA6-AE5C-EC60C7639E42}" type="datetimeFigureOut">
               <a:rPr lang="en-US" smtClean="0"/>
-              <a:t>4/28/2026</a:t>
+              <a:t>5/17/2026</a:t>
             </a:fld>
             <a:endParaRPr lang="en-US"/>
           </a:p>
@@ -4573,7 +4574,7 @@
           <a:p>
             <a:fld id="{79806886-C3E2-4AA6-AE5C-EC60C7639E42}" type="datetimeFigureOut">
               <a:rPr lang="en-US" smtClean="0"/>
-              <a:t>4/28/2026</a:t>
+              <a:t>5/17/2026</a:t>
             </a:fld>
             <a:endParaRPr lang="en-US"/>
           </a:p>
@@ -4828,7 +4829,7 @@
           <a:p>
             <a:fld id="{79806886-C3E2-4AA6-AE5C-EC60C7639E42}" type="datetimeFigureOut">
               <a:rPr lang="en-US" smtClean="0"/>
-              <a:t>4/28/2026</a:t>
+              <a:t>5/17/2026</a:t>
             </a:fld>
             <a:endParaRPr lang="en-US"/>
           </a:p>
@@ -5128,7 +5129,7 @@
           <a:p>
             <a:fld id="{79806886-C3E2-4AA6-AE5C-EC60C7639E42}" type="datetimeFigureOut">
               <a:rPr lang="en-US" smtClean="0"/>
-              <a:t>4/28/2026</a:t>
+              <a:t>5/17/2026</a:t>
             </a:fld>
             <a:endParaRPr lang="en-US"/>
           </a:p>
@@ -5362,7 +5363,7 @@
           <a:p>
             <a:fld id="{79806886-C3E2-4AA6-AE5C-EC60C7639E42}" type="datetimeFigureOut">
               <a:rPr lang="en-US" smtClean="0"/>
-              <a:t>4/28/2026</a:t>
+              <a:t>5/17/2026</a:t>
             </a:fld>
             <a:endParaRPr lang="en-US"/>
           </a:p>
@@ -6121,7 +6122,7 @@
           <p:cNvPr id="2" name="Title 1">
             <a:extLst>
               <a:ext uri="{FF2B5EF4-FFF2-40B4-BE49-F238E27FC236}">
-                <a16:creationId xmlns:a16="http://schemas.microsoft.com/office/drawing/2014/main" id="{204F4AEA-1971-E800-703E-69F376F262A9}"/>
+                <a16:creationId xmlns:a16="http://schemas.microsoft.com/office/drawing/2014/main" id="{C6017F55-A87E-8987-8C53-D352FE5F6AD4}"/>
               </a:ext>
             </a:extLst>
           </p:cNvPr>
@@ -6135,7 +6136,7 @@
         <p:spPr>
           <a:xfrm>
             <a:off x="913795" y="0"/>
-            <a:ext cx="10353762" cy="753533"/>
+            <a:ext cx="10353762" cy="970450"/>
           </a:xfrm>
         </p:spPr>
         <p:txBody>
@@ -6144,11 +6145,12 @@
           <a:p>
             <a:r>
               <a:rPr lang="en-US" b="1">
-                <a:effectLst/>
+                <a:solidFill>
+                  <a:srgbClr val="FF0000"/>
+                </a:solidFill>
               </a:rPr>
-              <a:t>Association </a:t>
-            </a:r>
-            <a:endParaRPr lang="en-US"/>
+              <a:t>Left join in .net 10</a:t>
+            </a:r>
           </a:p>
         </p:txBody>
       </p:sp>
@@ -6157,7 +6159,7 @@
           <p:cNvPr id="3" name="Content Placeholder 2">
             <a:extLst>
               <a:ext uri="{FF2B5EF4-FFF2-40B4-BE49-F238E27FC236}">
-                <a16:creationId xmlns:a16="http://schemas.microsoft.com/office/drawing/2014/main" id="{2F56D789-EEAB-71E6-ECF8-CFF49F4FD004}"/>
+                <a16:creationId xmlns:a16="http://schemas.microsoft.com/office/drawing/2014/main" id="{F573BCEA-3A25-B8DF-FB6E-C613885C8F25}"/>
               </a:ext>
             </a:extLst>
           </p:cNvPr>
@@ -6170,75 +6172,20 @@
         </p:nvSpPr>
         <p:spPr>
           <a:xfrm>
-            <a:off x="177800" y="897467"/>
-            <a:ext cx="11844867" cy="5698066"/>
+            <a:off x="143933" y="970450"/>
+            <a:ext cx="11954934" cy="5785949"/>
           </a:xfrm>
         </p:spPr>
         <p:txBody>
           <a:bodyPr/>
           <a:lstStyle/>
           <a:p>
-            <a:r>
-              <a:rPr lang="en-US" b="1">
-                <a:effectLst/>
-              </a:rPr>
-              <a:t>Uses-A"</a:t>
-            </a:r>
-            <a:r>
-              <a:rPr lang="en-US" b="1">
-                <a:solidFill>
-                  <a:srgbClr val="FFFF00"/>
-                </a:solidFill>
-                <a:effectLst/>
-              </a:rPr>
-              <a:t>Relationship</a:t>
-            </a:r>
-            <a:r>
-              <a:rPr lang="en-US" b="1">
-                <a:effectLst/>
-              </a:rPr>
-              <a:t>"</a:t>
-            </a:r>
-            <a:endParaRPr lang="en-US">
-              <a:effectLst/>
-            </a:endParaRPr>
-          </a:p>
-          <a:p>
-            <a:r>
-              <a:rPr lang="en-US">
-                <a:effectLst/>
-              </a:rPr>
-              <a:t>It defines a link between two </a:t>
-            </a:r>
-            <a:r>
-              <a:rPr lang="en-US" b="1">
-                <a:solidFill>
-                  <a:srgbClr val="FFFF00"/>
-                </a:solidFill>
-                <a:effectLst/>
-              </a:rPr>
-              <a:t>independent</a:t>
-            </a:r>
-            <a:r>
-              <a:rPr lang="en-US">
-                <a:effectLst/>
-              </a:rPr>
-              <a:t> objects where they use each other to perform actions, but neither "owns" the other.</a:t>
-            </a:r>
-          </a:p>
-          <a:p>
-            <a:r>
-              <a:rPr lang="en-US" b="1">
-                <a:effectLst/>
-              </a:rPr>
-              <a:t>Implementation: </a:t>
-            </a:r>
-            <a:r>
-              <a:rPr lang="en-US">
-                <a:effectLst/>
-              </a:rPr>
-              <a:t>by passing an object as a parameter to a method.</a:t>
-            </a:r>
+            <a:endParaRPr lang="en-US"/>
+          </a:p>
+          <a:p>
+            <a:endParaRPr lang="en-US"/>
+          </a:p>
+          <a:p>
             <a:endParaRPr lang="en-US"/>
           </a:p>
         </p:txBody>
@@ -6248,7 +6195,7 @@
           <p:cNvPr id="5" name="Picture 4">
             <a:extLst>
               <a:ext uri="{FF2B5EF4-FFF2-40B4-BE49-F238E27FC236}">
-                <a16:creationId xmlns:a16="http://schemas.microsoft.com/office/drawing/2014/main" id="{0134ABA0-88FD-1776-477D-E864080379AA}"/>
+                <a16:creationId xmlns:a16="http://schemas.microsoft.com/office/drawing/2014/main" id="{1A68C370-4A46-552D-83CE-7E9DB643D26E}"/>
               </a:ext>
             </a:extLst>
           </p:cNvPr>
@@ -6265,8 +6212,8 @@
         </p:blipFill>
         <p:spPr>
           <a:xfrm>
-            <a:off x="311776" y="2788392"/>
-            <a:ext cx="6063623" cy="2881812"/>
+            <a:off x="271574" y="885510"/>
+            <a:ext cx="5824426" cy="2921577"/>
           </a:xfrm>
           <a:prstGeom prst="rect">
             <a:avLst/>
@@ -6276,7 +6223,7 @@
     </p:spTree>
     <p:extLst>
       <p:ext uri="{BB962C8B-B14F-4D97-AF65-F5344CB8AC3E}">
-        <p14:creationId xmlns:p14="http://schemas.microsoft.com/office/powerpoint/2010/main" val="2546003169"/>
+        <p14:creationId xmlns:p14="http://schemas.microsoft.com/office/powerpoint/2010/main" val="1885605593"/>
       </p:ext>
     </p:extLst>
   </p:cSld>
@@ -6308,7 +6255,7 @@
           <p:cNvPr id="2" name="Title 1">
             <a:extLst>
               <a:ext uri="{FF2B5EF4-FFF2-40B4-BE49-F238E27FC236}">
-                <a16:creationId xmlns:a16="http://schemas.microsoft.com/office/drawing/2014/main" id="{264267C5-BAE5-0154-04C1-96AF1FC31AB4}"/>
+                <a16:creationId xmlns:a16="http://schemas.microsoft.com/office/drawing/2014/main" id="{204F4AEA-1971-E800-703E-69F376F262A9}"/>
               </a:ext>
             </a:extLst>
           </p:cNvPr>
@@ -6322,20 +6269,18 @@
         <p:spPr>
           <a:xfrm>
             <a:off x="913795" y="0"/>
-            <a:ext cx="10353762" cy="651933"/>
-          </a:xfrm>
-        </p:spPr>
-        <p:txBody>
-          <a:bodyPr>
-            <a:normAutofit fontScale="90000"/>
-          </a:bodyPr>
+            <a:ext cx="10353762" cy="753533"/>
+          </a:xfrm>
+        </p:spPr>
+        <p:txBody>
+          <a:bodyPr/>
           <a:lstStyle/>
           <a:p>
             <a:r>
               <a:rPr lang="en-US" b="1">
                 <a:effectLst/>
               </a:rPr>
-              <a:t>Aggregation </a:t>
+              <a:t>Association </a:t>
             </a:r>
             <a:endParaRPr lang="en-US"/>
           </a:p>
@@ -6346,7 +6291,7 @@
           <p:cNvPr id="3" name="Content Placeholder 2">
             <a:extLst>
               <a:ext uri="{FF2B5EF4-FFF2-40B4-BE49-F238E27FC236}">
-                <a16:creationId xmlns:a16="http://schemas.microsoft.com/office/drawing/2014/main" id="{D665FE83-4CE4-A8FB-78C3-FC7CC7279430}"/>
+                <a16:creationId xmlns:a16="http://schemas.microsoft.com/office/drawing/2014/main" id="{2F56D789-EEAB-71E6-ECF8-CFF49F4FD004}"/>
               </a:ext>
             </a:extLst>
           </p:cNvPr>
@@ -6359,8 +6304,8 @@
         </p:nvSpPr>
         <p:spPr>
           <a:xfrm>
-            <a:off x="93133" y="651933"/>
-            <a:ext cx="11980334" cy="6070600"/>
+            <a:off x="177800" y="897467"/>
+            <a:ext cx="11844867" cy="5698066"/>
           </a:xfrm>
         </p:spPr>
         <p:txBody>
@@ -6368,78 +6313,66 @@
           <a:lstStyle/>
           <a:p>
             <a:r>
-              <a:rPr lang="en-US" sz="1800" b="1">
+              <a:rPr lang="en-US" b="1">
                 <a:effectLst/>
               </a:rPr>
-              <a:t>The "Has-A" Relationship</a:t>
-            </a:r>
-          </a:p>
-          <a:p>
-            <a:r>
-              <a:rPr lang="en-US" sz="1800" b="1">
-                <a:effectLst/>
-              </a:rPr>
-              <a:t>C# Implementation:</a:t>
-            </a:r>
-            <a:r>
-              <a:rPr lang="en-US" sz="1800">
-                <a:effectLst/>
-              </a:rPr>
-              <a:t> </a:t>
-            </a:r>
-            <a:r>
-              <a:rPr lang="en-US" sz="1800" b="1">
-                <a:effectLst/>
-              </a:rPr>
-              <a:t>Usually implemented by passing the child object into the parent’s constructor or property (</a:t>
-            </a:r>
-            <a:r>
-              <a:rPr lang="en-US" sz="1800" b="1">
+              <a:t>Uses-A"</a:t>
+            </a:r>
+            <a:r>
+              <a:rPr lang="en-US" b="1">
                 <a:solidFill>
                   <a:srgbClr val="FFFF00"/>
                 </a:solidFill>
                 <a:effectLst/>
               </a:rPr>
-              <a:t>Dependency Injection</a:t>
-            </a:r>
-            <a:r>
-              <a:rPr lang="en-US" sz="1800" b="1">
-                <a:effectLst/>
-              </a:rPr>
-              <a:t>)</a:t>
-            </a:r>
-          </a:p>
-          <a:p>
+              <a:t>Relationship</a:t>
+            </a:r>
             <a:r>
               <a:rPr lang="en-US" b="1">
                 <a:effectLst/>
               </a:rPr>
-              <a:t>Here </a:t>
-            </a:r>
-            <a:r>
-              <a:rPr lang="en-US"/>
-              <a:t>children (teachers) can live without parent [ department ]</a:t>
-            </a:r>
-            <a:endParaRPr lang="en-US" b="1">
+              <a:t>"</a:t>
+            </a:r>
+            <a:endParaRPr lang="en-US">
               <a:effectLst/>
             </a:endParaRPr>
           </a:p>
           <a:p>
-            <a:endParaRPr lang="en-US" b="1">
-              <a:effectLst/>
-            </a:endParaRPr>
-          </a:p>
-          <a:p>
-            <a:endParaRPr lang="en-US" b="1">
-              <a:effectLst/>
-            </a:endParaRPr>
-          </a:p>
-          <a:p>
-            <a:endParaRPr lang="en-US" b="1">
-              <a:effectLst/>
-            </a:endParaRPr>
-          </a:p>
-          <a:p>
+            <a:r>
+              <a:rPr lang="en-US">
+                <a:effectLst/>
+              </a:rPr>
+              <a:t>It defines a link between two </a:t>
+            </a:r>
+            <a:r>
+              <a:rPr lang="en-US" b="1">
+                <a:solidFill>
+                  <a:srgbClr val="FFFF00"/>
+                </a:solidFill>
+                <a:effectLst/>
+              </a:rPr>
+              <a:t>independent</a:t>
+            </a:r>
+            <a:r>
+              <a:rPr lang="en-US">
+                <a:effectLst/>
+              </a:rPr>
+              <a:t> objects where they use each other to perform actions, but neither "owns" the other.</a:t>
+            </a:r>
+          </a:p>
+          <a:p>
+            <a:r>
+              <a:rPr lang="en-US" b="1">
+                <a:effectLst/>
+              </a:rPr>
+              <a:t>Implementation: </a:t>
+            </a:r>
+            <a:r>
+              <a:rPr lang="en-US">
+                <a:effectLst/>
+              </a:rPr>
+              <a:t>by passing an object as a parameter to a method.</a:t>
+            </a:r>
             <a:endParaRPr lang="en-US"/>
           </a:p>
         </p:txBody>
@@ -6449,7 +6382,7 @@
           <p:cNvPr id="5" name="Picture 4">
             <a:extLst>
               <a:ext uri="{FF2B5EF4-FFF2-40B4-BE49-F238E27FC236}">
-                <a16:creationId xmlns:a16="http://schemas.microsoft.com/office/drawing/2014/main" id="{89992E4A-01A8-4933-2AB5-554C036CF0B2}"/>
+                <a16:creationId xmlns:a16="http://schemas.microsoft.com/office/drawing/2014/main" id="{0134ABA0-88FD-1776-477D-E864080379AA}"/>
               </a:ext>
             </a:extLst>
           </p:cNvPr>
@@ -6466,8 +6399,8 @@
         </p:blipFill>
         <p:spPr>
           <a:xfrm>
-            <a:off x="118533" y="2684926"/>
-            <a:ext cx="4885267" cy="3147614"/>
+            <a:off x="311776" y="2788392"/>
+            <a:ext cx="6063623" cy="2881812"/>
           </a:xfrm>
           <a:prstGeom prst="rect">
             <a:avLst/>
@@ -6477,7 +6410,7 @@
     </p:spTree>
     <p:extLst>
       <p:ext uri="{BB962C8B-B14F-4D97-AF65-F5344CB8AC3E}">
-        <p14:creationId xmlns:p14="http://schemas.microsoft.com/office/powerpoint/2010/main" val="3768059492"/>
+        <p14:creationId xmlns:p14="http://schemas.microsoft.com/office/powerpoint/2010/main" val="2546003169"/>
       </p:ext>
     </p:extLst>
   </p:cSld>
@@ -6509,7 +6442,7 @@
           <p:cNvPr id="2" name="Title 1">
             <a:extLst>
               <a:ext uri="{FF2B5EF4-FFF2-40B4-BE49-F238E27FC236}">
-                <a16:creationId xmlns:a16="http://schemas.microsoft.com/office/drawing/2014/main" id="{E52B5755-B757-6CAE-6FCA-355EA02E6B56}"/>
+                <a16:creationId xmlns:a16="http://schemas.microsoft.com/office/drawing/2014/main" id="{264267C5-BAE5-0154-04C1-96AF1FC31AB4}"/>
               </a:ext>
             </a:extLst>
           </p:cNvPr>
@@ -6523,7 +6456,7 @@
         <p:spPr>
           <a:xfrm>
             <a:off x="913795" y="0"/>
-            <a:ext cx="10353762" cy="609600"/>
+            <a:ext cx="10353762" cy="651933"/>
           </a:xfrm>
         </p:spPr>
         <p:txBody>
@@ -6536,7 +6469,7 @@
               <a:rPr lang="en-US" b="1">
                 <a:effectLst/>
               </a:rPr>
-              <a:t>Composition </a:t>
+              <a:t>Aggregation </a:t>
             </a:r>
             <a:endParaRPr lang="en-US"/>
           </a:p>
@@ -6547,7 +6480,7 @@
           <p:cNvPr id="3" name="Content Placeholder 2">
             <a:extLst>
               <a:ext uri="{FF2B5EF4-FFF2-40B4-BE49-F238E27FC236}">
-                <a16:creationId xmlns:a16="http://schemas.microsoft.com/office/drawing/2014/main" id="{43BDCBF4-E275-B0F1-7606-6B1E25C882FD}"/>
+                <a16:creationId xmlns:a16="http://schemas.microsoft.com/office/drawing/2014/main" id="{D665FE83-4CE4-A8FB-78C3-FC7CC7279430}"/>
               </a:ext>
             </a:extLst>
           </p:cNvPr>
@@ -6560,30 +6493,77 @@
         </p:nvSpPr>
         <p:spPr>
           <a:xfrm>
-            <a:off x="101600" y="609601"/>
-            <a:ext cx="12022667" cy="6155266"/>
+            <a:off x="93133" y="651933"/>
+            <a:ext cx="11980334" cy="6070600"/>
           </a:xfrm>
         </p:spPr>
         <p:txBody>
           <a:bodyPr/>
           <a:lstStyle/>
+          <a:p>
+            <a:r>
+              <a:rPr lang="en-US" sz="1800" b="1">
+                <a:effectLst/>
+              </a:rPr>
+              <a:t>The "Has-A" Relationship</a:t>
+            </a:r>
+          </a:p>
+          <a:p>
+            <a:r>
+              <a:rPr lang="en-US" sz="1800" b="1">
+                <a:effectLst/>
+              </a:rPr>
+              <a:t>C# Implementation:</a:t>
+            </a:r>
+            <a:r>
+              <a:rPr lang="en-US" sz="1800">
+                <a:effectLst/>
+              </a:rPr>
+              <a:t> </a:t>
+            </a:r>
+            <a:r>
+              <a:rPr lang="en-US" sz="1800" b="1">
+                <a:effectLst/>
+              </a:rPr>
+              <a:t>Usually implemented by passing the child object into the parent’s constructor or property (</a:t>
+            </a:r>
+            <a:r>
+              <a:rPr lang="en-US" sz="1800" b="1">
+                <a:solidFill>
+                  <a:srgbClr val="FFFF00"/>
+                </a:solidFill>
+                <a:effectLst/>
+              </a:rPr>
+              <a:t>Dependency Injection</a:t>
+            </a:r>
+            <a:r>
+              <a:rPr lang="en-US" sz="1800" b="1">
+                <a:effectLst/>
+              </a:rPr>
+              <a:t>)</a:t>
+            </a:r>
+          </a:p>
           <a:p>
             <a:r>
               <a:rPr lang="en-US" b="1">
                 <a:effectLst/>
               </a:rPr>
-              <a:t>The "Part-Of" Relationship</a:t>
-            </a:r>
-          </a:p>
-          <a:p>
-            <a:r>
-              <a:rPr lang="en-US" b="1"/>
-              <a:t>child cannot exist without parent</a:t>
-            </a:r>
-            <a:r>
-              <a:rPr lang="en-US"/>
-              <a:t>.</a:t>
-            </a:r>
+              <a:t>Here </a:t>
+            </a:r>
+            <a:r>
+              <a:rPr lang="en-US"/>
+              <a:t>children (teachers) can live without parent [ department ]</a:t>
+            </a:r>
+            <a:endParaRPr lang="en-US" b="1">
+              <a:effectLst/>
+            </a:endParaRPr>
+          </a:p>
+          <a:p>
+            <a:endParaRPr lang="en-US" b="1">
+              <a:effectLst/>
+            </a:endParaRPr>
+          </a:p>
+          <a:p>
             <a:endParaRPr lang="en-US" b="1">
               <a:effectLst/>
             </a:endParaRPr>
@@ -6603,7 +6583,7 @@
           <p:cNvPr id="5" name="Picture 4">
             <a:extLst>
               <a:ext uri="{FF2B5EF4-FFF2-40B4-BE49-F238E27FC236}">
-                <a16:creationId xmlns:a16="http://schemas.microsoft.com/office/drawing/2014/main" id="{0ABBE13F-38DC-0375-5425-89FF89DE68DB}"/>
+                <a16:creationId xmlns:a16="http://schemas.microsoft.com/office/drawing/2014/main" id="{89992E4A-01A8-4933-2AB5-554C036CF0B2}"/>
               </a:ext>
             </a:extLst>
           </p:cNvPr>
@@ -6620,8 +6600,8 @@
         </p:blipFill>
         <p:spPr>
           <a:xfrm>
-            <a:off x="101600" y="1727965"/>
-            <a:ext cx="4719468" cy="2526795"/>
+            <a:off x="118533" y="2684926"/>
+            <a:ext cx="4885267" cy="3147614"/>
           </a:xfrm>
           <a:prstGeom prst="rect">
             <a:avLst/>
@@ -6631,7 +6611,7 @@
     </p:spTree>
     <p:extLst>
       <p:ext uri="{BB962C8B-B14F-4D97-AF65-F5344CB8AC3E}">
-        <p14:creationId xmlns:p14="http://schemas.microsoft.com/office/powerpoint/2010/main" val="3138428670"/>
+        <p14:creationId xmlns:p14="http://schemas.microsoft.com/office/powerpoint/2010/main" val="3768059492"/>
       </p:ext>
     </p:extLst>
   </p:cSld>
@@ -6663,7 +6643,7 @@
           <p:cNvPr id="2" name="Title 1">
             <a:extLst>
               <a:ext uri="{FF2B5EF4-FFF2-40B4-BE49-F238E27FC236}">
-                <a16:creationId xmlns:a16="http://schemas.microsoft.com/office/drawing/2014/main" id="{18BD19B6-E7B4-D6B7-EA34-EAE44153C85E}"/>
+                <a16:creationId xmlns:a16="http://schemas.microsoft.com/office/drawing/2014/main" id="{E52B5755-B757-6CAE-6FCA-355EA02E6B56}"/>
               </a:ext>
             </a:extLst>
           </p:cNvPr>
@@ -6688,12 +6668,11 @@
           <a:p>
             <a:r>
               <a:rPr lang="en-US" b="1">
-                <a:solidFill>
-                  <a:srgbClr val="FF0000"/>
-                </a:solidFill>
+                <a:effectLst/>
               </a:rPr>
-              <a:t>CQRS</a:t>
-            </a:r>
+              <a:t>Composition </a:t>
+            </a:r>
+            <a:endParaRPr lang="en-US"/>
           </a:p>
         </p:txBody>
       </p:sp>
@@ -6702,7 +6681,7 @@
           <p:cNvPr id="3" name="Content Placeholder 2">
             <a:extLst>
               <a:ext uri="{FF2B5EF4-FFF2-40B4-BE49-F238E27FC236}">
-                <a16:creationId xmlns:a16="http://schemas.microsoft.com/office/drawing/2014/main" id="{09AB7379-F3B5-45C0-E910-A23E10E29503}"/>
+                <a16:creationId xmlns:a16="http://schemas.microsoft.com/office/drawing/2014/main" id="{43BDCBF4-E275-B0F1-7606-6B1E25C882FD}"/>
               </a:ext>
             </a:extLst>
           </p:cNvPr>
@@ -6715,154 +6694,41 @@
         </p:nvSpPr>
         <p:spPr>
           <a:xfrm>
-            <a:off x="135467" y="609601"/>
-            <a:ext cx="11997266" cy="6138332"/>
-          </a:xfrm>
-        </p:spPr>
-        <p:txBody>
-          <a:bodyPr>
-            <a:normAutofit/>
-          </a:bodyPr>
-          <a:lstStyle/>
+            <a:off x="101600" y="609601"/>
+            <a:ext cx="12022667" cy="6155266"/>
+          </a:xfrm>
+        </p:spPr>
+        <p:txBody>
+          <a:bodyPr/>
+          <a:lstStyle/>
+          <a:p>
+            <a:r>
+              <a:rPr lang="en-US" b="1">
+                <a:effectLst/>
+              </a:rPr>
+              <a:t>The "Part-Of" Relationship</a:t>
+            </a:r>
+          </a:p>
           <a:p>
             <a:r>
               <a:rPr lang="en-US" b="1"/>
-              <a:t>CQRS stands for Command and </a:t>
-            </a:r>
-            <a:r>
-              <a:rPr lang="en-US" b="1">
-                <a:solidFill>
-                  <a:srgbClr val="FF0000"/>
-                </a:solidFill>
-              </a:rPr>
-              <a:t>Query Responsibility Segregation</a:t>
-            </a:r>
-          </a:p>
-          <a:p>
-            <a:r>
-              <a:rPr lang="en-US"/>
-              <a:t>It is a design pattern that separates read operations (queries) from write operations (commands).</a:t>
-            </a:r>
-          </a:p>
-          <a:p>
-            <a:r>
-              <a:rPr lang="en-US"/>
-              <a:t>Instead of having one model/service doing everything, CQRS splits responsibilities into two sides:</a:t>
-            </a:r>
-          </a:p>
-          <a:p>
-            <a:r>
-              <a:rPr lang="en-US"/>
-              <a:t>- Core Idea</a:t>
-            </a:r>
-          </a:p>
-          <a:p>
-            <a:r>
-              <a:rPr lang="en-US"/>
-              <a:t>   - </a:t>
-            </a:r>
-            <a:r>
-              <a:rPr lang="en-US" b="1">
-                <a:solidFill>
-                  <a:srgbClr val="00B0F0"/>
-                </a:solidFill>
-              </a:rPr>
-              <a:t>Commands</a:t>
-            </a:r>
-            <a:r>
-              <a:rPr lang="en-US"/>
-              <a:t> → change state (Create, Update, Delete)</a:t>
-            </a:r>
-          </a:p>
-          <a:p>
-            <a:r>
-              <a:rPr lang="en-US"/>
-              <a:t>   - </a:t>
-            </a:r>
-            <a:r>
-              <a:rPr lang="en-US" b="1">
-                <a:solidFill>
-                  <a:srgbClr val="00B0F0"/>
-                </a:solidFill>
-              </a:rPr>
-              <a:t>Queries</a:t>
-            </a:r>
-            <a:r>
-              <a:rPr lang="en-US"/>
-              <a:t> → read data (Get, List, Search)</a:t>
-            </a:r>
-          </a:p>
-          <a:p>
-            <a:r>
-              <a:rPr lang="en-US"/>
-              <a:t>-- Application</a:t>
-            </a:r>
-          </a:p>
-          <a:p>
-            <a:pPr lvl="1"/>
-            <a:r>
-              <a:rPr lang="en-US"/>
-              <a:t> </a:t>
-            </a:r>
-            <a:r>
-              <a:rPr lang="en-US" sz="1600" b="1">
-                <a:solidFill>
-                  <a:srgbClr val="FFFF00"/>
-                </a:solidFill>
-              </a:rPr>
-              <a:t>Commands</a:t>
-            </a:r>
-          </a:p>
-          <a:p>
-            <a:pPr lvl="2"/>
-            <a:r>
-              <a:rPr lang="en-US" b="1"/>
-              <a:t>CreateOrderCommand.cs</a:t>
-            </a:r>
-          </a:p>
-          <a:p>
-            <a:pPr lvl="1"/>
-            <a:r>
-              <a:rPr lang="en-US" sz="1600" b="1">
-                <a:solidFill>
-                  <a:srgbClr val="FFFF00"/>
-                </a:solidFill>
-              </a:rPr>
-              <a:t>Queries</a:t>
-            </a:r>
-          </a:p>
-          <a:p>
-            <a:pPr lvl="2"/>
-            <a:r>
-              <a:rPr lang="en-US" b="1"/>
-              <a:t>GetOrderByIdQuery.cs</a:t>
-            </a:r>
-          </a:p>
-          <a:p>
-            <a:pPr lvl="1"/>
-            <a:r>
-              <a:rPr lang="en-US" sz="1600" b="1">
-                <a:solidFill>
-                  <a:srgbClr val="FFFF00"/>
-                </a:solidFill>
-              </a:rPr>
-              <a:t>Handlers</a:t>
-            </a:r>
-            <a:endParaRPr lang="en-US" sz="1600" b="1"/>
-          </a:p>
-          <a:p>
-            <a:pPr lvl="2"/>
-            <a:r>
-              <a:rPr lang="en-US" b="1"/>
-              <a:t>CreateOrderHandler.cs</a:t>
-            </a:r>
-          </a:p>
-          <a:p>
-            <a:pPr lvl="2"/>
-            <a:r>
-              <a:rPr lang="en-US" b="1"/>
-              <a:t>GetOrderByIdHandler.cs</a:t>
-            </a:r>
+              <a:t>child cannot exist without parent</a:t>
+            </a:r>
+            <a:r>
+              <a:rPr lang="en-US"/>
+              <a:t>.</a:t>
+            </a:r>
+            <a:endParaRPr lang="en-US" b="1">
+              <a:effectLst/>
+            </a:endParaRPr>
+          </a:p>
+          <a:p>
+            <a:endParaRPr lang="en-US" b="1">
+              <a:effectLst/>
+            </a:endParaRPr>
+          </a:p>
+          <a:p>
+            <a:endParaRPr lang="en-US"/>
           </a:p>
         </p:txBody>
       </p:sp>
@@ -6871,7 +6737,7 @@
           <p:cNvPr id="5" name="Picture 4">
             <a:extLst>
               <a:ext uri="{FF2B5EF4-FFF2-40B4-BE49-F238E27FC236}">
-                <a16:creationId xmlns:a16="http://schemas.microsoft.com/office/drawing/2014/main" id="{3DE7AA69-5920-72EC-6556-3CFCF420F3BA}"/>
+                <a16:creationId xmlns:a16="http://schemas.microsoft.com/office/drawing/2014/main" id="{0ABBE13F-38DC-0375-5425-89FF89DE68DB}"/>
               </a:ext>
             </a:extLst>
           </p:cNvPr>
@@ -6888,8 +6754,8 @@
         </p:blipFill>
         <p:spPr>
           <a:xfrm>
-            <a:off x="5046020" y="3601657"/>
-            <a:ext cx="3469826" cy="1918609"/>
+            <a:off x="101600" y="1727965"/>
+            <a:ext cx="4719468" cy="2526795"/>
           </a:xfrm>
           <a:prstGeom prst="rect">
             <a:avLst/>
@@ -6899,7 +6765,7 @@
     </p:spTree>
     <p:extLst>
       <p:ext uri="{BB962C8B-B14F-4D97-AF65-F5344CB8AC3E}">
-        <p14:creationId xmlns:p14="http://schemas.microsoft.com/office/powerpoint/2010/main" val="205078609"/>
+        <p14:creationId xmlns:p14="http://schemas.microsoft.com/office/powerpoint/2010/main" val="3138428670"/>
       </p:ext>
     </p:extLst>
   </p:cSld>
@@ -6931,7 +6797,7 @@
           <p:cNvPr id="2" name="Title 1">
             <a:extLst>
               <a:ext uri="{FF2B5EF4-FFF2-40B4-BE49-F238E27FC236}">
-                <a16:creationId xmlns:a16="http://schemas.microsoft.com/office/drawing/2014/main" id="{93FD8936-648D-D9BA-8BA1-324899E5489B}"/>
+                <a16:creationId xmlns:a16="http://schemas.microsoft.com/office/drawing/2014/main" id="{18BD19B6-E7B4-D6B7-EA34-EAE44153C85E}"/>
               </a:ext>
             </a:extLst>
           </p:cNvPr>
@@ -6944,34 +6810,202 @@
         </p:nvSpPr>
         <p:spPr>
           <a:xfrm>
-            <a:off x="913795" y="1"/>
-            <a:ext cx="10353762" cy="482600"/>
+            <a:off x="913795" y="0"/>
+            <a:ext cx="10353762" cy="609600"/>
           </a:xfrm>
         </p:spPr>
         <p:txBody>
           <a:bodyPr>
-            <a:noAutofit/>
+            <a:normAutofit fontScale="90000"/>
           </a:bodyPr>
           <a:lstStyle/>
           <a:p>
             <a:r>
-              <a:rPr lang="en-US" sz="3200" b="1">
+              <a:rPr lang="en-US" b="1">
                 <a:solidFill>
                   <a:srgbClr val="FF0000"/>
                 </a:solidFill>
               </a:rPr>
-              <a:t>CQRS [cont.]</a:t>
-            </a:r>
-            <a:endParaRPr lang="en-US" sz="3200"/>
+              <a:t>CQRS</a:t>
+            </a:r>
+          </a:p>
+        </p:txBody>
+      </p:sp>
+      <p:sp>
+        <p:nvSpPr>
+          <p:cNvPr id="3" name="Content Placeholder 2">
+            <a:extLst>
+              <a:ext uri="{FF2B5EF4-FFF2-40B4-BE49-F238E27FC236}">
+                <a16:creationId xmlns:a16="http://schemas.microsoft.com/office/drawing/2014/main" id="{09AB7379-F3B5-45C0-E910-A23E10E29503}"/>
+              </a:ext>
+            </a:extLst>
+          </p:cNvPr>
+          <p:cNvSpPr>
+            <a:spLocks noGrp="1"/>
+          </p:cNvSpPr>
+          <p:nvPr>
+            <p:ph idx="1"/>
+          </p:nvPr>
+        </p:nvSpPr>
+        <p:spPr>
+          <a:xfrm>
+            <a:off x="135467" y="609601"/>
+            <a:ext cx="11997266" cy="6138332"/>
+          </a:xfrm>
+        </p:spPr>
+        <p:txBody>
+          <a:bodyPr>
+            <a:normAutofit/>
+          </a:bodyPr>
+          <a:lstStyle/>
+          <a:p>
+            <a:r>
+              <a:rPr lang="en-US" b="1"/>
+              <a:t>CQRS stands for Command and </a:t>
+            </a:r>
+            <a:r>
+              <a:rPr lang="en-US" b="1">
+                <a:solidFill>
+                  <a:srgbClr val="FF0000"/>
+                </a:solidFill>
+              </a:rPr>
+              <a:t>Query Responsibility Segregation</a:t>
+            </a:r>
+          </a:p>
+          <a:p>
+            <a:r>
+              <a:rPr lang="en-US"/>
+              <a:t>It is a design pattern that separates read operations (queries) from write operations (commands).</a:t>
+            </a:r>
+          </a:p>
+          <a:p>
+            <a:r>
+              <a:rPr lang="en-US"/>
+              <a:t>Instead of having one model/service doing everything, CQRS splits responsibilities into two sides:</a:t>
+            </a:r>
+          </a:p>
+          <a:p>
+            <a:r>
+              <a:rPr lang="en-US"/>
+              <a:t>- Core Idea</a:t>
+            </a:r>
+          </a:p>
+          <a:p>
+            <a:r>
+              <a:rPr lang="en-US"/>
+              <a:t>   - </a:t>
+            </a:r>
+            <a:r>
+              <a:rPr lang="en-US" b="1">
+                <a:solidFill>
+                  <a:srgbClr val="00B0F0"/>
+                </a:solidFill>
+              </a:rPr>
+              <a:t>Commands</a:t>
+            </a:r>
+            <a:r>
+              <a:rPr lang="en-US"/>
+              <a:t> → change state (Create, Update, Delete)</a:t>
+            </a:r>
+          </a:p>
+          <a:p>
+            <a:r>
+              <a:rPr lang="en-US"/>
+              <a:t>   - </a:t>
+            </a:r>
+            <a:r>
+              <a:rPr lang="en-US" b="1">
+                <a:solidFill>
+                  <a:srgbClr val="00B0F0"/>
+                </a:solidFill>
+              </a:rPr>
+              <a:t>Queries</a:t>
+            </a:r>
+            <a:r>
+              <a:rPr lang="en-US"/>
+              <a:t> → read data (Get, List, Search)</a:t>
+            </a:r>
+          </a:p>
+          <a:p>
+            <a:r>
+              <a:rPr lang="en-US"/>
+              <a:t>-- Application</a:t>
+            </a:r>
+          </a:p>
+          <a:p>
+            <a:pPr lvl="1"/>
+            <a:r>
+              <a:rPr lang="en-US"/>
+              <a:t> </a:t>
+            </a:r>
+            <a:r>
+              <a:rPr lang="en-US" sz="1600" b="1">
+                <a:solidFill>
+                  <a:srgbClr val="FFFF00"/>
+                </a:solidFill>
+              </a:rPr>
+              <a:t>Commands</a:t>
+            </a:r>
+          </a:p>
+          <a:p>
+            <a:pPr lvl="2"/>
+            <a:r>
+              <a:rPr lang="en-US" b="1"/>
+              <a:t>CreateOrderCommand.cs</a:t>
+            </a:r>
+          </a:p>
+          <a:p>
+            <a:pPr lvl="1"/>
+            <a:r>
+              <a:rPr lang="en-US" sz="1600" b="1">
+                <a:solidFill>
+                  <a:srgbClr val="FFFF00"/>
+                </a:solidFill>
+              </a:rPr>
+              <a:t>Queries</a:t>
+            </a:r>
+          </a:p>
+          <a:p>
+            <a:pPr lvl="2"/>
+            <a:r>
+              <a:rPr lang="en-US" b="1"/>
+              <a:t>GetOrderByIdQuery.cs</a:t>
+            </a:r>
+          </a:p>
+          <a:p>
+            <a:pPr lvl="1"/>
+            <a:r>
+              <a:rPr lang="en-US" sz="1600" b="1">
+                <a:solidFill>
+                  <a:srgbClr val="FFFF00"/>
+                </a:solidFill>
+              </a:rPr>
+              <a:t>Handlers</a:t>
+            </a:r>
+            <a:endParaRPr lang="en-US" sz="1600" b="1"/>
+          </a:p>
+          <a:p>
+            <a:pPr lvl="2"/>
+            <a:r>
+              <a:rPr lang="en-US" b="1"/>
+              <a:t>CreateOrderHandler.cs</a:t>
+            </a:r>
+          </a:p>
+          <a:p>
+            <a:pPr lvl="2"/>
+            <a:r>
+              <a:rPr lang="en-US" b="1"/>
+              <a:t>GetOrderByIdHandler.cs</a:t>
+            </a:r>
           </a:p>
         </p:txBody>
       </p:sp>
       <p:pic>
         <p:nvPicPr>
-          <p:cNvPr id="7" name="Picture 6">
+          <p:cNvPr id="5" name="Picture 4">
             <a:extLst>
               <a:ext uri="{FF2B5EF4-FFF2-40B4-BE49-F238E27FC236}">
-                <a16:creationId xmlns:a16="http://schemas.microsoft.com/office/drawing/2014/main" id="{92A6B526-486E-96C5-BF0B-7527114EAA20}"/>
+                <a16:creationId xmlns:a16="http://schemas.microsoft.com/office/drawing/2014/main" id="{3DE7AA69-5920-72EC-6556-3CFCF420F3BA}"/>
               </a:ext>
             </a:extLst>
           </p:cNvPr>
@@ -6988,68 +7022,8 @@
         </p:blipFill>
         <p:spPr>
           <a:xfrm>
-            <a:off x="564628" y="538161"/>
-            <a:ext cx="5526048" cy="3229506"/>
-          </a:xfrm>
-          <a:prstGeom prst="rect">
-            <a:avLst/>
-          </a:prstGeom>
-        </p:spPr>
-      </p:pic>
-      <p:pic>
-        <p:nvPicPr>
-          <p:cNvPr id="9" name="Picture 8">
-            <a:extLst>
-              <a:ext uri="{FF2B5EF4-FFF2-40B4-BE49-F238E27FC236}">
-                <a16:creationId xmlns:a16="http://schemas.microsoft.com/office/drawing/2014/main" id="{98C71119-4ADF-618D-29F0-B255D7F714ED}"/>
-              </a:ext>
-            </a:extLst>
-          </p:cNvPr>
-          <p:cNvPicPr>
-            <a:picLocks noChangeAspect="1"/>
-          </p:cNvPicPr>
-          <p:nvPr/>
-        </p:nvPicPr>
-        <p:blipFill>
-          <a:blip r:embed="rId3"/>
-          <a:stretch>
-            <a:fillRect/>
-          </a:stretch>
-        </p:blipFill>
-        <p:spPr>
-          <a:xfrm>
-            <a:off x="564628" y="3827987"/>
-            <a:ext cx="5526048" cy="3030012"/>
-          </a:xfrm>
-          <a:prstGeom prst="rect">
-            <a:avLst/>
-          </a:prstGeom>
-        </p:spPr>
-      </p:pic>
-      <p:pic>
-        <p:nvPicPr>
-          <p:cNvPr id="13" name="Picture 12">
-            <a:extLst>
-              <a:ext uri="{FF2B5EF4-FFF2-40B4-BE49-F238E27FC236}">
-                <a16:creationId xmlns:a16="http://schemas.microsoft.com/office/drawing/2014/main" id="{37BE61BF-A50B-9557-B63A-22A3C6D43743}"/>
-              </a:ext>
-            </a:extLst>
-          </p:cNvPr>
-          <p:cNvPicPr>
-            <a:picLocks noChangeAspect="1"/>
-          </p:cNvPicPr>
-          <p:nvPr/>
-        </p:nvPicPr>
-        <p:blipFill>
-          <a:blip r:embed="rId4"/>
-          <a:stretch>
-            <a:fillRect/>
-          </a:stretch>
-        </p:blipFill>
-        <p:spPr>
-          <a:xfrm>
-            <a:off x="6766443" y="819722"/>
-            <a:ext cx="4942957" cy="4523271"/>
+            <a:off x="5046020" y="3601657"/>
+            <a:ext cx="3469826" cy="1918609"/>
           </a:xfrm>
           <a:prstGeom prst="rect">
             <a:avLst/>
@@ -7059,7 +7033,7 @@
     </p:spTree>
     <p:extLst>
       <p:ext uri="{BB962C8B-B14F-4D97-AF65-F5344CB8AC3E}">
-        <p14:creationId xmlns:p14="http://schemas.microsoft.com/office/powerpoint/2010/main" val="2017616460"/>
+        <p14:creationId xmlns:p14="http://schemas.microsoft.com/office/powerpoint/2010/main" val="205078609"/>
       </p:ext>
     </p:extLst>
   </p:cSld>
@@ -7091,7 +7065,7 @@
           <p:cNvPr id="2" name="Title 1">
             <a:extLst>
               <a:ext uri="{FF2B5EF4-FFF2-40B4-BE49-F238E27FC236}">
-                <a16:creationId xmlns:a16="http://schemas.microsoft.com/office/drawing/2014/main" id="{E1A8B0CF-9FBD-570C-8889-185A96C90ED4}"/>
+                <a16:creationId xmlns:a16="http://schemas.microsoft.com/office/drawing/2014/main" id="{93FD8936-648D-D9BA-8BA1-324899E5489B}"/>
               </a:ext>
             </a:extLst>
           </p:cNvPr>
@@ -7102,44 +7076,124 @@
             <p:ph type="title"/>
           </p:nvPr>
         </p:nvSpPr>
-        <p:spPr/>
-        <p:txBody>
-          <a:bodyPr/>
-          <a:lstStyle/>
-          <a:p>
-            <a:endParaRPr lang="en-US"/>
-          </a:p>
-        </p:txBody>
-      </p:sp>
-      <p:sp>
-        <p:nvSpPr>
-          <p:cNvPr id="3" name="Content Placeholder 2">
+        <p:spPr>
+          <a:xfrm>
+            <a:off x="913795" y="1"/>
+            <a:ext cx="10353762" cy="482600"/>
+          </a:xfrm>
+        </p:spPr>
+        <p:txBody>
+          <a:bodyPr>
+            <a:noAutofit/>
+          </a:bodyPr>
+          <a:lstStyle/>
+          <a:p>
+            <a:r>
+              <a:rPr lang="en-US" sz="3200" b="1">
+                <a:solidFill>
+                  <a:srgbClr val="FF0000"/>
+                </a:solidFill>
+              </a:rPr>
+              <a:t>CQRS [cont.]</a:t>
+            </a:r>
+            <a:endParaRPr lang="en-US" sz="3200"/>
+          </a:p>
+        </p:txBody>
+      </p:sp>
+      <p:pic>
+        <p:nvPicPr>
+          <p:cNvPr id="7" name="Picture 6">
             <a:extLst>
               <a:ext uri="{FF2B5EF4-FFF2-40B4-BE49-F238E27FC236}">
-                <a16:creationId xmlns:a16="http://schemas.microsoft.com/office/drawing/2014/main" id="{2DA12D25-9BC0-E54F-F8F5-E9C371D629F5}"/>
+                <a16:creationId xmlns:a16="http://schemas.microsoft.com/office/drawing/2014/main" id="{92A6B526-486E-96C5-BF0B-7527114EAA20}"/>
               </a:ext>
             </a:extLst>
           </p:cNvPr>
-          <p:cNvSpPr>
-            <a:spLocks noGrp="1"/>
-          </p:cNvSpPr>
-          <p:nvPr>
-            <p:ph idx="1"/>
-          </p:nvPr>
-        </p:nvSpPr>
-        <p:spPr/>
-        <p:txBody>
-          <a:bodyPr/>
-          <a:lstStyle/>
-          <a:p>
-            <a:endParaRPr lang="en-US"/>
-          </a:p>
-        </p:txBody>
-      </p:sp>
+          <p:cNvPicPr>
+            <a:picLocks noChangeAspect="1"/>
+          </p:cNvPicPr>
+          <p:nvPr/>
+        </p:nvPicPr>
+        <p:blipFill>
+          <a:blip r:embed="rId2"/>
+          <a:stretch>
+            <a:fillRect/>
+          </a:stretch>
+        </p:blipFill>
+        <p:spPr>
+          <a:xfrm>
+            <a:off x="564628" y="538161"/>
+            <a:ext cx="5526048" cy="3229506"/>
+          </a:xfrm>
+          <a:prstGeom prst="rect">
+            <a:avLst/>
+          </a:prstGeom>
+        </p:spPr>
+      </p:pic>
+      <p:pic>
+        <p:nvPicPr>
+          <p:cNvPr id="9" name="Picture 8">
+            <a:extLst>
+              <a:ext uri="{FF2B5EF4-FFF2-40B4-BE49-F238E27FC236}">
+                <a16:creationId xmlns:a16="http://schemas.microsoft.com/office/drawing/2014/main" id="{98C71119-4ADF-618D-29F0-B255D7F714ED}"/>
+              </a:ext>
+            </a:extLst>
+          </p:cNvPr>
+          <p:cNvPicPr>
+            <a:picLocks noChangeAspect="1"/>
+          </p:cNvPicPr>
+          <p:nvPr/>
+        </p:nvPicPr>
+        <p:blipFill>
+          <a:blip r:embed="rId3"/>
+          <a:stretch>
+            <a:fillRect/>
+          </a:stretch>
+        </p:blipFill>
+        <p:spPr>
+          <a:xfrm>
+            <a:off x="564628" y="3827987"/>
+            <a:ext cx="5526048" cy="3030012"/>
+          </a:xfrm>
+          <a:prstGeom prst="rect">
+            <a:avLst/>
+          </a:prstGeom>
+        </p:spPr>
+      </p:pic>
+      <p:pic>
+        <p:nvPicPr>
+          <p:cNvPr id="13" name="Picture 12">
+            <a:extLst>
+              <a:ext uri="{FF2B5EF4-FFF2-40B4-BE49-F238E27FC236}">
+                <a16:creationId xmlns:a16="http://schemas.microsoft.com/office/drawing/2014/main" id="{37BE61BF-A50B-9557-B63A-22A3C6D43743}"/>
+              </a:ext>
+            </a:extLst>
+          </p:cNvPr>
+          <p:cNvPicPr>
+            <a:picLocks noChangeAspect="1"/>
+          </p:cNvPicPr>
+          <p:nvPr/>
+        </p:nvPicPr>
+        <p:blipFill>
+          <a:blip r:embed="rId4"/>
+          <a:stretch>
+            <a:fillRect/>
+          </a:stretch>
+        </p:blipFill>
+        <p:spPr>
+          <a:xfrm>
+            <a:off x="6766443" y="819722"/>
+            <a:ext cx="4942957" cy="4523271"/>
+          </a:xfrm>
+          <a:prstGeom prst="rect">
+            <a:avLst/>
+          </a:prstGeom>
+        </p:spPr>
+      </p:pic>
     </p:spTree>
     <p:extLst>
       <p:ext uri="{BB962C8B-B14F-4D97-AF65-F5344CB8AC3E}">
-        <p14:creationId xmlns:p14="http://schemas.microsoft.com/office/powerpoint/2010/main" val="2952004057"/>
+        <p14:creationId xmlns:p14="http://schemas.microsoft.com/office/powerpoint/2010/main" val="2017616460"/>
       </p:ext>
     </p:extLst>
   </p:cSld>
@@ -7168,10 +7222,35 @@
       </p:grpSpPr>
       <p:sp>
         <p:nvSpPr>
+          <p:cNvPr id="2" name="Title 1">
+            <a:extLst>
+              <a:ext uri="{FF2B5EF4-FFF2-40B4-BE49-F238E27FC236}">
+                <a16:creationId xmlns:a16="http://schemas.microsoft.com/office/drawing/2014/main" id="{E1A8B0CF-9FBD-570C-8889-185A96C90ED4}"/>
+              </a:ext>
+            </a:extLst>
+          </p:cNvPr>
+          <p:cNvSpPr>
+            <a:spLocks noGrp="1"/>
+          </p:cNvSpPr>
+          <p:nvPr>
+            <p:ph type="title"/>
+          </p:nvPr>
+        </p:nvSpPr>
+        <p:spPr/>
+        <p:txBody>
+          <a:bodyPr/>
+          <a:lstStyle/>
+          <a:p>
+            <a:endParaRPr lang="en-US"/>
+          </a:p>
+        </p:txBody>
+      </p:sp>
+      <p:sp>
+        <p:nvSpPr>
           <p:cNvPr id="3" name="Content Placeholder 2">
             <a:extLst>
               <a:ext uri="{FF2B5EF4-FFF2-40B4-BE49-F238E27FC236}">
-                <a16:creationId xmlns:a16="http://schemas.microsoft.com/office/drawing/2014/main" id="{8812E581-CD83-A0AD-774B-49DF71333757}"/>
+                <a16:creationId xmlns:a16="http://schemas.microsoft.com/office/drawing/2014/main" id="{2DA12D25-9BC0-E54F-F8F5-E9C371D629F5}"/>
               </a:ext>
             </a:extLst>
           </p:cNvPr>
@@ -7182,36 +7261,19 @@
             <p:ph idx="1"/>
           </p:nvPr>
         </p:nvSpPr>
-        <p:spPr>
-          <a:xfrm>
-            <a:off x="1023862" y="2159000"/>
-            <a:ext cx="10353762" cy="1430867"/>
-          </a:xfrm>
-        </p:spPr>
-        <p:txBody>
-          <a:bodyPr>
-            <a:normAutofit/>
-          </a:bodyPr>
-          <a:lstStyle/>
-          <a:p>
-            <a:pPr marL="36900" indent="0" algn="ctr">
-              <a:buNone/>
-            </a:pPr>
-            <a:r>
-              <a:rPr lang="en-US" sz="7200" b="1">
-                <a:solidFill>
-                  <a:srgbClr val="FF0000"/>
-                </a:solidFill>
-              </a:rPr>
-              <a:t>Start GIT</a:t>
-            </a:r>
+        <p:spPr/>
+        <p:txBody>
+          <a:bodyPr/>
+          <a:lstStyle/>
+          <a:p>
+            <a:endParaRPr lang="en-US"/>
           </a:p>
         </p:txBody>
       </p:sp>
     </p:spTree>
     <p:extLst>
       <p:ext uri="{BB962C8B-B14F-4D97-AF65-F5344CB8AC3E}">
-        <p14:creationId xmlns:p14="http://schemas.microsoft.com/office/powerpoint/2010/main" val="1394362454"/>
+        <p14:creationId xmlns:p14="http://schemas.microsoft.com/office/powerpoint/2010/main" val="2952004057"/>
       </p:ext>
     </p:extLst>
   </p:cSld>
@@ -7240,6 +7302,78 @@
       </p:grpSpPr>
       <p:sp>
         <p:nvSpPr>
+          <p:cNvPr id="3" name="Content Placeholder 2">
+            <a:extLst>
+              <a:ext uri="{FF2B5EF4-FFF2-40B4-BE49-F238E27FC236}">
+                <a16:creationId xmlns:a16="http://schemas.microsoft.com/office/drawing/2014/main" id="{8812E581-CD83-A0AD-774B-49DF71333757}"/>
+              </a:ext>
+            </a:extLst>
+          </p:cNvPr>
+          <p:cNvSpPr>
+            <a:spLocks noGrp="1"/>
+          </p:cNvSpPr>
+          <p:nvPr>
+            <p:ph idx="1"/>
+          </p:nvPr>
+        </p:nvSpPr>
+        <p:spPr>
+          <a:xfrm>
+            <a:off x="1023862" y="2159000"/>
+            <a:ext cx="10353762" cy="1430867"/>
+          </a:xfrm>
+        </p:spPr>
+        <p:txBody>
+          <a:bodyPr>
+            <a:normAutofit/>
+          </a:bodyPr>
+          <a:lstStyle/>
+          <a:p>
+            <a:pPr marL="36900" indent="0" algn="ctr">
+              <a:buNone/>
+            </a:pPr>
+            <a:r>
+              <a:rPr lang="en-US" sz="7200" b="1">
+                <a:solidFill>
+                  <a:srgbClr val="FF0000"/>
+                </a:solidFill>
+              </a:rPr>
+              <a:t>Start GIT</a:t>
+            </a:r>
+          </a:p>
+        </p:txBody>
+      </p:sp>
+    </p:spTree>
+    <p:extLst>
+      <p:ext uri="{BB962C8B-B14F-4D97-AF65-F5344CB8AC3E}">
+        <p14:creationId xmlns:p14="http://schemas.microsoft.com/office/powerpoint/2010/main" val="1394362454"/>
+      </p:ext>
+    </p:extLst>
+  </p:cSld>
+  <p:clrMapOvr>
+    <a:masterClrMapping/>
+  </p:clrMapOvr>
+</p:sld>
+</file>
+
+<file path=ppt/slides/slide18.xml><?xml version="1.0" encoding="utf-8"?>
+<p:sld xmlns:a="http://schemas.openxmlformats.org/drawingml/2006/main" xmlns:r="http://schemas.openxmlformats.org/officeDocument/2006/relationships" xmlns:p="http://schemas.openxmlformats.org/presentationml/2006/main">
+  <p:cSld>
+    <p:spTree>
+      <p:nvGrpSpPr>
+        <p:cNvPr id="1" name=""/>
+        <p:cNvGrpSpPr/>
+        <p:nvPr/>
+      </p:nvGrpSpPr>
+      <p:grpSpPr>
+        <a:xfrm>
+          <a:off x="0" y="0"/>
+          <a:ext cx="0" cy="0"/>
+          <a:chOff x="0" y="0"/>
+          <a:chExt cx="0" cy="0"/>
+        </a:xfrm>
+      </p:grpSpPr>
+      <p:sp>
+        <p:nvSpPr>
           <p:cNvPr id="2" name="Title 1">
             <a:extLst>
               <a:ext uri="{FF2B5EF4-FFF2-40B4-BE49-F238E27FC236}">
@@ -7339,7 +7473,7 @@
 </p:sld>
 </file>
 
-<file path=ppt/slides/slide18.xml><?xml version="1.0" encoding="utf-8"?>
+<file path=ppt/slides/slide19.xml><?xml version="1.0" encoding="utf-8"?>
 <p:sld xmlns:a="http://schemas.openxmlformats.org/drawingml/2006/main" xmlns:r="http://schemas.openxmlformats.org/officeDocument/2006/relationships" xmlns:p="http://schemas.openxmlformats.org/presentationml/2006/main">
   <p:cSld>
     <p:spTree>
@@ -7918,7 +8052,7 @@
         </p:blipFill>
         <p:spPr>
           <a:xfrm>
-            <a:off x="16598" y="2191049"/>
+            <a:off x="16598" y="2199516"/>
             <a:ext cx="3125800" cy="3193751"/>
           </a:xfrm>
           <a:prstGeom prst="rect">
@@ -8750,8 +8884,8 @@
         </p:nvSpPr>
         <p:spPr>
           <a:xfrm>
-            <a:off x="913795" y="491067"/>
-            <a:ext cx="10353762" cy="5300133"/>
+            <a:off x="228601" y="728133"/>
+            <a:ext cx="11734800" cy="5985934"/>
           </a:xfrm>
         </p:spPr>
         <p:txBody>
@@ -8760,8 +8894,14 @@
           <a:p>
             <a:r>
               <a:rPr lang="en-US"/>
-              <a:t>SPACE(1)</a:t>
-            </a:r>
+              <a:t>SPACE(1) // generate 1 space</a:t>
+            </a:r>
+          </a:p>
+          <a:p>
+            <a:endParaRPr lang="en-US"/>
+          </a:p>
+          <a:p>
+            <a:endParaRPr lang="en-US"/>
           </a:p>
         </p:txBody>
       </p:sp>
@@ -8800,7 +8940,7 @@
           <p:cNvPr id="2" name="Title 1">
             <a:extLst>
               <a:ext uri="{FF2B5EF4-FFF2-40B4-BE49-F238E27FC236}">
-                <a16:creationId xmlns:a16="http://schemas.microsoft.com/office/drawing/2014/main" id="{53D7DDB9-AA73-A473-E653-7B1D163CA4D5}"/>
+                <a16:creationId xmlns:a16="http://schemas.microsoft.com/office/drawing/2014/main" id="{E3DC3765-8FC0-A90B-A887-EF5E6AAEB92E}"/>
               </a:ext>
             </a:extLst>
           </p:cNvPr>
@@ -8811,249 +8951,44 @@
             <p:ph type="title"/>
           </p:nvPr>
         </p:nvSpPr>
-        <p:spPr>
-          <a:xfrm>
-            <a:off x="913795" y="0"/>
-            <a:ext cx="10353762" cy="575733"/>
-          </a:xfrm>
-        </p:spPr>
-        <p:txBody>
-          <a:bodyPr>
-            <a:normAutofit fontScale="90000"/>
-          </a:bodyPr>
-          <a:lstStyle/>
-          <a:p>
-            <a:r>
-              <a:rPr lang="en-US" b="1">
-                <a:solidFill>
-                  <a:srgbClr val="FFFF00"/>
-                </a:solidFill>
-                <a:effectLst/>
-              </a:rPr>
-              <a:t>LINQ Query Syntax left Join</a:t>
-            </a:r>
-            <a:endParaRPr lang="en-US" b="1">
-              <a:solidFill>
-                <a:srgbClr val="FFFF00"/>
-              </a:solidFill>
-            </a:endParaRPr>
-          </a:p>
-        </p:txBody>
-      </p:sp>
-      <p:pic>
-        <p:nvPicPr>
-          <p:cNvPr id="13" name="Picture 12">
+        <p:spPr/>
+        <p:txBody>
+          <a:bodyPr/>
+          <a:lstStyle/>
+          <a:p>
+            <a:endParaRPr lang="en-US"/>
+          </a:p>
+        </p:txBody>
+      </p:sp>
+      <p:sp>
+        <p:nvSpPr>
+          <p:cNvPr id="3" name="Content Placeholder 2">
             <a:extLst>
               <a:ext uri="{FF2B5EF4-FFF2-40B4-BE49-F238E27FC236}">
-                <a16:creationId xmlns:a16="http://schemas.microsoft.com/office/drawing/2014/main" id="{38D248F4-0131-E61B-4DC6-F1B7BD778D59}"/>
+                <a16:creationId xmlns:a16="http://schemas.microsoft.com/office/drawing/2014/main" id="{B32C5918-DD85-6F17-5B4D-856121CF6630}"/>
               </a:ext>
             </a:extLst>
           </p:cNvPr>
-          <p:cNvPicPr>
-            <a:picLocks noChangeAspect="1"/>
-          </p:cNvPicPr>
-          <p:nvPr/>
-        </p:nvPicPr>
-        <p:blipFill>
-          <a:blip r:embed="rId2"/>
-          <a:stretch>
-            <a:fillRect/>
-          </a:stretch>
-        </p:blipFill>
-        <p:spPr>
-          <a:xfrm>
-            <a:off x="151796" y="719666"/>
-            <a:ext cx="2606430" cy="1546994"/>
-          </a:xfrm>
-          <a:prstGeom prst="rect">
-            <a:avLst/>
-          </a:prstGeom>
-        </p:spPr>
-      </p:pic>
-      <p:pic>
-        <p:nvPicPr>
-          <p:cNvPr id="15" name="Picture 14">
-            <a:extLst>
-              <a:ext uri="{FF2B5EF4-FFF2-40B4-BE49-F238E27FC236}">
-                <a16:creationId xmlns:a16="http://schemas.microsoft.com/office/drawing/2014/main" id="{3A5E6F59-06F8-72D9-70F4-8C549D07F88F}"/>
-              </a:ext>
-            </a:extLst>
-          </p:cNvPr>
-          <p:cNvPicPr>
-            <a:picLocks noChangeAspect="1"/>
-          </p:cNvPicPr>
-          <p:nvPr/>
-        </p:nvPicPr>
-        <p:blipFill>
-          <a:blip r:embed="rId3"/>
-          <a:stretch>
-            <a:fillRect/>
-          </a:stretch>
-        </p:blipFill>
-        <p:spPr>
-          <a:xfrm>
-            <a:off x="2929468" y="560627"/>
-            <a:ext cx="3716336" cy="1791904"/>
-          </a:xfrm>
-          <a:prstGeom prst="rect">
-            <a:avLst/>
-          </a:prstGeom>
-        </p:spPr>
-      </p:pic>
-      <p:pic>
-        <p:nvPicPr>
-          <p:cNvPr id="17" name="Picture 16">
-            <a:extLst>
-              <a:ext uri="{FF2B5EF4-FFF2-40B4-BE49-F238E27FC236}">
-                <a16:creationId xmlns:a16="http://schemas.microsoft.com/office/drawing/2014/main" id="{33476E61-EFFB-1CC9-6979-6E6234D3E7BE}"/>
-              </a:ext>
-            </a:extLst>
-          </p:cNvPr>
-          <p:cNvPicPr>
-            <a:picLocks noChangeAspect="1"/>
-          </p:cNvPicPr>
-          <p:nvPr/>
-        </p:nvPicPr>
-        <p:blipFill>
-          <a:blip r:embed="rId4"/>
-          <a:stretch>
-            <a:fillRect/>
-          </a:stretch>
-        </p:blipFill>
-        <p:spPr>
-          <a:xfrm>
-            <a:off x="0" y="2438401"/>
-            <a:ext cx="3834023" cy="4447408"/>
-          </a:xfrm>
-          <a:prstGeom prst="rect">
-            <a:avLst/>
-          </a:prstGeom>
-        </p:spPr>
-      </p:pic>
-      <p:pic>
-        <p:nvPicPr>
-          <p:cNvPr id="21" name="Picture 20">
-            <a:extLst>
-              <a:ext uri="{FF2B5EF4-FFF2-40B4-BE49-F238E27FC236}">
-                <a16:creationId xmlns:a16="http://schemas.microsoft.com/office/drawing/2014/main" id="{46AA3581-A6E2-1BC7-E6DB-736DD2E0191B}"/>
-              </a:ext>
-            </a:extLst>
-          </p:cNvPr>
-          <p:cNvPicPr>
-            <a:picLocks noChangeAspect="1"/>
-          </p:cNvPicPr>
-          <p:nvPr/>
-        </p:nvPicPr>
-        <p:blipFill>
-          <a:blip r:embed="rId5"/>
-          <a:stretch>
-            <a:fillRect/>
-          </a:stretch>
-        </p:blipFill>
-        <p:spPr>
-          <a:xfrm>
-            <a:off x="3892559" y="2403018"/>
-            <a:ext cx="3716336" cy="2051963"/>
-          </a:xfrm>
-          <a:prstGeom prst="rect">
-            <a:avLst/>
-          </a:prstGeom>
-        </p:spPr>
-      </p:pic>
-      <p:pic>
-        <p:nvPicPr>
-          <p:cNvPr id="23" name="Picture 22">
-            <a:extLst>
-              <a:ext uri="{FF2B5EF4-FFF2-40B4-BE49-F238E27FC236}">
-                <a16:creationId xmlns:a16="http://schemas.microsoft.com/office/drawing/2014/main" id="{8B0F35E5-A5B4-4718-F3D9-89FA9709369C}"/>
-              </a:ext>
-            </a:extLst>
-          </p:cNvPr>
-          <p:cNvPicPr>
-            <a:picLocks noChangeAspect="1"/>
-          </p:cNvPicPr>
-          <p:nvPr/>
-        </p:nvPicPr>
-        <p:blipFill>
-          <a:blip r:embed="rId6"/>
-          <a:stretch>
-            <a:fillRect/>
-          </a:stretch>
-        </p:blipFill>
-        <p:spPr>
-          <a:xfrm>
-            <a:off x="3892559" y="4490364"/>
-            <a:ext cx="2682472" cy="2367636"/>
-          </a:xfrm>
-          <a:prstGeom prst="rect">
-            <a:avLst/>
-          </a:prstGeom>
-        </p:spPr>
-      </p:pic>
-      <p:pic>
-        <p:nvPicPr>
-          <p:cNvPr id="25" name="Picture 24">
-            <a:extLst>
-              <a:ext uri="{FF2B5EF4-FFF2-40B4-BE49-F238E27FC236}">
-                <a16:creationId xmlns:a16="http://schemas.microsoft.com/office/drawing/2014/main" id="{3FCD31B3-BF3B-0D8A-A0DA-28A446926527}"/>
-              </a:ext>
-            </a:extLst>
-          </p:cNvPr>
-          <p:cNvPicPr>
-            <a:picLocks noChangeAspect="1"/>
-          </p:cNvPicPr>
-          <p:nvPr/>
-        </p:nvPicPr>
-        <p:blipFill>
-          <a:blip r:embed="rId7"/>
-          <a:stretch>
-            <a:fillRect/>
-          </a:stretch>
-        </p:blipFill>
-        <p:spPr>
-          <a:xfrm>
-            <a:off x="8120912" y="575733"/>
-            <a:ext cx="2420087" cy="3311330"/>
-          </a:xfrm>
-          <a:prstGeom prst="rect">
-            <a:avLst/>
-          </a:prstGeom>
-        </p:spPr>
-      </p:pic>
-      <p:pic>
-        <p:nvPicPr>
-          <p:cNvPr id="27" name="Picture 26">
-            <a:extLst>
-              <a:ext uri="{FF2B5EF4-FFF2-40B4-BE49-F238E27FC236}">
-                <a16:creationId xmlns:a16="http://schemas.microsoft.com/office/drawing/2014/main" id="{A143240C-C79B-8D12-DEB4-A172F26C1010}"/>
-              </a:ext>
-            </a:extLst>
-          </p:cNvPr>
-          <p:cNvPicPr>
-            <a:picLocks noChangeAspect="1"/>
-          </p:cNvPicPr>
-          <p:nvPr/>
-        </p:nvPicPr>
-        <p:blipFill>
-          <a:blip r:embed="rId8"/>
-          <a:stretch>
-            <a:fillRect/>
-          </a:stretch>
-        </p:blipFill>
-        <p:spPr>
-          <a:xfrm>
-            <a:off x="7859872" y="4069389"/>
-            <a:ext cx="3635055" cy="2613887"/>
-          </a:xfrm>
-          <a:prstGeom prst="rect">
-            <a:avLst/>
-          </a:prstGeom>
-        </p:spPr>
-      </p:pic>
+          <p:cNvSpPr>
+            <a:spLocks noGrp="1"/>
+          </p:cNvSpPr>
+          <p:nvPr>
+            <p:ph idx="1"/>
+          </p:nvPr>
+        </p:nvSpPr>
+        <p:spPr/>
+        <p:txBody>
+          <a:bodyPr/>
+          <a:lstStyle/>
+          <a:p>
+            <a:endParaRPr lang="en-US"/>
+          </a:p>
+        </p:txBody>
+      </p:sp>
     </p:spTree>
     <p:extLst>
       <p:ext uri="{BB962C8B-B14F-4D97-AF65-F5344CB8AC3E}">
-        <p14:creationId xmlns:p14="http://schemas.microsoft.com/office/powerpoint/2010/main" val="2328028493"/>
+        <p14:creationId xmlns:p14="http://schemas.microsoft.com/office/powerpoint/2010/main" val="1572491351"/>
       </p:ext>
     </p:extLst>
   </p:cSld>
@@ -9085,7 +9020,7 @@
           <p:cNvPr id="2" name="Title 1">
             <a:extLst>
               <a:ext uri="{FF2B5EF4-FFF2-40B4-BE49-F238E27FC236}">
-                <a16:creationId xmlns:a16="http://schemas.microsoft.com/office/drawing/2014/main" id="{BC629567-C097-E677-74FD-BB7789F58B8C}"/>
+                <a16:creationId xmlns:a16="http://schemas.microsoft.com/office/drawing/2014/main" id="{53D7DDB9-AA73-A473-E653-7B1D163CA4D5}"/>
               </a:ext>
             </a:extLst>
           </p:cNvPr>
@@ -9099,7 +9034,7 @@
         <p:spPr>
           <a:xfrm>
             <a:off x="913795" y="0"/>
-            <a:ext cx="10353762" cy="601133"/>
+            <a:ext cx="10353762" cy="575733"/>
           </a:xfrm>
         </p:spPr>
         <p:txBody>
@@ -9117,25 +9052,27 @@
               </a:rPr>
               <a:t>LINQ Query Syntax left Join</a:t>
             </a:r>
-            <a:endParaRPr lang="en-US"/>
+            <a:endParaRPr lang="en-US" b="1">
+              <a:solidFill>
+                <a:srgbClr val="FFFF00"/>
+              </a:solidFill>
+            </a:endParaRPr>
           </a:p>
         </p:txBody>
       </p:sp>
       <p:pic>
         <p:nvPicPr>
-          <p:cNvPr id="5" name="Content Placeholder 4">
+          <p:cNvPr id="13" name="Picture 12">
             <a:extLst>
               <a:ext uri="{FF2B5EF4-FFF2-40B4-BE49-F238E27FC236}">
-                <a16:creationId xmlns:a16="http://schemas.microsoft.com/office/drawing/2014/main" id="{43EBEE3B-A167-F253-28A7-81C76EED4FD1}"/>
+                <a16:creationId xmlns:a16="http://schemas.microsoft.com/office/drawing/2014/main" id="{38D248F4-0131-E61B-4DC6-F1B7BD778D59}"/>
               </a:ext>
             </a:extLst>
           </p:cNvPr>
           <p:cNvPicPr>
-            <a:picLocks noGrp="1" noChangeAspect="1"/>
+            <a:picLocks noChangeAspect="1"/>
           </p:cNvPicPr>
-          <p:nvPr>
-            <p:ph idx="1"/>
-          </p:nvPr>
+          <p:nvPr/>
         </p:nvPicPr>
         <p:blipFill>
           <a:blip r:embed="rId2"/>
@@ -9145,27 +9082,20 @@
         </p:blipFill>
         <p:spPr>
           <a:xfrm>
-            <a:off x="3716866" y="601132"/>
-            <a:ext cx="4030133" cy="2820333"/>
+            <a:off x="151796" y="719666"/>
+            <a:ext cx="2606430" cy="1546994"/>
           </a:xfrm>
           <a:prstGeom prst="rect">
             <a:avLst/>
           </a:prstGeom>
-          <a:effectLst>
-            <a:outerShdw blurRad="25400" dir="17880000">
-              <a:srgbClr val="000000">
-                <a:alpha val="46000"/>
-              </a:srgbClr>
-            </a:outerShdw>
-          </a:effectLst>
         </p:spPr>
       </p:pic>
       <p:pic>
         <p:nvPicPr>
-          <p:cNvPr id="7" name="Picture 6">
+          <p:cNvPr id="15" name="Picture 14">
             <a:extLst>
               <a:ext uri="{FF2B5EF4-FFF2-40B4-BE49-F238E27FC236}">
-                <a16:creationId xmlns:a16="http://schemas.microsoft.com/office/drawing/2014/main" id="{B26874DD-4DB0-E2B0-FE6A-506E6C22AD83}"/>
+                <a16:creationId xmlns:a16="http://schemas.microsoft.com/office/drawing/2014/main" id="{3A5E6F59-06F8-72D9-70F4-8C549D07F88F}"/>
               </a:ext>
             </a:extLst>
           </p:cNvPr>
@@ -9182,65 +9112,168 @@
         </p:blipFill>
         <p:spPr>
           <a:xfrm>
-            <a:off x="196308" y="608667"/>
-            <a:ext cx="3247932" cy="2820333"/>
+            <a:off x="2929468" y="560627"/>
+            <a:ext cx="3716336" cy="1791904"/>
           </a:xfrm>
           <a:prstGeom prst="rect">
             <a:avLst/>
           </a:prstGeom>
         </p:spPr>
       </p:pic>
-      <p:sp>
-        <p:nvSpPr>
-          <p:cNvPr id="8" name="TextBox 7">
+      <p:pic>
+        <p:nvPicPr>
+          <p:cNvPr id="17" name="Picture 16">
             <a:extLst>
               <a:ext uri="{FF2B5EF4-FFF2-40B4-BE49-F238E27FC236}">
-                <a16:creationId xmlns:a16="http://schemas.microsoft.com/office/drawing/2014/main" id="{DC59A1D6-D574-D479-7528-6A48466DDE1C}"/>
+                <a16:creationId xmlns:a16="http://schemas.microsoft.com/office/drawing/2014/main" id="{33476E61-EFFB-1CC9-6979-6E6234D3E7BE}"/>
               </a:ext>
             </a:extLst>
           </p:cNvPr>
-          <p:cNvSpPr txBox="1"/>
+          <p:cNvPicPr>
+            <a:picLocks noChangeAspect="1"/>
+          </p:cNvPicPr>
           <p:nvPr/>
-        </p:nvSpPr>
-        <p:spPr>
-          <a:xfrm>
-            <a:off x="728132" y="4064000"/>
-            <a:ext cx="10041467" cy="1477328"/>
+        </p:nvPicPr>
+        <p:blipFill>
+          <a:blip r:embed="rId4"/>
+          <a:stretch>
+            <a:fillRect/>
+          </a:stretch>
+        </p:blipFill>
+        <p:spPr>
+          <a:xfrm>
+            <a:off x="0" y="2438401"/>
+            <a:ext cx="3834023" cy="4447408"/>
           </a:xfrm>
           <a:prstGeom prst="rect">
             <a:avLst/>
           </a:prstGeom>
-          <a:noFill/>
-        </p:spPr>
-        <p:txBody>
-          <a:bodyPr wrap="square" rtlCol="0">
-            <a:spAutoFit/>
-          </a:bodyPr>
-          <a:lstStyle/>
-          <a:p>
-            <a:r>
-              <a:rPr lang="en-US"/>
-              <a:t>The tricky here is : when we need to get from all rows from first table even if there no match in second table</a:t>
-            </a:r>
-          </a:p>
-          <a:p>
-            <a:endParaRPr lang="en-US"/>
-          </a:p>
-          <a:p>
-            <a:endParaRPr lang="en-US"/>
-          </a:p>
-          <a:p>
-            <a:r>
-              <a:rPr lang="en-US"/>
-              <a:t> </a:t>
-            </a:r>
-          </a:p>
-        </p:txBody>
-      </p:sp>
+        </p:spPr>
+      </p:pic>
+      <p:pic>
+        <p:nvPicPr>
+          <p:cNvPr id="21" name="Picture 20">
+            <a:extLst>
+              <a:ext uri="{FF2B5EF4-FFF2-40B4-BE49-F238E27FC236}">
+                <a16:creationId xmlns:a16="http://schemas.microsoft.com/office/drawing/2014/main" id="{46AA3581-A6E2-1BC7-E6DB-736DD2E0191B}"/>
+              </a:ext>
+            </a:extLst>
+          </p:cNvPr>
+          <p:cNvPicPr>
+            <a:picLocks noChangeAspect="1"/>
+          </p:cNvPicPr>
+          <p:nvPr/>
+        </p:nvPicPr>
+        <p:blipFill>
+          <a:blip r:embed="rId5"/>
+          <a:stretch>
+            <a:fillRect/>
+          </a:stretch>
+        </p:blipFill>
+        <p:spPr>
+          <a:xfrm>
+            <a:off x="3892559" y="2403018"/>
+            <a:ext cx="3716336" cy="2051963"/>
+          </a:xfrm>
+          <a:prstGeom prst="rect">
+            <a:avLst/>
+          </a:prstGeom>
+        </p:spPr>
+      </p:pic>
+      <p:pic>
+        <p:nvPicPr>
+          <p:cNvPr id="23" name="Picture 22">
+            <a:extLst>
+              <a:ext uri="{FF2B5EF4-FFF2-40B4-BE49-F238E27FC236}">
+                <a16:creationId xmlns:a16="http://schemas.microsoft.com/office/drawing/2014/main" id="{8B0F35E5-A5B4-4718-F3D9-89FA9709369C}"/>
+              </a:ext>
+            </a:extLst>
+          </p:cNvPr>
+          <p:cNvPicPr>
+            <a:picLocks noChangeAspect="1"/>
+          </p:cNvPicPr>
+          <p:nvPr/>
+        </p:nvPicPr>
+        <p:blipFill>
+          <a:blip r:embed="rId6"/>
+          <a:stretch>
+            <a:fillRect/>
+          </a:stretch>
+        </p:blipFill>
+        <p:spPr>
+          <a:xfrm>
+            <a:off x="3892559" y="4490364"/>
+            <a:ext cx="2682472" cy="2367636"/>
+          </a:xfrm>
+          <a:prstGeom prst="rect">
+            <a:avLst/>
+          </a:prstGeom>
+        </p:spPr>
+      </p:pic>
+      <p:pic>
+        <p:nvPicPr>
+          <p:cNvPr id="25" name="Picture 24">
+            <a:extLst>
+              <a:ext uri="{FF2B5EF4-FFF2-40B4-BE49-F238E27FC236}">
+                <a16:creationId xmlns:a16="http://schemas.microsoft.com/office/drawing/2014/main" id="{3FCD31B3-BF3B-0D8A-A0DA-28A446926527}"/>
+              </a:ext>
+            </a:extLst>
+          </p:cNvPr>
+          <p:cNvPicPr>
+            <a:picLocks noChangeAspect="1"/>
+          </p:cNvPicPr>
+          <p:nvPr/>
+        </p:nvPicPr>
+        <p:blipFill>
+          <a:blip r:embed="rId7"/>
+          <a:stretch>
+            <a:fillRect/>
+          </a:stretch>
+        </p:blipFill>
+        <p:spPr>
+          <a:xfrm>
+            <a:off x="8120912" y="575733"/>
+            <a:ext cx="2420087" cy="3311330"/>
+          </a:xfrm>
+          <a:prstGeom prst="rect">
+            <a:avLst/>
+          </a:prstGeom>
+        </p:spPr>
+      </p:pic>
+      <p:pic>
+        <p:nvPicPr>
+          <p:cNvPr id="27" name="Picture 26">
+            <a:extLst>
+              <a:ext uri="{FF2B5EF4-FFF2-40B4-BE49-F238E27FC236}">
+                <a16:creationId xmlns:a16="http://schemas.microsoft.com/office/drawing/2014/main" id="{A143240C-C79B-8D12-DEB4-A172F26C1010}"/>
+              </a:ext>
+            </a:extLst>
+          </p:cNvPr>
+          <p:cNvPicPr>
+            <a:picLocks noChangeAspect="1"/>
+          </p:cNvPicPr>
+          <p:nvPr/>
+        </p:nvPicPr>
+        <p:blipFill>
+          <a:blip r:embed="rId8"/>
+          <a:stretch>
+            <a:fillRect/>
+          </a:stretch>
+        </p:blipFill>
+        <p:spPr>
+          <a:xfrm>
+            <a:off x="7859872" y="4069389"/>
+            <a:ext cx="3635055" cy="2613887"/>
+          </a:xfrm>
+          <a:prstGeom prst="rect">
+            <a:avLst/>
+          </a:prstGeom>
+        </p:spPr>
+      </p:pic>
     </p:spTree>
     <p:extLst>
       <p:ext uri="{BB962C8B-B14F-4D97-AF65-F5344CB8AC3E}">
-        <p14:creationId xmlns:p14="http://schemas.microsoft.com/office/powerpoint/2010/main" val="2082898737"/>
+        <p14:creationId xmlns:p14="http://schemas.microsoft.com/office/powerpoint/2010/main" val="2328028493"/>
       </p:ext>
     </p:extLst>
   </p:cSld>
@@ -9272,7 +9305,7 @@
           <p:cNvPr id="2" name="Title 1">
             <a:extLst>
               <a:ext uri="{FF2B5EF4-FFF2-40B4-BE49-F238E27FC236}">
-                <a16:creationId xmlns:a16="http://schemas.microsoft.com/office/drawing/2014/main" id="{C6017F55-A87E-8987-8C53-D352FE5F6AD4}"/>
+                <a16:creationId xmlns:a16="http://schemas.microsoft.com/office/drawing/2014/main" id="{BC629567-C097-E677-74FD-BB7789F58B8C}"/>
               </a:ext>
             </a:extLst>
           </p:cNvPr>
@@ -9286,66 +9319,73 @@
         <p:spPr>
           <a:xfrm>
             <a:off x="913795" y="0"/>
-            <a:ext cx="10353762" cy="970450"/>
-          </a:xfrm>
-        </p:spPr>
-        <p:txBody>
-          <a:bodyPr/>
+            <a:ext cx="10353762" cy="601133"/>
+          </a:xfrm>
+        </p:spPr>
+        <p:txBody>
+          <a:bodyPr>
+            <a:normAutofit fontScale="90000"/>
+          </a:bodyPr>
           <a:lstStyle/>
           <a:p>
             <a:r>
               <a:rPr lang="en-US" b="1">
                 <a:solidFill>
-                  <a:srgbClr val="FF0000"/>
+                  <a:srgbClr val="FFFF00"/>
                 </a:solidFill>
+                <a:effectLst/>
               </a:rPr>
-              <a:t>Left join in .net 10</a:t>
-            </a:r>
-          </a:p>
-        </p:txBody>
-      </p:sp>
-      <p:sp>
-        <p:nvSpPr>
-          <p:cNvPr id="3" name="Content Placeholder 2">
+              <a:t>LINQ Query Syntax left Join</a:t>
+            </a:r>
+            <a:endParaRPr lang="en-US"/>
+          </a:p>
+        </p:txBody>
+      </p:sp>
+      <p:pic>
+        <p:nvPicPr>
+          <p:cNvPr id="5" name="Content Placeholder 4">
             <a:extLst>
               <a:ext uri="{FF2B5EF4-FFF2-40B4-BE49-F238E27FC236}">
-                <a16:creationId xmlns:a16="http://schemas.microsoft.com/office/drawing/2014/main" id="{F573BCEA-3A25-B8DF-FB6E-C613885C8F25}"/>
+                <a16:creationId xmlns:a16="http://schemas.microsoft.com/office/drawing/2014/main" id="{43EBEE3B-A167-F253-28A7-81C76EED4FD1}"/>
               </a:ext>
             </a:extLst>
           </p:cNvPr>
-          <p:cNvSpPr>
-            <a:spLocks noGrp="1"/>
-          </p:cNvSpPr>
+          <p:cNvPicPr>
+            <a:picLocks noGrp="1" noChangeAspect="1"/>
+          </p:cNvPicPr>
           <p:nvPr>
             <p:ph idx="1"/>
           </p:nvPr>
-        </p:nvSpPr>
-        <p:spPr>
-          <a:xfrm>
-            <a:off x="143933" y="970450"/>
-            <a:ext cx="11954934" cy="5785949"/>
-          </a:xfrm>
-        </p:spPr>
-        <p:txBody>
-          <a:bodyPr/>
-          <a:lstStyle/>
-          <a:p>
-            <a:endParaRPr lang="en-US"/>
-          </a:p>
-          <a:p>
-            <a:endParaRPr lang="en-US"/>
-          </a:p>
-          <a:p>
-            <a:endParaRPr lang="en-US"/>
-          </a:p>
-        </p:txBody>
-      </p:sp>
+        </p:nvPicPr>
+        <p:blipFill>
+          <a:blip r:embed="rId2"/>
+          <a:stretch>
+            <a:fillRect/>
+          </a:stretch>
+        </p:blipFill>
+        <p:spPr>
+          <a:xfrm>
+            <a:off x="3716866" y="601132"/>
+            <a:ext cx="4030133" cy="2820333"/>
+          </a:xfrm>
+          <a:prstGeom prst="rect">
+            <a:avLst/>
+          </a:prstGeom>
+          <a:effectLst>
+            <a:outerShdw blurRad="25400" dir="17880000">
+              <a:srgbClr val="000000">
+                <a:alpha val="46000"/>
+              </a:srgbClr>
+            </a:outerShdw>
+          </a:effectLst>
+        </p:spPr>
+      </p:pic>
       <p:pic>
         <p:nvPicPr>
-          <p:cNvPr id="5" name="Picture 4">
+          <p:cNvPr id="7" name="Picture 6">
             <a:extLst>
               <a:ext uri="{FF2B5EF4-FFF2-40B4-BE49-F238E27FC236}">
-                <a16:creationId xmlns:a16="http://schemas.microsoft.com/office/drawing/2014/main" id="{1A68C370-4A46-552D-83CE-7E9DB643D26E}"/>
+                <a16:creationId xmlns:a16="http://schemas.microsoft.com/office/drawing/2014/main" id="{B26874DD-4DB0-E2B0-FE6A-506E6C22AD83}"/>
               </a:ext>
             </a:extLst>
           </p:cNvPr>
@@ -9355,25 +9395,72 @@
           <p:nvPr/>
         </p:nvPicPr>
         <p:blipFill>
-          <a:blip r:embed="rId2"/>
+          <a:blip r:embed="rId3"/>
           <a:stretch>
             <a:fillRect/>
           </a:stretch>
         </p:blipFill>
         <p:spPr>
           <a:xfrm>
-            <a:off x="271574" y="885510"/>
-            <a:ext cx="5824426" cy="2921577"/>
+            <a:off x="196308" y="608667"/>
+            <a:ext cx="3247932" cy="2820333"/>
           </a:xfrm>
           <a:prstGeom prst="rect">
             <a:avLst/>
           </a:prstGeom>
         </p:spPr>
       </p:pic>
+      <p:sp>
+        <p:nvSpPr>
+          <p:cNvPr id="8" name="TextBox 7">
+            <a:extLst>
+              <a:ext uri="{FF2B5EF4-FFF2-40B4-BE49-F238E27FC236}">
+                <a16:creationId xmlns:a16="http://schemas.microsoft.com/office/drawing/2014/main" id="{DC59A1D6-D574-D479-7528-6A48466DDE1C}"/>
+              </a:ext>
+            </a:extLst>
+          </p:cNvPr>
+          <p:cNvSpPr txBox="1"/>
+          <p:nvPr/>
+        </p:nvSpPr>
+        <p:spPr>
+          <a:xfrm>
+            <a:off x="728132" y="4064000"/>
+            <a:ext cx="10041467" cy="1477328"/>
+          </a:xfrm>
+          <a:prstGeom prst="rect">
+            <a:avLst/>
+          </a:prstGeom>
+          <a:noFill/>
+        </p:spPr>
+        <p:txBody>
+          <a:bodyPr wrap="square" rtlCol="0">
+            <a:spAutoFit/>
+          </a:bodyPr>
+          <a:lstStyle/>
+          <a:p>
+            <a:r>
+              <a:rPr lang="en-US"/>
+              <a:t>The tricky here is : when we need to get from all rows from first table even if there no match in second table</a:t>
+            </a:r>
+          </a:p>
+          <a:p>
+            <a:endParaRPr lang="en-US"/>
+          </a:p>
+          <a:p>
+            <a:endParaRPr lang="en-US"/>
+          </a:p>
+          <a:p>
+            <a:r>
+              <a:rPr lang="en-US"/>
+              <a:t> </a:t>
+            </a:r>
+          </a:p>
+        </p:txBody>
+      </p:sp>
     </p:spTree>
     <p:extLst>
       <p:ext uri="{BB962C8B-B14F-4D97-AF65-F5344CB8AC3E}">
-        <p14:creationId xmlns:p14="http://schemas.microsoft.com/office/powerpoint/2010/main" val="1885605593"/>
+        <p14:creationId xmlns:p14="http://schemas.microsoft.com/office/powerpoint/2010/main" val="2082898737"/>
       </p:ext>
     </p:extLst>
   </p:cSld>

--- a/Dot Net/NEW.pptx
+++ b/Dot Net/NEW.pptx
@@ -24,6 +24,7 @@
     <p:sldId id="271" r:id="rId18"/>
     <p:sldId id="273" r:id="rId19"/>
     <p:sldId id="272" r:id="rId20"/>
+    <p:sldId id="275" r:id="rId21"/>
   </p:sldIdLst>
   <p:sldSz cx="12192000" cy="6858000"/>
   <p:notesSz cx="6858000" cy="9144000"/>
@@ -315,7 +316,7 @@
           <a:p>
             <a:fld id="{79806886-C3E2-4AA6-AE5C-EC60C7639E42}" type="datetimeFigureOut">
               <a:rPr lang="en-US" smtClean="0"/>
-              <a:t>5/17/2026</a:t>
+              <a:t>5/24/2026</a:t>
             </a:fld>
             <a:endParaRPr lang="en-US"/>
           </a:p>
@@ -613,7 +614,7 @@
           <a:p>
             <a:fld id="{79806886-C3E2-4AA6-AE5C-EC60C7639E42}" type="datetimeFigureOut">
               <a:rPr lang="en-US" smtClean="0"/>
-              <a:t>5/17/2026</a:t>
+              <a:t>5/24/2026</a:t>
             </a:fld>
             <a:endParaRPr lang="en-US"/>
           </a:p>
@@ -805,7 +806,7 @@
           <a:p>
             <a:fld id="{79806886-C3E2-4AA6-AE5C-EC60C7639E42}" type="datetimeFigureOut">
               <a:rPr lang="en-US" smtClean="0"/>
-              <a:t>5/17/2026</a:t>
+              <a:t>5/24/2026</a:t>
             </a:fld>
             <a:endParaRPr lang="en-US"/>
           </a:p>
@@ -1066,7 +1067,7 @@
           <a:p>
             <a:fld id="{79806886-C3E2-4AA6-AE5C-EC60C7639E42}" type="datetimeFigureOut">
               <a:rPr lang="en-US" smtClean="0"/>
-              <a:t>5/17/2026</a:t>
+              <a:t>5/24/2026</a:t>
             </a:fld>
             <a:endParaRPr lang="en-US"/>
           </a:p>
@@ -1490,7 +1491,7 @@
           <a:p>
             <a:fld id="{79806886-C3E2-4AA6-AE5C-EC60C7639E42}" type="datetimeFigureOut">
               <a:rPr lang="en-US" smtClean="0"/>
-              <a:t>5/17/2026</a:t>
+              <a:t>5/24/2026</a:t>
             </a:fld>
             <a:endParaRPr lang="en-US"/>
           </a:p>
@@ -2027,7 +2028,7 @@
           <a:p>
             <a:fld id="{79806886-C3E2-4AA6-AE5C-EC60C7639E42}" type="datetimeFigureOut">
               <a:rPr lang="en-US" smtClean="0"/>
-              <a:t>5/17/2026</a:t>
+              <a:t>5/24/2026</a:t>
             </a:fld>
             <a:endParaRPr lang="en-US"/>
           </a:p>
@@ -2891,7 +2892,7 @@
           <a:p>
             <a:fld id="{79806886-C3E2-4AA6-AE5C-EC60C7639E42}" type="datetimeFigureOut">
               <a:rPr lang="en-US" smtClean="0"/>
-              <a:t>5/17/2026</a:t>
+              <a:t>5/24/2026</a:t>
             </a:fld>
             <a:endParaRPr lang="en-US"/>
           </a:p>
@@ -3061,7 +3062,7 @@
           <a:p>
             <a:fld id="{79806886-C3E2-4AA6-AE5C-EC60C7639E42}" type="datetimeFigureOut">
               <a:rPr lang="en-US" smtClean="0"/>
-              <a:t>5/17/2026</a:t>
+              <a:t>5/24/2026</a:t>
             </a:fld>
             <a:endParaRPr lang="en-US"/>
           </a:p>
@@ -3245,7 +3246,7 @@
           <a:p>
             <a:fld id="{79806886-C3E2-4AA6-AE5C-EC60C7639E42}" type="datetimeFigureOut">
               <a:rPr lang="en-US" smtClean="0"/>
-              <a:t>5/17/2026</a:t>
+              <a:t>5/24/2026</a:t>
             </a:fld>
             <a:endParaRPr lang="en-US"/>
           </a:p>
@@ -3415,7 +3416,7 @@
           <a:p>
             <a:fld id="{79806886-C3E2-4AA6-AE5C-EC60C7639E42}" type="datetimeFigureOut">
               <a:rPr lang="en-US" smtClean="0"/>
-              <a:t>5/17/2026</a:t>
+              <a:t>5/24/2026</a:t>
             </a:fld>
             <a:endParaRPr lang="en-US"/>
           </a:p>
@@ -3659,7 +3660,7 @@
           <a:p>
             <a:fld id="{79806886-C3E2-4AA6-AE5C-EC60C7639E42}" type="datetimeFigureOut">
               <a:rPr lang="en-US" smtClean="0"/>
-              <a:t>5/17/2026</a:t>
+              <a:t>5/24/2026</a:t>
             </a:fld>
             <a:endParaRPr lang="en-US"/>
           </a:p>
@@ -3895,7 +3896,7 @@
           <a:p>
             <a:fld id="{79806886-C3E2-4AA6-AE5C-EC60C7639E42}" type="datetimeFigureOut">
               <a:rPr lang="en-US" smtClean="0"/>
-              <a:t>5/17/2026</a:t>
+              <a:t>5/24/2026</a:t>
             </a:fld>
             <a:endParaRPr lang="en-US"/>
           </a:p>
@@ -4361,7 +4362,7 @@
           <a:p>
             <a:fld id="{79806886-C3E2-4AA6-AE5C-EC60C7639E42}" type="datetimeFigureOut">
               <a:rPr lang="en-US" smtClean="0"/>
-              <a:t>5/17/2026</a:t>
+              <a:t>5/24/2026</a:t>
             </a:fld>
             <a:endParaRPr lang="en-US"/>
           </a:p>
@@ -4479,7 +4480,7 @@
           <a:p>
             <a:fld id="{79806886-C3E2-4AA6-AE5C-EC60C7639E42}" type="datetimeFigureOut">
               <a:rPr lang="en-US" smtClean="0"/>
-              <a:t>5/17/2026</a:t>
+              <a:t>5/24/2026</a:t>
             </a:fld>
             <a:endParaRPr lang="en-US"/>
           </a:p>
@@ -4574,7 +4575,7 @@
           <a:p>
             <a:fld id="{79806886-C3E2-4AA6-AE5C-EC60C7639E42}" type="datetimeFigureOut">
               <a:rPr lang="en-US" smtClean="0"/>
-              <a:t>5/17/2026</a:t>
+              <a:t>5/24/2026</a:t>
             </a:fld>
             <a:endParaRPr lang="en-US"/>
           </a:p>
@@ -4829,7 +4830,7 @@
           <a:p>
             <a:fld id="{79806886-C3E2-4AA6-AE5C-EC60C7639E42}" type="datetimeFigureOut">
               <a:rPr lang="en-US" smtClean="0"/>
-              <a:t>5/17/2026</a:t>
+              <a:t>5/24/2026</a:t>
             </a:fld>
             <a:endParaRPr lang="en-US"/>
           </a:p>
@@ -5129,7 +5130,7 @@
           <a:p>
             <a:fld id="{79806886-C3E2-4AA6-AE5C-EC60C7639E42}" type="datetimeFigureOut">
               <a:rPr lang="en-US" smtClean="0"/>
-              <a:t>5/17/2026</a:t>
+              <a:t>5/24/2026</a:t>
             </a:fld>
             <a:endParaRPr lang="en-US"/>
           </a:p>
@@ -5363,7 +5364,7 @@
           <a:p>
             <a:fld id="{79806886-C3E2-4AA6-AE5C-EC60C7639E42}" type="datetimeFigureOut">
               <a:rPr lang="en-US" smtClean="0"/>
-              <a:t>5/17/2026</a:t>
+              <a:t>5/24/2026</a:t>
             </a:fld>
             <a:endParaRPr lang="en-US"/>
           </a:p>
@@ -7898,6 +7899,174 @@
 </p:sld>
 </file>
 
+<file path=ppt/slides/slide20.xml><?xml version="1.0" encoding="utf-8"?>
+<p:sld xmlns:a="http://schemas.openxmlformats.org/drawingml/2006/main" xmlns:r="http://schemas.openxmlformats.org/officeDocument/2006/relationships" xmlns:p="http://schemas.openxmlformats.org/presentationml/2006/main">
+  <p:cSld>
+    <p:spTree>
+      <p:nvGrpSpPr>
+        <p:cNvPr id="1" name=""/>
+        <p:cNvGrpSpPr/>
+        <p:nvPr/>
+      </p:nvGrpSpPr>
+      <p:grpSpPr>
+        <a:xfrm>
+          <a:off x="0" y="0"/>
+          <a:ext cx="0" cy="0"/>
+          <a:chOff x="0" y="0"/>
+          <a:chExt cx="0" cy="0"/>
+        </a:xfrm>
+      </p:grpSpPr>
+      <p:sp>
+        <p:nvSpPr>
+          <p:cNvPr id="2" name="Title 1">
+            <a:extLst>
+              <a:ext uri="{FF2B5EF4-FFF2-40B4-BE49-F238E27FC236}">
+                <a16:creationId xmlns:a16="http://schemas.microsoft.com/office/drawing/2014/main" id="{16F57973-116E-F85C-0922-EDA62F71A3FA}"/>
+              </a:ext>
+            </a:extLst>
+          </p:cNvPr>
+          <p:cNvSpPr>
+            <a:spLocks noGrp="1"/>
+          </p:cNvSpPr>
+          <p:nvPr>
+            <p:ph type="title"/>
+          </p:nvPr>
+        </p:nvSpPr>
+        <p:spPr>
+          <a:xfrm>
+            <a:off x="913795" y="1"/>
+            <a:ext cx="10353762" cy="508000"/>
+          </a:xfrm>
+        </p:spPr>
+        <p:txBody>
+          <a:bodyPr>
+            <a:normAutofit fontScale="90000"/>
+          </a:bodyPr>
+          <a:lstStyle/>
+          <a:p>
+            <a:r>
+              <a:rPr lang="en-US"/>
+              <a:t>Hangfire</a:t>
+            </a:r>
+          </a:p>
+        </p:txBody>
+      </p:sp>
+      <p:sp>
+        <p:nvSpPr>
+          <p:cNvPr id="3" name="Content Placeholder 2">
+            <a:extLst>
+              <a:ext uri="{FF2B5EF4-FFF2-40B4-BE49-F238E27FC236}">
+                <a16:creationId xmlns:a16="http://schemas.microsoft.com/office/drawing/2014/main" id="{102F8648-23E7-7BDC-9673-218DCB3A8C88}"/>
+              </a:ext>
+            </a:extLst>
+          </p:cNvPr>
+          <p:cNvSpPr>
+            <a:spLocks noGrp="1"/>
+          </p:cNvSpPr>
+          <p:nvPr>
+            <p:ph idx="1"/>
+          </p:nvPr>
+        </p:nvSpPr>
+        <p:spPr>
+          <a:xfrm>
+            <a:off x="913795" y="626533"/>
+            <a:ext cx="10353762" cy="6045200"/>
+          </a:xfrm>
+        </p:spPr>
+        <p:txBody>
+          <a:bodyPr/>
+          <a:lstStyle/>
+          <a:p>
+            <a:r>
+              <a:rPr lang="en-US" sz="1800"/>
+              <a:t>install-package </a:t>
+            </a:r>
+            <a:r>
+              <a:rPr lang="en-US" sz="1800" b="1">
+                <a:solidFill>
+                  <a:srgbClr val="FFFF00"/>
+                </a:solidFill>
+              </a:rPr>
+              <a:t>Hangfire</a:t>
+            </a:r>
+            <a:r>
+              <a:rPr lang="en-US" sz="1800" b="1">
+                <a:solidFill>
+                  <a:srgbClr val="FF0000"/>
+                </a:solidFill>
+              </a:rPr>
+              <a:t>.</a:t>
+            </a:r>
+            <a:r>
+              <a:rPr lang="en-US" sz="1800">
+                <a:solidFill>
+                  <a:srgbClr val="00B0F0"/>
+                </a:solidFill>
+              </a:rPr>
+              <a:t>AspNetCore</a:t>
+            </a:r>
+          </a:p>
+          <a:p>
+            <a:r>
+              <a:rPr lang="en-US" sz="1800"/>
+              <a:t>install-package Hangfire.SqlServer</a:t>
+            </a:r>
+          </a:p>
+          <a:p>
+            <a:endParaRPr lang="en-US"/>
+          </a:p>
+          <a:p>
+            <a:r>
+              <a:rPr lang="en-US" sz="1800"/>
+              <a:t>Registeration</a:t>
+            </a:r>
+          </a:p>
+          <a:p>
+            <a:pPr lvl="1"/>
+            <a:r>
+              <a:rPr lang="en-US" b="1">
+                <a:effectLst/>
+              </a:rPr>
+              <a:t>builder.Services.</a:t>
+            </a:r>
+            <a:r>
+              <a:rPr lang="en-US" b="1">
+                <a:solidFill>
+                  <a:srgbClr val="00B0F0"/>
+                </a:solidFill>
+                <a:effectLst/>
+              </a:rPr>
+              <a:t>AddHangfireServer</a:t>
+            </a:r>
+            <a:r>
+              <a:rPr lang="en-US" b="1">
+                <a:effectLst/>
+              </a:rPr>
+              <a:t>();</a:t>
+            </a:r>
+            <a:endParaRPr lang="en-US"/>
+          </a:p>
+          <a:p>
+            <a:endParaRPr lang="en-US"/>
+          </a:p>
+          <a:p>
+            <a:endParaRPr lang="en-US"/>
+          </a:p>
+        </p:txBody>
+      </p:sp>
+    </p:spTree>
+    <p:extLst>
+      <p:ext uri="{BB962C8B-B14F-4D97-AF65-F5344CB8AC3E}">
+        <p14:creationId xmlns:p14="http://schemas.microsoft.com/office/powerpoint/2010/main" val="2063257890"/>
+      </p:ext>
+    </p:extLst>
+  </p:cSld>
+  <p:clrMapOvr>
+    <a:masterClrMapping/>
+  </p:clrMapOvr>
+</p:sld>
+</file>
+
 <file path=ppt/slides/slide3.xml><?xml version="1.0" encoding="utf-8"?>
 <p:sld xmlns:a="http://schemas.openxmlformats.org/drawingml/2006/main" xmlns:r="http://schemas.openxmlformats.org/officeDocument/2006/relationships" xmlns:p="http://schemas.openxmlformats.org/presentationml/2006/main">
   <p:cSld>

--- a/Dot Net/NEW.pptx
+++ b/Dot Net/NEW.pptx
@@ -25,6 +25,7 @@
     <p:sldId id="273" r:id="rId19"/>
     <p:sldId id="272" r:id="rId20"/>
     <p:sldId id="275" r:id="rId21"/>
+    <p:sldId id="276" r:id="rId22"/>
   </p:sldIdLst>
   <p:sldSz cx="12192000" cy="6858000"/>
   <p:notesSz cx="6858000" cy="9144000"/>
@@ -316,7 +317,7 @@
           <a:p>
             <a:fld id="{79806886-C3E2-4AA6-AE5C-EC60C7639E42}" type="datetimeFigureOut">
               <a:rPr lang="en-US" smtClean="0"/>
-              <a:t>5/24/2026</a:t>
+              <a:t>6/1/2026</a:t>
             </a:fld>
             <a:endParaRPr lang="en-US"/>
           </a:p>
@@ -614,7 +615,7 @@
           <a:p>
             <a:fld id="{79806886-C3E2-4AA6-AE5C-EC60C7639E42}" type="datetimeFigureOut">
               <a:rPr lang="en-US" smtClean="0"/>
-              <a:t>5/24/2026</a:t>
+              <a:t>6/1/2026</a:t>
             </a:fld>
             <a:endParaRPr lang="en-US"/>
           </a:p>
@@ -806,7 +807,7 @@
           <a:p>
             <a:fld id="{79806886-C3E2-4AA6-AE5C-EC60C7639E42}" type="datetimeFigureOut">
               <a:rPr lang="en-US" smtClean="0"/>
-              <a:t>5/24/2026</a:t>
+              <a:t>6/1/2026</a:t>
             </a:fld>
             <a:endParaRPr lang="en-US"/>
           </a:p>
@@ -1067,7 +1068,7 @@
           <a:p>
             <a:fld id="{79806886-C3E2-4AA6-AE5C-EC60C7639E42}" type="datetimeFigureOut">
               <a:rPr lang="en-US" smtClean="0"/>
-              <a:t>5/24/2026</a:t>
+              <a:t>6/1/2026</a:t>
             </a:fld>
             <a:endParaRPr lang="en-US"/>
           </a:p>
@@ -1491,7 +1492,7 @@
           <a:p>
             <a:fld id="{79806886-C3E2-4AA6-AE5C-EC60C7639E42}" type="datetimeFigureOut">
               <a:rPr lang="en-US" smtClean="0"/>
-              <a:t>5/24/2026</a:t>
+              <a:t>6/1/2026</a:t>
             </a:fld>
             <a:endParaRPr lang="en-US"/>
           </a:p>
@@ -2028,7 +2029,7 @@
           <a:p>
             <a:fld id="{79806886-C3E2-4AA6-AE5C-EC60C7639E42}" type="datetimeFigureOut">
               <a:rPr lang="en-US" smtClean="0"/>
-              <a:t>5/24/2026</a:t>
+              <a:t>6/1/2026</a:t>
             </a:fld>
             <a:endParaRPr lang="en-US"/>
           </a:p>
@@ -2892,7 +2893,7 @@
           <a:p>
             <a:fld id="{79806886-C3E2-4AA6-AE5C-EC60C7639E42}" type="datetimeFigureOut">
               <a:rPr lang="en-US" smtClean="0"/>
-              <a:t>5/24/2026</a:t>
+              <a:t>6/1/2026</a:t>
             </a:fld>
             <a:endParaRPr lang="en-US"/>
           </a:p>
@@ -3062,7 +3063,7 @@
           <a:p>
             <a:fld id="{79806886-C3E2-4AA6-AE5C-EC60C7639E42}" type="datetimeFigureOut">
               <a:rPr lang="en-US" smtClean="0"/>
-              <a:t>5/24/2026</a:t>
+              <a:t>6/1/2026</a:t>
             </a:fld>
             <a:endParaRPr lang="en-US"/>
           </a:p>
@@ -3246,7 +3247,7 @@
           <a:p>
             <a:fld id="{79806886-C3E2-4AA6-AE5C-EC60C7639E42}" type="datetimeFigureOut">
               <a:rPr lang="en-US" smtClean="0"/>
-              <a:t>5/24/2026</a:t>
+              <a:t>6/1/2026</a:t>
             </a:fld>
             <a:endParaRPr lang="en-US"/>
           </a:p>
@@ -3416,7 +3417,7 @@
           <a:p>
             <a:fld id="{79806886-C3E2-4AA6-AE5C-EC60C7639E42}" type="datetimeFigureOut">
               <a:rPr lang="en-US" smtClean="0"/>
-              <a:t>5/24/2026</a:t>
+              <a:t>6/1/2026</a:t>
             </a:fld>
             <a:endParaRPr lang="en-US"/>
           </a:p>
@@ -3660,7 +3661,7 @@
           <a:p>
             <a:fld id="{79806886-C3E2-4AA6-AE5C-EC60C7639E42}" type="datetimeFigureOut">
               <a:rPr lang="en-US" smtClean="0"/>
-              <a:t>5/24/2026</a:t>
+              <a:t>6/1/2026</a:t>
             </a:fld>
             <a:endParaRPr lang="en-US"/>
           </a:p>
@@ -3896,7 +3897,7 @@
           <a:p>
             <a:fld id="{79806886-C3E2-4AA6-AE5C-EC60C7639E42}" type="datetimeFigureOut">
               <a:rPr lang="en-US" smtClean="0"/>
-              <a:t>5/24/2026</a:t>
+              <a:t>6/1/2026</a:t>
             </a:fld>
             <a:endParaRPr lang="en-US"/>
           </a:p>
@@ -4362,7 +4363,7 @@
           <a:p>
             <a:fld id="{79806886-C3E2-4AA6-AE5C-EC60C7639E42}" type="datetimeFigureOut">
               <a:rPr lang="en-US" smtClean="0"/>
-              <a:t>5/24/2026</a:t>
+              <a:t>6/1/2026</a:t>
             </a:fld>
             <a:endParaRPr lang="en-US"/>
           </a:p>
@@ -4480,7 +4481,7 @@
           <a:p>
             <a:fld id="{79806886-C3E2-4AA6-AE5C-EC60C7639E42}" type="datetimeFigureOut">
               <a:rPr lang="en-US" smtClean="0"/>
-              <a:t>5/24/2026</a:t>
+              <a:t>6/1/2026</a:t>
             </a:fld>
             <a:endParaRPr lang="en-US"/>
           </a:p>
@@ -4575,7 +4576,7 @@
           <a:p>
             <a:fld id="{79806886-C3E2-4AA6-AE5C-EC60C7639E42}" type="datetimeFigureOut">
               <a:rPr lang="en-US" smtClean="0"/>
-              <a:t>5/24/2026</a:t>
+              <a:t>6/1/2026</a:t>
             </a:fld>
             <a:endParaRPr lang="en-US"/>
           </a:p>
@@ -4830,7 +4831,7 @@
           <a:p>
             <a:fld id="{79806886-C3E2-4AA6-AE5C-EC60C7639E42}" type="datetimeFigureOut">
               <a:rPr lang="en-US" smtClean="0"/>
-              <a:t>5/24/2026</a:t>
+              <a:t>6/1/2026</a:t>
             </a:fld>
             <a:endParaRPr lang="en-US"/>
           </a:p>
@@ -5130,7 +5131,7 @@
           <a:p>
             <a:fld id="{79806886-C3E2-4AA6-AE5C-EC60C7639E42}" type="datetimeFigureOut">
               <a:rPr lang="en-US" smtClean="0"/>
-              <a:t>5/24/2026</a:t>
+              <a:t>6/1/2026</a:t>
             </a:fld>
             <a:endParaRPr lang="en-US"/>
           </a:p>
@@ -5364,7 +5365,7 @@
           <a:p>
             <a:fld id="{79806886-C3E2-4AA6-AE5C-EC60C7639E42}" type="datetimeFigureOut">
               <a:rPr lang="en-US" smtClean="0"/>
-              <a:t>5/24/2026</a:t>
+              <a:t>6/1/2026</a:t>
             </a:fld>
             <a:endParaRPr lang="en-US"/>
           </a:p>
@@ -8067,6 +8068,127 @@
 </p:sld>
 </file>
 
+<file path=ppt/slides/slide21.xml><?xml version="1.0" encoding="utf-8"?>
+<p:sld xmlns:a="http://schemas.openxmlformats.org/drawingml/2006/main" xmlns:r="http://schemas.openxmlformats.org/officeDocument/2006/relationships" xmlns:p="http://schemas.openxmlformats.org/presentationml/2006/main">
+  <p:cSld>
+    <p:spTree>
+      <p:nvGrpSpPr>
+        <p:cNvPr id="1" name=""/>
+        <p:cNvGrpSpPr/>
+        <p:nvPr/>
+      </p:nvGrpSpPr>
+      <p:grpSpPr>
+        <a:xfrm>
+          <a:off x="0" y="0"/>
+          <a:ext cx="0" cy="0"/>
+          <a:chOff x="0" y="0"/>
+          <a:chExt cx="0" cy="0"/>
+        </a:xfrm>
+      </p:grpSpPr>
+      <p:sp>
+        <p:nvSpPr>
+          <p:cNvPr id="2" name="Title 1">
+            <a:extLst>
+              <a:ext uri="{FF2B5EF4-FFF2-40B4-BE49-F238E27FC236}">
+                <a16:creationId xmlns:a16="http://schemas.microsoft.com/office/drawing/2014/main" id="{CF9906C1-2BFE-A0C2-3012-CBD270B169E8}"/>
+              </a:ext>
+            </a:extLst>
+          </p:cNvPr>
+          <p:cNvSpPr>
+            <a:spLocks noGrp="1"/>
+          </p:cNvSpPr>
+          <p:nvPr>
+            <p:ph type="title"/>
+          </p:nvPr>
+        </p:nvSpPr>
+        <p:spPr>
+          <a:xfrm>
+            <a:off x="919119" y="0"/>
+            <a:ext cx="10353762" cy="702733"/>
+          </a:xfrm>
+        </p:spPr>
+        <p:txBody>
+          <a:bodyPr/>
+          <a:lstStyle/>
+          <a:p>
+            <a:r>
+              <a:rPr lang="en-US"/>
+              <a:t>Json Serializer</a:t>
+            </a:r>
+          </a:p>
+        </p:txBody>
+      </p:sp>
+      <p:sp>
+        <p:nvSpPr>
+          <p:cNvPr id="3" name="Content Placeholder 2">
+            <a:extLst>
+              <a:ext uri="{FF2B5EF4-FFF2-40B4-BE49-F238E27FC236}">
+                <a16:creationId xmlns:a16="http://schemas.microsoft.com/office/drawing/2014/main" id="{CF22425C-3A64-82E6-B9C7-67FF11B9F2E4}"/>
+              </a:ext>
+            </a:extLst>
+          </p:cNvPr>
+          <p:cNvSpPr>
+            <a:spLocks noGrp="1"/>
+          </p:cNvSpPr>
+          <p:nvPr>
+            <p:ph idx="1"/>
+          </p:nvPr>
+        </p:nvSpPr>
+        <p:spPr>
+          <a:xfrm>
+            <a:off x="76200" y="702733"/>
+            <a:ext cx="12115800" cy="5994400"/>
+          </a:xfrm>
+        </p:spPr>
+        <p:txBody>
+          <a:bodyPr>
+            <a:normAutofit/>
+          </a:bodyPr>
+          <a:lstStyle/>
+          <a:p>
+            <a:r>
+              <a:rPr lang="en-US" sz="1800"/>
+              <a:t>ASP.NET Core's model binding is generally </a:t>
+            </a:r>
+            <a:r>
+              <a:rPr lang="en-US" sz="1800" b="1">
+                <a:solidFill>
+                  <a:srgbClr val="FF0000"/>
+                </a:solidFill>
+              </a:rPr>
+              <a:t>case-insensitive</a:t>
+            </a:r>
+          </a:p>
+          <a:p>
+            <a:r>
+              <a:rPr lang="en-US" sz="1800"/>
+              <a:t>your ASP.NET Core API uses the default camelCase serialization</a:t>
+            </a:r>
+          </a:p>
+          <a:p>
+            <a:r>
+              <a:rPr lang="en-US" sz="1800"/>
+              <a:t>Since ASP.NET Core API returns JSON in camelCase, define your Angular interfaces properties in camelCase as well</a:t>
+            </a:r>
+          </a:p>
+          <a:p>
+            <a:endParaRPr lang="en-US" sz="1800"/>
+          </a:p>
+        </p:txBody>
+      </p:sp>
+    </p:spTree>
+    <p:extLst>
+      <p:ext uri="{BB962C8B-B14F-4D97-AF65-F5344CB8AC3E}">
+        <p14:creationId xmlns:p14="http://schemas.microsoft.com/office/powerpoint/2010/main" val="2145201965"/>
+      </p:ext>
+    </p:extLst>
+  </p:cSld>
+  <p:clrMapOvr>
+    <a:masterClrMapping/>
+  </p:clrMapOvr>
+</p:sld>
+</file>
+
 <file path=ppt/slides/slide3.xml><?xml version="1.0" encoding="utf-8"?>
 <p:sld xmlns:a="http://schemas.openxmlformats.org/drawingml/2006/main" xmlns:r="http://schemas.openxmlformats.org/officeDocument/2006/relationships" xmlns:p="http://schemas.openxmlformats.org/presentationml/2006/main">
   <p:cSld>

--- a/Dot Net/NEW.pptx
+++ b/Dot Net/NEW.pptx
@@ -10,22 +10,23 @@
     <p:sldId id="258" r:id="rId4"/>
     <p:sldId id="259" r:id="rId5"/>
     <p:sldId id="260" r:id="rId6"/>
-    <p:sldId id="269" r:id="rId7"/>
-    <p:sldId id="274" r:id="rId8"/>
-    <p:sldId id="261" r:id="rId9"/>
-    <p:sldId id="262" r:id="rId10"/>
-    <p:sldId id="263" r:id="rId11"/>
-    <p:sldId id="264" r:id="rId12"/>
-    <p:sldId id="265" r:id="rId13"/>
-    <p:sldId id="266" r:id="rId14"/>
-    <p:sldId id="267" r:id="rId15"/>
-    <p:sldId id="268" r:id="rId16"/>
-    <p:sldId id="270" r:id="rId17"/>
-    <p:sldId id="271" r:id="rId18"/>
-    <p:sldId id="273" r:id="rId19"/>
-    <p:sldId id="272" r:id="rId20"/>
-    <p:sldId id="275" r:id="rId21"/>
-    <p:sldId id="276" r:id="rId22"/>
+    <p:sldId id="277" r:id="rId7"/>
+    <p:sldId id="269" r:id="rId8"/>
+    <p:sldId id="274" r:id="rId9"/>
+    <p:sldId id="261" r:id="rId10"/>
+    <p:sldId id="262" r:id="rId11"/>
+    <p:sldId id="263" r:id="rId12"/>
+    <p:sldId id="264" r:id="rId13"/>
+    <p:sldId id="265" r:id="rId14"/>
+    <p:sldId id="266" r:id="rId15"/>
+    <p:sldId id="267" r:id="rId16"/>
+    <p:sldId id="268" r:id="rId17"/>
+    <p:sldId id="270" r:id="rId18"/>
+    <p:sldId id="271" r:id="rId19"/>
+    <p:sldId id="273" r:id="rId20"/>
+    <p:sldId id="272" r:id="rId21"/>
+    <p:sldId id="275" r:id="rId22"/>
+    <p:sldId id="276" r:id="rId23"/>
   </p:sldIdLst>
   <p:sldSz cx="12192000" cy="6858000"/>
   <p:notesSz cx="6858000" cy="9144000"/>
@@ -317,7 +318,7 @@
           <a:p>
             <a:fld id="{79806886-C3E2-4AA6-AE5C-EC60C7639E42}" type="datetimeFigureOut">
               <a:rPr lang="en-US" smtClean="0"/>
-              <a:t>6/10/2026</a:t>
+              <a:t>6/23/2026</a:t>
             </a:fld>
             <a:endParaRPr lang="en-US"/>
           </a:p>
@@ -615,7 +616,7 @@
           <a:p>
             <a:fld id="{79806886-C3E2-4AA6-AE5C-EC60C7639E42}" type="datetimeFigureOut">
               <a:rPr lang="en-US" smtClean="0"/>
-              <a:t>6/10/2026</a:t>
+              <a:t>6/23/2026</a:t>
             </a:fld>
             <a:endParaRPr lang="en-US"/>
           </a:p>
@@ -807,7 +808,7 @@
           <a:p>
             <a:fld id="{79806886-C3E2-4AA6-AE5C-EC60C7639E42}" type="datetimeFigureOut">
               <a:rPr lang="en-US" smtClean="0"/>
-              <a:t>6/10/2026</a:t>
+              <a:t>6/23/2026</a:t>
             </a:fld>
             <a:endParaRPr lang="en-US"/>
           </a:p>
@@ -1068,7 +1069,7 @@
           <a:p>
             <a:fld id="{79806886-C3E2-4AA6-AE5C-EC60C7639E42}" type="datetimeFigureOut">
               <a:rPr lang="en-US" smtClean="0"/>
-              <a:t>6/10/2026</a:t>
+              <a:t>6/23/2026</a:t>
             </a:fld>
             <a:endParaRPr lang="en-US"/>
           </a:p>
@@ -1492,7 +1493,7 @@
           <a:p>
             <a:fld id="{79806886-C3E2-4AA6-AE5C-EC60C7639E42}" type="datetimeFigureOut">
               <a:rPr lang="en-US" smtClean="0"/>
-              <a:t>6/10/2026</a:t>
+              <a:t>6/23/2026</a:t>
             </a:fld>
             <a:endParaRPr lang="en-US"/>
           </a:p>
@@ -2029,7 +2030,7 @@
           <a:p>
             <a:fld id="{79806886-C3E2-4AA6-AE5C-EC60C7639E42}" type="datetimeFigureOut">
               <a:rPr lang="en-US" smtClean="0"/>
-              <a:t>6/10/2026</a:t>
+              <a:t>6/23/2026</a:t>
             </a:fld>
             <a:endParaRPr lang="en-US"/>
           </a:p>
@@ -2893,7 +2894,7 @@
           <a:p>
             <a:fld id="{79806886-C3E2-4AA6-AE5C-EC60C7639E42}" type="datetimeFigureOut">
               <a:rPr lang="en-US" smtClean="0"/>
-              <a:t>6/10/2026</a:t>
+              <a:t>6/23/2026</a:t>
             </a:fld>
             <a:endParaRPr lang="en-US"/>
           </a:p>
@@ -3063,7 +3064,7 @@
           <a:p>
             <a:fld id="{79806886-C3E2-4AA6-AE5C-EC60C7639E42}" type="datetimeFigureOut">
               <a:rPr lang="en-US" smtClean="0"/>
-              <a:t>6/10/2026</a:t>
+              <a:t>6/23/2026</a:t>
             </a:fld>
             <a:endParaRPr lang="en-US"/>
           </a:p>
@@ -3247,7 +3248,7 @@
           <a:p>
             <a:fld id="{79806886-C3E2-4AA6-AE5C-EC60C7639E42}" type="datetimeFigureOut">
               <a:rPr lang="en-US" smtClean="0"/>
-              <a:t>6/10/2026</a:t>
+              <a:t>6/23/2026</a:t>
             </a:fld>
             <a:endParaRPr lang="en-US"/>
           </a:p>
@@ -3417,7 +3418,7 @@
           <a:p>
             <a:fld id="{79806886-C3E2-4AA6-AE5C-EC60C7639E42}" type="datetimeFigureOut">
               <a:rPr lang="en-US" smtClean="0"/>
-              <a:t>6/10/2026</a:t>
+              <a:t>6/23/2026</a:t>
             </a:fld>
             <a:endParaRPr lang="en-US"/>
           </a:p>
@@ -3661,7 +3662,7 @@
           <a:p>
             <a:fld id="{79806886-C3E2-4AA6-AE5C-EC60C7639E42}" type="datetimeFigureOut">
               <a:rPr lang="en-US" smtClean="0"/>
-              <a:t>6/10/2026</a:t>
+              <a:t>6/23/2026</a:t>
             </a:fld>
             <a:endParaRPr lang="en-US"/>
           </a:p>
@@ -3897,7 +3898,7 @@
           <a:p>
             <a:fld id="{79806886-C3E2-4AA6-AE5C-EC60C7639E42}" type="datetimeFigureOut">
               <a:rPr lang="en-US" smtClean="0"/>
-              <a:t>6/10/2026</a:t>
+              <a:t>6/23/2026</a:t>
             </a:fld>
             <a:endParaRPr lang="en-US"/>
           </a:p>
@@ -4363,7 +4364,7 @@
           <a:p>
             <a:fld id="{79806886-C3E2-4AA6-AE5C-EC60C7639E42}" type="datetimeFigureOut">
               <a:rPr lang="en-US" smtClean="0"/>
-              <a:t>6/10/2026</a:t>
+              <a:t>6/23/2026</a:t>
             </a:fld>
             <a:endParaRPr lang="en-US"/>
           </a:p>
@@ -4481,7 +4482,7 @@
           <a:p>
             <a:fld id="{79806886-C3E2-4AA6-AE5C-EC60C7639E42}" type="datetimeFigureOut">
               <a:rPr lang="en-US" smtClean="0"/>
-              <a:t>6/10/2026</a:t>
+              <a:t>6/23/2026</a:t>
             </a:fld>
             <a:endParaRPr lang="en-US"/>
           </a:p>
@@ -4576,7 +4577,7 @@
           <a:p>
             <a:fld id="{79806886-C3E2-4AA6-AE5C-EC60C7639E42}" type="datetimeFigureOut">
               <a:rPr lang="en-US" smtClean="0"/>
-              <a:t>6/10/2026</a:t>
+              <a:t>6/23/2026</a:t>
             </a:fld>
             <a:endParaRPr lang="en-US"/>
           </a:p>
@@ -4831,7 +4832,7 @@
           <a:p>
             <a:fld id="{79806886-C3E2-4AA6-AE5C-EC60C7639E42}" type="datetimeFigureOut">
               <a:rPr lang="en-US" smtClean="0"/>
-              <a:t>6/10/2026</a:t>
+              <a:t>6/23/2026</a:t>
             </a:fld>
             <a:endParaRPr lang="en-US"/>
           </a:p>
@@ -5131,7 +5132,7 @@
           <a:p>
             <a:fld id="{79806886-C3E2-4AA6-AE5C-EC60C7639E42}" type="datetimeFigureOut">
               <a:rPr lang="en-US" smtClean="0"/>
-              <a:t>6/10/2026</a:t>
+              <a:t>6/23/2026</a:t>
             </a:fld>
             <a:endParaRPr lang="en-US"/>
           </a:p>
@@ -5365,7 +5366,7 @@
           <a:p>
             <a:fld id="{79806886-C3E2-4AA6-AE5C-EC60C7639E42}" type="datetimeFigureOut">
               <a:rPr lang="en-US" smtClean="0"/>
-              <a:t>6/10/2026</a:t>
+              <a:t>6/23/2026</a:t>
             </a:fld>
             <a:endParaRPr lang="en-US"/>
           </a:p>
@@ -6124,7 +6125,7 @@
           <p:cNvPr id="2" name="Title 1">
             <a:extLst>
               <a:ext uri="{FF2B5EF4-FFF2-40B4-BE49-F238E27FC236}">
-                <a16:creationId xmlns:a16="http://schemas.microsoft.com/office/drawing/2014/main" id="{C6017F55-A87E-8987-8C53-D352FE5F6AD4}"/>
+                <a16:creationId xmlns:a16="http://schemas.microsoft.com/office/drawing/2014/main" id="{BC629567-C097-E677-74FD-BB7789F58B8C}"/>
               </a:ext>
             </a:extLst>
           </p:cNvPr>
@@ -6138,66 +6139,73 @@
         <p:spPr>
           <a:xfrm>
             <a:off x="913795" y="0"/>
-            <a:ext cx="10353762" cy="970450"/>
-          </a:xfrm>
-        </p:spPr>
-        <p:txBody>
-          <a:bodyPr/>
+            <a:ext cx="10353762" cy="601133"/>
+          </a:xfrm>
+        </p:spPr>
+        <p:txBody>
+          <a:bodyPr>
+            <a:normAutofit fontScale="90000"/>
+          </a:bodyPr>
           <a:lstStyle/>
           <a:p>
             <a:r>
               <a:rPr lang="en-US" b="1">
                 <a:solidFill>
-                  <a:srgbClr val="FF0000"/>
-                </a:solidFill>
+                  <a:srgbClr val="FFFF00"/>
+                </a:solidFill>
+                <a:effectLst/>
               </a:rPr>
-              <a:t>Left join in .net 10</a:t>
-            </a:r>
-          </a:p>
-        </p:txBody>
-      </p:sp>
-      <p:sp>
-        <p:nvSpPr>
-          <p:cNvPr id="3" name="Content Placeholder 2">
+              <a:t>LINQ Query Syntax left Join</a:t>
+            </a:r>
+            <a:endParaRPr lang="en-US"/>
+          </a:p>
+        </p:txBody>
+      </p:sp>
+      <p:pic>
+        <p:nvPicPr>
+          <p:cNvPr id="5" name="Content Placeholder 4">
             <a:extLst>
               <a:ext uri="{FF2B5EF4-FFF2-40B4-BE49-F238E27FC236}">
-                <a16:creationId xmlns:a16="http://schemas.microsoft.com/office/drawing/2014/main" id="{F573BCEA-3A25-B8DF-FB6E-C613885C8F25}"/>
+                <a16:creationId xmlns:a16="http://schemas.microsoft.com/office/drawing/2014/main" id="{43EBEE3B-A167-F253-28A7-81C76EED4FD1}"/>
               </a:ext>
             </a:extLst>
           </p:cNvPr>
-          <p:cNvSpPr>
-            <a:spLocks noGrp="1"/>
-          </p:cNvSpPr>
+          <p:cNvPicPr>
+            <a:picLocks noGrp="1" noChangeAspect="1"/>
+          </p:cNvPicPr>
           <p:nvPr>
             <p:ph idx="1"/>
           </p:nvPr>
-        </p:nvSpPr>
-        <p:spPr>
-          <a:xfrm>
-            <a:off x="143933" y="970450"/>
-            <a:ext cx="11954934" cy="5785949"/>
-          </a:xfrm>
-        </p:spPr>
-        <p:txBody>
-          <a:bodyPr/>
-          <a:lstStyle/>
-          <a:p>
-            <a:endParaRPr lang="en-US"/>
-          </a:p>
-          <a:p>
-            <a:endParaRPr lang="en-US"/>
-          </a:p>
-          <a:p>
-            <a:endParaRPr lang="en-US"/>
-          </a:p>
-        </p:txBody>
-      </p:sp>
+        </p:nvPicPr>
+        <p:blipFill>
+          <a:blip r:embed="rId2"/>
+          <a:stretch>
+            <a:fillRect/>
+          </a:stretch>
+        </p:blipFill>
+        <p:spPr>
+          <a:xfrm>
+            <a:off x="3716866" y="601132"/>
+            <a:ext cx="4030133" cy="2820333"/>
+          </a:xfrm>
+          <a:prstGeom prst="rect">
+            <a:avLst/>
+          </a:prstGeom>
+          <a:effectLst>
+            <a:outerShdw blurRad="25400" dir="17880000">
+              <a:srgbClr val="000000">
+                <a:alpha val="46000"/>
+              </a:srgbClr>
+            </a:outerShdw>
+          </a:effectLst>
+        </p:spPr>
+      </p:pic>
       <p:pic>
         <p:nvPicPr>
-          <p:cNvPr id="5" name="Picture 4">
+          <p:cNvPr id="7" name="Picture 6">
             <a:extLst>
               <a:ext uri="{FF2B5EF4-FFF2-40B4-BE49-F238E27FC236}">
-                <a16:creationId xmlns:a16="http://schemas.microsoft.com/office/drawing/2014/main" id="{1A68C370-4A46-552D-83CE-7E9DB643D26E}"/>
+                <a16:creationId xmlns:a16="http://schemas.microsoft.com/office/drawing/2014/main" id="{B26874DD-4DB0-E2B0-FE6A-506E6C22AD83}"/>
               </a:ext>
             </a:extLst>
           </p:cNvPr>
@@ -6207,25 +6215,72 @@
           <p:nvPr/>
         </p:nvPicPr>
         <p:blipFill>
-          <a:blip r:embed="rId2"/>
+          <a:blip r:embed="rId3"/>
           <a:stretch>
             <a:fillRect/>
           </a:stretch>
         </p:blipFill>
         <p:spPr>
           <a:xfrm>
-            <a:off x="271574" y="885510"/>
-            <a:ext cx="5824426" cy="2921577"/>
+            <a:off x="196308" y="608667"/>
+            <a:ext cx="3247932" cy="2820333"/>
           </a:xfrm>
           <a:prstGeom prst="rect">
             <a:avLst/>
           </a:prstGeom>
         </p:spPr>
       </p:pic>
+      <p:sp>
+        <p:nvSpPr>
+          <p:cNvPr id="8" name="TextBox 7">
+            <a:extLst>
+              <a:ext uri="{FF2B5EF4-FFF2-40B4-BE49-F238E27FC236}">
+                <a16:creationId xmlns:a16="http://schemas.microsoft.com/office/drawing/2014/main" id="{DC59A1D6-D574-D479-7528-6A48466DDE1C}"/>
+              </a:ext>
+            </a:extLst>
+          </p:cNvPr>
+          <p:cNvSpPr txBox="1"/>
+          <p:nvPr/>
+        </p:nvSpPr>
+        <p:spPr>
+          <a:xfrm>
+            <a:off x="728132" y="4064000"/>
+            <a:ext cx="10041467" cy="1477328"/>
+          </a:xfrm>
+          <a:prstGeom prst="rect">
+            <a:avLst/>
+          </a:prstGeom>
+          <a:noFill/>
+        </p:spPr>
+        <p:txBody>
+          <a:bodyPr wrap="square" rtlCol="0">
+            <a:spAutoFit/>
+          </a:bodyPr>
+          <a:lstStyle/>
+          <a:p>
+            <a:r>
+              <a:rPr lang="en-US"/>
+              <a:t>The tricky here is : when we need to get from all rows from first table even if there no match in second table</a:t>
+            </a:r>
+          </a:p>
+          <a:p>
+            <a:endParaRPr lang="en-US"/>
+          </a:p>
+          <a:p>
+            <a:endParaRPr lang="en-US"/>
+          </a:p>
+          <a:p>
+            <a:r>
+              <a:rPr lang="en-US"/>
+              <a:t> </a:t>
+            </a:r>
+          </a:p>
+        </p:txBody>
+      </p:sp>
     </p:spTree>
     <p:extLst>
       <p:ext uri="{BB962C8B-B14F-4D97-AF65-F5344CB8AC3E}">
-        <p14:creationId xmlns:p14="http://schemas.microsoft.com/office/powerpoint/2010/main" val="1885605593"/>
+        <p14:creationId xmlns:p14="http://schemas.microsoft.com/office/powerpoint/2010/main" val="2082898737"/>
       </p:ext>
     </p:extLst>
   </p:cSld>
@@ -6257,7 +6312,7 @@
           <p:cNvPr id="2" name="Title 1">
             <a:extLst>
               <a:ext uri="{FF2B5EF4-FFF2-40B4-BE49-F238E27FC236}">
-                <a16:creationId xmlns:a16="http://schemas.microsoft.com/office/drawing/2014/main" id="{204F4AEA-1971-E800-703E-69F376F262A9}"/>
+                <a16:creationId xmlns:a16="http://schemas.microsoft.com/office/drawing/2014/main" id="{C6017F55-A87E-8987-8C53-D352FE5F6AD4}"/>
               </a:ext>
             </a:extLst>
           </p:cNvPr>
@@ -6271,7 +6326,7 @@
         <p:spPr>
           <a:xfrm>
             <a:off x="913795" y="0"/>
-            <a:ext cx="10353762" cy="753533"/>
+            <a:ext cx="10353762" cy="970450"/>
           </a:xfrm>
         </p:spPr>
         <p:txBody>
@@ -6280,11 +6335,12 @@
           <a:p>
             <a:r>
               <a:rPr lang="en-US" b="1">
-                <a:effectLst/>
+                <a:solidFill>
+                  <a:srgbClr val="FF0000"/>
+                </a:solidFill>
               </a:rPr>
-              <a:t>Association </a:t>
-            </a:r>
-            <a:endParaRPr lang="en-US"/>
+              <a:t>Left join in .net 10</a:t>
+            </a:r>
           </a:p>
         </p:txBody>
       </p:sp>
@@ -6293,7 +6349,7 @@
           <p:cNvPr id="3" name="Content Placeholder 2">
             <a:extLst>
               <a:ext uri="{FF2B5EF4-FFF2-40B4-BE49-F238E27FC236}">
-                <a16:creationId xmlns:a16="http://schemas.microsoft.com/office/drawing/2014/main" id="{2F56D789-EEAB-71E6-ECF8-CFF49F4FD004}"/>
+                <a16:creationId xmlns:a16="http://schemas.microsoft.com/office/drawing/2014/main" id="{F573BCEA-3A25-B8DF-FB6E-C613885C8F25}"/>
               </a:ext>
             </a:extLst>
           </p:cNvPr>
@@ -6306,75 +6362,20 @@
         </p:nvSpPr>
         <p:spPr>
           <a:xfrm>
-            <a:off x="177800" y="897467"/>
-            <a:ext cx="11844867" cy="5698066"/>
+            <a:off x="143933" y="970450"/>
+            <a:ext cx="11954934" cy="5785949"/>
           </a:xfrm>
         </p:spPr>
         <p:txBody>
           <a:bodyPr/>
           <a:lstStyle/>
           <a:p>
-            <a:r>
-              <a:rPr lang="en-US" b="1">
-                <a:effectLst/>
-              </a:rPr>
-              <a:t>Uses-A"</a:t>
-            </a:r>
-            <a:r>
-              <a:rPr lang="en-US" b="1">
-                <a:solidFill>
-                  <a:srgbClr val="FFFF00"/>
-                </a:solidFill>
-                <a:effectLst/>
-              </a:rPr>
-              <a:t>Relationship</a:t>
-            </a:r>
-            <a:r>
-              <a:rPr lang="en-US" b="1">
-                <a:effectLst/>
-              </a:rPr>
-              <a:t>"</a:t>
-            </a:r>
-            <a:endParaRPr lang="en-US">
-              <a:effectLst/>
-            </a:endParaRPr>
-          </a:p>
-          <a:p>
-            <a:r>
-              <a:rPr lang="en-US">
-                <a:effectLst/>
-              </a:rPr>
-              <a:t>It defines a link between two </a:t>
-            </a:r>
-            <a:r>
-              <a:rPr lang="en-US" b="1">
-                <a:solidFill>
-                  <a:srgbClr val="FFFF00"/>
-                </a:solidFill>
-                <a:effectLst/>
-              </a:rPr>
-              <a:t>independent</a:t>
-            </a:r>
-            <a:r>
-              <a:rPr lang="en-US">
-                <a:effectLst/>
-              </a:rPr>
-              <a:t> objects where they use each other to perform actions, but neither "owns" the other.</a:t>
-            </a:r>
-          </a:p>
-          <a:p>
-            <a:r>
-              <a:rPr lang="en-US" b="1">
-                <a:effectLst/>
-              </a:rPr>
-              <a:t>Implementation: </a:t>
-            </a:r>
-            <a:r>
-              <a:rPr lang="en-US">
-                <a:effectLst/>
-              </a:rPr>
-              <a:t>by passing an object as a parameter to a method.</a:t>
-            </a:r>
+            <a:endParaRPr lang="en-US"/>
+          </a:p>
+          <a:p>
+            <a:endParaRPr lang="en-US"/>
+          </a:p>
+          <a:p>
             <a:endParaRPr lang="en-US"/>
           </a:p>
         </p:txBody>
@@ -6384,7 +6385,7 @@
           <p:cNvPr id="5" name="Picture 4">
             <a:extLst>
               <a:ext uri="{FF2B5EF4-FFF2-40B4-BE49-F238E27FC236}">
-                <a16:creationId xmlns:a16="http://schemas.microsoft.com/office/drawing/2014/main" id="{0134ABA0-88FD-1776-477D-E864080379AA}"/>
+                <a16:creationId xmlns:a16="http://schemas.microsoft.com/office/drawing/2014/main" id="{1A68C370-4A46-552D-83CE-7E9DB643D26E}"/>
               </a:ext>
             </a:extLst>
           </p:cNvPr>
@@ -6401,8 +6402,8 @@
         </p:blipFill>
         <p:spPr>
           <a:xfrm>
-            <a:off x="311776" y="2788392"/>
-            <a:ext cx="6063623" cy="2881812"/>
+            <a:off x="271574" y="885510"/>
+            <a:ext cx="5824426" cy="2921577"/>
           </a:xfrm>
           <a:prstGeom prst="rect">
             <a:avLst/>
@@ -6412,7 +6413,7 @@
     </p:spTree>
     <p:extLst>
       <p:ext uri="{BB962C8B-B14F-4D97-AF65-F5344CB8AC3E}">
-        <p14:creationId xmlns:p14="http://schemas.microsoft.com/office/powerpoint/2010/main" val="2546003169"/>
+        <p14:creationId xmlns:p14="http://schemas.microsoft.com/office/powerpoint/2010/main" val="1885605593"/>
       </p:ext>
     </p:extLst>
   </p:cSld>
@@ -6444,7 +6445,7 @@
           <p:cNvPr id="2" name="Title 1">
             <a:extLst>
               <a:ext uri="{FF2B5EF4-FFF2-40B4-BE49-F238E27FC236}">
-                <a16:creationId xmlns:a16="http://schemas.microsoft.com/office/drawing/2014/main" id="{264267C5-BAE5-0154-04C1-96AF1FC31AB4}"/>
+                <a16:creationId xmlns:a16="http://schemas.microsoft.com/office/drawing/2014/main" id="{204F4AEA-1971-E800-703E-69F376F262A9}"/>
               </a:ext>
             </a:extLst>
           </p:cNvPr>
@@ -6458,20 +6459,18 @@
         <p:spPr>
           <a:xfrm>
             <a:off x="913795" y="0"/>
-            <a:ext cx="10353762" cy="651933"/>
-          </a:xfrm>
-        </p:spPr>
-        <p:txBody>
-          <a:bodyPr>
-            <a:normAutofit fontScale="90000"/>
-          </a:bodyPr>
+            <a:ext cx="10353762" cy="753533"/>
+          </a:xfrm>
+        </p:spPr>
+        <p:txBody>
+          <a:bodyPr/>
           <a:lstStyle/>
           <a:p>
             <a:r>
               <a:rPr lang="en-US" b="1">
                 <a:effectLst/>
               </a:rPr>
-              <a:t>Aggregation </a:t>
+              <a:t>Association </a:t>
             </a:r>
             <a:endParaRPr lang="en-US"/>
           </a:p>
@@ -6482,7 +6481,7 @@
           <p:cNvPr id="3" name="Content Placeholder 2">
             <a:extLst>
               <a:ext uri="{FF2B5EF4-FFF2-40B4-BE49-F238E27FC236}">
-                <a16:creationId xmlns:a16="http://schemas.microsoft.com/office/drawing/2014/main" id="{D665FE83-4CE4-A8FB-78C3-FC7CC7279430}"/>
+                <a16:creationId xmlns:a16="http://schemas.microsoft.com/office/drawing/2014/main" id="{2F56D789-EEAB-71E6-ECF8-CFF49F4FD004}"/>
               </a:ext>
             </a:extLst>
           </p:cNvPr>
@@ -6495,87 +6494,75 @@
         </p:nvSpPr>
         <p:spPr>
           <a:xfrm>
-            <a:off x="93133" y="651933"/>
-            <a:ext cx="11980334" cy="6070600"/>
+            <a:off x="177800" y="897467"/>
+            <a:ext cx="11844867" cy="5698066"/>
           </a:xfrm>
         </p:spPr>
         <p:txBody>
           <a:bodyPr/>
           <a:lstStyle/>
-          <a:p>
-            <a:r>
-              <a:rPr lang="en-US" sz="1800" b="1">
-                <a:effectLst/>
-              </a:rPr>
-              <a:t>The "Has-A" Relationship</a:t>
-            </a:r>
-          </a:p>
-          <a:p>
-            <a:r>
-              <a:rPr lang="en-US" sz="1800" b="1">
-                <a:effectLst/>
-              </a:rPr>
-              <a:t>C# Implementation:</a:t>
-            </a:r>
-            <a:r>
-              <a:rPr lang="en-US" sz="1800">
-                <a:effectLst/>
-              </a:rPr>
-              <a:t> </a:t>
-            </a:r>
-            <a:r>
-              <a:rPr lang="en-US" sz="1800" b="1">
-                <a:effectLst/>
-              </a:rPr>
-              <a:t>Usually implemented by passing the child object into the parent’s constructor or property (</a:t>
-            </a:r>
-            <a:r>
-              <a:rPr lang="en-US" sz="1800" b="1">
-                <a:solidFill>
-                  <a:srgbClr val="FFFF00"/>
-                </a:solidFill>
-                <a:effectLst/>
-              </a:rPr>
-              <a:t>Dependency Injection</a:t>
-            </a:r>
-            <a:r>
-              <a:rPr lang="en-US" sz="1800" b="1">
-                <a:effectLst/>
-              </a:rPr>
-              <a:t>)</a:t>
-            </a:r>
-          </a:p>
           <a:p>
             <a:r>
               <a:rPr lang="en-US" b="1">
                 <a:effectLst/>
               </a:rPr>
-              <a:t>Here </a:t>
-            </a:r>
-            <a:r>
-              <a:rPr lang="en-US"/>
-              <a:t>children (teachers) can live without parent [ department ]</a:t>
-            </a:r>
-            <a:endParaRPr lang="en-US" b="1">
+              <a:t>Uses-A"</a:t>
+            </a:r>
+            <a:r>
+              <a:rPr lang="en-US" b="1">
+                <a:solidFill>
+                  <a:srgbClr val="FFFF00"/>
+                </a:solidFill>
+                <a:effectLst/>
+              </a:rPr>
+              <a:t>Relationship</a:t>
+            </a:r>
+            <a:r>
+              <a:rPr lang="en-US" b="1">
+                <a:effectLst/>
+              </a:rPr>
+              <a:t>"</a:t>
+            </a:r>
+            <a:endParaRPr lang="en-US">
               <a:effectLst/>
             </a:endParaRPr>
           </a:p>
           <a:p>
-            <a:endParaRPr lang="en-US" b="1">
-              <a:effectLst/>
-            </a:endParaRPr>
-          </a:p>
-          <a:p>
-            <a:endParaRPr lang="en-US" b="1">
-              <a:effectLst/>
-            </a:endParaRPr>
-          </a:p>
-          <a:p>
-            <a:endParaRPr lang="en-US" b="1">
-              <a:effectLst/>
-            </a:endParaRPr>
-          </a:p>
-          <a:p>
+            <a:r>
+              <a:rPr lang="en-US">
+                <a:effectLst/>
+              </a:rPr>
+              <a:t>It defines a link between two </a:t>
+            </a:r>
+            <a:r>
+              <a:rPr lang="en-US" b="1">
+                <a:solidFill>
+                  <a:srgbClr val="FFFF00"/>
+                </a:solidFill>
+                <a:effectLst/>
+              </a:rPr>
+              <a:t>independent</a:t>
+            </a:r>
+            <a:r>
+              <a:rPr lang="en-US">
+                <a:effectLst/>
+              </a:rPr>
+              <a:t> objects where they use each other to perform actions, but neither "owns" the other.</a:t>
+            </a:r>
+          </a:p>
+          <a:p>
+            <a:r>
+              <a:rPr lang="en-US" b="1">
+                <a:effectLst/>
+              </a:rPr>
+              <a:t>Implementation: </a:t>
+            </a:r>
+            <a:r>
+              <a:rPr lang="en-US">
+                <a:effectLst/>
+              </a:rPr>
+              <a:t>by passing an object as a parameter to a method.</a:t>
+            </a:r>
             <a:endParaRPr lang="en-US"/>
           </a:p>
         </p:txBody>
@@ -6585,7 +6572,7 @@
           <p:cNvPr id="5" name="Picture 4">
             <a:extLst>
               <a:ext uri="{FF2B5EF4-FFF2-40B4-BE49-F238E27FC236}">
-                <a16:creationId xmlns:a16="http://schemas.microsoft.com/office/drawing/2014/main" id="{89992E4A-01A8-4933-2AB5-554C036CF0B2}"/>
+                <a16:creationId xmlns:a16="http://schemas.microsoft.com/office/drawing/2014/main" id="{0134ABA0-88FD-1776-477D-E864080379AA}"/>
               </a:ext>
             </a:extLst>
           </p:cNvPr>
@@ -6602,8 +6589,8 @@
         </p:blipFill>
         <p:spPr>
           <a:xfrm>
-            <a:off x="118533" y="2684926"/>
-            <a:ext cx="4885267" cy="3147614"/>
+            <a:off x="311776" y="2788392"/>
+            <a:ext cx="6063623" cy="2881812"/>
           </a:xfrm>
           <a:prstGeom prst="rect">
             <a:avLst/>
@@ -6613,7 +6600,7 @@
     </p:spTree>
     <p:extLst>
       <p:ext uri="{BB962C8B-B14F-4D97-AF65-F5344CB8AC3E}">
-        <p14:creationId xmlns:p14="http://schemas.microsoft.com/office/powerpoint/2010/main" val="3768059492"/>
+        <p14:creationId xmlns:p14="http://schemas.microsoft.com/office/powerpoint/2010/main" val="2546003169"/>
       </p:ext>
     </p:extLst>
   </p:cSld>
@@ -6645,7 +6632,7 @@
           <p:cNvPr id="2" name="Title 1">
             <a:extLst>
               <a:ext uri="{FF2B5EF4-FFF2-40B4-BE49-F238E27FC236}">
-                <a16:creationId xmlns:a16="http://schemas.microsoft.com/office/drawing/2014/main" id="{E52B5755-B757-6CAE-6FCA-355EA02E6B56}"/>
+                <a16:creationId xmlns:a16="http://schemas.microsoft.com/office/drawing/2014/main" id="{264267C5-BAE5-0154-04C1-96AF1FC31AB4}"/>
               </a:ext>
             </a:extLst>
           </p:cNvPr>
@@ -6659,7 +6646,7 @@
         <p:spPr>
           <a:xfrm>
             <a:off x="913795" y="0"/>
-            <a:ext cx="10353762" cy="609600"/>
+            <a:ext cx="10353762" cy="651933"/>
           </a:xfrm>
         </p:spPr>
         <p:txBody>
@@ -6672,7 +6659,7 @@
               <a:rPr lang="en-US" b="1">
                 <a:effectLst/>
               </a:rPr>
-              <a:t>Composition </a:t>
+              <a:t>Aggregation </a:t>
             </a:r>
             <a:endParaRPr lang="en-US"/>
           </a:p>
@@ -6683,7 +6670,7 @@
           <p:cNvPr id="3" name="Content Placeholder 2">
             <a:extLst>
               <a:ext uri="{FF2B5EF4-FFF2-40B4-BE49-F238E27FC236}">
-                <a16:creationId xmlns:a16="http://schemas.microsoft.com/office/drawing/2014/main" id="{43BDCBF4-E275-B0F1-7606-6B1E25C882FD}"/>
+                <a16:creationId xmlns:a16="http://schemas.microsoft.com/office/drawing/2014/main" id="{D665FE83-4CE4-A8FB-78C3-FC7CC7279430}"/>
               </a:ext>
             </a:extLst>
           </p:cNvPr>
@@ -6696,30 +6683,77 @@
         </p:nvSpPr>
         <p:spPr>
           <a:xfrm>
-            <a:off x="101600" y="609601"/>
-            <a:ext cx="12022667" cy="6155266"/>
+            <a:off x="93133" y="651933"/>
+            <a:ext cx="11980334" cy="6070600"/>
           </a:xfrm>
         </p:spPr>
         <p:txBody>
           <a:bodyPr/>
           <a:lstStyle/>
+          <a:p>
+            <a:r>
+              <a:rPr lang="en-US" sz="1800" b="1">
+                <a:effectLst/>
+              </a:rPr>
+              <a:t>The "Has-A" Relationship</a:t>
+            </a:r>
+          </a:p>
+          <a:p>
+            <a:r>
+              <a:rPr lang="en-US" sz="1800" b="1">
+                <a:effectLst/>
+              </a:rPr>
+              <a:t>C# Implementation:</a:t>
+            </a:r>
+            <a:r>
+              <a:rPr lang="en-US" sz="1800">
+                <a:effectLst/>
+              </a:rPr>
+              <a:t> </a:t>
+            </a:r>
+            <a:r>
+              <a:rPr lang="en-US" sz="1800" b="1">
+                <a:effectLst/>
+              </a:rPr>
+              <a:t>Usually implemented by passing the child object into the parent’s constructor or property (</a:t>
+            </a:r>
+            <a:r>
+              <a:rPr lang="en-US" sz="1800" b="1">
+                <a:solidFill>
+                  <a:srgbClr val="FFFF00"/>
+                </a:solidFill>
+                <a:effectLst/>
+              </a:rPr>
+              <a:t>Dependency Injection</a:t>
+            </a:r>
+            <a:r>
+              <a:rPr lang="en-US" sz="1800" b="1">
+                <a:effectLst/>
+              </a:rPr>
+              <a:t>)</a:t>
+            </a:r>
+          </a:p>
           <a:p>
             <a:r>
               <a:rPr lang="en-US" b="1">
                 <a:effectLst/>
               </a:rPr>
-              <a:t>The "Part-Of" Relationship</a:t>
-            </a:r>
-          </a:p>
-          <a:p>
-            <a:r>
-              <a:rPr lang="en-US" b="1"/>
-              <a:t>child cannot exist without parent</a:t>
-            </a:r>
-            <a:r>
-              <a:rPr lang="en-US"/>
-              <a:t>.</a:t>
-            </a:r>
+              <a:t>Here </a:t>
+            </a:r>
+            <a:r>
+              <a:rPr lang="en-US"/>
+              <a:t>children (teachers) can live without parent [ department ]</a:t>
+            </a:r>
+            <a:endParaRPr lang="en-US" b="1">
+              <a:effectLst/>
+            </a:endParaRPr>
+          </a:p>
+          <a:p>
+            <a:endParaRPr lang="en-US" b="1">
+              <a:effectLst/>
+            </a:endParaRPr>
+          </a:p>
+          <a:p>
             <a:endParaRPr lang="en-US" b="1">
               <a:effectLst/>
             </a:endParaRPr>
@@ -6739,7 +6773,7 @@
           <p:cNvPr id="5" name="Picture 4">
             <a:extLst>
               <a:ext uri="{FF2B5EF4-FFF2-40B4-BE49-F238E27FC236}">
-                <a16:creationId xmlns:a16="http://schemas.microsoft.com/office/drawing/2014/main" id="{0ABBE13F-38DC-0375-5425-89FF89DE68DB}"/>
+                <a16:creationId xmlns:a16="http://schemas.microsoft.com/office/drawing/2014/main" id="{89992E4A-01A8-4933-2AB5-554C036CF0B2}"/>
               </a:ext>
             </a:extLst>
           </p:cNvPr>
@@ -6756,8 +6790,8 @@
         </p:blipFill>
         <p:spPr>
           <a:xfrm>
-            <a:off x="101600" y="1727965"/>
-            <a:ext cx="4719468" cy="2526795"/>
+            <a:off x="118533" y="2684926"/>
+            <a:ext cx="4885267" cy="3147614"/>
           </a:xfrm>
           <a:prstGeom prst="rect">
             <a:avLst/>
@@ -6767,7 +6801,7 @@
     </p:spTree>
     <p:extLst>
       <p:ext uri="{BB962C8B-B14F-4D97-AF65-F5344CB8AC3E}">
-        <p14:creationId xmlns:p14="http://schemas.microsoft.com/office/powerpoint/2010/main" val="3138428670"/>
+        <p14:creationId xmlns:p14="http://schemas.microsoft.com/office/powerpoint/2010/main" val="3768059492"/>
       </p:ext>
     </p:extLst>
   </p:cSld>
@@ -6799,7 +6833,7 @@
           <p:cNvPr id="2" name="Title 1">
             <a:extLst>
               <a:ext uri="{FF2B5EF4-FFF2-40B4-BE49-F238E27FC236}">
-                <a16:creationId xmlns:a16="http://schemas.microsoft.com/office/drawing/2014/main" id="{18BD19B6-E7B4-D6B7-EA34-EAE44153C85E}"/>
+                <a16:creationId xmlns:a16="http://schemas.microsoft.com/office/drawing/2014/main" id="{E52B5755-B757-6CAE-6FCA-355EA02E6B56}"/>
               </a:ext>
             </a:extLst>
           </p:cNvPr>
@@ -6824,12 +6858,11 @@
           <a:p>
             <a:r>
               <a:rPr lang="en-US" b="1">
-                <a:solidFill>
-                  <a:srgbClr val="FF0000"/>
-                </a:solidFill>
+                <a:effectLst/>
               </a:rPr>
-              <a:t>CQRS</a:t>
-            </a:r>
+              <a:t>Composition </a:t>
+            </a:r>
+            <a:endParaRPr lang="en-US"/>
           </a:p>
         </p:txBody>
       </p:sp>
@@ -6838,7 +6871,7 @@
           <p:cNvPr id="3" name="Content Placeholder 2">
             <a:extLst>
               <a:ext uri="{FF2B5EF4-FFF2-40B4-BE49-F238E27FC236}">
-                <a16:creationId xmlns:a16="http://schemas.microsoft.com/office/drawing/2014/main" id="{09AB7379-F3B5-45C0-E910-A23E10E29503}"/>
+                <a16:creationId xmlns:a16="http://schemas.microsoft.com/office/drawing/2014/main" id="{43BDCBF4-E275-B0F1-7606-6B1E25C882FD}"/>
               </a:ext>
             </a:extLst>
           </p:cNvPr>
@@ -6851,154 +6884,41 @@
         </p:nvSpPr>
         <p:spPr>
           <a:xfrm>
-            <a:off x="135467" y="609601"/>
-            <a:ext cx="11997266" cy="6138332"/>
-          </a:xfrm>
-        </p:spPr>
-        <p:txBody>
-          <a:bodyPr>
-            <a:normAutofit/>
-          </a:bodyPr>
-          <a:lstStyle/>
+            <a:off x="101600" y="609601"/>
+            <a:ext cx="12022667" cy="6155266"/>
+          </a:xfrm>
+        </p:spPr>
+        <p:txBody>
+          <a:bodyPr/>
+          <a:lstStyle/>
+          <a:p>
+            <a:r>
+              <a:rPr lang="en-US" b="1">
+                <a:effectLst/>
+              </a:rPr>
+              <a:t>The "Part-Of" Relationship</a:t>
+            </a:r>
+          </a:p>
           <a:p>
             <a:r>
               <a:rPr lang="en-US" b="1"/>
-              <a:t>CQRS stands for Command and </a:t>
-            </a:r>
-            <a:r>
-              <a:rPr lang="en-US" b="1">
-                <a:solidFill>
-                  <a:srgbClr val="FF0000"/>
-                </a:solidFill>
-              </a:rPr>
-              <a:t>Query Responsibility Segregation</a:t>
-            </a:r>
-          </a:p>
-          <a:p>
-            <a:r>
-              <a:rPr lang="en-US"/>
-              <a:t>It is a design pattern that separates read operations (queries) from write operations (commands).</a:t>
-            </a:r>
-          </a:p>
-          <a:p>
-            <a:r>
-              <a:rPr lang="en-US"/>
-              <a:t>Instead of having one model/service doing everything, CQRS splits responsibilities into two sides:</a:t>
-            </a:r>
-          </a:p>
-          <a:p>
-            <a:r>
-              <a:rPr lang="en-US"/>
-              <a:t>- Core Idea</a:t>
-            </a:r>
-          </a:p>
-          <a:p>
-            <a:r>
-              <a:rPr lang="en-US"/>
-              <a:t>   - </a:t>
-            </a:r>
-            <a:r>
-              <a:rPr lang="en-US" b="1">
-                <a:solidFill>
-                  <a:srgbClr val="00B0F0"/>
-                </a:solidFill>
-              </a:rPr>
-              <a:t>Commands</a:t>
-            </a:r>
-            <a:r>
-              <a:rPr lang="en-US"/>
-              <a:t> → change state (Create, Update, Delete)</a:t>
-            </a:r>
-          </a:p>
-          <a:p>
-            <a:r>
-              <a:rPr lang="en-US"/>
-              <a:t>   - </a:t>
-            </a:r>
-            <a:r>
-              <a:rPr lang="en-US" b="1">
-                <a:solidFill>
-                  <a:srgbClr val="00B0F0"/>
-                </a:solidFill>
-              </a:rPr>
-              <a:t>Queries</a:t>
-            </a:r>
-            <a:r>
-              <a:rPr lang="en-US"/>
-              <a:t> → read data (Get, List, Search)</a:t>
-            </a:r>
-          </a:p>
-          <a:p>
-            <a:r>
-              <a:rPr lang="en-US"/>
-              <a:t>-- Application</a:t>
-            </a:r>
-          </a:p>
-          <a:p>
-            <a:pPr lvl="1"/>
-            <a:r>
-              <a:rPr lang="en-US"/>
-              <a:t> </a:t>
-            </a:r>
-            <a:r>
-              <a:rPr lang="en-US" sz="1600" b="1">
-                <a:solidFill>
-                  <a:srgbClr val="FFFF00"/>
-                </a:solidFill>
-              </a:rPr>
-              <a:t>Commands</a:t>
-            </a:r>
-          </a:p>
-          <a:p>
-            <a:pPr lvl="2"/>
-            <a:r>
-              <a:rPr lang="en-US" b="1"/>
-              <a:t>CreateOrderCommand.cs</a:t>
-            </a:r>
-          </a:p>
-          <a:p>
-            <a:pPr lvl="1"/>
-            <a:r>
-              <a:rPr lang="en-US" sz="1600" b="1">
-                <a:solidFill>
-                  <a:srgbClr val="FFFF00"/>
-                </a:solidFill>
-              </a:rPr>
-              <a:t>Queries</a:t>
-            </a:r>
-          </a:p>
-          <a:p>
-            <a:pPr lvl="2"/>
-            <a:r>
-              <a:rPr lang="en-US" b="1"/>
-              <a:t>GetOrderByIdQuery.cs</a:t>
-            </a:r>
-          </a:p>
-          <a:p>
-            <a:pPr lvl="1"/>
-            <a:r>
-              <a:rPr lang="en-US" sz="1600" b="1">
-                <a:solidFill>
-                  <a:srgbClr val="FFFF00"/>
-                </a:solidFill>
-              </a:rPr>
-              <a:t>Handlers</a:t>
-            </a:r>
-            <a:endParaRPr lang="en-US" sz="1600" b="1"/>
-          </a:p>
-          <a:p>
-            <a:pPr lvl="2"/>
-            <a:r>
-              <a:rPr lang="en-US" b="1"/>
-              <a:t>CreateOrderHandler.cs</a:t>
-            </a:r>
-          </a:p>
-          <a:p>
-            <a:pPr lvl="2"/>
-            <a:r>
-              <a:rPr lang="en-US" b="1"/>
-              <a:t>GetOrderByIdHandler.cs</a:t>
-            </a:r>
+              <a:t>child cannot exist without parent</a:t>
+            </a:r>
+            <a:r>
+              <a:rPr lang="en-US"/>
+              <a:t>.</a:t>
+            </a:r>
+            <a:endParaRPr lang="en-US" b="1">
+              <a:effectLst/>
+            </a:endParaRPr>
+          </a:p>
+          <a:p>
+            <a:endParaRPr lang="en-US" b="1">
+              <a:effectLst/>
+            </a:endParaRPr>
+          </a:p>
+          <a:p>
+            <a:endParaRPr lang="en-US"/>
           </a:p>
         </p:txBody>
       </p:sp>
@@ -7007,7 +6927,7 @@
           <p:cNvPr id="5" name="Picture 4">
             <a:extLst>
               <a:ext uri="{FF2B5EF4-FFF2-40B4-BE49-F238E27FC236}">
-                <a16:creationId xmlns:a16="http://schemas.microsoft.com/office/drawing/2014/main" id="{3DE7AA69-5920-72EC-6556-3CFCF420F3BA}"/>
+                <a16:creationId xmlns:a16="http://schemas.microsoft.com/office/drawing/2014/main" id="{0ABBE13F-38DC-0375-5425-89FF89DE68DB}"/>
               </a:ext>
             </a:extLst>
           </p:cNvPr>
@@ -7024,8 +6944,8 @@
         </p:blipFill>
         <p:spPr>
           <a:xfrm>
-            <a:off x="5046020" y="3601657"/>
-            <a:ext cx="3469826" cy="1918609"/>
+            <a:off x="101600" y="1727965"/>
+            <a:ext cx="4719468" cy="2526795"/>
           </a:xfrm>
           <a:prstGeom prst="rect">
             <a:avLst/>
@@ -7035,7 +6955,7 @@
     </p:spTree>
     <p:extLst>
       <p:ext uri="{BB962C8B-B14F-4D97-AF65-F5344CB8AC3E}">
-        <p14:creationId xmlns:p14="http://schemas.microsoft.com/office/powerpoint/2010/main" val="205078609"/>
+        <p14:creationId xmlns:p14="http://schemas.microsoft.com/office/powerpoint/2010/main" val="3138428670"/>
       </p:ext>
     </p:extLst>
   </p:cSld>
@@ -7067,7 +6987,7 @@
           <p:cNvPr id="2" name="Title 1">
             <a:extLst>
               <a:ext uri="{FF2B5EF4-FFF2-40B4-BE49-F238E27FC236}">
-                <a16:creationId xmlns:a16="http://schemas.microsoft.com/office/drawing/2014/main" id="{93FD8936-648D-D9BA-8BA1-324899E5489B}"/>
+                <a16:creationId xmlns:a16="http://schemas.microsoft.com/office/drawing/2014/main" id="{18BD19B6-E7B4-D6B7-EA34-EAE44153C85E}"/>
               </a:ext>
             </a:extLst>
           </p:cNvPr>
@@ -7080,34 +7000,202 @@
         </p:nvSpPr>
         <p:spPr>
           <a:xfrm>
-            <a:off x="913795" y="1"/>
-            <a:ext cx="10353762" cy="482600"/>
+            <a:off x="913795" y="0"/>
+            <a:ext cx="10353762" cy="609600"/>
           </a:xfrm>
         </p:spPr>
         <p:txBody>
           <a:bodyPr>
-            <a:noAutofit/>
+            <a:normAutofit fontScale="90000"/>
           </a:bodyPr>
           <a:lstStyle/>
           <a:p>
             <a:r>
-              <a:rPr lang="en-US" sz="3200" b="1">
+              <a:rPr lang="en-US" b="1">
                 <a:solidFill>
                   <a:srgbClr val="FF0000"/>
                 </a:solidFill>
               </a:rPr>
-              <a:t>CQRS [cont.]</a:t>
-            </a:r>
-            <a:endParaRPr lang="en-US" sz="3200"/>
+              <a:t>CQRS</a:t>
+            </a:r>
+          </a:p>
+        </p:txBody>
+      </p:sp>
+      <p:sp>
+        <p:nvSpPr>
+          <p:cNvPr id="3" name="Content Placeholder 2">
+            <a:extLst>
+              <a:ext uri="{FF2B5EF4-FFF2-40B4-BE49-F238E27FC236}">
+                <a16:creationId xmlns:a16="http://schemas.microsoft.com/office/drawing/2014/main" id="{09AB7379-F3B5-45C0-E910-A23E10E29503}"/>
+              </a:ext>
+            </a:extLst>
+          </p:cNvPr>
+          <p:cNvSpPr>
+            <a:spLocks noGrp="1"/>
+          </p:cNvSpPr>
+          <p:nvPr>
+            <p:ph idx="1"/>
+          </p:nvPr>
+        </p:nvSpPr>
+        <p:spPr>
+          <a:xfrm>
+            <a:off x="135467" y="609601"/>
+            <a:ext cx="11997266" cy="6138332"/>
+          </a:xfrm>
+        </p:spPr>
+        <p:txBody>
+          <a:bodyPr>
+            <a:normAutofit/>
+          </a:bodyPr>
+          <a:lstStyle/>
+          <a:p>
+            <a:r>
+              <a:rPr lang="en-US" b="1"/>
+              <a:t>CQRS stands for Command and </a:t>
+            </a:r>
+            <a:r>
+              <a:rPr lang="en-US" b="1">
+                <a:solidFill>
+                  <a:srgbClr val="FF0000"/>
+                </a:solidFill>
+              </a:rPr>
+              <a:t>Query Responsibility Segregation</a:t>
+            </a:r>
+          </a:p>
+          <a:p>
+            <a:r>
+              <a:rPr lang="en-US"/>
+              <a:t>It is a design pattern that separates read operations (queries) from write operations (commands).</a:t>
+            </a:r>
+          </a:p>
+          <a:p>
+            <a:r>
+              <a:rPr lang="en-US"/>
+              <a:t>Instead of having one model/service doing everything, CQRS splits responsibilities into two sides:</a:t>
+            </a:r>
+          </a:p>
+          <a:p>
+            <a:r>
+              <a:rPr lang="en-US"/>
+              <a:t>- Core Idea</a:t>
+            </a:r>
+          </a:p>
+          <a:p>
+            <a:r>
+              <a:rPr lang="en-US"/>
+              <a:t>   - </a:t>
+            </a:r>
+            <a:r>
+              <a:rPr lang="en-US" b="1">
+                <a:solidFill>
+                  <a:srgbClr val="00B0F0"/>
+                </a:solidFill>
+              </a:rPr>
+              <a:t>Commands</a:t>
+            </a:r>
+            <a:r>
+              <a:rPr lang="en-US"/>
+              <a:t> → change state (Create, Update, Delete)</a:t>
+            </a:r>
+          </a:p>
+          <a:p>
+            <a:r>
+              <a:rPr lang="en-US"/>
+              <a:t>   - </a:t>
+            </a:r>
+            <a:r>
+              <a:rPr lang="en-US" b="1">
+                <a:solidFill>
+                  <a:srgbClr val="00B0F0"/>
+                </a:solidFill>
+              </a:rPr>
+              <a:t>Queries</a:t>
+            </a:r>
+            <a:r>
+              <a:rPr lang="en-US"/>
+              <a:t> → read data (Get, List, Search)</a:t>
+            </a:r>
+          </a:p>
+          <a:p>
+            <a:r>
+              <a:rPr lang="en-US"/>
+              <a:t>-- Application</a:t>
+            </a:r>
+          </a:p>
+          <a:p>
+            <a:pPr lvl="1"/>
+            <a:r>
+              <a:rPr lang="en-US"/>
+              <a:t> </a:t>
+            </a:r>
+            <a:r>
+              <a:rPr lang="en-US" sz="1600" b="1">
+                <a:solidFill>
+                  <a:srgbClr val="FFFF00"/>
+                </a:solidFill>
+              </a:rPr>
+              <a:t>Commands</a:t>
+            </a:r>
+          </a:p>
+          <a:p>
+            <a:pPr lvl="2"/>
+            <a:r>
+              <a:rPr lang="en-US" b="1"/>
+              <a:t>CreateOrderCommand.cs</a:t>
+            </a:r>
+          </a:p>
+          <a:p>
+            <a:pPr lvl="1"/>
+            <a:r>
+              <a:rPr lang="en-US" sz="1600" b="1">
+                <a:solidFill>
+                  <a:srgbClr val="FFFF00"/>
+                </a:solidFill>
+              </a:rPr>
+              <a:t>Queries</a:t>
+            </a:r>
+          </a:p>
+          <a:p>
+            <a:pPr lvl="2"/>
+            <a:r>
+              <a:rPr lang="en-US" b="1"/>
+              <a:t>GetOrderByIdQuery.cs</a:t>
+            </a:r>
+          </a:p>
+          <a:p>
+            <a:pPr lvl="1"/>
+            <a:r>
+              <a:rPr lang="en-US" sz="1600" b="1">
+                <a:solidFill>
+                  <a:srgbClr val="FFFF00"/>
+                </a:solidFill>
+              </a:rPr>
+              <a:t>Handlers</a:t>
+            </a:r>
+            <a:endParaRPr lang="en-US" sz="1600" b="1"/>
+          </a:p>
+          <a:p>
+            <a:pPr lvl="2"/>
+            <a:r>
+              <a:rPr lang="en-US" b="1"/>
+              <a:t>CreateOrderHandler.cs</a:t>
+            </a:r>
+          </a:p>
+          <a:p>
+            <a:pPr lvl="2"/>
+            <a:r>
+              <a:rPr lang="en-US" b="1"/>
+              <a:t>GetOrderByIdHandler.cs</a:t>
+            </a:r>
           </a:p>
         </p:txBody>
       </p:sp>
       <p:pic>
         <p:nvPicPr>
-          <p:cNvPr id="7" name="Picture 6">
+          <p:cNvPr id="5" name="Picture 4">
             <a:extLst>
               <a:ext uri="{FF2B5EF4-FFF2-40B4-BE49-F238E27FC236}">
-                <a16:creationId xmlns:a16="http://schemas.microsoft.com/office/drawing/2014/main" id="{92A6B526-486E-96C5-BF0B-7527114EAA20}"/>
+                <a16:creationId xmlns:a16="http://schemas.microsoft.com/office/drawing/2014/main" id="{3DE7AA69-5920-72EC-6556-3CFCF420F3BA}"/>
               </a:ext>
             </a:extLst>
           </p:cNvPr>
@@ -7124,68 +7212,8 @@
         </p:blipFill>
         <p:spPr>
           <a:xfrm>
-            <a:off x="564628" y="538161"/>
-            <a:ext cx="5526048" cy="3229506"/>
-          </a:xfrm>
-          <a:prstGeom prst="rect">
-            <a:avLst/>
-          </a:prstGeom>
-        </p:spPr>
-      </p:pic>
-      <p:pic>
-        <p:nvPicPr>
-          <p:cNvPr id="9" name="Picture 8">
-            <a:extLst>
-              <a:ext uri="{FF2B5EF4-FFF2-40B4-BE49-F238E27FC236}">
-                <a16:creationId xmlns:a16="http://schemas.microsoft.com/office/drawing/2014/main" id="{98C71119-4ADF-618D-29F0-B255D7F714ED}"/>
-              </a:ext>
-            </a:extLst>
-          </p:cNvPr>
-          <p:cNvPicPr>
-            <a:picLocks noChangeAspect="1"/>
-          </p:cNvPicPr>
-          <p:nvPr/>
-        </p:nvPicPr>
-        <p:blipFill>
-          <a:blip r:embed="rId3"/>
-          <a:stretch>
-            <a:fillRect/>
-          </a:stretch>
-        </p:blipFill>
-        <p:spPr>
-          <a:xfrm>
-            <a:off x="564628" y="3827987"/>
-            <a:ext cx="5526048" cy="3030012"/>
-          </a:xfrm>
-          <a:prstGeom prst="rect">
-            <a:avLst/>
-          </a:prstGeom>
-        </p:spPr>
-      </p:pic>
-      <p:pic>
-        <p:nvPicPr>
-          <p:cNvPr id="13" name="Picture 12">
-            <a:extLst>
-              <a:ext uri="{FF2B5EF4-FFF2-40B4-BE49-F238E27FC236}">
-                <a16:creationId xmlns:a16="http://schemas.microsoft.com/office/drawing/2014/main" id="{37BE61BF-A50B-9557-B63A-22A3C6D43743}"/>
-              </a:ext>
-            </a:extLst>
-          </p:cNvPr>
-          <p:cNvPicPr>
-            <a:picLocks noChangeAspect="1"/>
-          </p:cNvPicPr>
-          <p:nvPr/>
-        </p:nvPicPr>
-        <p:blipFill>
-          <a:blip r:embed="rId4"/>
-          <a:stretch>
-            <a:fillRect/>
-          </a:stretch>
-        </p:blipFill>
-        <p:spPr>
-          <a:xfrm>
-            <a:off x="6766443" y="819722"/>
-            <a:ext cx="4942957" cy="4523271"/>
+            <a:off x="5046020" y="3601657"/>
+            <a:ext cx="3469826" cy="1918609"/>
           </a:xfrm>
           <a:prstGeom prst="rect">
             <a:avLst/>
@@ -7195,7 +7223,7 @@
     </p:spTree>
     <p:extLst>
       <p:ext uri="{BB962C8B-B14F-4D97-AF65-F5344CB8AC3E}">
-        <p14:creationId xmlns:p14="http://schemas.microsoft.com/office/powerpoint/2010/main" val="2017616460"/>
+        <p14:creationId xmlns:p14="http://schemas.microsoft.com/office/powerpoint/2010/main" val="205078609"/>
       </p:ext>
     </p:extLst>
   </p:cSld>
@@ -7227,7 +7255,7 @@
           <p:cNvPr id="2" name="Title 1">
             <a:extLst>
               <a:ext uri="{FF2B5EF4-FFF2-40B4-BE49-F238E27FC236}">
-                <a16:creationId xmlns:a16="http://schemas.microsoft.com/office/drawing/2014/main" id="{E1A8B0CF-9FBD-570C-8889-185A96C90ED4}"/>
+                <a16:creationId xmlns:a16="http://schemas.microsoft.com/office/drawing/2014/main" id="{93FD8936-648D-D9BA-8BA1-324899E5489B}"/>
               </a:ext>
             </a:extLst>
           </p:cNvPr>
@@ -7238,44 +7266,124 @@
             <p:ph type="title"/>
           </p:nvPr>
         </p:nvSpPr>
-        <p:spPr/>
-        <p:txBody>
-          <a:bodyPr/>
-          <a:lstStyle/>
-          <a:p>
-            <a:endParaRPr lang="en-US"/>
-          </a:p>
-        </p:txBody>
-      </p:sp>
-      <p:sp>
-        <p:nvSpPr>
-          <p:cNvPr id="3" name="Content Placeholder 2">
+        <p:spPr>
+          <a:xfrm>
+            <a:off x="913795" y="1"/>
+            <a:ext cx="10353762" cy="482600"/>
+          </a:xfrm>
+        </p:spPr>
+        <p:txBody>
+          <a:bodyPr>
+            <a:noAutofit/>
+          </a:bodyPr>
+          <a:lstStyle/>
+          <a:p>
+            <a:r>
+              <a:rPr lang="en-US" sz="3200" b="1">
+                <a:solidFill>
+                  <a:srgbClr val="FF0000"/>
+                </a:solidFill>
+              </a:rPr>
+              <a:t>CQRS [cont.]</a:t>
+            </a:r>
+            <a:endParaRPr lang="en-US" sz="3200"/>
+          </a:p>
+        </p:txBody>
+      </p:sp>
+      <p:pic>
+        <p:nvPicPr>
+          <p:cNvPr id="7" name="Picture 6">
             <a:extLst>
               <a:ext uri="{FF2B5EF4-FFF2-40B4-BE49-F238E27FC236}">
-                <a16:creationId xmlns:a16="http://schemas.microsoft.com/office/drawing/2014/main" id="{2DA12D25-9BC0-E54F-F8F5-E9C371D629F5}"/>
+                <a16:creationId xmlns:a16="http://schemas.microsoft.com/office/drawing/2014/main" id="{92A6B526-486E-96C5-BF0B-7527114EAA20}"/>
               </a:ext>
             </a:extLst>
           </p:cNvPr>
-          <p:cNvSpPr>
-            <a:spLocks noGrp="1"/>
-          </p:cNvSpPr>
-          <p:nvPr>
-            <p:ph idx="1"/>
-          </p:nvPr>
-        </p:nvSpPr>
-        <p:spPr/>
-        <p:txBody>
-          <a:bodyPr/>
-          <a:lstStyle/>
-          <a:p>
-            <a:endParaRPr lang="en-US"/>
-          </a:p>
-        </p:txBody>
-      </p:sp>
+          <p:cNvPicPr>
+            <a:picLocks noChangeAspect="1"/>
+          </p:cNvPicPr>
+          <p:nvPr/>
+        </p:nvPicPr>
+        <p:blipFill>
+          <a:blip r:embed="rId2"/>
+          <a:stretch>
+            <a:fillRect/>
+          </a:stretch>
+        </p:blipFill>
+        <p:spPr>
+          <a:xfrm>
+            <a:off x="564628" y="538161"/>
+            <a:ext cx="5526048" cy="3229506"/>
+          </a:xfrm>
+          <a:prstGeom prst="rect">
+            <a:avLst/>
+          </a:prstGeom>
+        </p:spPr>
+      </p:pic>
+      <p:pic>
+        <p:nvPicPr>
+          <p:cNvPr id="9" name="Picture 8">
+            <a:extLst>
+              <a:ext uri="{FF2B5EF4-FFF2-40B4-BE49-F238E27FC236}">
+                <a16:creationId xmlns:a16="http://schemas.microsoft.com/office/drawing/2014/main" id="{98C71119-4ADF-618D-29F0-B255D7F714ED}"/>
+              </a:ext>
+            </a:extLst>
+          </p:cNvPr>
+          <p:cNvPicPr>
+            <a:picLocks noChangeAspect="1"/>
+          </p:cNvPicPr>
+          <p:nvPr/>
+        </p:nvPicPr>
+        <p:blipFill>
+          <a:blip r:embed="rId3"/>
+          <a:stretch>
+            <a:fillRect/>
+          </a:stretch>
+        </p:blipFill>
+        <p:spPr>
+          <a:xfrm>
+            <a:off x="564628" y="3827987"/>
+            <a:ext cx="5526048" cy="3030012"/>
+          </a:xfrm>
+          <a:prstGeom prst="rect">
+            <a:avLst/>
+          </a:prstGeom>
+        </p:spPr>
+      </p:pic>
+      <p:pic>
+        <p:nvPicPr>
+          <p:cNvPr id="13" name="Picture 12">
+            <a:extLst>
+              <a:ext uri="{FF2B5EF4-FFF2-40B4-BE49-F238E27FC236}">
+                <a16:creationId xmlns:a16="http://schemas.microsoft.com/office/drawing/2014/main" id="{37BE61BF-A50B-9557-B63A-22A3C6D43743}"/>
+              </a:ext>
+            </a:extLst>
+          </p:cNvPr>
+          <p:cNvPicPr>
+            <a:picLocks noChangeAspect="1"/>
+          </p:cNvPicPr>
+          <p:nvPr/>
+        </p:nvPicPr>
+        <p:blipFill>
+          <a:blip r:embed="rId4"/>
+          <a:stretch>
+            <a:fillRect/>
+          </a:stretch>
+        </p:blipFill>
+        <p:spPr>
+          <a:xfrm>
+            <a:off x="6766443" y="819722"/>
+            <a:ext cx="4942957" cy="4523271"/>
+          </a:xfrm>
+          <a:prstGeom prst="rect">
+            <a:avLst/>
+          </a:prstGeom>
+        </p:spPr>
+      </p:pic>
     </p:spTree>
     <p:extLst>
       <p:ext uri="{BB962C8B-B14F-4D97-AF65-F5344CB8AC3E}">
-        <p14:creationId xmlns:p14="http://schemas.microsoft.com/office/powerpoint/2010/main" val="2952004057"/>
+        <p14:creationId xmlns:p14="http://schemas.microsoft.com/office/powerpoint/2010/main" val="2017616460"/>
       </p:ext>
     </p:extLst>
   </p:cSld>
@@ -7304,10 +7412,35 @@
       </p:grpSpPr>
       <p:sp>
         <p:nvSpPr>
+          <p:cNvPr id="2" name="Title 1">
+            <a:extLst>
+              <a:ext uri="{FF2B5EF4-FFF2-40B4-BE49-F238E27FC236}">
+                <a16:creationId xmlns:a16="http://schemas.microsoft.com/office/drawing/2014/main" id="{E1A8B0CF-9FBD-570C-8889-185A96C90ED4}"/>
+              </a:ext>
+            </a:extLst>
+          </p:cNvPr>
+          <p:cNvSpPr>
+            <a:spLocks noGrp="1"/>
+          </p:cNvSpPr>
+          <p:nvPr>
+            <p:ph type="title"/>
+          </p:nvPr>
+        </p:nvSpPr>
+        <p:spPr/>
+        <p:txBody>
+          <a:bodyPr/>
+          <a:lstStyle/>
+          <a:p>
+            <a:endParaRPr lang="en-US"/>
+          </a:p>
+        </p:txBody>
+      </p:sp>
+      <p:sp>
+        <p:nvSpPr>
           <p:cNvPr id="3" name="Content Placeholder 2">
             <a:extLst>
               <a:ext uri="{FF2B5EF4-FFF2-40B4-BE49-F238E27FC236}">
-                <a16:creationId xmlns:a16="http://schemas.microsoft.com/office/drawing/2014/main" id="{8812E581-CD83-A0AD-774B-49DF71333757}"/>
+                <a16:creationId xmlns:a16="http://schemas.microsoft.com/office/drawing/2014/main" id="{2DA12D25-9BC0-E54F-F8F5-E9C371D629F5}"/>
               </a:ext>
             </a:extLst>
           </p:cNvPr>
@@ -7318,36 +7451,19 @@
             <p:ph idx="1"/>
           </p:nvPr>
         </p:nvSpPr>
-        <p:spPr>
-          <a:xfrm>
-            <a:off x="1023862" y="2159000"/>
-            <a:ext cx="10353762" cy="1430867"/>
-          </a:xfrm>
-        </p:spPr>
-        <p:txBody>
-          <a:bodyPr>
-            <a:normAutofit/>
-          </a:bodyPr>
-          <a:lstStyle/>
-          <a:p>
-            <a:pPr marL="36900" indent="0" algn="ctr">
-              <a:buNone/>
-            </a:pPr>
-            <a:r>
-              <a:rPr lang="en-US" sz="7200" b="1">
-                <a:solidFill>
-                  <a:srgbClr val="FF0000"/>
-                </a:solidFill>
-              </a:rPr>
-              <a:t>Start GIT</a:t>
-            </a:r>
+        <p:spPr/>
+        <p:txBody>
+          <a:bodyPr/>
+          <a:lstStyle/>
+          <a:p>
+            <a:endParaRPr lang="en-US"/>
           </a:p>
         </p:txBody>
       </p:sp>
     </p:spTree>
     <p:extLst>
       <p:ext uri="{BB962C8B-B14F-4D97-AF65-F5344CB8AC3E}">
-        <p14:creationId xmlns:p14="http://schemas.microsoft.com/office/powerpoint/2010/main" val="1394362454"/>
+        <p14:creationId xmlns:p14="http://schemas.microsoft.com/office/powerpoint/2010/main" val="2952004057"/>
       </p:ext>
     </p:extLst>
   </p:cSld>
@@ -7376,10 +7492,10 @@
       </p:grpSpPr>
       <p:sp>
         <p:nvSpPr>
-          <p:cNvPr id="2" name="Title 1">
+          <p:cNvPr id="3" name="Content Placeholder 2">
             <a:extLst>
               <a:ext uri="{FF2B5EF4-FFF2-40B4-BE49-F238E27FC236}">
-                <a16:creationId xmlns:a16="http://schemas.microsoft.com/office/drawing/2014/main" id="{1F25334C-1B96-D150-CC11-B6DD59DF4BEA}"/>
+                <a16:creationId xmlns:a16="http://schemas.microsoft.com/office/drawing/2014/main" id="{8812E581-CD83-A0AD-774B-49DF71333757}"/>
               </a:ext>
             </a:extLst>
           </p:cNvPr>
@@ -7387,85 +7503,39 @@
             <a:spLocks noGrp="1"/>
           </p:cNvSpPr>
           <p:nvPr>
-            <p:ph type="title"/>
-          </p:nvPr>
-        </p:nvSpPr>
-        <p:spPr/>
-        <p:txBody>
-          <a:bodyPr/>
-          <a:lstStyle/>
-          <a:p>
-            <a:endParaRPr lang="en-US"/>
-          </a:p>
-        </p:txBody>
-      </p:sp>
-      <p:sp>
-        <p:nvSpPr>
-          <p:cNvPr id="3" name="Content Placeholder 2">
-            <a:extLst>
-              <a:ext uri="{FF2B5EF4-FFF2-40B4-BE49-F238E27FC236}">
-                <a16:creationId xmlns:a16="http://schemas.microsoft.com/office/drawing/2014/main" id="{ECC9883E-73B2-9EDC-CD3F-5CEAD2883E9C}"/>
-              </a:ext>
-            </a:extLst>
-          </p:cNvPr>
-          <p:cNvSpPr>
-            <a:spLocks noGrp="1"/>
-          </p:cNvSpPr>
-          <p:nvPr>
             <p:ph idx="1"/>
           </p:nvPr>
         </p:nvSpPr>
-        <p:spPr/>
-        <p:txBody>
-          <a:bodyPr/>
-          <a:lstStyle/>
-          <a:p>
-            <a:r>
-              <a:rPr lang="en-US"/>
-              <a:t>During merge conflict</a:t>
-            </a:r>
-          </a:p>
-          <a:p>
-            <a:pPr lvl="1"/>
-            <a:r>
-              <a:rPr lang="en-US"/>
-              <a:t>If you want to keep the current version and ignore the incoming changes</a:t>
-            </a:r>
-          </a:p>
-          <a:p>
-            <a:pPr lvl="2"/>
-            <a:r>
-              <a:rPr lang="en-US"/>
-              <a:t>git checkout --ours "Dot Net/Business.pptx“</a:t>
-            </a:r>
-          </a:p>
-          <a:p>
-            <a:pPr lvl="1"/>
-            <a:r>
-              <a:rPr lang="en-US"/>
-              <a:t>If you want to keep the incoming version and ignore ( discard ) the local changes</a:t>
-            </a:r>
-          </a:p>
-          <a:p>
-            <a:pPr lvl="2"/>
-            <a:r>
-              <a:rPr lang="en-US"/>
-              <a:t>git checkout --theirs "Dot Net/Business.pptx“</a:t>
-            </a:r>
-          </a:p>
-          <a:p>
-            <a:pPr lvl="2"/>
-            <a:endParaRPr lang="en-US"/>
-          </a:p>
-          <a:p>
-            <a:endParaRPr lang="en-US"/>
+        <p:spPr>
+          <a:xfrm>
+            <a:off x="1023862" y="2159000"/>
+            <a:ext cx="10353762" cy="1430867"/>
+          </a:xfrm>
+        </p:spPr>
+        <p:txBody>
+          <a:bodyPr>
+            <a:normAutofit/>
+          </a:bodyPr>
+          <a:lstStyle/>
+          <a:p>
+            <a:pPr marL="36900" indent="0" algn="ctr">
+              <a:buNone/>
+            </a:pPr>
+            <a:r>
+              <a:rPr lang="en-US" sz="7200" b="1">
+                <a:solidFill>
+                  <a:srgbClr val="FF0000"/>
+                </a:solidFill>
+              </a:rPr>
+              <a:t>Start GIT</a:t>
+            </a:r>
           </a:p>
         </p:txBody>
       </p:sp>
     </p:spTree>
     <p:extLst>
       <p:ext uri="{BB962C8B-B14F-4D97-AF65-F5344CB8AC3E}">
-        <p14:creationId xmlns:p14="http://schemas.microsoft.com/office/powerpoint/2010/main" val="1480913698"/>
+        <p14:creationId xmlns:p14="http://schemas.microsoft.com/office/powerpoint/2010/main" val="1394362454"/>
       </p:ext>
     </p:extLst>
   </p:cSld>
@@ -7480,13 +7550,7 @@
   <p:cSld>
     <p:spTree>
       <p:nvGrpSpPr>
-        <p:cNvPr id="1" name="">
-          <a:extLst>
-            <a:ext uri="{FF2B5EF4-FFF2-40B4-BE49-F238E27FC236}">
-              <a16:creationId xmlns:a16="http://schemas.microsoft.com/office/drawing/2014/main" id="{2633D092-8CF7-AC2C-E735-CD881E5A7E47}"/>
-            </a:ext>
-          </a:extLst>
-        </p:cNvPr>
+        <p:cNvPr id="1" name=""/>
         <p:cNvGrpSpPr/>
         <p:nvPr/>
       </p:nvGrpSpPr>
@@ -7500,10 +7564,35 @@
       </p:grpSpPr>
       <p:sp>
         <p:nvSpPr>
+          <p:cNvPr id="2" name="Title 1">
+            <a:extLst>
+              <a:ext uri="{FF2B5EF4-FFF2-40B4-BE49-F238E27FC236}">
+                <a16:creationId xmlns:a16="http://schemas.microsoft.com/office/drawing/2014/main" id="{1F25334C-1B96-D150-CC11-B6DD59DF4BEA}"/>
+              </a:ext>
+            </a:extLst>
+          </p:cNvPr>
+          <p:cNvSpPr>
+            <a:spLocks noGrp="1"/>
+          </p:cNvSpPr>
+          <p:nvPr>
+            <p:ph type="title"/>
+          </p:nvPr>
+        </p:nvSpPr>
+        <p:spPr/>
+        <p:txBody>
+          <a:bodyPr/>
+          <a:lstStyle/>
+          <a:p>
+            <a:endParaRPr lang="en-US"/>
+          </a:p>
+        </p:txBody>
+      </p:sp>
+      <p:sp>
+        <p:nvSpPr>
           <p:cNvPr id="3" name="Content Placeholder 2">
             <a:extLst>
               <a:ext uri="{FF2B5EF4-FFF2-40B4-BE49-F238E27FC236}">
-                <a16:creationId xmlns:a16="http://schemas.microsoft.com/office/drawing/2014/main" id="{ED73A33B-30B1-C540-CF64-34BF78007BCC}"/>
+                <a16:creationId xmlns:a16="http://schemas.microsoft.com/office/drawing/2014/main" id="{ECC9883E-73B2-9EDC-CD3F-5CEAD2883E9C}"/>
               </a:ext>
             </a:extLst>
           </p:cNvPr>
@@ -7514,36 +7603,57 @@
             <p:ph idx="1"/>
           </p:nvPr>
         </p:nvSpPr>
-        <p:spPr>
-          <a:xfrm>
-            <a:off x="1023862" y="2159000"/>
-            <a:ext cx="10353762" cy="1430867"/>
-          </a:xfrm>
-        </p:spPr>
-        <p:txBody>
-          <a:bodyPr>
-            <a:normAutofit/>
-          </a:bodyPr>
-          <a:lstStyle/>
-          <a:p>
-            <a:pPr marL="36900" indent="0" algn="ctr">
-              <a:buNone/>
-            </a:pPr>
-            <a:r>
-              <a:rPr lang="en-US" sz="7200" b="1">
-                <a:solidFill>
-                  <a:srgbClr val="FF0000"/>
-                </a:solidFill>
-              </a:rPr>
-              <a:t>End GIT</a:t>
-            </a:r>
+        <p:spPr/>
+        <p:txBody>
+          <a:bodyPr/>
+          <a:lstStyle/>
+          <a:p>
+            <a:r>
+              <a:rPr lang="en-US"/>
+              <a:t>During merge conflict</a:t>
+            </a:r>
+          </a:p>
+          <a:p>
+            <a:pPr lvl="1"/>
+            <a:r>
+              <a:rPr lang="en-US"/>
+              <a:t>If you want to keep the current version and ignore the incoming changes</a:t>
+            </a:r>
+          </a:p>
+          <a:p>
+            <a:pPr lvl="2"/>
+            <a:r>
+              <a:rPr lang="en-US"/>
+              <a:t>git checkout --ours "Dot Net/Business.pptx“</a:t>
+            </a:r>
+          </a:p>
+          <a:p>
+            <a:pPr lvl="1"/>
+            <a:r>
+              <a:rPr lang="en-US"/>
+              <a:t>If you want to keep the incoming version and ignore ( discard ) the local changes</a:t>
+            </a:r>
+          </a:p>
+          <a:p>
+            <a:pPr lvl="2"/>
+            <a:r>
+              <a:rPr lang="en-US"/>
+              <a:t>git checkout --theirs "Dot Net/Business.pptx“</a:t>
+            </a:r>
+          </a:p>
+          <a:p>
+            <a:pPr lvl="2"/>
+            <a:endParaRPr lang="en-US"/>
+          </a:p>
+          <a:p>
+            <a:endParaRPr lang="en-US"/>
           </a:p>
         </p:txBody>
       </p:sp>
     </p:spTree>
     <p:extLst>
       <p:ext uri="{BB962C8B-B14F-4D97-AF65-F5344CB8AC3E}">
-        <p14:creationId xmlns:p14="http://schemas.microsoft.com/office/powerpoint/2010/main" val="2484187571"/>
+        <p14:creationId xmlns:p14="http://schemas.microsoft.com/office/powerpoint/2010/main" val="1480913698"/>
       </p:ext>
     </p:extLst>
   </p:cSld>
@@ -7905,6 +8015,84 @@
   <p:cSld>
     <p:spTree>
       <p:nvGrpSpPr>
+        <p:cNvPr id="1" name="">
+          <a:extLst>
+            <a:ext uri="{FF2B5EF4-FFF2-40B4-BE49-F238E27FC236}">
+              <a16:creationId xmlns:a16="http://schemas.microsoft.com/office/drawing/2014/main" id="{2633D092-8CF7-AC2C-E735-CD881E5A7E47}"/>
+            </a:ext>
+          </a:extLst>
+        </p:cNvPr>
+        <p:cNvGrpSpPr/>
+        <p:nvPr/>
+      </p:nvGrpSpPr>
+      <p:grpSpPr>
+        <a:xfrm>
+          <a:off x="0" y="0"/>
+          <a:ext cx="0" cy="0"/>
+          <a:chOff x="0" y="0"/>
+          <a:chExt cx="0" cy="0"/>
+        </a:xfrm>
+      </p:grpSpPr>
+      <p:sp>
+        <p:nvSpPr>
+          <p:cNvPr id="3" name="Content Placeholder 2">
+            <a:extLst>
+              <a:ext uri="{FF2B5EF4-FFF2-40B4-BE49-F238E27FC236}">
+                <a16:creationId xmlns:a16="http://schemas.microsoft.com/office/drawing/2014/main" id="{ED73A33B-30B1-C540-CF64-34BF78007BCC}"/>
+              </a:ext>
+            </a:extLst>
+          </p:cNvPr>
+          <p:cNvSpPr>
+            <a:spLocks noGrp="1"/>
+          </p:cNvSpPr>
+          <p:nvPr>
+            <p:ph idx="1"/>
+          </p:nvPr>
+        </p:nvSpPr>
+        <p:spPr>
+          <a:xfrm>
+            <a:off x="1023862" y="2159000"/>
+            <a:ext cx="10353762" cy="1430867"/>
+          </a:xfrm>
+        </p:spPr>
+        <p:txBody>
+          <a:bodyPr>
+            <a:normAutofit/>
+          </a:bodyPr>
+          <a:lstStyle/>
+          <a:p>
+            <a:pPr marL="36900" indent="0" algn="ctr">
+              <a:buNone/>
+            </a:pPr>
+            <a:r>
+              <a:rPr lang="en-US" sz="7200" b="1">
+                <a:solidFill>
+                  <a:srgbClr val="FF0000"/>
+                </a:solidFill>
+              </a:rPr>
+              <a:t>End GIT</a:t>
+            </a:r>
+          </a:p>
+        </p:txBody>
+      </p:sp>
+    </p:spTree>
+    <p:extLst>
+      <p:ext uri="{BB962C8B-B14F-4D97-AF65-F5344CB8AC3E}">
+        <p14:creationId xmlns:p14="http://schemas.microsoft.com/office/powerpoint/2010/main" val="2484187571"/>
+      </p:ext>
+    </p:extLst>
+  </p:cSld>
+  <p:clrMapOvr>
+    <a:masterClrMapping/>
+  </p:clrMapOvr>
+</p:sld>
+</file>
+
+<file path=ppt/slides/slide21.xml><?xml version="1.0" encoding="utf-8"?>
+<p:sld xmlns:a="http://schemas.openxmlformats.org/drawingml/2006/main" xmlns:r="http://schemas.openxmlformats.org/officeDocument/2006/relationships" xmlns:p="http://schemas.openxmlformats.org/presentationml/2006/main">
+  <p:cSld>
+    <p:spTree>
+      <p:nvGrpSpPr>
         <p:cNvPr id="1" name=""/>
         <p:cNvGrpSpPr/>
         <p:nvPr/>
@@ -7970,8 +8158,8 @@
         </p:nvSpPr>
         <p:spPr>
           <a:xfrm>
-            <a:off x="913795" y="626533"/>
-            <a:ext cx="10353762" cy="6045200"/>
+            <a:off x="169333" y="626533"/>
+            <a:ext cx="11878734" cy="6045200"/>
           </a:xfrm>
         </p:spPr>
         <p:txBody>
@@ -8004,8 +8192,26 @@
                   <a:srgbClr val="00B0F0"/>
                 </a:solidFill>
               </a:rPr>
-              <a:t>AspNetCore</a:t>
-            </a:r>
+              <a:t>AspNetCore -Version 1.8.23</a:t>
+            </a:r>
+          </a:p>
+          <a:p>
+            <a:pPr lvl="1"/>
+            <a:r>
+              <a:rPr lang="en-US"/>
+              <a:t>install-package </a:t>
+            </a:r>
+            <a:r>
+              <a:rPr lang="en-US">
+                <a:effectLst/>
+              </a:rPr>
+              <a:t>Newtonsoft.Json 13.0.3 // </a:t>
+            </a:r>
+            <a:endParaRPr lang="en-US" sz="1600">
+              <a:solidFill>
+                <a:srgbClr val="00B0F0"/>
+              </a:solidFill>
+            </a:endParaRPr>
           </a:p>
           <a:p>
             <a:r>
@@ -8020,6 +8226,20 @@
             <a:r>
               <a:rPr lang="en-US" sz="1800"/>
               <a:t>Registeration</a:t>
+            </a:r>
+          </a:p>
+          <a:p>
+            <a:pPr lvl="1"/>
+            <a:r>
+              <a:rPr lang="en-US" sz="1600"/>
+              <a:t>builder.Services.AddHangfire(config =&gt;{config.UseSqlServerStorage( builder.Configuration.GetConnectionString("DefaultConnection"));</a:t>
+            </a:r>
+            <a:br>
+              <a:rPr lang="en-US" sz="1600"/>
+            </a:br>
+            <a:r>
+              <a:rPr lang="en-US" sz="1600"/>
+              <a:t>});</a:t>
             </a:r>
           </a:p>
           <a:p>
@@ -8068,7 +8288,7 @@
 </p:sld>
 </file>
 
-<file path=ppt/slides/slide21.xml><?xml version="1.0" encoding="utf-8"?>
+<file path=ppt/slides/slide22.xml><?xml version="1.0" encoding="utf-8"?>
 <p:sld xmlns:a="http://schemas.openxmlformats.org/drawingml/2006/main" xmlns:r="http://schemas.openxmlformats.org/officeDocument/2006/relationships" xmlns:p="http://schemas.openxmlformats.org/presentationml/2006/main">
   <p:cSld>
     <p:spTree>
@@ -9101,7 +9321,7 @@
           <p:cNvPr id="2" name="Title 1">
             <a:extLst>
               <a:ext uri="{FF2B5EF4-FFF2-40B4-BE49-F238E27FC236}">
-                <a16:creationId xmlns:a16="http://schemas.microsoft.com/office/drawing/2014/main" id="{D57A302D-777A-F719-8C92-9D165BB03AEB}"/>
+                <a16:creationId xmlns:a16="http://schemas.microsoft.com/office/drawing/2014/main" id="{6C9677D7-DA0B-C3C6-B448-6E08C4A84FBA}"/>
               </a:ext>
             </a:extLst>
           </p:cNvPr>
@@ -9112,68 +9332,343 @@
             <p:ph type="title"/>
           </p:nvPr>
         </p:nvSpPr>
-        <p:spPr>
-          <a:xfrm>
-            <a:off x="913795" y="0"/>
-            <a:ext cx="10353762" cy="491067"/>
-          </a:xfrm>
-        </p:spPr>
-        <p:txBody>
-          <a:bodyPr>
-            <a:normAutofit fontScale="90000"/>
-          </a:bodyPr>
-          <a:lstStyle/>
-          <a:p>
-            <a:r>
-              <a:rPr lang="en-US"/>
-              <a:t>Built in methods</a:t>
-            </a:r>
-          </a:p>
-        </p:txBody>
-      </p:sp>
-      <p:sp>
-        <p:nvSpPr>
-          <p:cNvPr id="3" name="Content Placeholder 2">
+        <p:spPr/>
+        <p:txBody>
+          <a:bodyPr/>
+          <a:lstStyle/>
+          <a:p>
+            <a:endParaRPr lang="en-US"/>
+          </a:p>
+        </p:txBody>
+      </p:sp>
+      <p:sp>
+        <p:nvSpPr>
+          <p:cNvPr id="5" name="TextBox 4">
             <a:extLst>
               <a:ext uri="{FF2B5EF4-FFF2-40B4-BE49-F238E27FC236}">
-                <a16:creationId xmlns:a16="http://schemas.microsoft.com/office/drawing/2014/main" id="{DDC44BCE-5CA1-155C-BAED-09E66730BB5A}"/>
+                <a16:creationId xmlns:a16="http://schemas.microsoft.com/office/drawing/2014/main" id="{DF9908D5-2EF0-DC38-53F9-0D26E7B60E8B}"/>
               </a:ext>
             </a:extLst>
           </p:cNvPr>
-          <p:cNvSpPr>
-            <a:spLocks noGrp="1"/>
-          </p:cNvSpPr>
-          <p:nvPr>
-            <p:ph idx="1"/>
-          </p:nvPr>
-        </p:nvSpPr>
-        <p:spPr>
-          <a:xfrm>
-            <a:off x="228601" y="728133"/>
-            <a:ext cx="11734800" cy="5985934"/>
-          </a:xfrm>
-        </p:spPr>
-        <p:txBody>
-          <a:bodyPr/>
-          <a:lstStyle/>
-          <a:p>
-            <a:r>
-              <a:rPr lang="en-US"/>
-              <a:t>SPACE(1) // generate 1 space</a:t>
-            </a:r>
-          </a:p>
-          <a:p>
+          <p:cNvSpPr txBox="1"/>
+          <p:nvPr/>
+        </p:nvSpPr>
+        <p:spPr>
+          <a:xfrm>
+            <a:off x="913795" y="1906601"/>
+            <a:ext cx="6096000" cy="369332"/>
+          </a:xfrm>
+          <a:prstGeom prst="rect">
+            <a:avLst/>
+          </a:prstGeom>
+          <a:noFill/>
+        </p:spPr>
+        <p:txBody>
+          <a:bodyPr wrap="square">
+            <a:spAutoFit/>
+          </a:bodyPr>
+          <a:lstStyle/>
+          <a:p>
+            <a:r>
+              <a:rPr lang="en-US" sz="1800">
+                <a:solidFill>
+                  <a:srgbClr val="FF00FF"/>
+                </a:solidFill>
+                <a:latin typeface="Consolas" panose="020B0609020204030204" pitchFamily="49" charset="0"/>
+              </a:rPr>
+              <a:t>DATENAME</a:t>
+            </a:r>
+            <a:r>
+              <a:rPr lang="en-US" sz="1800">
+                <a:solidFill>
+                  <a:srgbClr val="808080"/>
+                </a:solidFill>
+                <a:latin typeface="Consolas" panose="020B0609020204030204" pitchFamily="49" charset="0"/>
+              </a:rPr>
+              <a:t>(</a:t>
+            </a:r>
+            <a:r>
+              <a:rPr lang="en-US" sz="1800">
+                <a:solidFill>
+                  <a:srgbClr val="0000FF"/>
+                </a:solidFill>
+                <a:latin typeface="Consolas" panose="020B0609020204030204" pitchFamily="49" charset="0"/>
+              </a:rPr>
+              <a:t>WEEKDAY</a:t>
+            </a:r>
+            <a:r>
+              <a:rPr lang="en-US" sz="1800">
+                <a:solidFill>
+                  <a:srgbClr val="808080"/>
+                </a:solidFill>
+                <a:latin typeface="Consolas" panose="020B0609020204030204" pitchFamily="49" charset="0"/>
+              </a:rPr>
+              <a:t>,</a:t>
+            </a:r>
+            <a:r>
+              <a:rPr lang="en-US" sz="1800">
+                <a:solidFill>
+                  <a:srgbClr val="000000"/>
+                </a:solidFill>
+                <a:latin typeface="Consolas" panose="020B0609020204030204" pitchFamily="49" charset="0"/>
+              </a:rPr>
+              <a:t> </a:t>
+            </a:r>
+            <a:r>
+              <a:rPr lang="en-US" sz="1800">
+                <a:solidFill>
+                  <a:srgbClr val="FF00FF"/>
+                </a:solidFill>
+                <a:latin typeface="Consolas" panose="020B0609020204030204" pitchFamily="49" charset="0"/>
+              </a:rPr>
+              <a:t>GETDATE</a:t>
+            </a:r>
+            <a:r>
+              <a:rPr lang="en-US" sz="1800">
+                <a:solidFill>
+                  <a:srgbClr val="808080"/>
+                </a:solidFill>
+                <a:latin typeface="Consolas" panose="020B0609020204030204" pitchFamily="49" charset="0"/>
+              </a:rPr>
+              <a:t>())</a:t>
+            </a:r>
+            <a:r>
+              <a:rPr lang="en-US" sz="1800">
+                <a:solidFill>
+                  <a:srgbClr val="000000"/>
+                </a:solidFill>
+                <a:latin typeface="Consolas" panose="020B0609020204030204" pitchFamily="49" charset="0"/>
+              </a:rPr>
+              <a:t> </a:t>
+            </a:r>
+            <a:r>
+              <a:rPr lang="en-US" sz="1800">
+                <a:latin typeface="Consolas" panose="020B0609020204030204" pitchFamily="49" charset="0"/>
+              </a:rPr>
+              <a:t>[Today]</a:t>
+            </a:r>
+            <a:r>
+              <a:rPr lang="en-US">
+                <a:latin typeface="Consolas" panose="020B0609020204030204" pitchFamily="49" charset="0"/>
+              </a:rPr>
+              <a:t>  -- Monday</a:t>
+            </a:r>
             <a:endParaRPr lang="en-US"/>
           </a:p>
-          <a:p>
-            <a:endParaRPr lang="en-US"/>
+        </p:txBody>
+      </p:sp>
+      <p:sp>
+        <p:nvSpPr>
+          <p:cNvPr id="7" name="TextBox 6">
+            <a:extLst>
+              <a:ext uri="{FF2B5EF4-FFF2-40B4-BE49-F238E27FC236}">
+                <a16:creationId xmlns:a16="http://schemas.microsoft.com/office/drawing/2014/main" id="{AB5DA155-3C5D-FEBA-AF9D-4B6F217346BD}"/>
+              </a:ext>
+            </a:extLst>
+          </p:cNvPr>
+          <p:cNvSpPr txBox="1"/>
+          <p:nvPr/>
+        </p:nvSpPr>
+        <p:spPr>
+          <a:xfrm>
+            <a:off x="913795" y="2417818"/>
+            <a:ext cx="8034867" cy="369332"/>
+          </a:xfrm>
+          <a:prstGeom prst="rect">
+            <a:avLst/>
+          </a:prstGeom>
+          <a:noFill/>
+        </p:spPr>
+        <p:txBody>
+          <a:bodyPr wrap="square">
+            <a:spAutoFit/>
+          </a:bodyPr>
+          <a:lstStyle/>
+          <a:p>
+            <a:r>
+              <a:rPr lang="en-US" sz="1800">
+                <a:solidFill>
+                  <a:srgbClr val="000000"/>
+                </a:solidFill>
+                <a:latin typeface="Consolas" panose="020B0609020204030204" pitchFamily="49" charset="0"/>
+              </a:rPr>
+              <a:t> </a:t>
+            </a:r>
+            <a:r>
+              <a:rPr lang="en-US" sz="1800">
+                <a:solidFill>
+                  <a:srgbClr val="0000FF"/>
+                </a:solidFill>
+                <a:latin typeface="Consolas" panose="020B0609020204030204" pitchFamily="49" charset="0"/>
+              </a:rPr>
+              <a:t>select</a:t>
+            </a:r>
+            <a:r>
+              <a:rPr lang="en-US" sz="1800">
+                <a:solidFill>
+                  <a:srgbClr val="000000"/>
+                </a:solidFill>
+                <a:latin typeface="Consolas" panose="020B0609020204030204" pitchFamily="49" charset="0"/>
+              </a:rPr>
+              <a:t> </a:t>
+            </a:r>
+            <a:r>
+              <a:rPr lang="en-US" sz="1800">
+                <a:solidFill>
+                  <a:srgbClr val="FF00FF"/>
+                </a:solidFill>
+                <a:latin typeface="Consolas" panose="020B0609020204030204" pitchFamily="49" charset="0"/>
+              </a:rPr>
+              <a:t>CONVERT</a:t>
+            </a:r>
+            <a:r>
+              <a:rPr lang="en-US" sz="1800">
+                <a:solidFill>
+                  <a:srgbClr val="808080"/>
+                </a:solidFill>
+                <a:latin typeface="Consolas" panose="020B0609020204030204" pitchFamily="49" charset="0"/>
+              </a:rPr>
+              <a:t>(</a:t>
+            </a:r>
+            <a:r>
+              <a:rPr lang="en-US" sz="1800">
+                <a:solidFill>
+                  <a:srgbClr val="0000FF"/>
+                </a:solidFill>
+                <a:latin typeface="Consolas" panose="020B0609020204030204" pitchFamily="49" charset="0"/>
+              </a:rPr>
+              <a:t>NVARCHAR</a:t>
+            </a:r>
+            <a:r>
+              <a:rPr lang="en-US" sz="1800">
+                <a:solidFill>
+                  <a:srgbClr val="808080"/>
+                </a:solidFill>
+                <a:latin typeface="Consolas" panose="020B0609020204030204" pitchFamily="49" charset="0"/>
+              </a:rPr>
+              <a:t>(</a:t>
+            </a:r>
+            <a:r>
+              <a:rPr lang="en-US" sz="1800">
+                <a:latin typeface="Consolas" panose="020B0609020204030204" pitchFamily="49" charset="0"/>
+              </a:rPr>
+              <a:t>10</a:t>
+            </a:r>
+            <a:r>
+              <a:rPr lang="en-US" sz="1800">
+                <a:solidFill>
+                  <a:srgbClr val="808080"/>
+                </a:solidFill>
+                <a:latin typeface="Consolas" panose="020B0609020204030204" pitchFamily="49" charset="0"/>
+              </a:rPr>
+              <a:t>),</a:t>
+            </a:r>
+            <a:r>
+              <a:rPr lang="en-US" sz="1800">
+                <a:solidFill>
+                  <a:srgbClr val="000000"/>
+                </a:solidFill>
+                <a:latin typeface="Consolas" panose="020B0609020204030204" pitchFamily="49" charset="0"/>
+              </a:rPr>
+              <a:t> </a:t>
+            </a:r>
+            <a:r>
+              <a:rPr lang="en-US" sz="1800">
+                <a:solidFill>
+                  <a:srgbClr val="FF00FF"/>
+                </a:solidFill>
+                <a:latin typeface="Consolas" panose="020B0609020204030204" pitchFamily="49" charset="0"/>
+              </a:rPr>
+              <a:t>GETDATE</a:t>
+            </a:r>
+            <a:r>
+              <a:rPr lang="en-US" sz="1800">
+                <a:solidFill>
+                  <a:srgbClr val="808080"/>
+                </a:solidFill>
+                <a:latin typeface="Consolas" panose="020B0609020204030204" pitchFamily="49" charset="0"/>
+              </a:rPr>
+              <a:t>(),</a:t>
+            </a:r>
+            <a:r>
+              <a:rPr lang="en-US" sz="1800">
+                <a:solidFill>
+                  <a:srgbClr val="000000"/>
+                </a:solidFill>
+                <a:latin typeface="Consolas" panose="020B0609020204030204" pitchFamily="49" charset="0"/>
+              </a:rPr>
+              <a:t> </a:t>
+            </a:r>
+            <a:r>
+              <a:rPr lang="en-US" sz="1800">
+                <a:latin typeface="Consolas" panose="020B0609020204030204" pitchFamily="49" charset="0"/>
+              </a:rPr>
+              <a:t>103</a:t>
+            </a:r>
+            <a:r>
+              <a:rPr lang="en-US" sz="1800">
+                <a:solidFill>
+                  <a:srgbClr val="808080"/>
+                </a:solidFill>
+                <a:latin typeface="Consolas" panose="020B0609020204030204" pitchFamily="49" charset="0"/>
+              </a:rPr>
+              <a:t>)</a:t>
+            </a:r>
+            <a:r>
+              <a:rPr lang="en-US" sz="1800">
+                <a:solidFill>
+                  <a:srgbClr val="000000"/>
+                </a:solidFill>
+                <a:latin typeface="Consolas" panose="020B0609020204030204" pitchFamily="49" charset="0"/>
+              </a:rPr>
+              <a:t> </a:t>
+            </a:r>
+            <a:r>
+              <a:rPr lang="en-US" sz="1800">
+                <a:solidFill>
+                  <a:srgbClr val="0000FF"/>
+                </a:solidFill>
+                <a:latin typeface="Consolas" panose="020B0609020204030204" pitchFamily="49" charset="0"/>
+              </a:rPr>
+              <a:t>AS</a:t>
+            </a:r>
+            <a:r>
+              <a:rPr lang="en-US" sz="1800">
+                <a:solidFill>
+                  <a:srgbClr val="000000"/>
+                </a:solidFill>
+                <a:latin typeface="Consolas" panose="020B0609020204030204" pitchFamily="49" charset="0"/>
+              </a:rPr>
+              <a:t> </a:t>
+            </a:r>
+            <a:r>
+              <a:rPr lang="en-US" sz="1800">
+                <a:latin typeface="Consolas" panose="020B0609020204030204" pitchFamily="49" charset="0"/>
+              </a:rPr>
+              <a:t>ReportDate</a:t>
+            </a:r>
+            <a:r>
+              <a:rPr lang="en-US" sz="1800">
+                <a:solidFill>
+                  <a:srgbClr val="808080"/>
+                </a:solidFill>
+                <a:latin typeface="Consolas" panose="020B0609020204030204" pitchFamily="49" charset="0"/>
+              </a:rPr>
+              <a:t>;</a:t>
+            </a:r>
+            <a:endParaRPr lang="en-US" sz="1800">
+              <a:solidFill>
+                <a:srgbClr val="000000"/>
+              </a:solidFill>
+              <a:latin typeface="Consolas" panose="020B0609020204030204" pitchFamily="49" charset="0"/>
+            </a:endParaRPr>
           </a:p>
         </p:txBody>
       </p:sp>
     </p:spTree>
     <p:extLst>
       <p:ext uri="{BB962C8B-B14F-4D97-AF65-F5344CB8AC3E}">
-        <p14:creationId xmlns:p14="http://schemas.microsoft.com/office/powerpoint/2010/main" val="1815370671"/>
+        <p14:creationId xmlns:p14="http://schemas.microsoft.com/office/powerpoint/2010/main" val="4154575717"/>
       </p:ext>
     </p:extLst>
   </p:cSld>
@@ -9205,7 +9700,7 @@
           <p:cNvPr id="2" name="Title 1">
             <a:extLst>
               <a:ext uri="{FF2B5EF4-FFF2-40B4-BE49-F238E27FC236}">
-                <a16:creationId xmlns:a16="http://schemas.microsoft.com/office/drawing/2014/main" id="{E3DC3765-8FC0-A90B-A887-EF5E6AAEB92E}"/>
+                <a16:creationId xmlns:a16="http://schemas.microsoft.com/office/drawing/2014/main" id="{D57A302D-777A-F719-8C92-9D165BB03AEB}"/>
               </a:ext>
             </a:extLst>
           </p:cNvPr>
@@ -9216,12 +9711,22 @@
             <p:ph type="title"/>
           </p:nvPr>
         </p:nvSpPr>
-        <p:spPr/>
-        <p:txBody>
-          <a:bodyPr/>
-          <a:lstStyle/>
-          <a:p>
-            <a:endParaRPr lang="en-US"/>
+        <p:spPr>
+          <a:xfrm>
+            <a:off x="913795" y="0"/>
+            <a:ext cx="10353762" cy="491067"/>
+          </a:xfrm>
+        </p:spPr>
+        <p:txBody>
+          <a:bodyPr>
+            <a:normAutofit fontScale="90000"/>
+          </a:bodyPr>
+          <a:lstStyle/>
+          <a:p>
+            <a:r>
+              <a:rPr lang="en-US"/>
+              <a:t>Built in methods</a:t>
+            </a:r>
           </a:p>
         </p:txBody>
       </p:sp>
@@ -9230,7 +9735,7 @@
           <p:cNvPr id="3" name="Content Placeholder 2">
             <a:extLst>
               <a:ext uri="{FF2B5EF4-FFF2-40B4-BE49-F238E27FC236}">
-                <a16:creationId xmlns:a16="http://schemas.microsoft.com/office/drawing/2014/main" id="{B32C5918-DD85-6F17-5B4D-856121CF6630}"/>
+                <a16:creationId xmlns:a16="http://schemas.microsoft.com/office/drawing/2014/main" id="{DDC44BCE-5CA1-155C-BAED-09E66730BB5A}"/>
               </a:ext>
             </a:extLst>
           </p:cNvPr>
@@ -9241,10 +9746,24 @@
             <p:ph idx="1"/>
           </p:nvPr>
         </p:nvSpPr>
-        <p:spPr/>
+        <p:spPr>
+          <a:xfrm>
+            <a:off x="228601" y="728133"/>
+            <a:ext cx="11734800" cy="5985934"/>
+          </a:xfrm>
+        </p:spPr>
         <p:txBody>
           <a:bodyPr/>
           <a:lstStyle/>
+          <a:p>
+            <a:r>
+              <a:rPr lang="en-US"/>
+              <a:t>SPACE(1) // generate 1 space</a:t>
+            </a:r>
+          </a:p>
+          <a:p>
+            <a:endParaRPr lang="en-US"/>
+          </a:p>
           <a:p>
             <a:endParaRPr lang="en-US"/>
           </a:p>
@@ -9253,7 +9772,7 @@
     </p:spTree>
     <p:extLst>
       <p:ext uri="{BB962C8B-B14F-4D97-AF65-F5344CB8AC3E}">
-        <p14:creationId xmlns:p14="http://schemas.microsoft.com/office/powerpoint/2010/main" val="1572491351"/>
+        <p14:creationId xmlns:p14="http://schemas.microsoft.com/office/powerpoint/2010/main" val="1815370671"/>
       </p:ext>
     </p:extLst>
   </p:cSld>
@@ -9285,7 +9804,7 @@
           <p:cNvPr id="2" name="Title 1">
             <a:extLst>
               <a:ext uri="{FF2B5EF4-FFF2-40B4-BE49-F238E27FC236}">
-                <a16:creationId xmlns:a16="http://schemas.microsoft.com/office/drawing/2014/main" id="{53D7DDB9-AA73-A473-E653-7B1D163CA4D5}"/>
+                <a16:creationId xmlns:a16="http://schemas.microsoft.com/office/drawing/2014/main" id="{E3DC3765-8FC0-A90B-A887-EF5E6AAEB92E}"/>
               </a:ext>
             </a:extLst>
           </p:cNvPr>
@@ -9296,249 +9815,44 @@
             <p:ph type="title"/>
           </p:nvPr>
         </p:nvSpPr>
-        <p:spPr>
-          <a:xfrm>
-            <a:off x="913795" y="0"/>
-            <a:ext cx="10353762" cy="575733"/>
-          </a:xfrm>
-        </p:spPr>
-        <p:txBody>
-          <a:bodyPr>
-            <a:normAutofit fontScale="90000"/>
-          </a:bodyPr>
-          <a:lstStyle/>
-          <a:p>
-            <a:r>
-              <a:rPr lang="en-US" b="1">
-                <a:solidFill>
-                  <a:srgbClr val="FFFF00"/>
-                </a:solidFill>
-                <a:effectLst/>
-              </a:rPr>
-              <a:t>LINQ Query Syntax left Join</a:t>
-            </a:r>
-            <a:endParaRPr lang="en-US" b="1">
-              <a:solidFill>
-                <a:srgbClr val="FFFF00"/>
-              </a:solidFill>
-            </a:endParaRPr>
-          </a:p>
-        </p:txBody>
-      </p:sp>
-      <p:pic>
-        <p:nvPicPr>
-          <p:cNvPr id="13" name="Picture 12">
+        <p:spPr/>
+        <p:txBody>
+          <a:bodyPr/>
+          <a:lstStyle/>
+          <a:p>
+            <a:endParaRPr lang="en-US"/>
+          </a:p>
+        </p:txBody>
+      </p:sp>
+      <p:sp>
+        <p:nvSpPr>
+          <p:cNvPr id="3" name="Content Placeholder 2">
             <a:extLst>
               <a:ext uri="{FF2B5EF4-FFF2-40B4-BE49-F238E27FC236}">
-                <a16:creationId xmlns:a16="http://schemas.microsoft.com/office/drawing/2014/main" id="{38D248F4-0131-E61B-4DC6-F1B7BD778D59}"/>
+                <a16:creationId xmlns:a16="http://schemas.microsoft.com/office/drawing/2014/main" id="{B32C5918-DD85-6F17-5B4D-856121CF6630}"/>
               </a:ext>
             </a:extLst>
           </p:cNvPr>
-          <p:cNvPicPr>
-            <a:picLocks noChangeAspect="1"/>
-          </p:cNvPicPr>
-          <p:nvPr/>
-        </p:nvPicPr>
-        <p:blipFill>
-          <a:blip r:embed="rId2"/>
-          <a:stretch>
-            <a:fillRect/>
-          </a:stretch>
-        </p:blipFill>
-        <p:spPr>
-          <a:xfrm>
-            <a:off x="151796" y="719666"/>
-            <a:ext cx="2606430" cy="1546994"/>
-          </a:xfrm>
-          <a:prstGeom prst="rect">
-            <a:avLst/>
-          </a:prstGeom>
-        </p:spPr>
-      </p:pic>
-      <p:pic>
-        <p:nvPicPr>
-          <p:cNvPr id="15" name="Picture 14">
-            <a:extLst>
-              <a:ext uri="{FF2B5EF4-FFF2-40B4-BE49-F238E27FC236}">
-                <a16:creationId xmlns:a16="http://schemas.microsoft.com/office/drawing/2014/main" id="{3A5E6F59-06F8-72D9-70F4-8C549D07F88F}"/>
-              </a:ext>
-            </a:extLst>
-          </p:cNvPr>
-          <p:cNvPicPr>
-            <a:picLocks noChangeAspect="1"/>
-          </p:cNvPicPr>
-          <p:nvPr/>
-        </p:nvPicPr>
-        <p:blipFill>
-          <a:blip r:embed="rId3"/>
-          <a:stretch>
-            <a:fillRect/>
-          </a:stretch>
-        </p:blipFill>
-        <p:spPr>
-          <a:xfrm>
-            <a:off x="2929468" y="560627"/>
-            <a:ext cx="3716336" cy="1791904"/>
-          </a:xfrm>
-          <a:prstGeom prst="rect">
-            <a:avLst/>
-          </a:prstGeom>
-        </p:spPr>
-      </p:pic>
-      <p:pic>
-        <p:nvPicPr>
-          <p:cNvPr id="17" name="Picture 16">
-            <a:extLst>
-              <a:ext uri="{FF2B5EF4-FFF2-40B4-BE49-F238E27FC236}">
-                <a16:creationId xmlns:a16="http://schemas.microsoft.com/office/drawing/2014/main" id="{33476E61-EFFB-1CC9-6979-6E6234D3E7BE}"/>
-              </a:ext>
-            </a:extLst>
-          </p:cNvPr>
-          <p:cNvPicPr>
-            <a:picLocks noChangeAspect="1"/>
-          </p:cNvPicPr>
-          <p:nvPr/>
-        </p:nvPicPr>
-        <p:blipFill>
-          <a:blip r:embed="rId4"/>
-          <a:stretch>
-            <a:fillRect/>
-          </a:stretch>
-        </p:blipFill>
-        <p:spPr>
-          <a:xfrm>
-            <a:off x="0" y="2438401"/>
-            <a:ext cx="3834023" cy="4447408"/>
-          </a:xfrm>
-          <a:prstGeom prst="rect">
-            <a:avLst/>
-          </a:prstGeom>
-        </p:spPr>
-      </p:pic>
-      <p:pic>
-        <p:nvPicPr>
-          <p:cNvPr id="21" name="Picture 20">
-            <a:extLst>
-              <a:ext uri="{FF2B5EF4-FFF2-40B4-BE49-F238E27FC236}">
-                <a16:creationId xmlns:a16="http://schemas.microsoft.com/office/drawing/2014/main" id="{46AA3581-A6E2-1BC7-E6DB-736DD2E0191B}"/>
-              </a:ext>
-            </a:extLst>
-          </p:cNvPr>
-          <p:cNvPicPr>
-            <a:picLocks noChangeAspect="1"/>
-          </p:cNvPicPr>
-          <p:nvPr/>
-        </p:nvPicPr>
-        <p:blipFill>
-          <a:blip r:embed="rId5"/>
-          <a:stretch>
-            <a:fillRect/>
-          </a:stretch>
-        </p:blipFill>
-        <p:spPr>
-          <a:xfrm>
-            <a:off x="3892559" y="2403018"/>
-            <a:ext cx="3716336" cy="2051963"/>
-          </a:xfrm>
-          <a:prstGeom prst="rect">
-            <a:avLst/>
-          </a:prstGeom>
-        </p:spPr>
-      </p:pic>
-      <p:pic>
-        <p:nvPicPr>
-          <p:cNvPr id="23" name="Picture 22">
-            <a:extLst>
-              <a:ext uri="{FF2B5EF4-FFF2-40B4-BE49-F238E27FC236}">
-                <a16:creationId xmlns:a16="http://schemas.microsoft.com/office/drawing/2014/main" id="{8B0F35E5-A5B4-4718-F3D9-89FA9709369C}"/>
-              </a:ext>
-            </a:extLst>
-          </p:cNvPr>
-          <p:cNvPicPr>
-            <a:picLocks noChangeAspect="1"/>
-          </p:cNvPicPr>
-          <p:nvPr/>
-        </p:nvPicPr>
-        <p:blipFill>
-          <a:blip r:embed="rId6"/>
-          <a:stretch>
-            <a:fillRect/>
-          </a:stretch>
-        </p:blipFill>
-        <p:spPr>
-          <a:xfrm>
-            <a:off x="3892559" y="4490364"/>
-            <a:ext cx="2682472" cy="2367636"/>
-          </a:xfrm>
-          <a:prstGeom prst="rect">
-            <a:avLst/>
-          </a:prstGeom>
-        </p:spPr>
-      </p:pic>
-      <p:pic>
-        <p:nvPicPr>
-          <p:cNvPr id="25" name="Picture 24">
-            <a:extLst>
-              <a:ext uri="{FF2B5EF4-FFF2-40B4-BE49-F238E27FC236}">
-                <a16:creationId xmlns:a16="http://schemas.microsoft.com/office/drawing/2014/main" id="{3FCD31B3-BF3B-0D8A-A0DA-28A446926527}"/>
-              </a:ext>
-            </a:extLst>
-          </p:cNvPr>
-          <p:cNvPicPr>
-            <a:picLocks noChangeAspect="1"/>
-          </p:cNvPicPr>
-          <p:nvPr/>
-        </p:nvPicPr>
-        <p:blipFill>
-          <a:blip r:embed="rId7"/>
-          <a:stretch>
-            <a:fillRect/>
-          </a:stretch>
-        </p:blipFill>
-        <p:spPr>
-          <a:xfrm>
-            <a:off x="8120912" y="575733"/>
-            <a:ext cx="2420087" cy="3311330"/>
-          </a:xfrm>
-          <a:prstGeom prst="rect">
-            <a:avLst/>
-          </a:prstGeom>
-        </p:spPr>
-      </p:pic>
-      <p:pic>
-        <p:nvPicPr>
-          <p:cNvPr id="27" name="Picture 26">
-            <a:extLst>
-              <a:ext uri="{FF2B5EF4-FFF2-40B4-BE49-F238E27FC236}">
-                <a16:creationId xmlns:a16="http://schemas.microsoft.com/office/drawing/2014/main" id="{A143240C-C79B-8D12-DEB4-A172F26C1010}"/>
-              </a:ext>
-            </a:extLst>
-          </p:cNvPr>
-          <p:cNvPicPr>
-            <a:picLocks noChangeAspect="1"/>
-          </p:cNvPicPr>
-          <p:nvPr/>
-        </p:nvPicPr>
-        <p:blipFill>
-          <a:blip r:embed="rId8"/>
-          <a:stretch>
-            <a:fillRect/>
-          </a:stretch>
-        </p:blipFill>
-        <p:spPr>
-          <a:xfrm>
-            <a:off x="7859872" y="4069389"/>
-            <a:ext cx="3635055" cy="2613887"/>
-          </a:xfrm>
-          <a:prstGeom prst="rect">
-            <a:avLst/>
-          </a:prstGeom>
-        </p:spPr>
-      </p:pic>
+          <p:cNvSpPr>
+            <a:spLocks noGrp="1"/>
+          </p:cNvSpPr>
+          <p:nvPr>
+            <p:ph idx="1"/>
+          </p:nvPr>
+        </p:nvSpPr>
+        <p:spPr/>
+        <p:txBody>
+          <a:bodyPr/>
+          <a:lstStyle/>
+          <a:p>
+            <a:endParaRPr lang="en-US"/>
+          </a:p>
+        </p:txBody>
+      </p:sp>
     </p:spTree>
     <p:extLst>
       <p:ext uri="{BB962C8B-B14F-4D97-AF65-F5344CB8AC3E}">
-        <p14:creationId xmlns:p14="http://schemas.microsoft.com/office/powerpoint/2010/main" val="2328028493"/>
+        <p14:creationId xmlns:p14="http://schemas.microsoft.com/office/powerpoint/2010/main" val="1572491351"/>
       </p:ext>
     </p:extLst>
   </p:cSld>
@@ -9570,7 +9884,7 @@
           <p:cNvPr id="2" name="Title 1">
             <a:extLst>
               <a:ext uri="{FF2B5EF4-FFF2-40B4-BE49-F238E27FC236}">
-                <a16:creationId xmlns:a16="http://schemas.microsoft.com/office/drawing/2014/main" id="{BC629567-C097-E677-74FD-BB7789F58B8C}"/>
+                <a16:creationId xmlns:a16="http://schemas.microsoft.com/office/drawing/2014/main" id="{53D7DDB9-AA73-A473-E653-7B1D163CA4D5}"/>
               </a:ext>
             </a:extLst>
           </p:cNvPr>
@@ -9584,7 +9898,7 @@
         <p:spPr>
           <a:xfrm>
             <a:off x="913795" y="0"/>
-            <a:ext cx="10353762" cy="601133"/>
+            <a:ext cx="10353762" cy="575733"/>
           </a:xfrm>
         </p:spPr>
         <p:txBody>
@@ -9602,25 +9916,27 @@
               </a:rPr>
               <a:t>LINQ Query Syntax left Join</a:t>
             </a:r>
-            <a:endParaRPr lang="en-US"/>
+            <a:endParaRPr lang="en-US" b="1">
+              <a:solidFill>
+                <a:srgbClr val="FFFF00"/>
+              </a:solidFill>
+            </a:endParaRPr>
           </a:p>
         </p:txBody>
       </p:sp>
       <p:pic>
         <p:nvPicPr>
-          <p:cNvPr id="5" name="Content Placeholder 4">
+          <p:cNvPr id="13" name="Picture 12">
             <a:extLst>
               <a:ext uri="{FF2B5EF4-FFF2-40B4-BE49-F238E27FC236}">
-                <a16:creationId xmlns:a16="http://schemas.microsoft.com/office/drawing/2014/main" id="{43EBEE3B-A167-F253-28A7-81C76EED4FD1}"/>
+                <a16:creationId xmlns:a16="http://schemas.microsoft.com/office/drawing/2014/main" id="{38D248F4-0131-E61B-4DC6-F1B7BD778D59}"/>
               </a:ext>
             </a:extLst>
           </p:cNvPr>
           <p:cNvPicPr>
-            <a:picLocks noGrp="1" noChangeAspect="1"/>
+            <a:picLocks noChangeAspect="1"/>
           </p:cNvPicPr>
-          <p:nvPr>
-            <p:ph idx="1"/>
-          </p:nvPr>
+          <p:nvPr/>
         </p:nvPicPr>
         <p:blipFill>
           <a:blip r:embed="rId2"/>
@@ -9630,27 +9946,20 @@
         </p:blipFill>
         <p:spPr>
           <a:xfrm>
-            <a:off x="3716866" y="601132"/>
-            <a:ext cx="4030133" cy="2820333"/>
+            <a:off x="151796" y="719666"/>
+            <a:ext cx="2606430" cy="1546994"/>
           </a:xfrm>
           <a:prstGeom prst="rect">
             <a:avLst/>
           </a:prstGeom>
-          <a:effectLst>
-            <a:outerShdw blurRad="25400" dir="17880000">
-              <a:srgbClr val="000000">
-                <a:alpha val="46000"/>
-              </a:srgbClr>
-            </a:outerShdw>
-          </a:effectLst>
         </p:spPr>
       </p:pic>
       <p:pic>
         <p:nvPicPr>
-          <p:cNvPr id="7" name="Picture 6">
+          <p:cNvPr id="15" name="Picture 14">
             <a:extLst>
               <a:ext uri="{FF2B5EF4-FFF2-40B4-BE49-F238E27FC236}">
-                <a16:creationId xmlns:a16="http://schemas.microsoft.com/office/drawing/2014/main" id="{B26874DD-4DB0-E2B0-FE6A-506E6C22AD83}"/>
+                <a16:creationId xmlns:a16="http://schemas.microsoft.com/office/drawing/2014/main" id="{3A5E6F59-06F8-72D9-70F4-8C549D07F88F}"/>
               </a:ext>
             </a:extLst>
           </p:cNvPr>
@@ -9667,65 +9976,168 @@
         </p:blipFill>
         <p:spPr>
           <a:xfrm>
-            <a:off x="196308" y="608667"/>
-            <a:ext cx="3247932" cy="2820333"/>
+            <a:off x="2929468" y="560627"/>
+            <a:ext cx="3716336" cy="1791904"/>
           </a:xfrm>
           <a:prstGeom prst="rect">
             <a:avLst/>
           </a:prstGeom>
         </p:spPr>
       </p:pic>
-      <p:sp>
-        <p:nvSpPr>
-          <p:cNvPr id="8" name="TextBox 7">
+      <p:pic>
+        <p:nvPicPr>
+          <p:cNvPr id="17" name="Picture 16">
             <a:extLst>
               <a:ext uri="{FF2B5EF4-FFF2-40B4-BE49-F238E27FC236}">
-                <a16:creationId xmlns:a16="http://schemas.microsoft.com/office/drawing/2014/main" id="{DC59A1D6-D574-D479-7528-6A48466DDE1C}"/>
+                <a16:creationId xmlns:a16="http://schemas.microsoft.com/office/drawing/2014/main" id="{33476E61-EFFB-1CC9-6979-6E6234D3E7BE}"/>
               </a:ext>
             </a:extLst>
           </p:cNvPr>
-          <p:cNvSpPr txBox="1"/>
+          <p:cNvPicPr>
+            <a:picLocks noChangeAspect="1"/>
+          </p:cNvPicPr>
           <p:nvPr/>
-        </p:nvSpPr>
-        <p:spPr>
-          <a:xfrm>
-            <a:off x="728132" y="4064000"/>
-            <a:ext cx="10041467" cy="1477328"/>
+        </p:nvPicPr>
+        <p:blipFill>
+          <a:blip r:embed="rId4"/>
+          <a:stretch>
+            <a:fillRect/>
+          </a:stretch>
+        </p:blipFill>
+        <p:spPr>
+          <a:xfrm>
+            <a:off x="0" y="2438401"/>
+            <a:ext cx="3834023" cy="4447408"/>
           </a:xfrm>
           <a:prstGeom prst="rect">
             <a:avLst/>
           </a:prstGeom>
-          <a:noFill/>
-        </p:spPr>
-        <p:txBody>
-          <a:bodyPr wrap="square" rtlCol="0">
-            <a:spAutoFit/>
-          </a:bodyPr>
-          <a:lstStyle/>
-          <a:p>
-            <a:r>
-              <a:rPr lang="en-US"/>
-              <a:t>The tricky here is : when we need to get from all rows from first table even if there no match in second table</a:t>
-            </a:r>
-          </a:p>
-          <a:p>
-            <a:endParaRPr lang="en-US"/>
-          </a:p>
-          <a:p>
-            <a:endParaRPr lang="en-US"/>
-          </a:p>
-          <a:p>
-            <a:r>
-              <a:rPr lang="en-US"/>
-              <a:t> </a:t>
-            </a:r>
-          </a:p>
-        </p:txBody>
-      </p:sp>
+        </p:spPr>
+      </p:pic>
+      <p:pic>
+        <p:nvPicPr>
+          <p:cNvPr id="21" name="Picture 20">
+            <a:extLst>
+              <a:ext uri="{FF2B5EF4-FFF2-40B4-BE49-F238E27FC236}">
+                <a16:creationId xmlns:a16="http://schemas.microsoft.com/office/drawing/2014/main" id="{46AA3581-A6E2-1BC7-E6DB-736DD2E0191B}"/>
+              </a:ext>
+            </a:extLst>
+          </p:cNvPr>
+          <p:cNvPicPr>
+            <a:picLocks noChangeAspect="1"/>
+          </p:cNvPicPr>
+          <p:nvPr/>
+        </p:nvPicPr>
+        <p:blipFill>
+          <a:blip r:embed="rId5"/>
+          <a:stretch>
+            <a:fillRect/>
+          </a:stretch>
+        </p:blipFill>
+        <p:spPr>
+          <a:xfrm>
+            <a:off x="3892559" y="2403018"/>
+            <a:ext cx="3716336" cy="2051963"/>
+          </a:xfrm>
+          <a:prstGeom prst="rect">
+            <a:avLst/>
+          </a:prstGeom>
+        </p:spPr>
+      </p:pic>
+      <p:pic>
+        <p:nvPicPr>
+          <p:cNvPr id="23" name="Picture 22">
+            <a:extLst>
+              <a:ext uri="{FF2B5EF4-FFF2-40B4-BE49-F238E27FC236}">
+                <a16:creationId xmlns:a16="http://schemas.microsoft.com/office/drawing/2014/main" id="{8B0F35E5-A5B4-4718-F3D9-89FA9709369C}"/>
+              </a:ext>
+            </a:extLst>
+          </p:cNvPr>
+          <p:cNvPicPr>
+            <a:picLocks noChangeAspect="1"/>
+          </p:cNvPicPr>
+          <p:nvPr/>
+        </p:nvPicPr>
+        <p:blipFill>
+          <a:blip r:embed="rId6"/>
+          <a:stretch>
+            <a:fillRect/>
+          </a:stretch>
+        </p:blipFill>
+        <p:spPr>
+          <a:xfrm>
+            <a:off x="3892559" y="4490364"/>
+            <a:ext cx="2682472" cy="2367636"/>
+          </a:xfrm>
+          <a:prstGeom prst="rect">
+            <a:avLst/>
+          </a:prstGeom>
+        </p:spPr>
+      </p:pic>
+      <p:pic>
+        <p:nvPicPr>
+          <p:cNvPr id="25" name="Picture 24">
+            <a:extLst>
+              <a:ext uri="{FF2B5EF4-FFF2-40B4-BE49-F238E27FC236}">
+                <a16:creationId xmlns:a16="http://schemas.microsoft.com/office/drawing/2014/main" id="{3FCD31B3-BF3B-0D8A-A0DA-28A446926527}"/>
+              </a:ext>
+            </a:extLst>
+          </p:cNvPr>
+          <p:cNvPicPr>
+            <a:picLocks noChangeAspect="1"/>
+          </p:cNvPicPr>
+          <p:nvPr/>
+        </p:nvPicPr>
+        <p:blipFill>
+          <a:blip r:embed="rId7"/>
+          <a:stretch>
+            <a:fillRect/>
+          </a:stretch>
+        </p:blipFill>
+        <p:spPr>
+          <a:xfrm>
+            <a:off x="8120912" y="575733"/>
+            <a:ext cx="2420087" cy="3311330"/>
+          </a:xfrm>
+          <a:prstGeom prst="rect">
+            <a:avLst/>
+          </a:prstGeom>
+        </p:spPr>
+      </p:pic>
+      <p:pic>
+        <p:nvPicPr>
+          <p:cNvPr id="27" name="Picture 26">
+            <a:extLst>
+              <a:ext uri="{FF2B5EF4-FFF2-40B4-BE49-F238E27FC236}">
+                <a16:creationId xmlns:a16="http://schemas.microsoft.com/office/drawing/2014/main" id="{A143240C-C79B-8D12-DEB4-A172F26C1010}"/>
+              </a:ext>
+            </a:extLst>
+          </p:cNvPr>
+          <p:cNvPicPr>
+            <a:picLocks noChangeAspect="1"/>
+          </p:cNvPicPr>
+          <p:nvPr/>
+        </p:nvPicPr>
+        <p:blipFill>
+          <a:blip r:embed="rId8"/>
+          <a:stretch>
+            <a:fillRect/>
+          </a:stretch>
+        </p:blipFill>
+        <p:spPr>
+          <a:xfrm>
+            <a:off x="7859872" y="4069389"/>
+            <a:ext cx="3635055" cy="2613887"/>
+          </a:xfrm>
+          <a:prstGeom prst="rect">
+            <a:avLst/>
+          </a:prstGeom>
+        </p:spPr>
+      </p:pic>
     </p:spTree>
     <p:extLst>
       <p:ext uri="{BB962C8B-B14F-4D97-AF65-F5344CB8AC3E}">
-        <p14:creationId xmlns:p14="http://schemas.microsoft.com/office/powerpoint/2010/main" val="2082898737"/>
+        <p14:creationId xmlns:p14="http://schemas.microsoft.com/office/powerpoint/2010/main" val="2328028493"/>
       </p:ext>
     </p:extLst>
   </p:cSld>

--- a/Dot Net/NEW.pptx
+++ b/Dot Net/NEW.pptx
@@ -27,6 +27,7 @@
     <p:sldId id="272" r:id="rId21"/>
     <p:sldId id="275" r:id="rId22"/>
     <p:sldId id="276" r:id="rId23"/>
+    <p:sldId id="278" r:id="rId24"/>
   </p:sldIdLst>
   <p:sldSz cx="12192000" cy="6858000"/>
   <p:notesSz cx="6858000" cy="9144000"/>
@@ -318,7 +319,7 @@
           <a:p>
             <a:fld id="{79806886-C3E2-4AA6-AE5C-EC60C7639E42}" type="datetimeFigureOut">
               <a:rPr lang="en-US" smtClean="0"/>
-              <a:t>6/23/2026</a:t>
+              <a:t>8/18/2026</a:t>
             </a:fld>
             <a:endParaRPr lang="en-US"/>
           </a:p>
@@ -616,7 +617,7 @@
           <a:p>
             <a:fld id="{79806886-C3E2-4AA6-AE5C-EC60C7639E42}" type="datetimeFigureOut">
               <a:rPr lang="en-US" smtClean="0"/>
-              <a:t>6/23/2026</a:t>
+              <a:t>8/18/2026</a:t>
             </a:fld>
             <a:endParaRPr lang="en-US"/>
           </a:p>
@@ -808,7 +809,7 @@
           <a:p>
             <a:fld id="{79806886-C3E2-4AA6-AE5C-EC60C7639E42}" type="datetimeFigureOut">
               <a:rPr lang="en-US" smtClean="0"/>
-              <a:t>6/23/2026</a:t>
+              <a:t>8/18/2026</a:t>
             </a:fld>
             <a:endParaRPr lang="en-US"/>
           </a:p>
@@ -1069,7 +1070,7 @@
           <a:p>
             <a:fld id="{79806886-C3E2-4AA6-AE5C-EC60C7639E42}" type="datetimeFigureOut">
               <a:rPr lang="en-US" smtClean="0"/>
-              <a:t>6/23/2026</a:t>
+              <a:t>8/18/2026</a:t>
             </a:fld>
             <a:endParaRPr lang="en-US"/>
           </a:p>
@@ -1493,7 +1494,7 @@
           <a:p>
             <a:fld id="{79806886-C3E2-4AA6-AE5C-EC60C7639E42}" type="datetimeFigureOut">
               <a:rPr lang="en-US" smtClean="0"/>
-              <a:t>6/23/2026</a:t>
+              <a:t>8/18/2026</a:t>
             </a:fld>
             <a:endParaRPr lang="en-US"/>
           </a:p>
@@ -2030,7 +2031,7 @@
           <a:p>
             <a:fld id="{79806886-C3E2-4AA6-AE5C-EC60C7639E42}" type="datetimeFigureOut">
               <a:rPr lang="en-US" smtClean="0"/>
-              <a:t>6/23/2026</a:t>
+              <a:t>8/18/2026</a:t>
             </a:fld>
             <a:endParaRPr lang="en-US"/>
           </a:p>
@@ -2894,7 +2895,7 @@
           <a:p>
             <a:fld id="{79806886-C3E2-4AA6-AE5C-EC60C7639E42}" type="datetimeFigureOut">
               <a:rPr lang="en-US" smtClean="0"/>
-              <a:t>6/23/2026</a:t>
+              <a:t>8/18/2026</a:t>
             </a:fld>
             <a:endParaRPr lang="en-US"/>
           </a:p>
@@ -3064,7 +3065,7 @@
           <a:p>
             <a:fld id="{79806886-C3E2-4AA6-AE5C-EC60C7639E42}" type="datetimeFigureOut">
               <a:rPr lang="en-US" smtClean="0"/>
-              <a:t>6/23/2026</a:t>
+              <a:t>8/18/2026</a:t>
             </a:fld>
             <a:endParaRPr lang="en-US"/>
           </a:p>
@@ -3248,7 +3249,7 @@
           <a:p>
             <a:fld id="{79806886-C3E2-4AA6-AE5C-EC60C7639E42}" type="datetimeFigureOut">
               <a:rPr lang="en-US" smtClean="0"/>
-              <a:t>6/23/2026</a:t>
+              <a:t>8/18/2026</a:t>
             </a:fld>
             <a:endParaRPr lang="en-US"/>
           </a:p>
@@ -3418,7 +3419,7 @@
           <a:p>
             <a:fld id="{79806886-C3E2-4AA6-AE5C-EC60C7639E42}" type="datetimeFigureOut">
               <a:rPr lang="en-US" smtClean="0"/>
-              <a:t>6/23/2026</a:t>
+              <a:t>8/18/2026</a:t>
             </a:fld>
             <a:endParaRPr lang="en-US"/>
           </a:p>
@@ -3662,7 +3663,7 @@
           <a:p>
             <a:fld id="{79806886-C3E2-4AA6-AE5C-EC60C7639E42}" type="datetimeFigureOut">
               <a:rPr lang="en-US" smtClean="0"/>
-              <a:t>6/23/2026</a:t>
+              <a:t>8/18/2026</a:t>
             </a:fld>
             <a:endParaRPr lang="en-US"/>
           </a:p>
@@ -3898,7 +3899,7 @@
           <a:p>
             <a:fld id="{79806886-C3E2-4AA6-AE5C-EC60C7639E42}" type="datetimeFigureOut">
               <a:rPr lang="en-US" smtClean="0"/>
-              <a:t>6/23/2026</a:t>
+              <a:t>8/18/2026</a:t>
             </a:fld>
             <a:endParaRPr lang="en-US"/>
           </a:p>
@@ -4364,7 +4365,7 @@
           <a:p>
             <a:fld id="{79806886-C3E2-4AA6-AE5C-EC60C7639E42}" type="datetimeFigureOut">
               <a:rPr lang="en-US" smtClean="0"/>
-              <a:t>6/23/2026</a:t>
+              <a:t>8/18/2026</a:t>
             </a:fld>
             <a:endParaRPr lang="en-US"/>
           </a:p>
@@ -4482,7 +4483,7 @@
           <a:p>
             <a:fld id="{79806886-C3E2-4AA6-AE5C-EC60C7639E42}" type="datetimeFigureOut">
               <a:rPr lang="en-US" smtClean="0"/>
-              <a:t>6/23/2026</a:t>
+              <a:t>8/18/2026</a:t>
             </a:fld>
             <a:endParaRPr lang="en-US"/>
           </a:p>
@@ -4577,7 +4578,7 @@
           <a:p>
             <a:fld id="{79806886-C3E2-4AA6-AE5C-EC60C7639E42}" type="datetimeFigureOut">
               <a:rPr lang="en-US" smtClean="0"/>
-              <a:t>6/23/2026</a:t>
+              <a:t>8/18/2026</a:t>
             </a:fld>
             <a:endParaRPr lang="en-US"/>
           </a:p>
@@ -4832,7 +4833,7 @@
           <a:p>
             <a:fld id="{79806886-C3E2-4AA6-AE5C-EC60C7639E42}" type="datetimeFigureOut">
               <a:rPr lang="en-US" smtClean="0"/>
-              <a:t>6/23/2026</a:t>
+              <a:t>8/18/2026</a:t>
             </a:fld>
             <a:endParaRPr lang="en-US"/>
           </a:p>
@@ -5132,7 +5133,7 @@
           <a:p>
             <a:fld id="{79806886-C3E2-4AA6-AE5C-EC60C7639E42}" type="datetimeFigureOut">
               <a:rPr lang="en-US" smtClean="0"/>
-              <a:t>6/23/2026</a:t>
+              <a:t>8/18/2026</a:t>
             </a:fld>
             <a:endParaRPr lang="en-US"/>
           </a:p>
@@ -5366,7 +5367,7 @@
           <a:p>
             <a:fld id="{79806886-C3E2-4AA6-AE5C-EC60C7639E42}" type="datetimeFigureOut">
               <a:rPr lang="en-US" smtClean="0"/>
-              <a:t>6/23/2026</a:t>
+              <a:t>8/18/2026</a:t>
             </a:fld>
             <a:endParaRPr lang="en-US"/>
           </a:p>
@@ -8383,6 +8384,86 @@
 </p:sld>
 </file>
 
+<file path=ppt/slides/slide23.xml><?xml version="1.0" encoding="utf-8"?>
+<p:sld xmlns:a="http://schemas.openxmlformats.org/drawingml/2006/main" xmlns:r="http://schemas.openxmlformats.org/officeDocument/2006/relationships" xmlns:p="http://schemas.openxmlformats.org/presentationml/2006/main">
+  <p:cSld>
+    <p:spTree>
+      <p:nvGrpSpPr>
+        <p:cNvPr id="1" name=""/>
+        <p:cNvGrpSpPr/>
+        <p:nvPr/>
+      </p:nvGrpSpPr>
+      <p:grpSpPr>
+        <a:xfrm>
+          <a:off x="0" y="0"/>
+          <a:ext cx="0" cy="0"/>
+          <a:chOff x="0" y="0"/>
+          <a:chExt cx="0" cy="0"/>
+        </a:xfrm>
+      </p:grpSpPr>
+      <p:sp>
+        <p:nvSpPr>
+          <p:cNvPr id="2" name="Title 1">
+            <a:extLst>
+              <a:ext uri="{FF2B5EF4-FFF2-40B4-BE49-F238E27FC236}">
+                <a16:creationId xmlns:a16="http://schemas.microsoft.com/office/drawing/2014/main" id="{AE5102F5-CC81-9682-F4E1-8920174BA46A}"/>
+              </a:ext>
+            </a:extLst>
+          </p:cNvPr>
+          <p:cNvSpPr>
+            <a:spLocks noGrp="1"/>
+          </p:cNvSpPr>
+          <p:nvPr>
+            <p:ph type="title"/>
+          </p:nvPr>
+        </p:nvSpPr>
+        <p:spPr/>
+        <p:txBody>
+          <a:bodyPr/>
+          <a:lstStyle/>
+          <a:p>
+            <a:endParaRPr lang="en-US"/>
+          </a:p>
+        </p:txBody>
+      </p:sp>
+      <p:sp>
+        <p:nvSpPr>
+          <p:cNvPr id="3" name="Content Placeholder 2">
+            <a:extLst>
+              <a:ext uri="{FF2B5EF4-FFF2-40B4-BE49-F238E27FC236}">
+                <a16:creationId xmlns:a16="http://schemas.microsoft.com/office/drawing/2014/main" id="{1337745F-F9D6-1851-11DF-8CEB10234FC5}"/>
+              </a:ext>
+            </a:extLst>
+          </p:cNvPr>
+          <p:cNvSpPr>
+            <a:spLocks noGrp="1"/>
+          </p:cNvSpPr>
+          <p:nvPr>
+            <p:ph idx="1"/>
+          </p:nvPr>
+        </p:nvSpPr>
+        <p:spPr/>
+        <p:txBody>
+          <a:bodyPr/>
+          <a:lstStyle/>
+          <a:p>
+            <a:endParaRPr lang="en-US"/>
+          </a:p>
+        </p:txBody>
+      </p:sp>
+    </p:spTree>
+    <p:extLst>
+      <p:ext uri="{BB962C8B-B14F-4D97-AF65-F5344CB8AC3E}">
+        <p14:creationId xmlns:p14="http://schemas.microsoft.com/office/powerpoint/2010/main" val="4087679543"/>
+      </p:ext>
+    </p:extLst>
+  </p:cSld>
+  <p:clrMapOvr>
+    <a:masterClrMapping/>
+  </p:clrMapOvr>
+</p:sld>
+</file>
+
 <file path=ppt/slides/slide3.xml><?xml version="1.0" encoding="utf-8"?>
 <p:sld xmlns:a="http://schemas.openxmlformats.org/drawingml/2006/main" xmlns:r="http://schemas.openxmlformats.org/officeDocument/2006/relationships" xmlns:p="http://schemas.openxmlformats.org/presentationml/2006/main">
   <p:cSld>
